--- a/vi/files/slides/Session_4_VN.pptx
+++ b/vi/files/slides/Session_4_VN.pptx
@@ -738,7 +738,7 @@
           <a:p>
             <a:r>
               <a:rPr lang="en-US" sz="1400" b="0" dirty="0"/>
-              <a:t>MỞ ĐẦU BUỔI 4 (0:00). Hôm qua ta chọn CÁCH trả lời câu hỏi. Hôm nay hai câu hỏi cho mọi kết quả: có TIN được không (sai lệch, yếu tố nhiễu, nhân quả) và LỚN đến đâu (nguy cơ, RR, OR, RD, NNT)? Sau đó vượt ra ngoài một nghiên cứu: xét nghiệm chẩn đoán, phân tích gộp và công cụ thẩm định.</a:t>
+              <a:t>MỞ ĐẦU BUỔI 4 (0:00). Thứ Bảy tuần trước ta chọn CÁCH trả lời câu hỏi. Hôm nay hai câu hỏi cho mọi kết quả: có TIN được không (sai lệch, yếu tố nhiễu, nhân quả) và LỚN đến đâu (nguy cơ, RR, OR, RD, NNT)? Sau đó vượt ra ngoài một nghiên cứu: xét nghiệm chẩn đoán, phân tích gộp và công cụ thẩm định.</a:t>
             </a:r>
           </a:p>
           <a:p>
@@ -3231,7 +3231,7 @@
           <a:p>
             <a:r>
               <a:rPr lang="en-US" sz="1400" b="0" dirty="0"/>
-              <a:t>Trong giờ giải lao, đi qua các nhóm và kiểm tra mỗi nhóm có Phần 2a từ hôm qua - họ sẽ cần nó khi xây dựng đề cương.</a:t>
+              <a:t>Trong giờ giải lao, đi qua các nhóm và kiểm tra mỗi nhóm có Phần 2a từ thứ Bảy tuần trước - họ sẽ cần nó khi xây dựng đề cương.</a:t>
             </a:r>
           </a:p>
           <a:p>
@@ -4860,7 +4860,7 @@
           <a:p>
             <a:r>
               <a:rPr lang="en-US" sz="1400" b="0" dirty="0"/>
-              <a:t>Slide này cũng khép lại Cuối tuần 2: đề cương giờ đã có câu hỏi (Phần 1) và thiết kế (Phần 2).</a:t>
+              <a:t>Slide này cũng khép lại Tuần 3-4: đề cương giờ đã có câu hỏi (Phần 1) và thiết kế (Phần 2).</a:t>
             </a:r>
           </a:p>
           <a:p>
@@ -4953,7 +4953,7 @@
           <a:p>
             <a:r>
               <a:rPr lang="en-US" sz="1400" b="0" dirty="0"/>
-              <a:t>Xem trước: ở Cuối tuần 3 ta biến thiết kế thành dữ liệu - biến số, phiếu thu thập dữ liệu - và bộ dữ liệu khóa học FLUID-ICU, một thuần tập mô phỏng trả lời phiên bản quan sát của câu hỏi về dịch truyền.</a:t>
+              <a:t>Xem trước: ở Tuần 5-6 ta biến thiết kế thành dữ liệu - biến số, phiếu thu thập dữ liệu - và bộ dữ liệu khóa học FLUID-ICU, một thuần tập mô phỏng trả lời phiên bản quan sát của câu hỏi về dịch truyền.</a:t>
             </a:r>
           </a:p>
           <a:p>
@@ -9134,7 +9134,7 @@
                 <a:latin typeface="Segoe UI"/>
                 <a:cs typeface="Segoe UI"/>
               </a:rPr>
-              <a:t>Cuối tuần 2 · Chủ Nhật</a:t>
+              <a:t>Tuần 4 · Thứ Bảy</a:t>
             </a:r>
           </a:p>
           <a:p>
@@ -25196,7 +25196,7 @@
                 <a:latin typeface="Segoe UI"/>
                 <a:cs typeface="Segoe UI"/>
               </a:rPr>
-              <a:t>Cuối tuần sau (Buổi 5-6): dữ liệu - bộ dữ liệu khóa học FLUID-ICU</a:t>
+              <a:t>Hai thứ Bảy tới (Buổi 5-6): dữ liệu - bộ dữ liệu khóa học FLUID-ICU</a:t>
             </a:r>
           </a:p>
         </p:txBody>

--- a/vi/files/slides/Session_4_VN.pptx
+++ b/vi/files/slides/Session_4_VN.pptx
@@ -744,7 +744,7 @@
           <a:p>
             <a:r>
               <a:rPr lang="en-US" sz="1400" b="0" dirty="0"/>
-              <a:t>Đọc ba giấy dán câu hỏi cuối Buổi 3 trước (thuần tập vắc xin cúm) - nó dẫn thẳng vào yếu tố nhiễu.</a:t>
+              <a:t>Đọc ba giấy dán câu hỏi cuối Buổi 3 trước (thuần tập vắc xin cúm). Nó dẫn thẳng vào yếu tố nhiễu.</a:t>
             </a:r>
           </a:p>
           <a:p>
@@ -837,7 +837,7 @@
           <a:p>
             <a:r>
               <a:rPr lang="en-US" sz="1400" b="0" dirty="0"/>
-              <a:t>Số liệu giả định, chọn để minh họa. Gộp tất cả bệnh nhân: 42% bệnh nhân truyền nhiều dịch tử vong so với 18% bệnh nhân truyền ít - tỷ số nguy cơ thô 2,33. Trông như dịch gây tử vong.</a:t>
+              <a:t>Số liệu giả định, chọn để minh họa. Gộp tất cả bệnh nhân: 42% bệnh nhân truyền nhiều dịch tử vong so với 18% bệnh nhân truyền ít, tỷ số nguy cơ thô 2,33. Trông như dịch gây tử vong.</a:t>
             </a:r>
           </a:p>
           <a:p>
@@ -849,25 +849,25 @@
           <a:p>
             <a:r>
               <a:rPr lang="en-US" sz="1400" b="0" dirty="0"/>
-              <a:t>Vì sao? 80 trong 100 bệnh nhân truyền nhiều dịch là bệnh nặng, nhưng chỉ 20 trong 100 bệnh nhân truyền ít dịch. Mức độ nặng, chứ không phải dịch, giải thích khác biệt thô.</a:t>
+              <a:t>Lý do: 80 trong 100 bệnh nhân truyền nhiều dịch là bệnh nặng, nhưng chỉ 20 trong 100 bệnh nhân truyền ít dịch. Mức độ nặng, chứ không phải dịch, giải thích khác biệt thô.</a:t>
             </a:r>
           </a:p>
           <a:p>
             <a:r>
               <a:rPr lang="en-US" sz="1400" b="0" dirty="0"/>
-              <a:t>Ý chính: đó là điều 'hiệu chỉnh theo mức độ nặng' làm - so sánh tương đồng với tương đồng. Buổi 6 sẽ xem các bài báo và mô hình trình bày điều này thế nào. Slide sau: điều gì xảy ra khi các tầng KHÔNG giống nhau.</a:t>
+              <a:t>Ý chính: đó là điều 'hiệu chỉnh theo mức độ nặng' làm: so sánh tương đồng với tương đồng. Buổi 6 sẽ xem các bài báo và mô hình trình bày điều này thế nào. Slide sau: điều gì xảy ra khi các tầng KHÔNG giống nhau.</a:t>
             </a:r>
           </a:p>
           <a:p>
             <a:r>
               <a:rPr lang="en-US" sz="1400" b="0" dirty="0"/>
-              <a:t>Quan niệm sai: 'sau hiệu chỉnh, mối liên quan còn lại là nhân quả'. Chỉ đúng nếu mọi yếu tố nhiễu quan trọng đều được đo tốt - điều không bao giờ được bảo đảm trong dữ liệu quan sát.</a:t>
+              <a:t>Quan niệm sai: 'sau hiệu chỉnh, mối liên quan còn lại là nhân quả'. Chỉ đúng nếu mọi yếu tố nhiễu quan trọng đều được đo tốt, điều không bao giờ được bảo đảm trong dữ liệu quan sát.</a:t>
             </a:r>
           </a:p>
           <a:p>
             <a:r>
               <a:rPr lang="en-US" sz="1400" b="0" dirty="0"/>
-              <a:t>Hỏi cả lớp: cần đo gì lúc ban đầu trong nghiên cứu quan sát của mình để làm được điều này? Dự kiến: các chỉ dấu mức độ nặng chính - với nhiễm khuẩn huyết là SOFA, lactate, liều vận mạch, tuổi, bệnh kèm.</a:t>
+              <a:t>Hỏi cả lớp: cần đo gì lúc ban đầu trong nghiên cứu quan sát của mình để làm được điều này? Dự kiến: các chỉ dấu mức độ nặng chính. Với nhiễm khuẩn huyết là SOFA, lactate, liều vận mạch, tuổi, bệnh kèm.</a:t>
             </a:r>
           </a:p>
           <a:p>
@@ -966,7 +966,7 @@
           <a:p>
             <a:r>
               <a:rPr lang="en-US" sz="1400" b="0" dirty="0"/>
-              <a:t>Thẻ 3 cố ý pha trộn: vận mạch có thể gây rối loạn nhịp, VÀ mức độ sốc chi phối cả hai. Mối liên quan thực tế thường là hỗn hợp của tác động thật và yếu tố nhiễu - vì vậy cần hiệu chỉnh, hoặc ngẫu nhiên hóa, để tách chúng ra.</a:t>
+              <a:t>Thẻ 3 cố ý pha trộn: vận mạch có thể gây rối loạn nhịp, VÀ mức độ sốc chi phối cả hai. Mối liên quan thực tế thường là hỗn hợp của tác động thật và yếu tố nhiễu. Vì vậy cần hiệu chỉnh, hoặc ngẫu nhiên hóa, để tách chúng ra.</a:t>
             </a:r>
           </a:p>
           <a:p>
@@ -1065,13 +1065,13 @@
           <a:p>
             <a:r>
               <a:rPr lang="en-US" sz="1400" b="0" dirty="0"/>
-              <a:t>Trái - yếu tố nhiễu (ví dụ dịch truyền): các tầng giống NHAU (RR 1,0 và 1,0) nhưng khác kết quả thô (2,33). Yếu tố thứ ba (độ nặng) tạo ra một mối liên quan giả. Cách xử lý: hiệu chỉnh, và báo cáo ước lượng đã hiệu chỉnh.</a:t>
+              <a:t>Bên trái, yếu tố nhiễu (ví dụ dịch truyền): các tầng giống NHAU (RR 1,0 và 1,0) nhưng khác kết quả thô (2,33). Yếu tố thứ ba (độ nặng) tạo ra một mối liên quan giả. Cách xử lý: hiệu chỉnh, và báo cáo ước lượng đã hiệu chỉnh.</a:t>
             </a:r>
           </a:p>
           <a:p>
             <a:r>
               <a:rPr lang="en-US" sz="1400" b="0" dirty="0"/>
-              <a:t>Phải - thay đổi tác động (effect modification), còn gọi là tương tác (interaction) (giả định): chiến lược hạn chế dịch có thể có lợi ở bệnh nhân ARDS (RR 0,60) nhưng không khác biệt khi không có ARDS (RR 1,00). Các tầng khác NHAU. Đây là sinh học thật, không phải sai lệch: báo cáo từng phân nhóm; đừng gộp trung bình.</a:t>
+              <a:t>Bên phải, thay đổi tác động (effect modification), còn gọi là tương tác (interaction) (giả định): chiến lược hạn chế dịch có thể có lợi ở bệnh nhân ARDS (RR 0,60) nhưng không khác biệt khi không có ARDS (RR 1,00). Các tầng khác NHAU. Đây là sinh học thật, không phải sai lệch: báo cáo từng phân nhóm; đừng gộp trung bình.</a:t>
             </a:r>
           </a:p>
           <a:p>
@@ -1194,7 +1194,7 @@
           <a:p>
             <a:r>
               <a:rPr lang="en-US" sz="1400" b="0" dirty="0"/>
-              <a:t>Quan niệm sai: 'ghép cặp theo điểm xu hướng tốt như ngẫu nhiên hóa'. Đó là ghép cặp trên các yếu tố đã đo - khéo léo, nhưng vẫn giới hạn ở những yếu tố đó.</a:t>
+              <a:t>Quan niệm sai: 'ghép cặp theo điểm xu hướng tốt như ngẫu nhiên hóa'. Đó là ghép cặp trên các yếu tố đã đo: khéo léo, nhưng vẫn giới hạn ở những yếu tố đó.</a:t>
             </a:r>
           </a:p>
           <a:p>
@@ -1287,7 +1287,7 @@
           <a:p>
             <a:r>
               <a:rPr lang="en-US" sz="1400" b="0" dirty="0"/>
-              <a:t>Hình màu đỏ là bệnh nhân nặng (yếu tố nhiễu đã biết). Ngôi sao vàng là một yếu tố ẩn chưa ai đo - một đặc điểm di truyền, sự suy yếu (frailty), linh cảm của bác sĩ.</a:t>
+              <a:t>Hình màu đỏ là bệnh nhân nặng (yếu tố nhiễu đã biết). Ngôi sao vàng là một yếu tố ẩn chưa ai đo: một đặc điểm di truyền, sự suy yếu (frailty), linh cảm của bác sĩ.</a:t>
             </a:r>
           </a:p>
           <a:p>
@@ -1299,7 +1299,7 @@
           <a:p>
             <a:r>
               <a:rPr lang="en-US" sz="1400" b="0" dirty="0"/>
-              <a:t>Ý chính: sự cân bằng là tính trung bình; với thử nghiệm rất nhỏ vẫn có mất cân bằng do may rủi. Boulet thấy creatinine ban đầu cao hơn ở nhóm can thiệp - với 24 bệnh nhân mỗi nhóm điều này không lạ.</a:t>
+              <a:t>Ý chính: sự cân bằng là tính trung bình; với thử nghiệm rất nhỏ vẫn có mất cân bằng do may rủi. Boulet thấy creatinine ban đầu cao hơn ở nhóm can thiệp. Với 24 bệnh nhân mỗi nhóm điều này không lạ.</a:t>
             </a:r>
           </a:p>
           <a:p>
@@ -1398,13 +1398,13 @@
           <a:p>
             <a:r>
               <a:rPr lang="en-US" sz="1400" b="0" dirty="0"/>
-              <a:t>Che giấu phân bổ (allocation concealment) diễn ra TRƯỚC khi phân nhóm: người tuyển bệnh nhân không biết và không đoán được lần phân bổ kế tiếp (máy tính trung tâm, không phải phong bì trên bàn). Nếu không, bác sĩ có thể hướng bệnh nhân nặng tránh khỏi điều trị mới - sai lệch chọn lựa ngay trong thử nghiệm.</a:t>
+              <a:t>Che giấu phân bổ (allocation concealment) diễn ra TRƯỚC khi phân nhóm: người tuyển bệnh nhân không biết và không đoán được lần phân bổ kế tiếp (máy tính trung tâm, không phải phong bì trên bàn). Nếu không, bác sĩ có thể hướng bệnh nhân nặng tránh khỏi điều trị mới: sai lệch chọn lựa ngay trong thử nghiệm.</a:t>
             </a:r>
           </a:p>
           <a:p>
             <a:r>
               <a:rPr lang="en-US" sz="1400" b="0" dirty="0"/>
-              <a:t>Làm mù (blinding) diễn ra SAU: ai biết nhóm? Trong Boulet, bệnh nhân và nhà thống kê được làm mù, bác sĩ và nghiên cứu viên thì không - vì vậy gọi là 'mù đơn'.</a:t>
+              <a:t>Làm mù (blinding) diễn ra SAU: ai biết nhóm? Trong Boulet, bệnh nhân và nhà thống kê được làm mù, bác sĩ và nghiên cứu viên thì không, vì vậy gọi là 'mù đơn'.</a:t>
             </a:r>
           </a:p>
           <a:p>
@@ -1416,13 +1416,13 @@
           <a:p>
             <a:r>
               <a:rPr lang="en-US" sz="1400" b="0" dirty="0"/>
-              <a:t>Quan niệm sai: 'mù đơn, mù đôi, mù ba' có nghĩa cố định. Không - bài báo nên nêu chính xác AI được làm mù.</a:t>
+              <a:t>Quan niệm sai: 'mù đơn, mù đôi, mù ba' có nghĩa cố định. Không. Bài báo nên nêu chính xác AI được làm mù.</a:t>
             </a:r>
           </a:p>
           <a:p>
             <a:r>
               <a:rPr lang="en-US" sz="1400" b="0" dirty="0"/>
-              <a:t>Hỏi cả lớp: có thể che giấu phân bổ khi không thể làm mù không? Dự kiến: có - che giấu phân bổ luôn làm được và luôn bắt buộc.</a:t>
+              <a:t>Hỏi cả lớp: có thể che giấu phân bổ khi không thể làm mù không? Dự kiến: có. Che giấu phân bổ luôn làm được và luôn bắt buộc.</a:t>
             </a:r>
           </a:p>
           <a:p>
@@ -1527,7 +1527,7 @@
           <a:p>
             <a:r>
               <a:rPr lang="en-US" sz="1400" b="0" dirty="0"/>
-              <a:t>Quan niệm sai: 'nhóm đã ghép cặp tốt như nhóm ngẫu nhiên'. Hãy xem Bảng 1 - rồi hỏi điều gì không có trong Bảng 1.</a:t>
+              <a:t>Quan niệm sai: 'nhóm đã ghép cặp tốt như nhóm ngẫu nhiên'. Hãy xem Bảng 1, rồi hỏi điều gì không có trong Bảng 1.</a:t>
             </a:r>
           </a:p>
           <a:p>
@@ -1761,7 +1761,7 @@
           <a:p>
             <a:r>
               <a:rPr lang="en-US" sz="1400" b="0" dirty="0"/>
-              <a:t>Hỏi cả lớp: bệnh nhân mê sảng dùng nhiều thuốc chống loạn thần hơn. Mũi tên có thể chạy chiều nào? Dự kiến: cả hai - thuốc có thể gây hại, nhưng mê sảng chính là lý do kê đơn.</a:t>
+              <a:t>Hỏi cả lớp: bệnh nhân mê sảng dùng nhiều thuốc chống loạn thần hơn. Mũi tên có thể chạy chiều nào? Dự kiến: cả hai. Thuốc có thể gây hại, nhưng mê sảng chính là lý do kê đơn.</a:t>
             </a:r>
           </a:p>
           <a:p>
@@ -1854,13 +1854,13 @@
           <a:p>
             <a:r>
               <a:rPr lang="en-US" sz="1400" b="0" dirty="0"/>
-              <a:t>Độ mạnh (RR lớn khó giải thích bằng nhiễu), tính nhất quán (lặp lại ở nghiên cứu và bối cảnh khác), tính đặc hiệu (yếu nhất), trình tự thời gian (nguyên nhân phải có trước - điều duy nhất bắt buộc), liều - đáp ứng (phơi nhiễm nhiều hơn, tác động lớn hơn), tính hợp lý (có cơ chế), tính mạch lạc (phù hợp với điều đã biết), thực nghiệm (loại bỏ phơi nhiễm làm giảm kết cục - RCT là dạng mạnh nhất), tương tự.</a:t>
+              <a:t>Độ mạnh (RR lớn khó giải thích bằng nhiễu), tính nhất quán (lặp lại ở nghiên cứu và bối cảnh khác), tính đặc hiệu (yếu nhất), trình tự thời gian (nguyên nhân phải có trước, và đây là điều duy nhất bắt buộc), liều-đáp ứng (phơi nhiễm nhiều hơn, tác động lớn hơn), tính hợp lý (có cơ chế), tính mạch lạc (phù hợp với điều đã biết), thực nghiệm (loại bỏ phơi nhiễm làm giảm kết cục, và RCT là dạng mạnh nhất), tương tự.</a:t>
             </a:r>
           </a:p>
           <a:p>
             <a:r>
               <a:rPr lang="en-US" sz="1400" b="0" dirty="0"/>
-              <a:t>Áp dụng cho Hyun: độ mạnh vừa (HR khoảng 1,6-2,1); nhất quán với các thuần tập khác; trình tự thời gian - cân bằng dịch đo trước tử vong, nhưng có thể có nhân quả ngược; chưa cho thấy liều - đáp ứng; thực nghiệm - các thử nghiệm như Boulet chưa cho thấy tác động lên tử vong. Kết luận: có thể, chưa được chứng minh.</a:t>
+              <a:t>Áp dụng cho Hyun: độ mạnh vừa (HR khoảng 1,6-2,1); nhất quán với các thuần tập khác; trình tự thời gian: cân bằng dịch đo trước tử vong, nhưng có thể có nhân quả ngược; chưa cho thấy liều-đáp ứng; thực nghiệm: các thử nghiệm như Boulet chưa cho thấy tác động lên tử vong. Kết luận: có thể, chưa được chứng minh.</a:t>
             </a:r>
           </a:p>
           <a:p>
@@ -1959,7 +1959,7 @@
           <a:p>
             <a:r>
               <a:rPr lang="en-US" sz="1400" b="0" dirty="0"/>
-              <a:t>Đáp án. C1: bệnh - chứng (chọn theo kết cục, nhìn lại phơi nhiễm). C2: thử nghiệm ngẫu nhiên theo cụm. C3: không kém hơn - toàn bộ KTC nằm dưới ngưỡng +4 (KTC cắt 0 nên không vượt trội).</a:t>
+              <a:t>Đáp án. C1: bệnh-chứng (chọn theo kết cục, nhìn lại phơi nhiễm). C2: thử nghiệm ngẫu nhiên theo cụm. C3: không kém hơn. Toàn bộ KTC nằm dưới ngưỡng +4 (KTC cắt 0 nên không vượt trội).</a:t>
             </a:r>
           </a:p>
           <a:p>
@@ -2058,7 +2058,7 @@
           <a:p>
             <a:r>
               <a:rPr lang="en-US" sz="1400" b="0" dirty="0"/>
-              <a:t>Đáp án. 1: sai lệch nhớ lại - khắc phục: ghi nhận phơi nhiễm trước khi biết kết cục (hồ sơ kê đơn), hỏi ca bệnh và ca chứng theo cùng một cách có cấu trúc. 2: sai lệch người quan sát - khắc phục: người đánh giá được làm mù, tiêu chuẩn ra viện khách quan. 3: sai lệch chọn lựa (và mất theo dõi) - khắc phục: liên hệ mọi người sống sót, báo cáo người không trả lời. 4: nhiễu do chỉ định - khắc phục: phân nhóm ngẫu nhiên, hoặc đo lactate và các chỉ dấu độ nặng khác rồi hiệu chỉnh/ghép cặp.</a:t>
+              <a:t>Đáp án. 1: sai lệch nhớ lại. Khắc phục: ghi nhận phơi nhiễm trước khi biết kết cục (hồ sơ kê đơn), hỏi ca bệnh và ca chứng theo cùng một cách có cấu trúc. 2: sai lệch người quan sát. Khắc phục: người đánh giá được làm mù, tiêu chuẩn ra viện khách quan. 3: sai lệch chọn lựa (và mất theo dõi). Khắc phục: liên hệ mọi người sống sót, báo cáo người không trả lời. 4: nhiễu do chỉ định. Khắc phục: phân nhóm ngẫu nhiên, hoặc đo lactate và các chỉ dấu độ nặng khác rồi hiệu chỉnh/ghép cặp.</a:t>
             </a:r>
           </a:p>
           <a:p>
@@ -2070,7 +2070,7 @@
           <a:p>
             <a:r>
               <a:rPr lang="en-US" sz="1400" b="0" dirty="0"/>
-              <a:t>Thời gian: 4 phút. Đi nhanh - đây là kiểm tra, không phải bài giảng.</a:t>
+              <a:t>Thời gian: 4 phút. Đi nhanh: đây là kiểm tra, không phải bài giảng.</a:t>
             </a:r>
           </a:p>
         </p:txBody>
@@ -2268,7 +2268,7 @@
           <a:p>
             <a:r>
               <a:rPr lang="en-US" sz="1400" b="0" dirty="0"/>
-              <a:t>Hỏi cả lớp: nếu ta giữ bệnh nhân mắc một bệnh mạn tính sống lâu hơn nhưng không phòng bệnh tốt hơn, tỷ lệ hiện mắc thay đổi thế nào? Dự kiến: tăng - lỗ xả chảy chậm lại.</a:t>
+              <a:t>Hỏi cả lớp: nếu ta giữ bệnh nhân mắc một bệnh mạn tính sống lâu hơn nhưng không phòng bệnh tốt hơn, tỷ lệ hiện mắc thay đổi thế nào? Dự kiến: tăng, vì lỗ xả chảy chậm lại.</a:t>
             </a:r>
           </a:p>
           <a:p>
@@ -2355,7 +2355,7 @@
           <a:p>
             <a:r>
               <a:rPr lang="en-US" sz="1400" b="0" dirty="0"/>
-              <a:t>Một thử nghiệm giả định, lớn hơn, cho câu hỏi xuyên suốt - không phải số liệu của Boulet. 100 bệnh nhân mỗi nhóm. Hạn chế dịch: 20 tử vong đến ngày 28. Thường quy: 30 tử vong.</a:t>
+              <a:t>Một thử nghiệm giả định, lớn hơn, cho câu hỏi xuyên suốt, không phải số liệu của Boulet. 100 bệnh nhân mỗi nhóm. Hạn chế dịch: 20 tử vong đến ngày 28. Thường quy: 30 tử vong.</a:t>
             </a:r>
           </a:p>
           <a:p>
@@ -2484,7 +2484,7 @@
           <a:p>
             <a:r>
               <a:rPr lang="en-US" sz="1400" b="0" dirty="0"/>
-              <a:t>Quan niệm sai: đảo hàng và cột. Nhiều lỗi trong bài làm của học viên đến từ bảng vẽ ngược - kiểm tra cách trình bày trước khi tính.</a:t>
+              <a:t>Quan niệm sai: đảo hàng và cột. Nhiều lỗi trong bài làm của học viên đến từ bảng vẽ ngược. Kiểm tra cách trình bày trước khi tính.</a:t>
             </a:r>
           </a:p>
           <a:p>
@@ -2601,7 +2601,7 @@
           <a:p>
             <a:r>
               <a:rPr lang="en-US" sz="1400" b="0" dirty="0"/>
-              <a:t>OR = (20 x 70) / (80 x 30) = 1400 / 2400 = 0,58. Xa 1 hơn RR - các slide sau giải thích vì sao.</a:t>
+              <a:t>OR = (20 x 70) / (80 x 30) = 1400 / 2400 = 0,58. Xa 1 hơn RR. Các slide sau giải thích vì sao.</a:t>
             </a:r>
           </a:p>
           <a:p>
@@ -2706,7 +2706,7 @@
           <a:p>
             <a:r>
               <a:rPr lang="en-US" sz="1400" b="0" dirty="0"/>
-              <a:t>Ý chính: 9 người còn lại hoặc đằng nào cũng sống, hoặc đằng nào cũng tử vong - họ chịu gánh nặng điều trị mà không được lợi. Vì vậy NNT là công cụ trao đổi mạnh với bệnh nhân, nhà quản lý và khoa dược.</a:t>
+              <a:t>Ý chính: 9 người còn lại hoặc đằng nào cũng sống, hoặc đằng nào cũng tử vong. Họ chịu gánh nặng điều trị mà không được lợi. Vì vậy NNT là công cụ trao đổi hữu ích với bệnh nhân, nhà quản lý và khoa dược.</a:t>
             </a:r>
           </a:p>
           <a:p>
@@ -2718,7 +2718,7 @@
           <a:p>
             <a:r>
               <a:rPr lang="en-US" sz="1400" b="0" dirty="0"/>
-              <a:t>Hỏi cả lớp: NNT 5 hay NNT 50 tốt hơn? Dự kiến: 5 - cần điều trị ít người hơn để một người có lợi (nhưng luôn cân nhắc với tác hại và chi phí).</a:t>
+              <a:t>Hỏi cả lớp: NNT 5 hay NNT 50 tốt hơn? Dự kiến: 5. Cần điều trị ít người hơn để một người có lợi (nhưng luôn cân nhắc với tác hại và chi phí).</a:t>
             </a:r>
           </a:p>
           <a:p>
@@ -2811,13 +2811,13 @@
           <a:p>
             <a:r>
               <a:rPr lang="en-US" sz="1400" b="0" dirty="0"/>
-              <a:t>Khi kết cục hiếm (bên trái, vùng tô), OR khoảng 2,1 - gần như bằng RR. Ở nguy cơ nền 20%, OR = 2,7. Ở 40%, OR = 6. OR luôn nằm xa 1 hơn RR.</a:t>
+              <a:t>Khi kết cục hiếm (bên trái, vùng tô), OR khoảng 2,1, gần như bằng RR. Ở nguy cơ nền 20%, OR = 2,7. Ở 40%, OR = 6. OR luôn nằm xa 1 hơn RR.</a:t>
             </a:r>
           </a:p>
           <a:p>
             <a:r>
               <a:rPr lang="en-US" sz="1400" b="0" dirty="0"/>
-              <a:t>Ý chính: nghiên cứu bệnh - chứng và hồi quy logistic cho ra OR. Khi bài báo báo cáo OR cho kết cục phổ biến, như tử vong ICU 20-40%, đừng đọc thành 'nguy cơ gấp X lần'.</a:t>
+              <a:t>Ý chính: nghiên cứu bệnh-chứng và hồi quy logistic cho ra OR. Khi bài báo báo cáo OR cho kết cục phổ biến, như tử vong ICU 20-40%, đừng đọc thành 'nguy cơ gấp X lần'.</a:t>
             </a:r>
           </a:p>
           <a:p>
@@ -3027,19 +3027,19 @@
           <a:p>
             <a:r>
               <a:rPr lang="en-US" sz="1400" b="0" dirty="0"/>
-              <a:t>Khoảnh khắc then chốt: đổi a thành 2 và c thành 3 (b = 98, d = 97). RR vẫn 0,67 nhưng OR giờ là 0,66 - gần như bằng nhau. NNT nhảy lên 100. Cùng tác động tương đối, tác động tuyệt đối rất khác.</a:t>
+              <a:t>Khoảnh khắc then chốt: đổi a thành 2 và c thành 3 (b = 98, d = 97). RR vẫn 0,67 nhưng OR giờ là 0,66, gần như bằng nhau. NNT nhảy lên 100. Cùng tác động tương đối, tác động tuyệt đối rất khác.</a:t>
             </a:r>
           </a:p>
           <a:p>
             <a:r>
               <a:rPr lang="en-US" sz="1400" b="0" dirty="0"/>
-              <a:t>Phương án dự phòng nếu máy tính hỏng: vẽ bảng 2x2 lên bảng và cùng cả lớp tính RR và NNT bằng tay - các con số được chọn để dễ tính.</a:t>
+              <a:t>Phương án dự phòng nếu máy tính hỏng: vẽ bảng 2x2 lên bảng và cùng cả lớp tính RR và NNT bằng tay. Các con số được chọn để dễ tính.</a:t>
             </a:r>
           </a:p>
           <a:p>
             <a:r>
               <a:rPr lang="en-US" sz="1400" b="0" dirty="0"/>
-              <a:t>Quan niệm sai cần nêu: công cụ vẫn tính ra 'nguy cơ' cho dữ liệu bệnh - chứng. Ở đó nó vô nghĩa - chỉ OR là hợp lệ.</a:t>
+              <a:t>Quan niệm sai cần nêu: công cụ vẫn tính ra 'nguy cơ' cho dữ liệu bệnh-chứng. Ở đó nó vô nghĩa: chỉ OR là hợp lệ.</a:t>
             </a:r>
           </a:p>
           <a:p>
@@ -3231,7 +3231,7 @@
           <a:p>
             <a:r>
               <a:rPr lang="en-US" sz="1400" b="0" dirty="0"/>
-              <a:t>Trong giờ giải lao, đi qua các nhóm và kiểm tra mỗi nhóm có Phần 2a từ thứ Bảy tuần trước - họ sẽ cần nó khi xây dựng đề cương.</a:t>
+              <a:t>Trong giờ giải lao, đi qua các nhóm và kiểm tra mỗi nhóm có Phần 2a từ thứ Bảy tuần trước. Họ sẽ cần nó khi xây dựng đề cương.</a:t>
             </a:r>
           </a:p>
           <a:p>
@@ -3324,13 +3324,13 @@
           <a:p>
             <a:r>
               <a:rPr lang="en-US" sz="1400" b="0" dirty="0"/>
-              <a:t>Bài 2 (bệnh - chứng, nhiễm Candida máu ở ICU và nuôi ăn tĩnh mạch): nhóm bệnh 24 có phơi nhiễm / 16 không; nhóm chứng 16 có / 64 không. OR = (24 x 64) / (16 x 16) = 6,0. Không tính được RR vì nhà nghiên cứu tự chọn số ca bệnh và ca chứng.</a:t>
+              <a:t>Bài 2 (bệnh-chứng, nhiễm Candida máu ở ICU và nuôi ăn tĩnh mạch): nhóm bệnh 24 có phơi nhiễm / 16 không; nhóm chứng 16 có / 64 không. OR = (24 x 64) / (16 x 16) = 6,0. Không tính được RR vì nhà nghiên cứu tự chọn số ca bệnh và ca chứng.</a:t>
             </a:r>
           </a:p>
           <a:p>
             <a:r>
               <a:rPr lang="en-US" sz="1400" b="0" dirty="0"/>
-              <a:t>Đi vòng quanh lớp và kiểm tra bảng được vẽ đúng chiều - phần lớn lỗi là do cách trình bày, không phải số học.</a:t>
+              <a:t>Đi vòng quanh lớp và kiểm tra bảng được vẽ đúng chiều. Phần lớn lỗi là do cách trình bày, không phải số học.</a:t>
             </a:r>
           </a:p>
           <a:p>
@@ -3429,7 +3429,7 @@
           <a:p>
             <a:r>
               <a:rPr lang="en-US" sz="1400" b="0" dirty="0"/>
-              <a:t>Ý chính: mọi thứ ở đây là để đánh giá bằng chứng - những kỹ năng học viên sẽ dùng ở Buổi 8 trong phần 'Làm người phản biện'.</a:t>
+              <a:t>Ý chính: mọi thứ ở đây là để đánh giá bằng chứng, những kỹ năng học viên sẽ dùng ở Buổi 8 trong phần 'Làm người phản biện'.</a:t>
             </a:r>
           </a:p>
           <a:p>
@@ -3534,19 +3534,19 @@
           <a:p>
             <a:r>
               <a:rPr lang="en-US" sz="1400" b="0" dirty="0"/>
-              <a:t>Xem trước slide sau: trong 34 xét nghiệm dương tính, chỉ 18 người thực sự có bệnh - giá trị tiên đoán dương (PPV) 53%. PPV phụ thuộc vào mức độ phổ biến của bệnh.</a:t>
+              <a:t>Xem trước slide sau: trong 34 xét nghiệm dương tính, chỉ 18 người thực sự có bệnh, giá trị tiên đoán dương (PPV) 53%. PPV phụ thuộc vào mức độ phổ biến của bệnh.</a:t>
             </a:r>
           </a:p>
           <a:p>
             <a:r>
               <a:rPr lang="en-US" sz="1400" b="0" dirty="0"/>
-              <a:t>Quan niệm sai: 'xét nghiệm có độ nhạy 90% nghĩa là người dương tính có 90% khả năng mắc bệnh'. Không - đó là PPV, ở đây chỉ 53%.</a:t>
+              <a:t>Quan niệm sai: 'xét nghiệm có độ nhạy 90% nghĩa là người dương tính có 90% khả năng mắc bệnh'. Không. Đó là PPV, ở đây chỉ 53%.</a:t>
             </a:r>
           </a:p>
           <a:p>
             <a:r>
               <a:rPr lang="en-US" sz="1400" b="0" dirty="0"/>
-              <a:t>Hỏi cả lớp: với xét nghiệm sàng lọc mà ta không muốn bỏ sót nhiễm khuẩn huyết - ưu tiên độ nhạy hay độ đặc hiệu? Dự kiến: độ nhạy.</a:t>
+              <a:t>Hỏi cả lớp: với xét nghiệm sàng lọc mà ta không muốn bỏ sót nhiễm khuẩn huyết, ưu tiên độ nhạy hay độ đặc hiệu? Dự kiến: độ nhạy.</a:t>
             </a:r>
           </a:p>
           <a:p>
@@ -3639,13 +3639,13 @@
           <a:p>
             <a:r>
               <a:rPr lang="en-US" sz="1400" b="0" dirty="0"/>
-              <a:t>ICU, nơi 20% mắc bệnh: 90 dương thật, 80 dương giả - kết quả dương tính đúng 90 / 170 = 53% số lần.</a:t>
+              <a:t>ICU, nơi 20% mắc bệnh: 90 dương thật, 80 dương giả, nên kết quả dương tính đúng 90 / 170 = 53% số lần.</a:t>
             </a:r>
           </a:p>
           <a:p>
             <a:r>
               <a:rPr lang="en-US" sz="1400" b="0" dirty="0"/>
-              <a:t>Sàng lọc, nơi 2% mắc bệnh: 9 dương thật nhưng 98 dương giả - PPV 9 / 107 = 8%. Hơn 9/10 kết quả dương là báo động nhầm. Trong khi đó NPV tăng lên 99,7%.</a:t>
+              <a:t>Sàng lọc, nơi 2% mắc bệnh: 9 dương thật nhưng 98 dương giả: PPV 9 / 107 = 8%. Hơn 9/10 kết quả dương là báo động nhầm. Trong khi đó NPV tăng lên 99,7%.</a:t>
             </a:r>
           </a:p>
           <a:p>
@@ -3657,7 +3657,7 @@
           <a:p>
             <a:r>
               <a:rPr lang="en-US" sz="1400" b="0" dirty="0"/>
-              <a:t>Quan niệm sai: 'xét nghiệm tốt thì tốt ở mọi nơi'. Sàng lọc quần thể khỏe mạnh bằng xét nghiệm có độ đặc hiệu vừa phải tạo ra nhiều dương giả - và nhiều thăm dò không cần thiết.</a:t>
+              <a:t>Quan niệm sai: 'xét nghiệm tốt thì tốt ở mọi nơi'. Sàng lọc quần thể khỏe mạnh bằng xét nghiệm có độ đặc hiệu vừa phải tạo ra nhiều dương giả và nhiều thăm dò không cần thiết.</a:t>
             </a:r>
           </a:p>
           <a:p>
@@ -3669,7 +3669,7 @@
           <a:p>
             <a:r>
               <a:rPr lang="en-US" sz="1400" b="0" dirty="0"/>
-              <a:t>Tùy chọn (1 phút): mở ô 'PPV ở tỷ lệ hiện mắc khác' trên trang Diagnostic của công cụ tính 2x2 - nhập 2% và 20%.</a:t>
+              <a:t>Tùy chọn (1 phút): mở ô 'PPV ở tỷ lệ hiện mắc khác' trên trang Diagnostic của công cụ tính 2x2, rồi nhập 2% và 20%.</a:t>
             </a:r>
           </a:p>
           <a:p>
@@ -3780,7 +3780,7 @@
           <a:p>
             <a:r>
               <a:rPr lang="en-US" sz="1400" b="0" dirty="0"/>
-              <a:t>Hỏi cả lớp: để loại trừ nhiễm khuẩn huyết ở phân loại cấp cứu, chọn ngưỡng thấp hay cao? Dự kiến: thấp - độ nhạy cao, chấp nhận nhiều báo động nhầm hơn.</a:t>
+              <a:t>Hỏi cả lớp: để loại trừ nhiễm khuẩn huyết ở phân loại cấp cứu, chọn ngưỡng thấp hay cao? Dự kiến: thấp, để có độ nhạy cao, chấp nhận nhiều báo động nhầm hơn.</a:t>
             </a:r>
           </a:p>
           <a:p>
@@ -3879,7 +3879,7 @@
           <a:p>
             <a:r>
               <a:rPr lang="en-US" sz="1400" b="0" dirty="0"/>
-              <a:t>Sàng lọc: 1.000 tiêu đề và tóm tắt được sàng lọc, loại 920; đọc 80 toàn văn, loại 71 có lý do (38 không phải RCT, 21 sai đối tượng, 12 không có dữ liệu tử vong - cộng lại đúng 71).</a:t>
+              <a:t>Sàng lọc: 1.000 tiêu đề và tóm tắt được sàng lọc, loại 920; đọc 80 toàn văn, loại 71 có lý do (38 không phải RCT, 21 sai đối tượng, 12 không có dữ liệu tử vong, cộng lại đúng 71).</a:t>
             </a:r>
           </a:p>
           <a:p>
@@ -3903,7 +3903,7 @@
           <a:p>
             <a:r>
               <a:rPr lang="en-US" sz="1400" b="0" dirty="0"/>
-              <a:t>Hỏi cả lớp: vì sao tìm trong sổ đăng ký thử nghiệm chứ không chỉ PubMed? Dự kiến: để tìm thử nghiệm chưa công bố hoặc kết quả âm tính - sai lệch công bố (tài liệu xám ở Buổi 2).</a:t>
+              <a:t>Hỏi cả lớp: vì sao tìm trong sổ đăng ký thử nghiệm chứ không chỉ PubMed? Dự kiến: để tìm thử nghiệm chưa công bố hoặc kết quả âm tính, do sai lệch công bố (tài liệu xám ở Buổi 2).</a:t>
             </a:r>
           </a:p>
           <a:p>
@@ -3990,13 +3990,13 @@
           <a:p>
             <a:r>
               <a:rPr lang="en-US" sz="1400" b="0" dirty="0"/>
-              <a:t>Các thử nghiệm giả định, gộp theo mô hình tác động cố định (nghịch đảo phương sai). Đọc trong bốn bước. (1) Tìm đường dọc không tác động: RR = 1. Bên trái có lợi cho hạn chế dịch; bên phải có lợi cho thường quy. (2) Mỗi ô vuông là RR của một nghiên cứu; kích thước thể hiện trọng số (TN 4 lớn nhất, 38%). (3) Mỗi đường ngang là KTC 95% của nghiên cứu đó - nếu cắt 1, riêng nghiên cứu đó chưa kết luận được. Ở đây mọi thử nghiệm đều cắt 1. (4) Hình thoi là ước lượng gộp: RR 0,79 (KTC 95% 0,64-0,98). Độ rộng là KTC; nó không cắt 1.</a:t>
+              <a:t>Các thử nghiệm giả định, gộp theo mô hình tác động cố định (nghịch đảo phương sai). Đọc trong bốn bước. (1) Tìm đường dọc không tác động: RR = 1. Bên trái có lợi cho hạn chế dịch; bên phải có lợi cho thường quy. (2) Mỗi ô vuông là RR của một nghiên cứu; kích thước thể hiện trọng số (TN 4 lớn nhất, 38%). (3) Mỗi đường ngang là KTC 95% của nghiên cứu đó. Nếu cắt 1, riêng nghiên cứu đó chưa kết luận được. Ở đây mọi thử nghiệm đều cắt 1. (4) Hình thoi là ước lượng gộp: RR 0,79 (KTC 95% 0,64-0,98). Độ rộng là KTC; nó không cắt 1.</a:t>
             </a:r>
           </a:p>
           <a:p>
             <a:r>
               <a:rPr lang="en-US" sz="1400" b="0" dirty="0"/>
-              <a:t>Ý chính: gộp nhiều thử nghiệm chưa kết luận có thể cho câu trả lời chính xác - đó là sức mạnh của phân tích gộp. Bằng lời: nguy cơ tử vong tương đối thấp hơn khoảng 21%, dù giới hạn trên (0,98) gần mức không tác động.</a:t>
+              <a:t>Ý chính: gộp nhiều thử nghiệm chưa kết luận có thể cho câu trả lời chính xác. Đó là thế mạnh của phân tích gộp. Bằng lời: nguy cơ tử vong tương đối thấp hơn khoảng 21%, dù giới hạn trên (0,98) gần mức không tác động.</a:t>
             </a:r>
           </a:p>
           <a:p>
@@ -4008,7 +4008,7 @@
           <a:p>
             <a:r>
               <a:rPr lang="en-US" sz="1400" b="0" dirty="0"/>
-              <a:t>Hỏi cả lớp: thử nghiệm nào đóng góp nhiều nhất, vì sao? Dự kiến: TN 4 - lớn nhất, nhiều biến cố nhất, nên KTC hẹp nhất.</a:t>
+              <a:t>Hỏi cả lớp: thử nghiệm nào đóng góp nhiều nhất, vì sao? Dự kiến: TN 4, lớn nhất, nhiều biến cố nhất, nên KTC hẹp nhất.</a:t>
             </a:r>
           </a:p>
           <a:p>
@@ -4101,7 +4101,7 @@
           <a:p>
             <a:r>
               <a:rPr lang="en-US" sz="1400" b="0" dirty="0"/>
-              <a:t>Phải: sáu thử nghiệm giả định khác bất đồng - một số rõ ràng có lợi cho hạn chế dịch, số khác theo hướng ngược lại. I² = 80%: khoảng 80% biến thiên giữa các nghiên cứu phản ánh khác biệt thật chứ không phải may rủi. Hình thoi theo mô hình tác động ngẫu nhiên rộng và cắt 1 (RR 0,74, KTC 95% 0,47-1,15).</a:t>
+              <a:t>Phải: sáu thử nghiệm giả định khác bất đồng. Một số rõ ràng có lợi cho hạn chế dịch, số khác theo hướng ngược lại. I² = 80%: khoảng 80% biến thiên giữa các nghiên cứu phản ánh khác biệt thật chứ không phải may rủi. Hình thoi theo mô hình tác động ngẫu nhiên rộng và cắt 1 (RR 0,74, KTC 95% 0,47-1,15).</a:t>
             </a:r>
           </a:p>
           <a:p>
@@ -4113,7 +4113,7 @@
           <a:p>
             <a:r>
               <a:rPr lang="en-US" sz="1400" b="0" dirty="0"/>
-              <a:t>Ý chính: khi không đồng nhất cao, câu hỏi hữu ích nhất là VÌ SAO - khác bệnh nhân, liều, thời điểm, định nghĩa kết cục hay nguy cơ sai lệch? Một con số gộp duy nhất có thể che giấu điều đó.</a:t>
+              <a:t>Ý chính: khi không đồng nhất cao, câu hỏi hữu ích nhất là VÌ SAO: khác bệnh nhân, liều, thời điểm, định nghĩa kết cục hay nguy cơ sai lệch? Một con số gộp duy nhất có thể che giấu điều đó.</a:t>
             </a:r>
           </a:p>
           <a:p>
@@ -4218,13 +4218,13 @@
           <a:p>
             <a:r>
               <a:rPr lang="en-US" sz="1400" b="0" dirty="0"/>
-              <a:t>Thử nghiệm ngẫu nhiên: RoB 2 (Cochrane) - Boulet. Nghiên cứu không ngẫu nhiên về can thiệp (trước - sau, thuần tập so sánh điều trị): ROBINS-I. Nghiên cứu thuần tập và bệnh - chứng về phơi nhiễm: thang Newcastle-Ottawa vẫn được dùng rộng rãi; ROBINS-E là lựa chọn mới hơn, chặt chẽ hơn - Hyun. Nghiên cứu độ chính xác chẩn đoán: QUADAS-2. Bản thân tổng quan hệ thống: AMSTAR 2.</a:t>
+              <a:t>Thử nghiệm ngẫu nhiên: RoB 2 (Cochrane), dùng cho Boulet. Nghiên cứu không ngẫu nhiên về can thiệp (trước-sau, thuần tập so sánh điều trị): ROBINS-I. Nghiên cứu thuần tập và bệnh-chứng về phơi nhiễm: thang Newcastle-Ottawa vẫn được dùng rộng rãi; ROBINS-E là lựa chọn mới hơn, chặt chẽ hơn (dùng cho Hyun). Nghiên cứu độ chính xác chẩn đoán: QUADAS-2. Bản thân tổng quan hệ thống: AMSTAR 2.</a:t>
             </a:r>
           </a:p>
           <a:p>
             <a:r>
               <a:rPr lang="en-US" sz="1400" b="0" dirty="0"/>
-              <a:t>Cột bên phải nối lại: mỗi thiết kế cũng có hướng dẫn báo cáo (CONSORT, TREND/STROBE, STROBE, STARD, PRISMA) - học ở Buổi 8.</a:t>
+              <a:t>Cột bên phải nối lại: mỗi thiết kế cũng có hướng dẫn báo cáo (CONSORT, TREND/STROBE, STROBE, STARD, PRISMA), học ở Buổi 8.</a:t>
             </a:r>
           </a:p>
           <a:p>
@@ -4242,7 +4242,7 @@
           <a:p>
             <a:r>
               <a:rPr lang="en-US" sz="1400" b="0" dirty="0"/>
-              <a:t>Hỏi cả lớp: thẩm định một nghiên cứu cải tiến chất lượng trước - sau về gói xử trí nhiễm khuẩn huyết, dùng công cụ nào? Dự kiến: ROBINS-I.</a:t>
+              <a:t>Hỏi cả lớp: thẩm định một nghiên cứu cải tiến chất lượng trước-sau về gói xử trí nhiễm khuẩn huyết, dùng công cụ nào? Dự kiến: ROBINS-I.</a:t>
             </a:r>
           </a:p>
           <a:p>
@@ -4428,7 +4428,7 @@
           <a:p>
             <a:r>
               <a:rPr lang="en-US" sz="1400" b="0" dirty="0"/>
-              <a:t>Lời lẽ và thiết kế: kết luận của Boulet ('không làm giảm cân bằng dịch chung ở ngày 5') khớp với thiết kế RCT thí điểm. Tóm tắt của Hyun nói 'có liên quan', nhưng tiêu đề dùng chữ 'Impact' (tác động) - mạnh hơn mức một nghiên cứu thuần tập cho phép.</a:t>
+              <a:t>Lời lẽ và thiết kế: kết luận của Boulet ('không làm giảm cân bằng dịch chung ở ngày 5') khớp với thiết kế RCT thí điểm. Tóm tắt của Hyun nói 'có liên quan', nhưng tiêu đề dùng chữ 'Impact' (tác động), mạnh hơn mức một nghiên cứu thuần tập cho phép.</a:t>
             </a:r>
           </a:p>
           <a:p>
@@ -4539,7 +4539,7 @@
           <a:p>
             <a:r>
               <a:rPr lang="en-US" sz="1400" b="0" dirty="0"/>
-              <a:t>Đáp án: TN 4 có trọng số lớn nhất (38%). Không thử nghiệm riêng lẻ nào loại trừ được RR = 1 - mọi KTC đều cắt 1. Hình thoi (RR 0,79, KTC 95% 0,64-0,98) không cắt 1: gộp lại, hạn chế dịch liên quan với nguy cơ tử vong tương đối thấp hơn khoảng 21% trong các thử nghiệm (giả định) này, với giới hạn trên gần mức không tác động. Công cụ: Boulet - RoB 2; Hyun - Newcastle-Ottawa (hoặc ROBINS-E); tổng quan - AMSTAR 2.</a:t>
+              <a:t>Đáp án: TN 4 có trọng số lớn nhất (38%). Không thử nghiệm riêng lẻ nào loại trừ được RR = 1: mọi KTC đều cắt 1. Hình thoi (RR 0,79, KTC 95% 0,64-0,98) không cắt 1: gộp lại, hạn chế dịch liên quan với nguy cơ tử vong tương đối thấp hơn khoảng 21% trong các thử nghiệm (giả định) này, với giới hạn trên gần mức không tác động. Công cụ: RoB 2 cho Boulet; Newcastle-Ottawa (hoặc ROBINS-E) cho Hyun; AMSTAR 2 cho tổng quan.</a:t>
             </a:r>
           </a:p>
           <a:p>
@@ -4551,7 +4551,7 @@
           <a:p>
             <a:r>
               <a:rPr lang="en-US" sz="1400" b="0" dirty="0"/>
-              <a:t>Lỗi thường gặp: chỉ đọc tâm hình thoi mà bỏ qua độ rộng - luôn nêu KTC.</a:t>
+              <a:t>Lỗi thường gặp: chỉ đọc tâm hình thoi mà bỏ qua độ rộng. Luôn nêu KTC.</a:t>
             </a:r>
           </a:p>
           <a:p>
@@ -4644,19 +4644,19 @@
           <a:p>
             <a:r>
               <a:rPr lang="en-US" sz="1400" b="0" dirty="0"/>
-              <a:t>Kết cục chính là MỘT kết quả mà nghiên cứu được thiết kế và tính cỡ mẫu cho nó. Định nghĩa theo ba ý: CÁI GÌ (tử vong do mọi nguyên nhân - không phải 'cải thiện tử vong'), ĐO THẾ NÀO (hồ sơ bệnh viện; gọi điện nếu đã ra viện), KHI NÀO (ngày 28 sau khi vào ICU). Kết cục phụ cũng có đủ ba ý.</a:t>
+              <a:t>Kết cục chính là MỘT kết quả mà nghiên cứu được thiết kế và tính cỡ mẫu cho nó. Định nghĩa theo ba ý: CÁI GÌ (tử vong do mọi nguyên nhân, không phải 'cải thiện tử vong'), ĐO THẾ NÀO (hồ sơ bệnh viện; gọi điện nếu đã ra viện), KHI NÀO (ngày 28 sau khi vào ICU). Kết cục phụ cũng có đủ ba ý.</a:t>
             </a:r>
           </a:p>
           <a:p>
             <a:r>
               <a:rPr lang="en-US" sz="1400" b="0" dirty="0"/>
-              <a:t>Kết cục chính của Boulet: cân bằng dịch tích lũy (ml/kg) ở ngày 5 - rõ cái gì, thế nào và khi nào. Của Hyun: tử vong ngày 28.</a:t>
+              <a:t>Kết cục chính của Boulet: cân bằng dịch tích lũy (ml/kg) ở ngày 5: rõ cái gì, thế nào và khi nào. Của Hyun: tử vong ngày 28.</a:t>
             </a:r>
           </a:p>
           <a:p>
             <a:r>
               <a:rPr lang="en-US" sz="1400" b="0" dirty="0"/>
-              <a:t>Quan niệm sai: 'nhiều kết cục chính = nhiều cơ hội có kết quả'. Đó chính là vấn đề - nhiều kết cục chính tạo điều kiện chọn lọc kết quả (tô vẽ, Buổi 2).</a:t>
+              <a:t>Quan niệm sai: 'nhiều kết cục chính = nhiều cơ hội có kết quả'. Đó chính là vấn đề: nhiều kết cục chính tạo điều kiện chọn lọc kết quả (tô vẽ, Buổi 2).</a:t>
             </a:r>
           </a:p>
           <a:p>
@@ -4761,7 +4761,7 @@
           <a:p>
             <a:r>
               <a:rPr lang="en-US" sz="1400" b="0" dirty="0"/>
-              <a:t>Đáp án mẫu cho ví dụ xuyên suốt (phiên bản quan sát): phơi nhiễm - cân bằng dịch tích lũy dương (ml/kg) ở 72 giờ sau khi vào ICU; so sánh - cân bằng bằng 0 hoặc âm; kết cục chính - tử vong do mọi nguyên nhân đến ngày 28 (hồ sơ bệnh viện); kết cục phụ - AKI (KDIGO) đến ngày 7, số ngày không thở máy đến ngày 28, thời gian nằm ICU; sai lệch - nhiễu do độ nặng (ghi SOFA, lactate, liều vận mạch và hiệu chỉnh hoặc ghép cặp), chọn lựa (bệnh nhân liên tiếp, báo cáo các trường hợp bị loại), thông tin (định nghĩa dịch định trước, kiểm tra lại 10% hồ sơ); kết luận - 'có liên quan với'.</a:t>
+              <a:t>Đáp án mẫu cho ví dụ xuyên suốt (phiên bản quan sát): phơi nhiễm: cân bằng dịch tích lũy dương (ml/kg) ở 72 giờ sau khi vào ICU; so sánh: cân bằng bằng 0 hoặc âm; kết cục chính: tử vong do mọi nguyên nhân đến ngày 28 (hồ sơ bệnh viện); kết cục phụ: AKI (KDIGO) đến ngày 7, số ngày không thở máy đến ngày 28, thời gian nằm ICU; sai lệch: nhiễu do độ nặng (ghi SOFA, lactate, liều vận mạch và hiệu chỉnh hoặc ghép cặp), chọn lựa (bệnh nhân liên tiếp, báo cáo các trường hợp bị loại), thông tin (định nghĩa dịch định trước, kiểm tra lại 10% hồ sơ); kết luận: 'có liên quan với'.</a:t>
             </a:r>
           </a:p>
           <a:p>
@@ -4953,7 +4953,7 @@
           <a:p>
             <a:r>
               <a:rPr lang="en-US" sz="1400" b="0" dirty="0"/>
-              <a:t>Xem trước: ở Tuần 5-6 ta biến thiết kế thành dữ liệu - biến số, phiếu thu thập dữ liệu - và bộ dữ liệu khóa học FLUID-ICU, một thuần tập mô phỏng trả lời phiên bản quan sát của câu hỏi về dịch truyền.</a:t>
+              <a:t>Xem trước: ở Tuần 5-6 ta biến thiết kế thành dữ liệu (biến số, phiếu thu thập dữ liệu) và làm quen với bộ dữ liệu khóa học FLUID-ICU, một thuần tập mô phỏng trả lời phiên bản quan sát của câu hỏi về dịch truyền.</a:t>
             </a:r>
           </a:p>
           <a:p>
@@ -5145,7 +5145,7 @@
           <a:p>
             <a:r>
               <a:rPr lang="en-US" sz="1400" b="0" dirty="0"/>
-              <a:t>Báo cáo: STARD (30 mục và sơ đồ luồng người tham gia). Thẩm định: QUADAS-2. Cảnh giác sai lệch phổ bệnh (spectrum bias) - xét nghiệm được đánh giá trên bệnh nhân rất nặng so với người tình nguyện khỏe sẽ trông tốt hơn so với khi dùng trên bệnh nhân thực tế.</a:t>
+              <a:t>Báo cáo: STARD (30 mục và sơ đồ luồng người tham gia). Thẩm định: QUADAS-2. Cảnh giác sai lệch phổ bệnh (spectrum bias): xét nghiệm được đánh giá trên bệnh nhân rất nặng so với người tình nguyện khỏe sẽ trông tốt hơn so với khi dùng trên bệnh nhân thực tế.</a:t>
             </a:r>
           </a:p>
           <a:p>
@@ -5244,7 +5244,7 @@
           <a:p>
             <a:r>
               <a:rPr lang="en-US" sz="1400" b="0" dirty="0"/>
-              <a:t>Mỗi lĩnh vực được đánh giá nguy cơ thấp (xanh +), có vài lo ngại (vàng -) hoặc nguy cơ cao (đỏ x). Đánh giá chung do lĩnh vực xấu nhất quyết định - TN C có nguy cơ cao vì D2.</a:t>
+              <a:t>Mỗi lĩnh vực được đánh giá nguy cơ thấp (xanh +), có vài lo ngại (vàng -) hoặc nguy cơ cao (đỏ x). Đánh giá chung do lĩnh vực xấu nhất quyết định: TN C có nguy cơ cao vì D2.</a:t>
             </a:r>
           </a:p>
           <a:p>
@@ -5442,7 +5442,7 @@
           <a:p>
             <a:r>
               <a:rPr lang="en-US" sz="1400" b="0" dirty="0"/>
-              <a:t>Dùng hình bia phi tiêu. Trái: điều ta muốn - gần sự thật và tập trung. Giữa: sai số ngẫu nhiên - quanh sự thật nhưng phân tán; cỡ mẫu lớn hơn sẽ kéo các phi tiêu lại gần nhau. Phải: sai lệch - tập trung nhưng sai chỗ; cỡ mẫu lớn hơn chỉ làm ta tự tin hơn vào câu trả lời sai.</a:t>
+              <a:t>Dùng hình bia phi tiêu. Trái: điều ta muốn, gần sự thật và tập trung. Giữa: sai số ngẫu nhiên, quanh sự thật nhưng phân tán. Cỡ mẫu lớn hơn sẽ kéo các phi tiêu lại gần nhau. Phải: sai lệch, tập trung nhưng sai chỗ. Cỡ mẫu lớn hơn chỉ làm ta tự tin hơn vào câu trả lời sai.</a:t>
             </a:r>
           </a:p>
           <a:p>
@@ -5460,7 +5460,7 @@
           <a:p>
             <a:r>
               <a:rPr lang="en-US" sz="1400" b="0" dirty="0"/>
-              <a:t>Hỏi cả lớp: bài nào dễ bị sai số ngẫu nhiên hơn, bài nào dễ bị sai lệch hơn? Dự kiến: Boulet (48 BN) - sai số ngẫu nhiên; Hyun (quan sát) - sai lệch, nhất là yếu tố nhiễu.</a:t>
+              <a:t>Hỏi cả lớp: bài nào dễ bị sai số ngẫu nhiên hơn, bài nào dễ bị sai lệch hơn? Dự kiến: Boulet (48 BN) dễ bị sai số ngẫu nhiên; Hyun (quan sát) dễ bị sai lệch, nhất là yếu tố nhiễu.</a:t>
             </a:r>
           </a:p>
           <a:p>
@@ -5547,7 +5547,7 @@
           <a:p>
             <a:r>
               <a:rPr lang="en-US" sz="1400" b="0" dirty="0"/>
-              <a:t>Slide bản quyền - để trên màn hình khi học viên ra về.</a:t>
+              <a:t>Slide bản quyền. Để trên màn hình khi học viên ra về.</a:t>
             </a:r>
           </a:p>
         </p:txBody>
@@ -5652,7 +5652,7 @@
           <a:p>
             <a:r>
               <a:rPr lang="en-US" sz="1400" b="0" dirty="0"/>
-              <a:t>Hỏi cả lớp: trong Boulet, 1.201 bệnh nhân được sàng lọc và 50 được đưa vào. Điều đó nói gì? Dự kiến: bệnh nhân thử nghiệm được chọn lọc rất kỹ - kiểm tra xem họ có giống bệnh nhân của mình không trước khi áp dụng.</a:t>
+              <a:t>Hỏi cả lớp: trong Boulet, 1.201 bệnh nhân được sàng lọc và 50 được đưa vào. Điều đó nói gì? Dự kiến: bệnh nhân thử nghiệm được chọn lọc rất kỹ. Kiểm tra xem họ có giống bệnh nhân của mình không trước khi áp dụng.</a:t>
             </a:r>
           </a:p>
           <a:p>
@@ -5745,13 +5745,13 @@
           <a:p>
             <a:r>
               <a:rPr lang="en-US" sz="1400" b="0" dirty="0"/>
-              <a:t>Sai lệch nhớ lại: trong nghiên cứu bệnh - chứng, ca bệnh (hoặc gia đình) cố nhớ kỹ hơn ca chứng, nên phơi nhiễm có vẻ phổ biến hơn ở ca bệnh.</a:t>
+              <a:t>Sai lệch nhớ lại: trong nghiên cứu bệnh-chứng, ca bệnh (hoặc gia đình) cố nhớ kỹ hơn ca chứng, nên phơi nhiễm có vẻ phổ biến hơn ở ca bệnh.</a:t>
             </a:r>
           </a:p>
           <a:p>
             <a:r>
               <a:rPr lang="en-US" sz="1400" b="0" dirty="0"/>
-              <a:t>Sai lệch người quan sát: người đánh giá biết nhóm có thể đánh giá kết cục 'mềm' khác đi - ví dụ 'đủ điều kiện ra viện' hay 'có mê sảng'. Trong Boulet, bác sĩ biết phân nhóm.</a:t>
+              <a:t>Sai lệch người quan sát: người đánh giá biết nhóm có thể đánh giá kết cục 'mềm' khác đi, ví dụ 'đủ điều kiện ra viện' hay 'có mê sảng'. Trong Boulet, bác sĩ biết phân nhóm.</a:t>
             </a:r>
           </a:p>
           <a:p>
@@ -5763,7 +5763,7 @@
           <a:p>
             <a:r>
               <a:rPr lang="en-US" sz="1400" b="0" dirty="0"/>
-              <a:t>Quan niệm sai: 'kết cục cứng như tử vong thì miễn nhiễm'. Tử vong là kết cục vững, nhưng thời điểm và nguyên nhân tử vong vẫn có thể bị phân loại sai.</a:t>
+              <a:t>Quan niệm sai: 'kết cục cứng như tử vong thì miễn nhiễm'. Tử vong được ghi nhận đáng tin cậy, nhưng thời điểm và nguyên nhân tử vong vẫn có thể bị phân loại sai.</a:t>
             </a:r>
           </a:p>
           <a:p>
@@ -5862,7 +5862,7 @@
           <a:p>
             <a:r>
               <a:rPr lang="en-US" sz="1400" b="0" dirty="0"/>
-              <a:t>Đáp án. A: sai lệch chọn lựa - những bệnh nhân nặng nhất (đã tử vong) bị thiếu, nên mẫu không còn là quần thể. B: sai lệch người quan sát (sai lệch thông tin) - một điểm số chủ quan do người biết nhóm đánh giá. C: sai lệch đo lường (sai lệch thông tin) - vì chỉ ảnh hưởng một khoa, nó làm méo phép so sánh giữa các khoa.</a:t>
+              <a:t>Đáp án. A: sai lệch chọn lựa. Những bệnh nhân nặng nhất (đã tử vong) bị thiếu, nên mẫu không còn là quần thể. B: sai lệch người quan sát (sai lệch thông tin): một điểm số chủ quan do người biết nhóm đánh giá. C: sai lệch đo lường (sai lệch thông tin). Vì chỉ ảnh hưởng một khoa, nó làm méo phép so sánh giữa các khoa.</a:t>
             </a:r>
           </a:p>
           <a:p>
@@ -5955,7 +5955,7 @@
           <a:p>
             <a:r>
               <a:rPr lang="en-US" sz="1400" b="0" dirty="0"/>
-              <a:t>Mức độ nặng của bệnh khiến bác sĩ truyền nhiều dịch hơn (mũi tên trái). Mức độ nặng cũng gây tử vong (mũi tên phải). Vì vậy bệnh nhân được truyền nhiều dịch hơn tử vong nhiều hơn - kể cả khi dịch không có tác động gì.</a:t>
+              <a:t>Mức độ nặng của bệnh khiến bác sĩ truyền nhiều dịch hơn (mũi tên trái). Mức độ nặng cũng gây tử vong (mũi tên phải). Vì vậy bệnh nhân được truyền nhiều dịch hơn tử vong nhiều hơn, kể cả khi dịch không có tác động gì.</a:t>
             </a:r>
           </a:p>
           <a:p>
@@ -9216,7 +9216,7 @@
                 <a:latin typeface="Segoe UI"/>
                 <a:cs typeface="Segoe UI"/>
               </a:rPr>
-              <a:t>Giải lao (15 phút) - rồi hai bài tính bảng 2x2 (20 phút)</a:t>
+              <a:t>Giải lao (15 phút), rồi hai bài tính bảng 2x2 (20 phút)</a:t>
             </a:r>
           </a:p>
           <a:p>
@@ -9254,7 +9254,7 @@
                 <a:latin typeface="Segoe UI"/>
                 <a:cs typeface="Segoe UI"/>
               </a:rPr>
-              <a:t>Xây dựng đề cương 4: phơi nhiễm, kết cục, sai lệch (30 phút) - tổng kết</a:t>
+              <a:t>Xây dựng đề cương 4: phơi nhiễm, kết cục, sai lệch (30 phút), rồi tổng kết</a:t>
             </a:r>
           </a:p>
         </p:txBody>
@@ -9895,7 +9895,7 @@
                 <a:latin typeface="Segoe UI"/>
                 <a:cs typeface="Segoe UI"/>
               </a:rPr>
-              <a:t>Nhiều kháng sinh -&gt; nhiều tử vong?</a:t>
+              <a:t>Nhiều kháng sinh → nhiều tử vong?</a:t>
             </a:r>
           </a:p>
           <a:p>
@@ -10029,7 +10029,7 @@
                 <a:latin typeface="Segoe UI"/>
                 <a:cs typeface="Segoe UI"/>
               </a:rPr>
-              <a:t>Được chuyên gia dinh dưỡng khám -&gt; sụt cân nhiều hơn?</a:t>
+              <a:t>Được chuyên gia dinh dưỡng khám → sụt cân nhiều hơn?</a:t>
             </a:r>
           </a:p>
           <a:p>
@@ -10163,7 +10163,7 @@
                 <a:latin typeface="Segoe UI"/>
                 <a:cs typeface="Segoe UI"/>
               </a:rPr>
-              <a:t>Vận mạch -&gt; nhiều rối loạn nhịp?</a:t>
+              <a:t>Vận mạch → nhiều rối loạn nhịp?</a:t>
             </a:r>
           </a:p>
           <a:p>
@@ -11562,7 +11562,7 @@
                 <a:latin typeface="Segoe UI"/>
                 <a:cs typeface="Segoe UI"/>
               </a:rPr>
-              <a:t>Nhờ may rủi, hai nhóm có thành phần tương tự - kể cả yếu tố chưa ai đo.</a:t>
+              <a:t>Nhờ may rủi, hai nhóm có thành phần tương tự, kể cả yếu tố chưa ai đo.</a:t>
             </a:r>
           </a:p>
         </p:txBody>
@@ -12005,7 +12005,7 @@
                 <a:latin typeface="Segoe UI"/>
                 <a:cs typeface="Segoe UI"/>
               </a:rPr>
-              <a:t>Ghép cặp có ích - nhưng chỉ với điều đã được đo</a:t>
+              <a:t>Ghép cặp có ích, nhưng chỉ với điều đã được đo</a:t>
             </a:r>
           </a:p>
         </p:txBody>
@@ -12280,7 +12280,7 @@
                 <a:latin typeface="Segoe UI"/>
                 <a:cs typeface="Segoe UI"/>
               </a:rPr>
-              <a:t>Giá trị nội tại và giá trị ngoại suy</a:t>
+              <a:t>Giá trị nội tại trước, rồi đến giá trị ngoại suy</a:t>
             </a:r>
           </a:p>
         </p:txBody>
@@ -13324,7 +13324,7 @@
                 <a:latin typeface="Segoe UI"/>
                 <a:cs typeface="Segoe UI"/>
               </a:rPr>
-              <a:t>Các nhóm: đọc lại Phần 2a của đề cương (thiết kế, bối cảnh, đối tượng) - 2 phút</a:t>
+              <a:t>Các nhóm: đọc lại Phần 2a của đề cương (thiết kế, bối cảnh, đối tượng): 2 phút</a:t>
             </a:r>
           </a:p>
         </p:txBody>
@@ -17098,7 +17098,7 @@
                 <a:latin typeface="Segoe UI"/>
                 <a:cs typeface="Segoe UI"/>
               </a:rPr>
-              <a:t>Nguy cơ, RR, RD và NNT - đáp án trong ghi chú</a:t>
+              <a:t>Nguy cơ, RR, RD và NNT (đáp án trong ghi chú)</a:t>
             </a:r>
           </a:p>
         </p:txBody>
@@ -17392,7 +17392,7 @@
                 <a:latin typeface="Segoe UI"/>
                 <a:cs typeface="Segoe UI"/>
               </a:rPr>
-              <a:t>Mở 2x2_calculator.xlsx - trang Association</a:t>
+              <a:t>Mở 2x2_calculator.xlsx, trang Association</a:t>
             </a:r>
           </a:p>
           <a:p>
@@ -17454,7 +17454,7 @@
                 <a:latin typeface="Segoe UI"/>
                 <a:cs typeface="Segoe UI"/>
               </a:rPr>
-              <a:t>Đọc nguy cơ, RR, RD, NNT, OR - và các câu diễn giải</a:t>
+              <a:t>Đọc nguy cơ, RR, RD, NNT, OR, và các câu diễn giải</a:t>
             </a:r>
           </a:p>
           <a:p>
@@ -17516,7 +17516,7 @@
                 <a:latin typeface="Segoe UI"/>
                 <a:cs typeface="Segoe UI"/>
               </a:rPr>
-              <a:t>Chỉ vào dòng chữ đỏ: dữ liệu bệnh - chứng chỉ cho OR</a:t>
+              <a:t>Chỉ vào dòng chữ đỏ: dữ liệu bệnh-chứng chỉ cho OR</a:t>
             </a:r>
           </a:p>
         </p:txBody>
@@ -17919,7 +17919,7 @@
                 <a:latin typeface="Segoe UI"/>
                 <a:cs typeface="Segoe UI"/>
               </a:rPr>
-              <a:t>Từ vựng hôm nay - mỗi định nghĩa đi kèm một hình</a:t>
+              <a:t>Từ vựng hôm nay. Mỗi định nghĩa đi kèm một hình</a:t>
             </a:r>
           </a:p>
         </p:txBody>
@@ -18793,7 +18793,7 @@
                 <a:latin typeface="Segoe UI"/>
                 <a:cs typeface="Segoe UI"/>
               </a:rPr>
-              <a:t>Sau giải lao: hai bài tính bảng 2x2 - chuẩn bị bút</a:t>
+              <a:t>Sau giải lao: hai bài tính bảng 2x2, hãy chuẩn bị bút</a:t>
             </a:r>
           </a:p>
           <a:p>
@@ -19149,7 +19149,7 @@
                 <a:latin typeface="Segoe UI"/>
                 <a:cs typeface="Segoe UI"/>
               </a:rPr>
-              <a:t>Bài 1 (thử nghiệm): nguy cơ, RR, RD, NNT, OR - và một câu diễn giải</a:t>
+              <a:t>Bài 1 (thử nghiệm): nguy cơ, RR, RD, NNT, OR, và một câu diễn giải</a:t>
             </a:r>
           </a:p>
           <a:p>
@@ -19180,7 +19180,7 @@
                 <a:latin typeface="Segoe UI"/>
                 <a:cs typeface="Segoe UI"/>
               </a:rPr>
-              <a:t>Bài 2 (bệnh - chứng): chỉ tính OR - và giải thích vì sao không tính RR</a:t>
+              <a:t>Bài 2 (bệnh-chứng): chỉ tính OR, và giải thích vì sao không tính RR</a:t>
             </a:r>
           </a:p>
           <a:p>
@@ -20757,7 +20757,7 @@
                 <a:latin typeface="Segoe UI"/>
                 <a:cs typeface="Segoe UI"/>
               </a:rPr>
-              <a:t>Sơ đồ PRISMA cho thấy cách tìm, sàng lọc và loại nghiên cứu - kèm lý do.</a:t>
+              <a:t>Sơ đồ PRISMA cho thấy cách tìm, sàng lọc và loại nghiên cứu, kèm lý do.</a:t>
             </a:r>
           </a:p>
         </p:txBody>
@@ -21582,7 +21582,7 @@
                 <a:latin typeface="Segoe UI"/>
                 <a:cs typeface="Segoe UI"/>
               </a:rPr>
-              <a:t>Chọn công cụ thẩm định phù hợp với thiết kế - và cả hướng dẫn báo cáo.</a:t>
+              <a:t>Chọn công cụ thẩm định phù hợp với thiết kế, và cả hướng dẫn báo cáo.</a:t>
             </a:r>
           </a:p>
         </p:txBody>
@@ -21838,7 +21838,7 @@
                 <a:latin typeface="Segoe UI"/>
                 <a:cs typeface="Segoe UI"/>
               </a:rPr>
-              <a:t>Chọn lựa, thông tin, yếu tố nhiễu, thay đổi tác động - và từ liên quan đến nhân quả. (40 phút)</a:t>
+              <a:t>Chọn lựa, thông tin, yếu tố nhiễu, thay đổi tác động, và từ liên quan đến nhân quả. (40 phút)</a:t>
             </a:r>
           </a:p>
         </p:txBody>
@@ -22530,7 +22530,7 @@
                 <a:latin typeface="Segoe UI"/>
                 <a:cs typeface="Segoe UI"/>
               </a:rPr>
-              <a:t>Đọc kết luận sau cùng - và đối chiếu với thiết kế và con số.</a:t>
+              <a:t>Đọc kết luận sau cùng, và đối chiếu với thiết kế và con số.</a:t>
             </a:r>
           </a:p>
         </p:txBody>
@@ -23986,7 +23986,7 @@
                 <a:latin typeface="Segoe UI"/>
                 <a:cs typeface="Segoe UI"/>
               </a:rPr>
-              <a:t>Sai lệch -&gt; biện pháp cụ thể?</a:t>
+              <a:t>Mỗi sai lệch có biện pháp cụ thể?</a:t>
             </a:r>
           </a:p>
         </p:txBody>
@@ -24809,7 +24809,7 @@
                 <a:latin typeface="Segoe UI"/>
                 <a:cs typeface="Segoe UI"/>
               </a:rPr>
-              <a:t>Tin trước, rồi đến độ lớn - và kiểm tra lời lẽ có khớp với thiết kế.</a:t>
+              <a:t>Tin trước, rồi đến độ lớn, và kiểm tra lời lẽ có khớp với thiết kế.</a:t>
             </a:r>
           </a:p>
         </p:txBody>
@@ -25196,7 +25196,7 @@
                 <a:latin typeface="Segoe UI"/>
                 <a:cs typeface="Segoe UI"/>
               </a:rPr>
-              <a:t>Hai thứ Bảy tới (Buổi 5-6): dữ liệu - bộ dữ liệu khóa học FLUID-ICU</a:t>
+              <a:t>Hai thứ Bảy tới (Buổi 5-6): dữ liệu và bộ dữ liệu khóa học FLUID-ICU</a:t>
             </a:r>
           </a:p>
         </p:txBody>
@@ -25421,7 +25421,7 @@
                 <a:latin typeface="Segoe UI"/>
                 <a:cs typeface="Segoe UI"/>
               </a:rPr>
-              <a:t>Slide bổ sung - Buổi 4</a:t>
+              <a:t>Slide bổ sung: Buổi 4</a:t>
             </a:r>
           </a:p>
         </p:txBody>
@@ -25491,7 +25491,7 @@
                 <a:latin typeface="Segoe UI"/>
                 <a:cs typeface="Segoe UI"/>
               </a:rPr>
-              <a:t>Slide bổ sung - Buổi 4</a:t>
+              <a:t>Slide bổ sung: Buổi 4</a:t>
             </a:r>
           </a:p>
           <a:p>
@@ -28770,7 +28770,7 @@
                 <a:latin typeface="Segoe UI"/>
                 <a:cs typeface="Segoe UI"/>
               </a:rPr>
-              <a:t>Mỗi câu một sai lệch - đáp án trong ghi chú</a:t>
+              <a:t>Mỗi câu một sai lệch (đáp án trong ghi chú)</a:t>
             </a:r>
           </a:p>
         </p:txBody>

--- a/vi/files/slides/Session_4_VN.pptx
+++ b/vi/files/slides/Session_4_VN.pptx
@@ -9063,8 +9063,8 @@
                 <a:solidFill>
                   <a:srgbClr val="0D7377"/>
                 </a:solidFill>
-                <a:latin typeface="Segoe UI"/>
-                <a:cs typeface="Segoe UI"/>
+                <a:latin typeface="Arial"/>
+                <a:cs typeface="Arial"/>
               </a:rPr>
               <a:t>Buổi 4 · Sai lệch và tác động: có tin được không, lớn đến đâu?</a:t>
             </a:r>
@@ -9131,8 +9131,8 @@
                 <a:solidFill>
                   <a:srgbClr val="0070C0"/>
                 </a:solidFill>
-                <a:latin typeface="Segoe UI"/>
-                <a:cs typeface="Segoe UI"/>
+                <a:latin typeface="Arial"/>
+                <a:cs typeface="Arial"/>
               </a:rPr>
               <a:t>Tuần 4 · Thứ Bảy</a:t>
             </a:r>
@@ -9156,8 +9156,8 @@
                 <a:solidFill>
                   <a:srgbClr val="000000"/>
                 </a:solidFill>
-                <a:latin typeface="Segoe UI"/>
-                <a:cs typeface="Segoe UI"/>
+                <a:latin typeface="Arial"/>
+                <a:cs typeface="Arial"/>
               </a:rPr>
               <a:t>Câu hỏi ôn tập Buổi 3 (10 phút)</a:t>
             </a:r>
@@ -9175,8 +9175,8 @@
                 <a:solidFill>
                   <a:srgbClr val="000000"/>
                 </a:solidFill>
-                <a:latin typeface="Segoe UI"/>
-                <a:cs typeface="Segoe UI"/>
+                <a:latin typeface="Arial"/>
+                <a:cs typeface="Arial"/>
               </a:rPr>
               <a:t>4.1  Sai lệch, yếu tố nhiễu và nhân quả (40 phút)</a:t>
             </a:r>
@@ -9194,8 +9194,8 @@
                 <a:solidFill>
                   <a:srgbClr val="000000"/>
                 </a:solidFill>
-                <a:latin typeface="Segoe UI"/>
-                <a:cs typeface="Segoe UI"/>
+                <a:latin typeface="Arial"/>
+                <a:cs typeface="Arial"/>
               </a:rPr>
               <a:t>4.2  Đo lường bệnh và mối liên quan + trình diễn bảng 2x2 (30 phút)</a:t>
             </a:r>
@@ -9213,8 +9213,8 @@
                 <a:solidFill>
                   <a:srgbClr val="000000"/>
                 </a:solidFill>
-                <a:latin typeface="Segoe UI"/>
-                <a:cs typeface="Segoe UI"/>
+                <a:latin typeface="Arial"/>
+                <a:cs typeface="Arial"/>
               </a:rPr>
               <a:t>Giải lao (15 phút), rồi hai bài tính bảng 2x2 (20 phút)</a:t>
             </a:r>
@@ -9232,8 +9232,8 @@
                 <a:solidFill>
                   <a:srgbClr val="000000"/>
                 </a:solidFill>
-                <a:latin typeface="Segoe UI"/>
-                <a:cs typeface="Segoe UI"/>
+                <a:latin typeface="Arial"/>
+                <a:cs typeface="Arial"/>
               </a:rPr>
               <a:t>4.3  Vượt ra ngoài một nghiên cứu: xét nghiệm, phân tích gộp, thẩm định (30 phút)</a:t>
             </a:r>
@@ -9251,8 +9251,8 @@
                 <a:solidFill>
                   <a:srgbClr val="000000"/>
                 </a:solidFill>
-                <a:latin typeface="Segoe UI"/>
-                <a:cs typeface="Segoe UI"/>
+                <a:latin typeface="Arial"/>
+                <a:cs typeface="Arial"/>
               </a:rPr>
               <a:t>Xây dựng đề cương 4: phơi nhiễm, kết cục, sai lệch (30 phút), rồi tổng kết</a:t>
             </a:r>
@@ -9289,7 +9289,7 @@
                     <a:lumMod val="50000"/>
                   </a:schemeClr>
                 </a:solidFill>
-                <a:latin typeface="Verdana"/>
+                <a:latin typeface="Arial"/>
               </a:rPr>
               <a:t>Neudata | #ClearDataClearImpact</a:t>
             </a:r>
@@ -9419,8 +9419,8 @@
                 <a:solidFill>
                   <a:srgbClr val="0D7377"/>
                 </a:solidFill>
-                <a:latin typeface="Segoe UI"/>
-                <a:cs typeface="Segoe UI"/>
+                <a:latin typeface="Arial"/>
+                <a:cs typeface="Arial"/>
               </a:rPr>
               <a:t>Yếu tố nhiễu bằng con số: mối liên quan biến mất</a:t>
             </a:r>
@@ -9510,8 +9510,8 @@
                 <a:solidFill>
                   <a:srgbClr val="595959"/>
                 </a:solidFill>
-                <a:latin typeface="Segoe UI"/>
-                <a:cs typeface="Segoe UI"/>
+                <a:latin typeface="Arial"/>
+                <a:cs typeface="Arial"/>
               </a:rPr>
               <a:t>Số liệu giả định dùng cho giảng dạy</a:t>
             </a:r>
@@ -9555,8 +9555,8 @@
                 <a:solidFill>
                   <a:srgbClr val="FFFFFF"/>
                 </a:solidFill>
-                <a:latin typeface="Segoe UI"/>
-                <a:cs typeface="Segoe UI"/>
+                <a:latin typeface="Arial"/>
+                <a:cs typeface="Arial"/>
               </a:rPr>
               <a:t>THÔNG ĐIỆP CHÍNH   </a:t>
             </a:r>
@@ -9565,8 +9565,8 @@
                 <a:solidFill>
                   <a:srgbClr val="FFFFFF"/>
                 </a:solidFill>
-                <a:latin typeface="Segoe UI"/>
-                <a:cs typeface="Segoe UI"/>
+                <a:latin typeface="Arial"/>
+                <a:cs typeface="Arial"/>
               </a:rPr>
               <a:t>So sánh tương đồng: trong từng mức độ nặng, lượng dịch không tạo khác biệt.</a:t>
             </a:r>
@@ -9603,7 +9603,7 @@
                     <a:lumMod val="50000"/>
                   </a:schemeClr>
                 </a:solidFill>
-                <a:latin typeface="Verdana"/>
+                <a:latin typeface="Arial"/>
               </a:rPr>
               <a:t>Neudata | #ClearDataClearImpact</a:t>
             </a:r>
@@ -9733,8 +9733,8 @@
                 <a:solidFill>
                   <a:srgbClr val="0D7377"/>
                 </a:solidFill>
-                <a:latin typeface="Segoe UI"/>
-                <a:cs typeface="Segoe UI"/>
+                <a:latin typeface="Arial"/>
+                <a:cs typeface="Arial"/>
               </a:rPr>
               <a:t>Ví dụ: tìm yếu tố nhiễu</a:t>
             </a:r>
@@ -9800,8 +9800,8 @@
                 <a:solidFill>
                   <a:srgbClr val="595959"/>
                 </a:solidFill>
-                <a:latin typeface="Segoe UI"/>
-                <a:cs typeface="Segoe UI"/>
+                <a:latin typeface="Arial"/>
+                <a:cs typeface="Arial"/>
               </a:rPr>
               <a:t>Trong mỗi ví dụ, một yếu tố thứ ba chi phối cả phơi nhiễm lẫn kết cục</a:t>
             </a:r>
@@ -9843,8 +9843,8 @@
                 <a:solidFill>
                   <a:srgbClr val="FFFFFF"/>
                 </a:solidFill>
-                <a:latin typeface="Segoe UI"/>
-                <a:cs typeface="Segoe UI"/>
+                <a:latin typeface="Arial"/>
+                <a:cs typeface="Arial"/>
               </a:rPr>
               <a:t>Kháng sinh và tử vong</a:t>
             </a:r>
@@ -9892,8 +9892,8 @@
                 <a:solidFill>
                   <a:srgbClr val="000000"/>
                 </a:solidFill>
-                <a:latin typeface="Segoe UI"/>
-                <a:cs typeface="Segoe UI"/>
+                <a:latin typeface="Arial"/>
+                <a:cs typeface="Arial"/>
               </a:rPr>
               <a:t>Nhiều kháng sinh → nhiều tử vong?</a:t>
             </a:r>
@@ -9913,8 +9913,8 @@
                 <a:solidFill>
                   <a:srgbClr val="000000"/>
                 </a:solidFill>
-                <a:latin typeface="Segoe UI"/>
-                <a:cs typeface="Segoe UI"/>
+                <a:latin typeface="Arial"/>
+                <a:cs typeface="Arial"/>
               </a:rPr>
               <a:t>Yếu tố nhiễu: độ nặng nhiễm khuẩn</a:t>
             </a:r>
@@ -9934,8 +9934,8 @@
                 <a:solidFill>
                   <a:srgbClr val="000000"/>
                 </a:solidFill>
-                <a:latin typeface="Segoe UI"/>
-                <a:cs typeface="Segoe UI"/>
+                <a:latin typeface="Arial"/>
+                <a:cs typeface="Arial"/>
               </a:rPr>
               <a:t>BN nặng hơn dùng nhiều thuốc hơn</a:t>
             </a:r>
@@ -9977,8 +9977,8 @@
                 <a:solidFill>
                   <a:srgbClr val="FFFFFF"/>
                 </a:solidFill>
-                <a:latin typeface="Segoe UI"/>
-                <a:cs typeface="Segoe UI"/>
+                <a:latin typeface="Arial"/>
+                <a:cs typeface="Arial"/>
               </a:rPr>
               <a:t>Dinh dưỡng và sụt cân</a:t>
             </a:r>
@@ -10026,8 +10026,8 @@
                 <a:solidFill>
                   <a:srgbClr val="000000"/>
                 </a:solidFill>
-                <a:latin typeface="Segoe UI"/>
-                <a:cs typeface="Segoe UI"/>
+                <a:latin typeface="Arial"/>
+                <a:cs typeface="Arial"/>
               </a:rPr>
               <a:t>Được chuyên gia dinh dưỡng khám → sụt cân nhiều hơn?</a:t>
             </a:r>
@@ -10047,8 +10047,8 @@
                 <a:solidFill>
                   <a:srgbClr val="000000"/>
                 </a:solidFill>
-                <a:latin typeface="Segoe UI"/>
-                <a:cs typeface="Segoe UI"/>
+                <a:latin typeface="Arial"/>
+                <a:cs typeface="Arial"/>
               </a:rPr>
               <a:t>Yếu tố nhiễu: suy dinh dưỡng khi vào viện</a:t>
             </a:r>
@@ -10068,8 +10068,8 @@
                 <a:solidFill>
                   <a:srgbClr val="000000"/>
                 </a:solidFill>
-                <a:latin typeface="Segoe UI"/>
-                <a:cs typeface="Segoe UI"/>
+                <a:latin typeface="Arial"/>
+                <a:cs typeface="Arial"/>
               </a:rPr>
               <a:t>Chính là lý do được giới thiệu</a:t>
             </a:r>
@@ -10111,8 +10111,8 @@
                 <a:solidFill>
                   <a:srgbClr val="FFFFFF"/>
                 </a:solidFill>
-                <a:latin typeface="Segoe UI"/>
-                <a:cs typeface="Segoe UI"/>
+                <a:latin typeface="Arial"/>
+                <a:cs typeface="Arial"/>
               </a:rPr>
               <a:t>Vận mạch và rối loạn nhịp</a:t>
             </a:r>
@@ -10160,8 +10160,8 @@
                 <a:solidFill>
                   <a:srgbClr val="000000"/>
                 </a:solidFill>
-                <a:latin typeface="Segoe UI"/>
-                <a:cs typeface="Segoe UI"/>
+                <a:latin typeface="Arial"/>
+                <a:cs typeface="Arial"/>
               </a:rPr>
               <a:t>Vận mạch → nhiều rối loạn nhịp?</a:t>
             </a:r>
@@ -10181,8 +10181,8 @@
                 <a:solidFill>
                   <a:srgbClr val="000000"/>
                 </a:solidFill>
-                <a:latin typeface="Segoe UI"/>
-                <a:cs typeface="Segoe UI"/>
+                <a:latin typeface="Arial"/>
+                <a:cs typeface="Arial"/>
               </a:rPr>
               <a:t>Yếu tố nhiễu: mức độ sốc</a:t>
             </a:r>
@@ -10202,8 +10202,8 @@
                 <a:solidFill>
                   <a:srgbClr val="000000"/>
                 </a:solidFill>
-                <a:latin typeface="Segoe UI"/>
-                <a:cs typeface="Segoe UI"/>
+                <a:latin typeface="Arial"/>
+                <a:cs typeface="Arial"/>
               </a:rPr>
               <a:t>Một phần cũng do thuốc</a:t>
             </a:r>
@@ -10247,8 +10247,8 @@
                 <a:solidFill>
                   <a:srgbClr val="FFFFFF"/>
                 </a:solidFill>
-                <a:latin typeface="Segoe UI"/>
-                <a:cs typeface="Segoe UI"/>
+                <a:latin typeface="Arial"/>
+                <a:cs typeface="Arial"/>
               </a:rPr>
               <a:t>THÔNG ĐIỆP CHÍNH   </a:t>
             </a:r>
@@ -10257,8 +10257,8 @@
                 <a:solidFill>
                   <a:srgbClr val="FFFFFF"/>
                 </a:solidFill>
-                <a:latin typeface="Segoe UI"/>
-                <a:cs typeface="Segoe UI"/>
+                <a:latin typeface="Arial"/>
+                <a:cs typeface="Arial"/>
               </a:rPr>
               <a:t>Hỏi: vì sao những BN này nhận phơi nhiễm? Lý do đó có thể là yếu tố nhiễu.</a:t>
             </a:r>
@@ -10295,7 +10295,7 @@
                     <a:lumMod val="50000"/>
                   </a:schemeClr>
                 </a:solidFill>
-                <a:latin typeface="Verdana"/>
+                <a:latin typeface="Arial"/>
               </a:rPr>
               <a:t>Neudata | #ClearDataClearImpact</a:t>
             </a:r>
@@ -10425,8 +10425,8 @@
                 <a:solidFill>
                   <a:srgbClr val="0D7377"/>
                 </a:solidFill>
-                <a:latin typeface="Segoe UI"/>
-                <a:cs typeface="Segoe UI"/>
+                <a:latin typeface="Arial"/>
+                <a:cs typeface="Arial"/>
               </a:rPr>
               <a:t>Yếu tố nhiễu hay thay đổi tác động?</a:t>
             </a:r>
@@ -10516,8 +10516,8 @@
                 <a:solidFill>
                   <a:srgbClr val="595959"/>
                 </a:solidFill>
-                <a:latin typeface="Segoe UI"/>
-                <a:cs typeface="Segoe UI"/>
+                <a:latin typeface="Arial"/>
+                <a:cs typeface="Arial"/>
               </a:rPr>
               <a:t>Số liệu giả định dùng cho giảng dạy</a:t>
             </a:r>
@@ -10561,8 +10561,8 @@
                 <a:solidFill>
                   <a:srgbClr val="FFFFFF"/>
                 </a:solidFill>
-                <a:latin typeface="Segoe UI"/>
-                <a:cs typeface="Segoe UI"/>
+                <a:latin typeface="Arial"/>
+                <a:cs typeface="Arial"/>
               </a:rPr>
               <a:t>THÔNG ĐIỆP CHÍNH   </a:t>
             </a:r>
@@ -10571,8 +10571,8 @@
                 <a:solidFill>
                   <a:srgbClr val="FFFFFF"/>
                 </a:solidFill>
-                <a:latin typeface="Segoe UI"/>
-                <a:cs typeface="Segoe UI"/>
+                <a:latin typeface="Arial"/>
+                <a:cs typeface="Arial"/>
               </a:rPr>
               <a:t>Nhiễu là sai lệch cần loại bỏ; thay đổi tác động là phát hiện cần báo cáo.</a:t>
             </a:r>
@@ -10609,7 +10609,7 @@
                     <a:lumMod val="50000"/>
                   </a:schemeClr>
                 </a:solidFill>
-                <a:latin typeface="Verdana"/>
+                <a:latin typeface="Arial"/>
               </a:rPr>
               <a:t>Neudata | #ClearDataClearImpact</a:t>
             </a:r>
@@ -10739,8 +10739,8 @@
                 <a:solidFill>
                   <a:srgbClr val="0D7377"/>
                 </a:solidFill>
-                <a:latin typeface="Segoe UI"/>
-                <a:cs typeface="Segoe UI"/>
+                <a:latin typeface="Arial"/>
+                <a:cs typeface="Arial"/>
               </a:rPr>
               <a:t>Thiết kế chống lại sai lệch như thế nào</a:t>
             </a:r>
@@ -10806,8 +10806,8 @@
                 <a:solidFill>
                   <a:srgbClr val="595959"/>
                 </a:solidFill>
-                <a:latin typeface="Segoe UI"/>
-                <a:cs typeface="Segoe UI"/>
+                <a:latin typeface="Arial"/>
+                <a:cs typeface="Arial"/>
               </a:rPr>
               <a:t>Xây sự bảo vệ vào thiết kế; sửa phần còn lại trong phân tích.</a:t>
             </a:r>
@@ -10849,8 +10849,8 @@
                 <a:solidFill>
                   <a:srgbClr val="FFFFFF"/>
                 </a:solidFill>
-                <a:latin typeface="Segoe UI"/>
-                <a:cs typeface="Segoe UI"/>
+                <a:latin typeface="Arial"/>
+                <a:cs typeface="Arial"/>
               </a:rPr>
               <a:t>Ngẫu nhiên + che giấu</a:t>
             </a:r>
@@ -10898,8 +10898,8 @@
                 <a:solidFill>
                   <a:srgbClr val="000000"/>
                 </a:solidFill>
-                <a:latin typeface="Segoe UI"/>
-                <a:cs typeface="Segoe UI"/>
+                <a:latin typeface="Arial"/>
+                <a:cs typeface="Arial"/>
               </a:rPr>
               <a:t>May rủi quyết định nhóm</a:t>
             </a:r>
@@ -10919,8 +10919,8 @@
                 <a:solidFill>
                   <a:srgbClr val="000000"/>
                 </a:solidFill>
-                <a:latin typeface="Segoe UI"/>
-                <a:cs typeface="Segoe UI"/>
+                <a:latin typeface="Arial"/>
+                <a:cs typeface="Arial"/>
               </a:rPr>
               <a:t>Cân bằng yếu tố nhiễu đã biết VÀ chưa biết</a:t>
             </a:r>
@@ -10940,8 +10940,8 @@
                 <a:solidFill>
                   <a:srgbClr val="000000"/>
                 </a:solidFill>
-                <a:latin typeface="Segoe UI"/>
-                <a:cs typeface="Segoe UI"/>
+                <a:latin typeface="Arial"/>
+                <a:cs typeface="Arial"/>
               </a:rPr>
               <a:t>Không ai đoán được lần phân bổ kế tiếp</a:t>
             </a:r>
@@ -10983,8 +10983,8 @@
                 <a:solidFill>
                   <a:srgbClr val="FFFFFF"/>
                 </a:solidFill>
-                <a:latin typeface="Segoe UI"/>
-                <a:cs typeface="Segoe UI"/>
+                <a:latin typeface="Arial"/>
+                <a:cs typeface="Arial"/>
               </a:rPr>
               <a:t>Làm mù</a:t>
             </a:r>
@@ -11032,8 +11032,8 @@
                 <a:solidFill>
                   <a:srgbClr val="000000"/>
                 </a:solidFill>
-                <a:latin typeface="Segoe UI"/>
-                <a:cs typeface="Segoe UI"/>
+                <a:latin typeface="Arial"/>
+                <a:cs typeface="Arial"/>
               </a:rPr>
               <a:t>Bệnh nhân, bác sĩ, người đánh giá, người phân tích</a:t>
             </a:r>
@@ -11053,8 +11053,8 @@
                 <a:solidFill>
                   <a:srgbClr val="000000"/>
                 </a:solidFill>
-                <a:latin typeface="Segoe UI"/>
-                <a:cs typeface="Segoe UI"/>
+                <a:latin typeface="Arial"/>
+                <a:cs typeface="Arial"/>
               </a:rPr>
               <a:t>Bảo vệ cách đo kết cục</a:t>
             </a:r>
@@ -11074,8 +11074,8 @@
                 <a:solidFill>
                   <a:srgbClr val="000000"/>
                 </a:solidFill>
-                <a:latin typeface="Segoe UI"/>
-                <a:cs typeface="Segoe UI"/>
+                <a:latin typeface="Arial"/>
+                <a:cs typeface="Arial"/>
               </a:rPr>
               <a:t>Nếu không thể: làm mù người đánh giá</a:t>
             </a:r>
@@ -11117,8 +11117,8 @@
                 <a:solidFill>
                   <a:srgbClr val="FFFFFF"/>
                 </a:solidFill>
-                <a:latin typeface="Segoe UI"/>
-                <a:cs typeface="Segoe UI"/>
+                <a:latin typeface="Arial"/>
+                <a:cs typeface="Arial"/>
               </a:rPr>
               <a:t>Giới hạn, ghép cặp, hiệu chỉnh</a:t>
             </a:r>
@@ -11166,8 +11166,8 @@
                 <a:solidFill>
                   <a:srgbClr val="000000"/>
                 </a:solidFill>
-                <a:latin typeface="Segoe UI"/>
-                <a:cs typeface="Segoe UI"/>
+                <a:latin typeface="Arial"/>
+                <a:cs typeface="Arial"/>
               </a:rPr>
               <a:t>Giới hạn: thu hẹp tiêu chuẩn chọn</a:t>
             </a:r>
@@ -11187,8 +11187,8 @@
                 <a:solidFill>
                   <a:srgbClr val="000000"/>
                 </a:solidFill>
-                <a:latin typeface="Segoe UI"/>
-                <a:cs typeface="Segoe UI"/>
+                <a:latin typeface="Arial"/>
+                <a:cs typeface="Arial"/>
               </a:rPr>
               <a:t>Ghép cặp: ghép BN tương tự</a:t>
             </a:r>
@@ -11208,8 +11208,8 @@
                 <a:solidFill>
                   <a:srgbClr val="000000"/>
                 </a:solidFill>
-                <a:latin typeface="Segoe UI"/>
-                <a:cs typeface="Segoe UI"/>
+                <a:latin typeface="Arial"/>
+                <a:cs typeface="Arial"/>
               </a:rPr>
               <a:t>Hiệu chỉnh: thống kê khi phân tích</a:t>
             </a:r>
@@ -11229,8 +11229,8 @@
                 <a:solidFill>
                   <a:srgbClr val="B23B2E"/>
                 </a:solidFill>
-                <a:latin typeface="Segoe UI"/>
-                <a:cs typeface="Segoe UI"/>
+                <a:latin typeface="Arial"/>
+                <a:cs typeface="Arial"/>
               </a:rPr>
               <a:t>Chỉ với yếu tố nhiễu đã đo</a:t>
             </a:r>
@@ -11274,8 +11274,8 @@
                 <a:solidFill>
                   <a:srgbClr val="FFFFFF"/>
                 </a:solidFill>
-                <a:latin typeface="Segoe UI"/>
-                <a:cs typeface="Segoe UI"/>
+                <a:latin typeface="Arial"/>
+                <a:cs typeface="Arial"/>
               </a:rPr>
               <a:t>THÔNG ĐIỆP CHÍNH   </a:t>
             </a:r>
@@ -11284,8 +11284,8 @@
                 <a:solidFill>
                   <a:srgbClr val="FFFFFF"/>
                 </a:solidFill>
-                <a:latin typeface="Segoe UI"/>
-                <a:cs typeface="Segoe UI"/>
+                <a:latin typeface="Arial"/>
+                <a:cs typeface="Arial"/>
               </a:rPr>
               <a:t>Chỉ phân nhóm ngẫu nhiên bảo vệ trước yếu tố nhiễu chưa từng được đo.</a:t>
             </a:r>
@@ -11322,7 +11322,7 @@
                     <a:lumMod val="50000"/>
                   </a:schemeClr>
                 </a:solidFill>
-                <a:latin typeface="Verdana"/>
+                <a:latin typeface="Arial"/>
               </a:rPr>
               <a:t>Neudata | #ClearDataClearImpact</a:t>
             </a:r>
@@ -11452,8 +11452,8 @@
                 <a:solidFill>
                   <a:srgbClr val="0D7377"/>
                 </a:solidFill>
-                <a:latin typeface="Segoe UI"/>
-                <a:cs typeface="Segoe UI"/>
+                <a:latin typeface="Arial"/>
+                <a:cs typeface="Arial"/>
               </a:rPr>
               <a:t>Ngẫu nhiên hóa cân bằng điều ta biết và điều ta chưa biết</a:t>
             </a:r>
@@ -11549,8 +11549,8 @@
                 <a:solidFill>
                   <a:srgbClr val="FFFFFF"/>
                 </a:solidFill>
-                <a:latin typeface="Segoe UI"/>
-                <a:cs typeface="Segoe UI"/>
+                <a:latin typeface="Arial"/>
+                <a:cs typeface="Arial"/>
               </a:rPr>
               <a:t>THÔNG ĐIỆP CHÍNH   </a:t>
             </a:r>
@@ -11559,8 +11559,8 @@
                 <a:solidFill>
                   <a:srgbClr val="FFFFFF"/>
                 </a:solidFill>
-                <a:latin typeface="Segoe UI"/>
-                <a:cs typeface="Segoe UI"/>
+                <a:latin typeface="Arial"/>
+                <a:cs typeface="Arial"/>
               </a:rPr>
               <a:t>Nhờ may rủi, hai nhóm có thành phần tương tự, kể cả yếu tố chưa ai đo.</a:t>
             </a:r>
@@ -11597,7 +11597,7 @@
                     <a:lumMod val="50000"/>
                   </a:schemeClr>
                 </a:solidFill>
-                <a:latin typeface="Verdana"/>
+                <a:latin typeface="Arial"/>
               </a:rPr>
               <a:t>Neudata | #ClearDataClearImpact</a:t>
             </a:r>
@@ -11727,8 +11727,8 @@
                 <a:solidFill>
                   <a:srgbClr val="0D7377"/>
                 </a:solidFill>
-                <a:latin typeface="Segoe UI"/>
-                <a:cs typeface="Segoe UI"/>
+                <a:latin typeface="Arial"/>
+                <a:cs typeface="Arial"/>
               </a:rPr>
               <a:t>Che giấu phân bổ trước, làm mù sau</a:t>
             </a:r>
@@ -11824,8 +11824,8 @@
                 <a:solidFill>
                   <a:srgbClr val="FFFFFF"/>
                 </a:solidFill>
-                <a:latin typeface="Segoe UI"/>
-                <a:cs typeface="Segoe UI"/>
+                <a:latin typeface="Arial"/>
+                <a:cs typeface="Arial"/>
               </a:rPr>
               <a:t>THÔNG ĐIỆP CHÍNH   </a:t>
             </a:r>
@@ -11834,8 +11834,8 @@
                 <a:solidFill>
                   <a:srgbClr val="FFFFFF"/>
                 </a:solidFill>
-                <a:latin typeface="Segoe UI"/>
-                <a:cs typeface="Segoe UI"/>
+                <a:latin typeface="Arial"/>
+                <a:cs typeface="Arial"/>
               </a:rPr>
               <a:t>Che giấu bảo vệ AI được đưa vào; làm mù bảo vệ CÁCH đo kết cục.</a:t>
             </a:r>
@@ -11872,7 +11872,7 @@
                     <a:lumMod val="50000"/>
                   </a:schemeClr>
                 </a:solidFill>
-                <a:latin typeface="Verdana"/>
+                <a:latin typeface="Arial"/>
               </a:rPr>
               <a:t>Neudata | #ClearDataClearImpact</a:t>
             </a:r>
@@ -12002,8 +12002,8 @@
                 <a:solidFill>
                   <a:srgbClr val="0D7377"/>
                 </a:solidFill>
-                <a:latin typeface="Segoe UI"/>
-                <a:cs typeface="Segoe UI"/>
+                <a:latin typeface="Arial"/>
+                <a:cs typeface="Arial"/>
               </a:rPr>
               <a:t>Ghép cặp có ích, nhưng chỉ với điều đã được đo</a:t>
             </a:r>
@@ -12099,8 +12099,8 @@
                 <a:solidFill>
                   <a:srgbClr val="FFFFFF"/>
                 </a:solidFill>
-                <a:latin typeface="Segoe UI"/>
-                <a:cs typeface="Segoe UI"/>
+                <a:latin typeface="Arial"/>
+                <a:cs typeface="Arial"/>
               </a:rPr>
               <a:t>THÔNG ĐIỆP CHÍNH   </a:t>
             </a:r>
@@ -12109,8 +12109,8 @@
                 <a:solidFill>
                   <a:srgbClr val="FFFFFF"/>
                 </a:solidFill>
-                <a:latin typeface="Segoe UI"/>
-                <a:cs typeface="Segoe UI"/>
+                <a:latin typeface="Arial"/>
+                <a:cs typeface="Arial"/>
               </a:rPr>
               <a:t>Ghép cặp và hiệu chỉnh không cân bằng được điều không ai ghi lại.</a:t>
             </a:r>
@@ -12147,7 +12147,7 @@
                     <a:lumMod val="50000"/>
                   </a:schemeClr>
                 </a:solidFill>
-                <a:latin typeface="Verdana"/>
+                <a:latin typeface="Arial"/>
               </a:rPr>
               <a:t>Neudata | #ClearDataClearImpact</a:t>
             </a:r>
@@ -12277,8 +12277,8 @@
                 <a:solidFill>
                   <a:srgbClr val="0D7377"/>
                 </a:solidFill>
-                <a:latin typeface="Segoe UI"/>
-                <a:cs typeface="Segoe UI"/>
+                <a:latin typeface="Arial"/>
+                <a:cs typeface="Arial"/>
               </a:rPr>
               <a:t>Giá trị nội tại trước, rồi đến giá trị ngoại suy</a:t>
             </a:r>
@@ -12374,8 +12374,8 @@
                 <a:solidFill>
                   <a:srgbClr val="FFFFFF"/>
                 </a:solidFill>
-                <a:latin typeface="Segoe UI"/>
-                <a:cs typeface="Segoe UI"/>
+                <a:latin typeface="Arial"/>
+                <a:cs typeface="Arial"/>
               </a:rPr>
               <a:t>THÔNG ĐIỆP CHÍNH   </a:t>
             </a:r>
@@ -12384,8 +12384,8 @@
                 <a:solidFill>
                   <a:srgbClr val="FFFFFF"/>
                 </a:solidFill>
-                <a:latin typeface="Segoe UI"/>
-                <a:cs typeface="Segoe UI"/>
+                <a:latin typeface="Arial"/>
+                <a:cs typeface="Arial"/>
               </a:rPr>
               <a:t>Trước hết: đúng với người được nghiên cứu? Sau đó: có áp dụng cho BN của tôi?</a:t>
             </a:r>
@@ -12422,7 +12422,7 @@
                     <a:lumMod val="50000"/>
                   </a:schemeClr>
                 </a:solidFill>
-                <a:latin typeface="Verdana"/>
+                <a:latin typeface="Arial"/>
               </a:rPr>
               <a:t>Neudata | #ClearDataClearImpact</a:t>
             </a:r>
@@ -12552,8 +12552,8 @@
                 <a:solidFill>
                   <a:srgbClr val="0D7377"/>
                 </a:solidFill>
-                <a:latin typeface="Segoe UI"/>
-                <a:cs typeface="Segoe UI"/>
+                <a:latin typeface="Arial"/>
+                <a:cs typeface="Arial"/>
               </a:rPr>
               <a:t>Nhân quả ngược: cái nào có trước?</a:t>
             </a:r>
@@ -12649,8 +12649,8 @@
                 <a:solidFill>
                   <a:srgbClr val="FFFFFF"/>
                 </a:solidFill>
-                <a:latin typeface="Segoe UI"/>
-                <a:cs typeface="Segoe UI"/>
+                <a:latin typeface="Arial"/>
+                <a:cs typeface="Arial"/>
               </a:rPr>
               <a:t>THÔNG ĐIỆP CHÍNH   </a:t>
             </a:r>
@@ -12659,8 +12659,8 @@
                 <a:solidFill>
                   <a:srgbClr val="FFFFFF"/>
                 </a:solidFill>
-                <a:latin typeface="Segoe UI"/>
-                <a:cs typeface="Segoe UI"/>
+                <a:latin typeface="Arial"/>
+                <a:cs typeface="Arial"/>
               </a:rPr>
               <a:t>Trước khi nói X gây ra Y, hãy chắc rằng Y không gây ra X.</a:t>
             </a:r>
@@ -12697,7 +12697,7 @@
                     <a:lumMod val="50000"/>
                   </a:schemeClr>
                 </a:solidFill>
-                <a:latin typeface="Verdana"/>
+                <a:latin typeface="Arial"/>
               </a:rPr>
               <a:t>Neudata | #ClearDataClearImpact</a:t>
             </a:r>
@@ -12827,8 +12827,8 @@
                 <a:solidFill>
                   <a:srgbClr val="0D7377"/>
                 </a:solidFill>
-                <a:latin typeface="Segoe UI"/>
-                <a:cs typeface="Segoe UI"/>
+                <a:latin typeface="Arial"/>
+                <a:cs typeface="Arial"/>
               </a:rPr>
               <a:t>Từ liên quan đến nhân quả: Bradford Hill bằng hình ảnh</a:t>
             </a:r>
@@ -12924,8 +12924,8 @@
                 <a:solidFill>
                   <a:srgbClr val="FFFFFF"/>
                 </a:solidFill>
-                <a:latin typeface="Segoe UI"/>
-                <a:cs typeface="Segoe UI"/>
+                <a:latin typeface="Arial"/>
+                <a:cs typeface="Arial"/>
               </a:rPr>
               <a:t>THÔNG ĐIỆP CHÍNH   </a:t>
             </a:r>
@@ -12934,8 +12934,8 @@
                 <a:solidFill>
                   <a:srgbClr val="FFFFFF"/>
                 </a:solidFill>
-                <a:latin typeface="Segoe UI"/>
-                <a:cs typeface="Segoe UI"/>
+                <a:latin typeface="Arial"/>
+                <a:cs typeface="Arial"/>
               </a:rPr>
               <a:t>Nhân quả là nhận định từ nhiều manh mối; trình tự thời gian là điều bắt buộc duy nhất.</a:t>
             </a:r>
@@ -12972,7 +12972,7 @@
                     <a:lumMod val="50000"/>
                   </a:schemeClr>
                 </a:solidFill>
-                <a:latin typeface="Verdana"/>
+                <a:latin typeface="Arial"/>
               </a:rPr>
               <a:t>Neudata | #ClearDataClearImpact</a:t>
             </a:r>
@@ -13102,8 +13102,8 @@
                 <a:solidFill>
                   <a:srgbClr val="0D7377"/>
                 </a:solidFill>
-                <a:latin typeface="Segoe UI"/>
-                <a:cs typeface="Segoe UI"/>
+                <a:latin typeface="Arial"/>
+                <a:cs typeface="Arial"/>
               </a:rPr>
               <a:t>Ôn tập: ba câu hỏi về Buổi 3</a:t>
             </a:r>
@@ -13173,8 +13173,8 @@
                 <a:solidFill>
                   <a:srgbClr val="FFFFFF"/>
                 </a:solidFill>
-                <a:latin typeface="Segoe UI"/>
-                <a:cs typeface="Segoe UI"/>
+                <a:latin typeface="Arial"/>
+                <a:cs typeface="Arial"/>
               </a:rPr>
               <a:t>CÂU HỎI NHANH   |   10 phút</a:t>
             </a:r>
@@ -13211,25 +13211,19 @@
               <a:spcBef>
                 <a:spcPts val="450"/>
               </a:spcBef>
-              <a:buNone/>
-            </a:pPr>
-            <a:r>
-              <a:rPr lang="en-US" sz="1650" b="1" dirty="0">
-                <a:solidFill>
-                  <a:srgbClr val="6C3483"/>
-                </a:solidFill>
-                <a:latin typeface="Segoe UI"/>
-                <a:cs typeface="Segoe UI"/>
-              </a:rPr>
-              <a:t>1.  </a:t>
-            </a:r>
+              <a:buClr>
+                <a:srgbClr val="6C3483"/>
+              </a:buClr>
+              <a:buFont typeface="Arial"/>
+              <a:buChar char="•"/>
+            </a:pPr>
             <a:r>
               <a:rPr lang="en-US" sz="1650" dirty="0">
                 <a:solidFill>
                   <a:srgbClr val="000000"/>
                 </a:solidFill>
-                <a:latin typeface="Segoe UI"/>
-                <a:cs typeface="Segoe UI"/>
+                <a:latin typeface="Arial"/>
+                <a:cs typeface="Arial"/>
               </a:rPr>
               <a:t>C1. BN ICU mê sảng được so sánh với BN không mê sảng về việc dùng benzodiazepine trước đó. Thiết kế?</a:t>
             </a:r>
@@ -13242,25 +13236,19 @@
               <a:spcBef>
                 <a:spcPts val="450"/>
               </a:spcBef>
-              <a:buNone/>
-            </a:pPr>
-            <a:r>
-              <a:rPr lang="en-US" sz="1650" b="1" dirty="0">
-                <a:solidFill>
-                  <a:srgbClr val="6C3483"/>
-                </a:solidFill>
-                <a:latin typeface="Segoe UI"/>
-                <a:cs typeface="Segoe UI"/>
-              </a:rPr>
-              <a:t>2.  </a:t>
-            </a:r>
+              <a:buClr>
+                <a:srgbClr val="6C3483"/>
+              </a:buClr>
+              <a:buFont typeface="Arial"/>
+              <a:buChar char="•"/>
+            </a:pPr>
             <a:r>
               <a:rPr lang="en-US" sz="1650" dirty="0">
                 <a:solidFill>
                   <a:srgbClr val="000000"/>
                 </a:solidFill>
-                <a:latin typeface="Segoe UI"/>
-                <a:cs typeface="Segoe UI"/>
+                <a:latin typeface="Arial"/>
+                <a:cs typeface="Arial"/>
               </a:rPr>
               <a:t>C2. Thiết kế nào phân nhóm ngẫu nhiên cả khoa thay vì từng bệnh nhân?</a:t>
             </a:r>
@@ -13273,25 +13261,19 @@
               <a:spcBef>
                 <a:spcPts val="450"/>
               </a:spcBef>
-              <a:buNone/>
-            </a:pPr>
-            <a:r>
-              <a:rPr lang="en-US" sz="1650" b="1" dirty="0">
-                <a:solidFill>
-                  <a:srgbClr val="6C3483"/>
-                </a:solidFill>
-                <a:latin typeface="Segoe UI"/>
-                <a:cs typeface="Segoe UI"/>
-              </a:rPr>
-              <a:t>3.  </a:t>
-            </a:r>
+              <a:buClr>
+                <a:srgbClr val="6C3483"/>
+              </a:buClr>
+              <a:buFont typeface="Arial"/>
+              <a:buChar char="•"/>
+            </a:pPr>
             <a:r>
               <a:rPr lang="en-US" sz="1650" dirty="0">
                 <a:solidFill>
                   <a:srgbClr val="000000"/>
                 </a:solidFill>
-                <a:latin typeface="Segoe UI"/>
-                <a:cs typeface="Segoe UI"/>
+                <a:latin typeface="Arial"/>
+                <a:cs typeface="Arial"/>
               </a:rPr>
               <a:t>C3. Chiến lược mới vs cũ, hiệu số tử vong KTC 95% -1 đến +3 điểm; ngưỡng +4 điểm. Kết quả?</a:t>
             </a:r>
@@ -13304,25 +13286,19 @@
               <a:spcBef>
                 <a:spcPts val="450"/>
               </a:spcBef>
-              <a:buNone/>
-            </a:pPr>
-            <a:r>
-              <a:rPr lang="en-US" sz="1650" b="1" dirty="0">
-                <a:solidFill>
-                  <a:srgbClr val="6C3483"/>
-                </a:solidFill>
-                <a:latin typeface="Segoe UI"/>
-                <a:cs typeface="Segoe UI"/>
-              </a:rPr>
-              <a:t>4.  </a:t>
-            </a:r>
+              <a:buClr>
+                <a:srgbClr val="6C3483"/>
+              </a:buClr>
+              <a:buFont typeface="Arial"/>
+              <a:buChar char="•"/>
+            </a:pPr>
             <a:r>
               <a:rPr lang="en-US" sz="1650" dirty="0">
                 <a:solidFill>
                   <a:srgbClr val="000000"/>
                 </a:solidFill>
-                <a:latin typeface="Segoe UI"/>
-                <a:cs typeface="Segoe UI"/>
+                <a:latin typeface="Arial"/>
+                <a:cs typeface="Arial"/>
               </a:rPr>
               <a:t>Các nhóm: đọc lại Phần 2a của đề cương (thiết kế, bối cảnh, đối tượng): 2 phút</a:t>
             </a:r>
@@ -13366,8 +13342,8 @@
                 <a:solidFill>
                   <a:srgbClr val="6C3483"/>
                 </a:solidFill>
-                <a:latin typeface="Segoe UI"/>
-                <a:cs typeface="Segoe UI"/>
+                <a:latin typeface="Arial"/>
+                <a:cs typeface="Arial"/>
               </a:rPr>
               <a:t>Cách thực hiện</a:t>
             </a:r>
@@ -13388,8 +13364,8 @@
                 <a:solidFill>
                   <a:srgbClr val="000000"/>
                 </a:solidFill>
-                <a:latin typeface="Segoe UI"/>
-                <a:cs typeface="Segoe UI"/>
+                <a:latin typeface="Arial"/>
+                <a:cs typeface="Arial"/>
               </a:rPr>
               <a:t>Tự trả lời trước</a:t>
             </a:r>
@@ -13410,8 +13386,8 @@
                 <a:solidFill>
                   <a:srgbClr val="000000"/>
                 </a:solidFill>
-                <a:latin typeface="Segoe UI"/>
-                <a:cs typeface="Segoe UI"/>
+                <a:latin typeface="Arial"/>
+                <a:cs typeface="Arial"/>
               </a:rPr>
               <a:t>Giơ tay, rồi công bố đáp án</a:t>
             </a:r>
@@ -13432,8 +13408,8 @@
                 <a:solidFill>
                   <a:srgbClr val="000000"/>
                 </a:solidFill>
-                <a:latin typeface="Segoe UI"/>
-                <a:cs typeface="Segoe UI"/>
+                <a:latin typeface="Arial"/>
+                <a:cs typeface="Arial"/>
               </a:rPr>
               <a:t>Mời một người giải thích</a:t>
             </a:r>
@@ -13479,8 +13455,8 @@
                 <a:solidFill>
                   <a:srgbClr val="6C3483"/>
                 </a:solidFill>
-                <a:latin typeface="Segoe UI"/>
-                <a:cs typeface="Segoe UI"/>
+                <a:latin typeface="Arial"/>
+                <a:cs typeface="Arial"/>
               </a:rPr>
               <a:t>SẢN PHẨM   </a:t>
             </a:r>
@@ -13489,8 +13465,8 @@
                 <a:solidFill>
                   <a:srgbClr val="000000"/>
                 </a:solidFill>
-                <a:latin typeface="Segoe UI"/>
-                <a:cs typeface="Segoe UI"/>
+                <a:latin typeface="Arial"/>
+                <a:cs typeface="Arial"/>
               </a:rPr>
               <a:t>Phần 2a của mỗi nhóm được đọc lại, sẵn sàng làm tiếp</a:t>
             </a:r>
@@ -13527,7 +13503,7 @@
                     <a:lumMod val="50000"/>
                   </a:schemeClr>
                 </a:solidFill>
-                <a:latin typeface="Verdana"/>
+                <a:latin typeface="Arial"/>
               </a:rPr>
               <a:t>Neudata | #ClearDataClearImpact</a:t>
             </a:r>
@@ -13657,8 +13633,8 @@
                 <a:solidFill>
                   <a:srgbClr val="0D7377"/>
                 </a:solidFill>
-                <a:latin typeface="Segoe UI"/>
-                <a:cs typeface="Segoe UI"/>
+                <a:latin typeface="Arial"/>
+                <a:cs typeface="Arial"/>
               </a:rPr>
               <a:t>Câu hỏi nhanh: Phát hiện sai lệch</a:t>
             </a:r>
@@ -13728,8 +13704,8 @@
                 <a:solidFill>
                   <a:srgbClr val="FFFFFF"/>
                 </a:solidFill>
-                <a:latin typeface="Segoe UI"/>
-                <a:cs typeface="Segoe UI"/>
+                <a:latin typeface="Arial"/>
+                <a:cs typeface="Arial"/>
               </a:rPr>
               <a:t>CÂU HỎI NHANH   |   4 phút</a:t>
             </a:r>
@@ -13766,25 +13742,19 @@
               <a:spcBef>
                 <a:spcPts val="450"/>
               </a:spcBef>
-              <a:buNone/>
-            </a:pPr>
-            <a:r>
-              <a:rPr lang="en-US" sz="1650" b="1" dirty="0">
-                <a:solidFill>
-                  <a:srgbClr val="6C3483"/>
-                </a:solidFill>
-                <a:latin typeface="Segoe UI"/>
-                <a:cs typeface="Segoe UI"/>
-              </a:rPr>
-              <a:t>1.  </a:t>
-            </a:r>
+              <a:buClr>
+                <a:srgbClr val="6C3483"/>
+              </a:buClr>
+              <a:buFont typeface="Arial"/>
+              <a:buChar char="•"/>
+            </a:pPr>
             <a:r>
               <a:rPr lang="en-US" sz="1650" dirty="0">
                 <a:solidFill>
                   <a:srgbClr val="000000"/>
                 </a:solidFill>
-                <a:latin typeface="Segoe UI"/>
-                <a:cs typeface="Segoe UI"/>
+                <a:latin typeface="Arial"/>
+                <a:cs typeface="Arial"/>
               </a:rPr>
               <a:t>Mẹ của trẻ dị tật bẩm sinh nhớ thuốc dùng khi mang thai rõ hơn các bà mẹ khác</a:t>
             </a:r>
@@ -13797,25 +13767,19 @@
               <a:spcBef>
                 <a:spcPts val="450"/>
               </a:spcBef>
-              <a:buNone/>
-            </a:pPr>
-            <a:r>
-              <a:rPr lang="en-US" sz="1650" b="1" dirty="0">
-                <a:solidFill>
-                  <a:srgbClr val="6C3483"/>
-                </a:solidFill>
-                <a:latin typeface="Segoe UI"/>
-                <a:cs typeface="Segoe UI"/>
-              </a:rPr>
-              <a:t>2.  </a:t>
-            </a:r>
+              <a:buClr>
+                <a:srgbClr val="6C3483"/>
+              </a:buClr>
+              <a:buFont typeface="Arial"/>
+              <a:buChar char="•"/>
+            </a:pPr>
             <a:r>
               <a:rPr lang="en-US" sz="1650" dirty="0">
                 <a:solidFill>
                   <a:srgbClr val="000000"/>
                 </a:solidFill>
-                <a:latin typeface="Segoe UI"/>
-                <a:cs typeface="Segoe UI"/>
+                <a:latin typeface="Arial"/>
+                <a:cs typeface="Arial"/>
               </a:rPr>
               <a:t>Điều dưỡng nghiên cứu biết nhóm chấm điểm 'đủ điều kiện ra viện'</a:t>
             </a:r>
@@ -13828,25 +13792,19 @@
               <a:spcBef>
                 <a:spcPts val="450"/>
               </a:spcBef>
-              <a:buNone/>
-            </a:pPr>
-            <a:r>
-              <a:rPr lang="en-US" sz="1650" b="1" dirty="0">
-                <a:solidFill>
-                  <a:srgbClr val="6C3483"/>
-                </a:solidFill>
-                <a:latin typeface="Segoe UI"/>
-                <a:cs typeface="Segoe UI"/>
-              </a:rPr>
-              <a:t>3.  </a:t>
-            </a:r>
+              <a:buClr>
+                <a:srgbClr val="6C3483"/>
+              </a:buClr>
+              <a:buFont typeface="Arial"/>
+              <a:buChar char="•"/>
+            </a:pPr>
             <a:r>
               <a:rPr lang="en-US" sz="1650" dirty="0">
                 <a:solidFill>
                   <a:srgbClr val="000000"/>
                 </a:solidFill>
-                <a:latin typeface="Segoe UI"/>
-                <a:cs typeface="Segoe UI"/>
+                <a:latin typeface="Arial"/>
+                <a:cs typeface="Arial"/>
               </a:rPr>
               <a:t>Khảo sát chất lượng sống sau ICU chỉ tuyển người đến tái khám</a:t>
             </a:r>
@@ -13859,25 +13817,19 @@
               <a:spcBef>
                 <a:spcPts val="450"/>
               </a:spcBef>
-              <a:buNone/>
-            </a:pPr>
-            <a:r>
-              <a:rPr lang="en-US" sz="1650" b="1" dirty="0">
-                <a:solidFill>
-                  <a:srgbClr val="6C3483"/>
-                </a:solidFill>
-                <a:latin typeface="Segoe UI"/>
-                <a:cs typeface="Segoe UI"/>
-              </a:rPr>
-              <a:t>4.  </a:t>
-            </a:r>
+              <a:buClr>
+                <a:srgbClr val="6C3483"/>
+              </a:buClr>
+              <a:buFont typeface="Arial"/>
+              <a:buChar char="•"/>
+            </a:pPr>
             <a:r>
               <a:rPr lang="en-US" sz="1650" dirty="0">
                 <a:solidFill>
                   <a:srgbClr val="000000"/>
                 </a:solidFill>
-                <a:latin typeface="Segoe UI"/>
-                <a:cs typeface="Segoe UI"/>
+                <a:latin typeface="Arial"/>
+                <a:cs typeface="Arial"/>
               </a:rPr>
               <a:t>BN có lactate cao được truyền nhiều dịch hơn và tử vong nhiều hơn</a:t>
             </a:r>
@@ -13921,8 +13873,8 @@
                 <a:solidFill>
                   <a:srgbClr val="6C3483"/>
                 </a:solidFill>
-                <a:latin typeface="Segoe UI"/>
-                <a:cs typeface="Segoe UI"/>
+                <a:latin typeface="Arial"/>
+                <a:cs typeface="Arial"/>
               </a:rPr>
               <a:t>Chọn một</a:t>
             </a:r>
@@ -13943,8 +13895,8 @@
                 <a:solidFill>
                   <a:srgbClr val="000000"/>
                 </a:solidFill>
-                <a:latin typeface="Segoe UI"/>
-                <a:cs typeface="Segoe UI"/>
+                <a:latin typeface="Arial"/>
+                <a:cs typeface="Arial"/>
               </a:rPr>
               <a:t>Sai lệch chọn lựa</a:t>
             </a:r>
@@ -13965,8 +13917,8 @@
                 <a:solidFill>
                   <a:srgbClr val="000000"/>
                 </a:solidFill>
-                <a:latin typeface="Segoe UI"/>
-                <a:cs typeface="Segoe UI"/>
+                <a:latin typeface="Arial"/>
+                <a:cs typeface="Arial"/>
               </a:rPr>
               <a:t>Sai lệch nhớ lại</a:t>
             </a:r>
@@ -13987,8 +13939,8 @@
                 <a:solidFill>
                   <a:srgbClr val="000000"/>
                 </a:solidFill>
-                <a:latin typeface="Segoe UI"/>
-                <a:cs typeface="Segoe UI"/>
+                <a:latin typeface="Arial"/>
+                <a:cs typeface="Arial"/>
               </a:rPr>
               <a:t>Sai lệch người quan sát</a:t>
             </a:r>
@@ -14009,8 +13961,8 @@
                 <a:solidFill>
                   <a:srgbClr val="000000"/>
                 </a:solidFill>
-                <a:latin typeface="Segoe UI"/>
-                <a:cs typeface="Segoe UI"/>
+                <a:latin typeface="Arial"/>
+                <a:cs typeface="Arial"/>
               </a:rPr>
               <a:t>Yếu tố nhiễu</a:t>
             </a:r>
@@ -14056,8 +14008,8 @@
                 <a:solidFill>
                   <a:srgbClr val="6C3483"/>
                 </a:solidFill>
-                <a:latin typeface="Segoe UI"/>
-                <a:cs typeface="Segoe UI"/>
+                <a:latin typeface="Arial"/>
+                <a:cs typeface="Arial"/>
               </a:rPr>
               <a:t>SẢN PHẨM   </a:t>
             </a:r>
@@ -14066,8 +14018,8 @@
                 <a:solidFill>
                   <a:srgbClr val="000000"/>
                 </a:solidFill>
-                <a:latin typeface="Segoe UI"/>
-                <a:cs typeface="Segoe UI"/>
+                <a:latin typeface="Arial"/>
+                <a:cs typeface="Arial"/>
               </a:rPr>
               <a:t>Mỗi tình huống: gọi tên một sai lệch và một cách khắc phục</a:t>
             </a:r>
@@ -14104,7 +14056,7 @@
                     <a:lumMod val="50000"/>
                   </a:schemeClr>
                 </a:solidFill>
-                <a:latin typeface="Verdana"/>
+                <a:latin typeface="Arial"/>
               </a:rPr>
               <a:t>Neudata | #ClearDataClearImpact</a:t>
             </a:r>
@@ -14234,8 +14186,8 @@
                 <a:solidFill>
                   <a:srgbClr val="0D7377"/>
                 </a:solidFill>
-                <a:latin typeface="Segoe UI"/>
-                <a:cs typeface="Segoe UI"/>
+                <a:latin typeface="Arial"/>
+                <a:cs typeface="Arial"/>
               </a:rPr>
               <a:t>4.2  Đo lường bệnh và mối liên quan</a:t>
             </a:r>
@@ -14304,8 +14256,8 @@
                 <a:solidFill>
                   <a:srgbClr val="0D7377"/>
                 </a:solidFill>
-                <a:latin typeface="Segoe UI"/>
-                <a:cs typeface="Segoe UI"/>
+                <a:latin typeface="Arial"/>
+                <a:cs typeface="Arial"/>
               </a:rPr>
               <a:t>Phổ biến đến đâu? Khả năng cao hơn bao nhiêu?</a:t>
             </a:r>
@@ -14322,8 +14274,8 @@
                 <a:solidFill>
                   <a:srgbClr val="595959"/>
                 </a:solidFill>
-                <a:latin typeface="Segoe UI"/>
-                <a:cs typeface="Segoe UI"/>
+                <a:latin typeface="Arial"/>
+                <a:cs typeface="Arial"/>
               </a:rPr>
               <a:t>Hiện mắc, mới mắc, nguy cơ, và bảng 2x2 đằng sau RR, OR, RD và NNT. (30 phút)</a:t>
             </a:r>
@@ -14360,7 +14312,7 @@
                     <a:lumMod val="50000"/>
                   </a:schemeClr>
                 </a:solidFill>
-                <a:latin typeface="Verdana"/>
+                <a:latin typeface="Arial"/>
               </a:rPr>
               <a:t>Neudata | #ClearDataClearImpact</a:t>
             </a:r>
@@ -14490,8 +14442,8 @@
                 <a:solidFill>
                   <a:srgbClr val="0D7377"/>
                 </a:solidFill>
-                <a:latin typeface="Segoe UI"/>
-                <a:cs typeface="Segoe UI"/>
+                <a:latin typeface="Arial"/>
+                <a:cs typeface="Arial"/>
               </a:rPr>
               <a:t>Hiện mắc và mới mắc: hình ảnh bồn tắm</a:t>
             </a:r>
@@ -14587,8 +14539,8 @@
                 <a:solidFill>
                   <a:srgbClr val="FFFFFF"/>
                 </a:solidFill>
-                <a:latin typeface="Segoe UI"/>
-                <a:cs typeface="Segoe UI"/>
+                <a:latin typeface="Arial"/>
+                <a:cs typeface="Arial"/>
               </a:rPr>
               <a:t>THÔNG ĐIỆP CHÍNH   </a:t>
             </a:r>
@@ -14597,8 +14549,8 @@
                 <a:solidFill>
                   <a:srgbClr val="FFFFFF"/>
                 </a:solidFill>
-                <a:latin typeface="Segoe UI"/>
-                <a:cs typeface="Segoe UI"/>
+                <a:latin typeface="Arial"/>
+                <a:cs typeface="Arial"/>
               </a:rPr>
               <a:t>Hiện mắc = bao nhiêu người đang mắc; mới mắc = bao nhiêu ca mới theo thời gian.</a:t>
             </a:r>
@@ -14635,7 +14587,7 @@
                     <a:lumMod val="50000"/>
                   </a:schemeClr>
                 </a:solidFill>
-                <a:latin typeface="Verdana"/>
+                <a:latin typeface="Arial"/>
               </a:rPr>
               <a:t>Neudata | #ClearDataClearImpact</a:t>
             </a:r>
@@ -14765,8 +14717,8 @@
                 <a:solidFill>
                   <a:srgbClr val="0D7377"/>
                 </a:solidFill>
-                <a:latin typeface="Segoe UI"/>
-                <a:cs typeface="Segoe UI"/>
+                <a:latin typeface="Arial"/>
+                <a:cs typeface="Arial"/>
               </a:rPr>
               <a:t>Nguy cơ ở hai nhóm, bằng hình ảnh</a:t>
             </a:r>
@@ -14856,8 +14808,8 @@
                 <a:solidFill>
                   <a:srgbClr val="595959"/>
                 </a:solidFill>
-                <a:latin typeface="Segoe UI"/>
-                <a:cs typeface="Segoe UI"/>
+                <a:latin typeface="Arial"/>
+                <a:cs typeface="Arial"/>
               </a:rPr>
               <a:t>Thử nghiệm giả định dùng cho giảng dạy: 100 bệnh nhân mỗi nhóm</a:t>
             </a:r>
@@ -14901,8 +14853,8 @@
                 <a:solidFill>
                   <a:srgbClr val="FFFFFF"/>
                 </a:solidFill>
-                <a:latin typeface="Segoe UI"/>
-                <a:cs typeface="Segoe UI"/>
+                <a:latin typeface="Arial"/>
+                <a:cs typeface="Arial"/>
               </a:rPr>
               <a:t>THÔNG ĐIỆP CHÍNH   </a:t>
             </a:r>
@@ -14911,8 +14863,8 @@
                 <a:solidFill>
                   <a:srgbClr val="FFFFFF"/>
                 </a:solidFill>
-                <a:latin typeface="Segoe UI"/>
-                <a:cs typeface="Segoe UI"/>
+                <a:latin typeface="Arial"/>
+                <a:cs typeface="Arial"/>
               </a:rPr>
               <a:t>Nguy cơ = số người có kết cục / số người trong nhóm.</a:t>
             </a:r>
@@ -14949,7 +14901,7 @@
                     <a:lumMod val="50000"/>
                   </a:schemeClr>
                 </a:solidFill>
-                <a:latin typeface="Verdana"/>
+                <a:latin typeface="Arial"/>
               </a:rPr>
               <a:t>Neudata | #ClearDataClearImpact</a:t>
             </a:r>
@@ -15079,8 +15031,8 @@
                 <a:solidFill>
                   <a:srgbClr val="0D7377"/>
                 </a:solidFill>
-                <a:latin typeface="Segoe UI"/>
-                <a:cs typeface="Segoe UI"/>
+                <a:latin typeface="Arial"/>
+                <a:cs typeface="Arial"/>
               </a:rPr>
               <a:t>Bảng 2x2: một công cụ cho mọi số đo</a:t>
             </a:r>
@@ -15176,8 +15128,8 @@
                 <a:solidFill>
                   <a:srgbClr val="FFFFFF"/>
                 </a:solidFill>
-                <a:latin typeface="Segoe UI"/>
-                <a:cs typeface="Segoe UI"/>
+                <a:latin typeface="Arial"/>
+                <a:cs typeface="Arial"/>
               </a:rPr>
               <a:t>THÔNG ĐIỆP CHÍNH   </a:t>
             </a:r>
@@ -15186,8 +15138,8 @@
                 <a:solidFill>
                   <a:srgbClr val="FFFFFF"/>
                 </a:solidFill>
-                <a:latin typeface="Segoe UI"/>
-                <a:cs typeface="Segoe UI"/>
+                <a:latin typeface="Arial"/>
+                <a:cs typeface="Arial"/>
               </a:rPr>
               <a:t>Phơi nhiễm ở hàng, kết cục ở cột: a, b, c, d.</a:t>
             </a:r>
@@ -15224,7 +15176,7 @@
                     <a:lumMod val="50000"/>
                   </a:schemeClr>
                 </a:solidFill>
-                <a:latin typeface="Verdana"/>
+                <a:latin typeface="Arial"/>
               </a:rPr>
               <a:t>Neudata | #ClearDataClearImpact</a:t>
             </a:r>
@@ -15354,8 +15306,8 @@
                 <a:solidFill>
                   <a:srgbClr val="0D7377"/>
                 </a:solidFill>
-                <a:latin typeface="Segoe UI"/>
-                <a:cs typeface="Segoe UI"/>
+                <a:latin typeface="Arial"/>
+                <a:cs typeface="Arial"/>
               </a:rPr>
               <a:t>Bốn số đo từ một bảng 2x2</a:t>
             </a:r>
@@ -15421,8 +15373,8 @@
                 <a:solidFill>
                   <a:srgbClr val="595959"/>
                 </a:solidFill>
-                <a:latin typeface="Segoe UI"/>
-                <a:cs typeface="Segoe UI"/>
+                <a:latin typeface="Arial"/>
+                <a:cs typeface="Arial"/>
               </a:rPr>
               <a:t>Ví dụ: hạn chế dịch 20/100 tử vong, thường quy 30/100 tử vong</a:t>
             </a:r>
@@ -15464,8 +15416,8 @@
                 <a:solidFill>
                   <a:srgbClr val="FFFFFF"/>
                 </a:solidFill>
-                <a:latin typeface="Segoe UI"/>
-                <a:cs typeface="Segoe UI"/>
+                <a:latin typeface="Arial"/>
+                <a:cs typeface="Arial"/>
               </a:rPr>
               <a:t>Tỷ số nguy cơ (RR)</a:t>
             </a:r>
@@ -15513,8 +15465,8 @@
                 <a:solidFill>
                   <a:srgbClr val="000000"/>
                 </a:solidFill>
-                <a:latin typeface="Segoe UI"/>
-                <a:cs typeface="Segoe UI"/>
+                <a:latin typeface="Arial"/>
+                <a:cs typeface="Arial"/>
               </a:rPr>
               <a:t>[a/(a+b)] / [c/(c+d)]</a:t>
             </a:r>
@@ -15534,8 +15486,8 @@
                 <a:solidFill>
                   <a:srgbClr val="000000"/>
                 </a:solidFill>
-                <a:latin typeface="Segoe UI"/>
-                <a:cs typeface="Segoe UI"/>
+                <a:latin typeface="Arial"/>
+                <a:cs typeface="Arial"/>
               </a:rPr>
               <a:t>20% / 30% = 0,67</a:t>
             </a:r>
@@ -15555,8 +15507,8 @@
                 <a:solidFill>
                   <a:srgbClr val="000000"/>
                 </a:solidFill>
-                <a:latin typeface="Segoe UI"/>
-                <a:cs typeface="Segoe UI"/>
+                <a:latin typeface="Arial"/>
+                <a:cs typeface="Arial"/>
               </a:rPr>
               <a:t>nguy cơ thấp hơn 1/3</a:t>
             </a:r>
@@ -15598,8 +15550,8 @@
                 <a:solidFill>
                   <a:srgbClr val="FFFFFF"/>
                 </a:solidFill>
-                <a:latin typeface="Segoe UI"/>
-                <a:cs typeface="Segoe UI"/>
+                <a:latin typeface="Arial"/>
+                <a:cs typeface="Arial"/>
               </a:rPr>
               <a:t>Hiệu số nguy cơ (RD)</a:t>
             </a:r>
@@ -15647,8 +15599,8 @@
                 <a:solidFill>
                   <a:srgbClr val="000000"/>
                 </a:solidFill>
-                <a:latin typeface="Segoe UI"/>
-                <a:cs typeface="Segoe UI"/>
+                <a:latin typeface="Arial"/>
+                <a:cs typeface="Arial"/>
               </a:rPr>
               <a:t>a/(a+b) - c/(c+d)</a:t>
             </a:r>
@@ -15668,8 +15620,8 @@
                 <a:solidFill>
                   <a:srgbClr val="000000"/>
                 </a:solidFill>
-                <a:latin typeface="Segoe UI"/>
-                <a:cs typeface="Segoe UI"/>
+                <a:latin typeface="Arial"/>
+                <a:cs typeface="Arial"/>
               </a:rPr>
               <a:t>20% - 30% = -10 điểm</a:t>
             </a:r>
@@ -15689,8 +15641,8 @@
                 <a:solidFill>
                   <a:srgbClr val="000000"/>
                 </a:solidFill>
-                <a:latin typeface="Segoe UI"/>
-                <a:cs typeface="Segoe UI"/>
+                <a:latin typeface="Arial"/>
+                <a:cs typeface="Arial"/>
               </a:rPr>
               <a:t>ít hơn 10 ca tử vong/100</a:t>
             </a:r>
@@ -15732,8 +15684,8 @@
                 <a:solidFill>
                   <a:srgbClr val="FFFFFF"/>
                 </a:solidFill>
-                <a:latin typeface="Segoe UI"/>
-                <a:cs typeface="Segoe UI"/>
+                <a:latin typeface="Arial"/>
+                <a:cs typeface="Arial"/>
               </a:rPr>
               <a:t>NNT</a:t>
             </a:r>
@@ -15781,8 +15733,8 @@
                 <a:solidFill>
                   <a:srgbClr val="000000"/>
                 </a:solidFill>
-                <a:latin typeface="Segoe UI"/>
-                <a:cs typeface="Segoe UI"/>
+                <a:latin typeface="Arial"/>
+                <a:cs typeface="Arial"/>
               </a:rPr>
               <a:t>1 / |hiệu số nguy cơ|</a:t>
             </a:r>
@@ -15802,8 +15754,8 @@
                 <a:solidFill>
                   <a:srgbClr val="000000"/>
                 </a:solidFill>
-                <a:latin typeface="Segoe UI"/>
-                <a:cs typeface="Segoe UI"/>
+                <a:latin typeface="Arial"/>
+                <a:cs typeface="Arial"/>
               </a:rPr>
               <a:t>1 / 0,10 = 10</a:t>
             </a:r>
@@ -15823,8 +15775,8 @@
                 <a:solidFill>
                   <a:srgbClr val="000000"/>
                 </a:solidFill>
-                <a:latin typeface="Segoe UI"/>
-                <a:cs typeface="Segoe UI"/>
+                <a:latin typeface="Arial"/>
+                <a:cs typeface="Arial"/>
               </a:rPr>
               <a:t>điều trị 10 để ngăn 1 ca tử vong</a:t>
             </a:r>
@@ -15866,8 +15818,8 @@
                 <a:solidFill>
                   <a:srgbClr val="FFFFFF"/>
                 </a:solidFill>
-                <a:latin typeface="Segoe UI"/>
-                <a:cs typeface="Segoe UI"/>
+                <a:latin typeface="Arial"/>
+                <a:cs typeface="Arial"/>
               </a:rPr>
               <a:t>Tỷ số chênh (OR)</a:t>
             </a:r>
@@ -15915,8 +15867,8 @@
                 <a:solidFill>
                   <a:srgbClr val="000000"/>
                 </a:solidFill>
-                <a:latin typeface="Segoe UI"/>
-                <a:cs typeface="Segoe UI"/>
+                <a:latin typeface="Arial"/>
+                <a:cs typeface="Arial"/>
               </a:rPr>
               <a:t>(a x d) / (b x c)</a:t>
             </a:r>
@@ -15936,8 +15888,8 @@
                 <a:solidFill>
                   <a:srgbClr val="000000"/>
                 </a:solidFill>
-                <a:latin typeface="Segoe UI"/>
-                <a:cs typeface="Segoe UI"/>
+                <a:latin typeface="Arial"/>
+                <a:cs typeface="Arial"/>
               </a:rPr>
               <a:t>(20x70)/(80x30) = 0,58</a:t>
             </a:r>
@@ -15957,8 +15909,8 @@
                 <a:solidFill>
                   <a:srgbClr val="000000"/>
                 </a:solidFill>
-                <a:latin typeface="Segoe UI"/>
-                <a:cs typeface="Segoe UI"/>
+                <a:latin typeface="Arial"/>
+                <a:cs typeface="Arial"/>
               </a:rPr>
               <a:t>odds, không phải nguy cơ</a:t>
             </a:r>
@@ -16002,8 +15954,8 @@
                 <a:solidFill>
                   <a:srgbClr val="FFFFFF"/>
                 </a:solidFill>
-                <a:latin typeface="Segoe UI"/>
-                <a:cs typeface="Segoe UI"/>
+                <a:latin typeface="Arial"/>
+                <a:cs typeface="Arial"/>
               </a:rPr>
               <a:t>THÔNG ĐIỆP CHÍNH   </a:t>
             </a:r>
@@ -16012,8 +15964,8 @@
                 <a:solidFill>
                   <a:srgbClr val="FFFFFF"/>
                 </a:solidFill>
-                <a:latin typeface="Segoe UI"/>
-                <a:cs typeface="Segoe UI"/>
+                <a:latin typeface="Arial"/>
+                <a:cs typeface="Arial"/>
               </a:rPr>
               <a:t>Tỷ số cho biết mạnh đến đâu; hiệu số cho biết bao nhiêu bệnh nhân.</a:t>
             </a:r>
@@ -16050,7 +16002,7 @@
                     <a:lumMod val="50000"/>
                   </a:schemeClr>
                 </a:solidFill>
-                <a:latin typeface="Verdana"/>
+                <a:latin typeface="Arial"/>
               </a:rPr>
               <a:t>Neudata | #ClearDataClearImpact</a:t>
             </a:r>
@@ -16180,8 +16132,8 @@
                 <a:solidFill>
                   <a:srgbClr val="0D7377"/>
                 </a:solidFill>
-                <a:latin typeface="Segoe UI"/>
-                <a:cs typeface="Segoe UI"/>
+                <a:latin typeface="Arial"/>
+                <a:cs typeface="Arial"/>
               </a:rPr>
               <a:t>NNT bằng hình ảnh</a:t>
             </a:r>
@@ -16277,8 +16229,8 @@
                 <a:solidFill>
                   <a:srgbClr val="FFFFFF"/>
                 </a:solidFill>
-                <a:latin typeface="Segoe UI"/>
-                <a:cs typeface="Segoe UI"/>
+                <a:latin typeface="Arial"/>
+                <a:cs typeface="Arial"/>
               </a:rPr>
               <a:t>THÔNG ĐIỆP CHÍNH   </a:t>
             </a:r>
@@ -16287,8 +16239,8 @@
                 <a:solidFill>
                   <a:srgbClr val="FFFFFF"/>
                 </a:solidFill>
-                <a:latin typeface="Segoe UI"/>
-                <a:cs typeface="Segoe UI"/>
+                <a:latin typeface="Arial"/>
+                <a:cs typeface="Arial"/>
               </a:rPr>
               <a:t>NNT = 1 / hiệu số nguy cơ: cần điều trị bao nhiêu người để một người có lợi.</a:t>
             </a:r>
@@ -16325,7 +16277,7 @@
                     <a:lumMod val="50000"/>
                   </a:schemeClr>
                 </a:solidFill>
-                <a:latin typeface="Verdana"/>
+                <a:latin typeface="Arial"/>
               </a:rPr>
               <a:t>Neudata | #ClearDataClearImpact</a:t>
             </a:r>
@@ -16455,8 +16407,8 @@
                 <a:solidFill>
                   <a:srgbClr val="0D7377"/>
                 </a:solidFill>
-                <a:latin typeface="Segoe UI"/>
-                <a:cs typeface="Segoe UI"/>
+                <a:latin typeface="Arial"/>
+                <a:cs typeface="Arial"/>
               </a:rPr>
               <a:t>Khi nào tỷ số chênh gần bằng tỷ số nguy cơ?</a:t>
             </a:r>
@@ -16552,8 +16504,8 @@
                 <a:solidFill>
                   <a:srgbClr val="FFFFFF"/>
                 </a:solidFill>
-                <a:latin typeface="Segoe UI"/>
-                <a:cs typeface="Segoe UI"/>
+                <a:latin typeface="Arial"/>
+                <a:cs typeface="Arial"/>
               </a:rPr>
               <a:t>THÔNG ĐIỆP CHÍNH   </a:t>
             </a:r>
@@ -16562,8 +16514,8 @@
                 <a:solidFill>
                   <a:srgbClr val="FFFFFF"/>
                 </a:solidFill>
-                <a:latin typeface="Segoe UI"/>
-                <a:cs typeface="Segoe UI"/>
+                <a:latin typeface="Arial"/>
+                <a:cs typeface="Arial"/>
               </a:rPr>
               <a:t>OR chỉ gần bằng RR khi kết cục hiếm (dưới khoảng 10%).</a:t>
             </a:r>
@@ -16600,7 +16552,7 @@
                     <a:lumMod val="50000"/>
                   </a:schemeClr>
                 </a:solidFill>
-                <a:latin typeface="Verdana"/>
+                <a:latin typeface="Arial"/>
               </a:rPr>
               <a:t>Neudata | #ClearDataClearImpact</a:t>
             </a:r>
@@ -16730,8 +16682,8 @@
                 <a:solidFill>
                   <a:srgbClr val="0D7377"/>
                 </a:solidFill>
-                <a:latin typeface="Segoe UI"/>
-                <a:cs typeface="Segoe UI"/>
+                <a:latin typeface="Arial"/>
+                <a:cs typeface="Arial"/>
               </a:rPr>
               <a:t>Kiểm tra nhanh: thêm một bảng 2x2</a:t>
             </a:r>
@@ -16801,8 +16753,8 @@
                 <a:solidFill>
                   <a:srgbClr val="FFFFFF"/>
                 </a:solidFill>
-                <a:latin typeface="Segoe UI"/>
-                <a:cs typeface="Segoe UI"/>
+                <a:latin typeface="Arial"/>
+                <a:cs typeface="Arial"/>
               </a:rPr>
               <a:t>CÂU HỎI NHANH   |   3 phút</a:t>
             </a:r>
@@ -16839,25 +16791,19 @@
               <a:spcBef>
                 <a:spcPts val="450"/>
               </a:spcBef>
-              <a:buNone/>
-            </a:pPr>
-            <a:r>
-              <a:rPr lang="en-US" sz="1650" b="1" dirty="0">
-                <a:solidFill>
-                  <a:srgbClr val="6C3483"/>
-                </a:solidFill>
-                <a:latin typeface="Segoe UI"/>
-                <a:cs typeface="Segoe UI"/>
-              </a:rPr>
-              <a:t>1.  </a:t>
-            </a:r>
+              <a:buClr>
+                <a:srgbClr val="6C3483"/>
+              </a:buClr>
+              <a:buFont typeface="Arial"/>
+              <a:buChar char="•"/>
+            </a:pPr>
             <a:r>
               <a:rPr lang="en-US" sz="1650" dirty="0">
                 <a:solidFill>
                   <a:srgbClr val="000000"/>
                 </a:solidFill>
-                <a:latin typeface="Segoe UI"/>
-                <a:cs typeface="Segoe UI"/>
+                <a:latin typeface="Arial"/>
+                <a:cs typeface="Arial"/>
               </a:rPr>
               <a:t>Mỗi nhóm 200 BN: 20 tử vong với điều trị mới, 30 với thường quy</a:t>
             </a:r>
@@ -16870,25 +16816,19 @@
               <a:spcBef>
                 <a:spcPts val="450"/>
               </a:spcBef>
-              <a:buNone/>
-            </a:pPr>
-            <a:r>
-              <a:rPr lang="en-US" sz="1650" b="1" dirty="0">
-                <a:solidFill>
-                  <a:srgbClr val="6C3483"/>
-                </a:solidFill>
-                <a:latin typeface="Segoe UI"/>
-                <a:cs typeface="Segoe UI"/>
-              </a:rPr>
-              <a:t>2.  </a:t>
-            </a:r>
+              <a:buClr>
+                <a:srgbClr val="6C3483"/>
+              </a:buClr>
+              <a:buFont typeface="Arial"/>
+              <a:buChar char="•"/>
+            </a:pPr>
             <a:r>
               <a:rPr lang="en-US" sz="1650" dirty="0">
                 <a:solidFill>
                   <a:srgbClr val="000000"/>
                 </a:solidFill>
-                <a:latin typeface="Segoe UI"/>
-                <a:cs typeface="Segoe UI"/>
+                <a:latin typeface="Arial"/>
+                <a:cs typeface="Arial"/>
               </a:rPr>
               <a:t>Nguy cơ ở mỗi nhóm?</a:t>
             </a:r>
@@ -16901,25 +16841,19 @@
               <a:spcBef>
                 <a:spcPts val="450"/>
               </a:spcBef>
-              <a:buNone/>
-            </a:pPr>
-            <a:r>
-              <a:rPr lang="en-US" sz="1650" b="1" dirty="0">
-                <a:solidFill>
-                  <a:srgbClr val="6C3483"/>
-                </a:solidFill>
-                <a:latin typeface="Segoe UI"/>
-                <a:cs typeface="Segoe UI"/>
-              </a:rPr>
-              <a:t>3.  </a:t>
-            </a:r>
+              <a:buClr>
+                <a:srgbClr val="6C3483"/>
+              </a:buClr>
+              <a:buFont typeface="Arial"/>
+              <a:buChar char="•"/>
+            </a:pPr>
             <a:r>
               <a:rPr lang="en-US" sz="1650" dirty="0">
                 <a:solidFill>
                   <a:srgbClr val="000000"/>
                 </a:solidFill>
-                <a:latin typeface="Segoe UI"/>
-                <a:cs typeface="Segoe UI"/>
+                <a:latin typeface="Arial"/>
+                <a:cs typeface="Arial"/>
               </a:rPr>
               <a:t>RR? Hiệu số nguy cơ? NNT?</a:t>
             </a:r>
@@ -16932,25 +16866,19 @@
               <a:spcBef>
                 <a:spcPts val="450"/>
               </a:spcBef>
-              <a:buNone/>
-            </a:pPr>
-            <a:r>
-              <a:rPr lang="en-US" sz="1650" b="1" dirty="0">
-                <a:solidFill>
-                  <a:srgbClr val="6C3483"/>
-                </a:solidFill>
-                <a:latin typeface="Segoe UI"/>
-                <a:cs typeface="Segoe UI"/>
-              </a:rPr>
-              <a:t>4.  </a:t>
-            </a:r>
+              <a:buClr>
+                <a:srgbClr val="6C3483"/>
+              </a:buClr>
+              <a:buFont typeface="Arial"/>
+              <a:buChar char="•"/>
+            </a:pPr>
             <a:r>
               <a:rPr lang="en-US" sz="1650" dirty="0">
                 <a:solidFill>
                   <a:srgbClr val="000000"/>
                 </a:solidFill>
-                <a:latin typeface="Segoe UI"/>
-                <a:cs typeface="Segoe UI"/>
+                <a:latin typeface="Arial"/>
+                <a:cs typeface="Arial"/>
               </a:rPr>
               <a:t>Câu thêm: OR = (a x d) / (b x c)?</a:t>
             </a:r>
@@ -16994,8 +16922,8 @@
                 <a:solidFill>
                   <a:srgbClr val="6C3483"/>
                 </a:solidFill>
-                <a:latin typeface="Segoe UI"/>
-                <a:cs typeface="Segoe UI"/>
+                <a:latin typeface="Arial"/>
+                <a:cs typeface="Arial"/>
               </a:rPr>
               <a:t>Bảng</a:t>
             </a:r>
@@ -17016,8 +16944,8 @@
                 <a:solidFill>
                   <a:srgbClr val="000000"/>
                 </a:solidFill>
-                <a:latin typeface="Segoe UI"/>
-                <a:cs typeface="Segoe UI"/>
+                <a:latin typeface="Arial"/>
+                <a:cs typeface="Arial"/>
               </a:rPr>
               <a:t>a = 20, b = 180</a:t>
             </a:r>
@@ -17038,8 +16966,8 @@
                 <a:solidFill>
                   <a:srgbClr val="000000"/>
                 </a:solidFill>
-                <a:latin typeface="Segoe UI"/>
-                <a:cs typeface="Segoe UI"/>
+                <a:latin typeface="Arial"/>
+                <a:cs typeface="Arial"/>
               </a:rPr>
               <a:t>c = 30, d = 170</a:t>
             </a:r>
@@ -17085,8 +17013,8 @@
                 <a:solidFill>
                   <a:srgbClr val="6C3483"/>
                 </a:solidFill>
-                <a:latin typeface="Segoe UI"/>
-                <a:cs typeface="Segoe UI"/>
+                <a:latin typeface="Arial"/>
+                <a:cs typeface="Arial"/>
               </a:rPr>
               <a:t>SẢN PHẨM   </a:t>
             </a:r>
@@ -17095,8 +17023,8 @@
                 <a:solidFill>
                   <a:srgbClr val="000000"/>
                 </a:solidFill>
-                <a:latin typeface="Segoe UI"/>
-                <a:cs typeface="Segoe UI"/>
+                <a:latin typeface="Arial"/>
+                <a:cs typeface="Arial"/>
               </a:rPr>
               <a:t>Nguy cơ, RR, RD và NNT (đáp án trong ghi chú)</a:t>
             </a:r>
@@ -17133,7 +17061,7 @@
                     <a:lumMod val="50000"/>
                   </a:schemeClr>
                 </a:solidFill>
-                <a:latin typeface="Verdana"/>
+                <a:latin typeface="Arial"/>
               </a:rPr>
               <a:t>Neudata | #ClearDataClearImpact</a:t>
             </a:r>
@@ -17263,8 +17191,8 @@
                 <a:solidFill>
                   <a:srgbClr val="0D7377"/>
                 </a:solidFill>
-                <a:latin typeface="Segoe UI"/>
-                <a:cs typeface="Segoe UI"/>
+                <a:latin typeface="Arial"/>
+                <a:cs typeface="Arial"/>
               </a:rPr>
               <a:t>Trình diễn trực tiếp: công cụ tính bảng 2x2</a:t>
             </a:r>
@@ -17334,8 +17262,8 @@
                 <a:solidFill>
                   <a:srgbClr val="FFFFFF"/>
                 </a:solidFill>
-                <a:latin typeface="Segoe UI"/>
-                <a:cs typeface="Segoe UI"/>
+                <a:latin typeface="Arial"/>
+                <a:cs typeface="Arial"/>
               </a:rPr>
               <a:t>TRÌNH DIỄN TRỰC TIẾP   |   8 phút</a:t>
             </a:r>
@@ -17372,25 +17300,19 @@
               <a:spcBef>
                 <a:spcPts val="450"/>
               </a:spcBef>
-              <a:buNone/>
-            </a:pPr>
-            <a:r>
-              <a:rPr lang="en-US" sz="1650" b="1" dirty="0">
-                <a:solidFill>
-                  <a:srgbClr val="B5651D"/>
-                </a:solidFill>
-                <a:latin typeface="Segoe UI"/>
-                <a:cs typeface="Segoe UI"/>
-              </a:rPr>
-              <a:t>1.  </a:t>
-            </a:r>
+              <a:buClr>
+                <a:srgbClr val="B5651D"/>
+              </a:buClr>
+              <a:buFont typeface="Arial"/>
+              <a:buChar char="•"/>
+            </a:pPr>
             <a:r>
               <a:rPr lang="en-US" sz="1650" dirty="0">
                 <a:solidFill>
                   <a:srgbClr val="000000"/>
                 </a:solidFill>
-                <a:latin typeface="Segoe UI"/>
-                <a:cs typeface="Segoe UI"/>
+                <a:latin typeface="Arial"/>
+                <a:cs typeface="Arial"/>
               </a:rPr>
               <a:t>Mở 2x2_calculator.xlsx, trang Association</a:t>
             </a:r>
@@ -17403,25 +17325,19 @@
               <a:spcBef>
                 <a:spcPts val="450"/>
               </a:spcBef>
-              <a:buNone/>
-            </a:pPr>
-            <a:r>
-              <a:rPr lang="en-US" sz="1650" b="1" dirty="0">
-                <a:solidFill>
-                  <a:srgbClr val="B5651D"/>
-                </a:solidFill>
-                <a:latin typeface="Segoe UI"/>
-                <a:cs typeface="Segoe UI"/>
-              </a:rPr>
-              <a:t>2.  </a:t>
-            </a:r>
+              <a:buClr>
+                <a:srgbClr val="B5651D"/>
+              </a:buClr>
+              <a:buFont typeface="Arial"/>
+              <a:buChar char="•"/>
+            </a:pPr>
             <a:r>
               <a:rPr lang="en-US" sz="1650" dirty="0">
                 <a:solidFill>
                   <a:srgbClr val="000000"/>
                 </a:solidFill>
-                <a:latin typeface="Segoe UI"/>
-                <a:cs typeface="Segoe UI"/>
+                <a:latin typeface="Arial"/>
+                <a:cs typeface="Arial"/>
               </a:rPr>
               <a:t>Nhập a, b, c, d của ví dụ: 20, 80, 30, 70</a:t>
             </a:r>
@@ -17434,25 +17350,19 @@
               <a:spcBef>
                 <a:spcPts val="450"/>
               </a:spcBef>
-              <a:buNone/>
-            </a:pPr>
-            <a:r>
-              <a:rPr lang="en-US" sz="1650" b="1" dirty="0">
-                <a:solidFill>
-                  <a:srgbClr val="B5651D"/>
-                </a:solidFill>
-                <a:latin typeface="Segoe UI"/>
-                <a:cs typeface="Segoe UI"/>
-              </a:rPr>
-              <a:t>3.  </a:t>
-            </a:r>
+              <a:buClr>
+                <a:srgbClr val="B5651D"/>
+              </a:buClr>
+              <a:buFont typeface="Arial"/>
+              <a:buChar char="•"/>
+            </a:pPr>
             <a:r>
               <a:rPr lang="en-US" sz="1650" dirty="0">
                 <a:solidFill>
                   <a:srgbClr val="000000"/>
                 </a:solidFill>
-                <a:latin typeface="Segoe UI"/>
-                <a:cs typeface="Segoe UI"/>
+                <a:latin typeface="Arial"/>
+                <a:cs typeface="Arial"/>
               </a:rPr>
               <a:t>Đọc nguy cơ, RR, RD, NNT, OR, và các câu diễn giải</a:t>
             </a:r>
@@ -17465,25 +17375,19 @@
               <a:spcBef>
                 <a:spcPts val="450"/>
               </a:spcBef>
-              <a:buNone/>
-            </a:pPr>
-            <a:r>
-              <a:rPr lang="en-US" sz="1650" b="1" dirty="0">
-                <a:solidFill>
-                  <a:srgbClr val="B5651D"/>
-                </a:solidFill>
-                <a:latin typeface="Segoe UI"/>
-                <a:cs typeface="Segoe UI"/>
-              </a:rPr>
-              <a:t>4.  </a:t>
-            </a:r>
+              <a:buClr>
+                <a:srgbClr val="B5651D"/>
+              </a:buClr>
+              <a:buFont typeface="Arial"/>
+              <a:buChar char="•"/>
+            </a:pPr>
             <a:r>
               <a:rPr lang="en-US" sz="1650" dirty="0">
                 <a:solidFill>
                   <a:srgbClr val="000000"/>
                 </a:solidFill>
-                <a:latin typeface="Segoe UI"/>
-                <a:cs typeface="Segoe UI"/>
+                <a:latin typeface="Arial"/>
+                <a:cs typeface="Arial"/>
               </a:rPr>
               <a:t>Đổi số tử vong thành 2 và 3 trên 100: xem OR tiến gần RR</a:t>
             </a:r>
@@ -17496,25 +17400,19 @@
               <a:spcBef>
                 <a:spcPts val="450"/>
               </a:spcBef>
-              <a:buNone/>
-            </a:pPr>
-            <a:r>
-              <a:rPr lang="en-US" sz="1650" b="1" dirty="0">
-                <a:solidFill>
-                  <a:srgbClr val="B5651D"/>
-                </a:solidFill>
-                <a:latin typeface="Segoe UI"/>
-                <a:cs typeface="Segoe UI"/>
-              </a:rPr>
-              <a:t>5.  </a:t>
-            </a:r>
+              <a:buClr>
+                <a:srgbClr val="B5651D"/>
+              </a:buClr>
+              <a:buFont typeface="Arial"/>
+              <a:buChar char="•"/>
+            </a:pPr>
             <a:r>
               <a:rPr lang="en-US" sz="1650" dirty="0">
                 <a:solidFill>
                   <a:srgbClr val="000000"/>
                 </a:solidFill>
-                <a:latin typeface="Segoe UI"/>
-                <a:cs typeface="Segoe UI"/>
+                <a:latin typeface="Arial"/>
+                <a:cs typeface="Arial"/>
               </a:rPr>
               <a:t>Chỉ vào dòng chữ đỏ: dữ liệu bệnh-chứng chỉ cho OR</a:t>
             </a:r>
@@ -17558,8 +17456,8 @@
                 <a:solidFill>
                   <a:srgbClr val="B5651D"/>
                 </a:solidFill>
-                <a:latin typeface="Segoe UI"/>
-                <a:cs typeface="Segoe UI"/>
+                <a:latin typeface="Arial"/>
+                <a:cs typeface="Arial"/>
               </a:rPr>
               <a:t>Chú ý</a:t>
             </a:r>
@@ -17580,8 +17478,8 @@
                 <a:solidFill>
                   <a:srgbClr val="000000"/>
                 </a:solidFill>
-                <a:latin typeface="Segoe UI"/>
-                <a:cs typeface="Segoe UI"/>
+                <a:latin typeface="Arial"/>
+                <a:cs typeface="Arial"/>
               </a:rPr>
               <a:t>Cùng cách trình bày như slide</a:t>
             </a:r>
@@ -17602,8 +17500,8 @@
                 <a:solidFill>
                   <a:srgbClr val="000000"/>
                 </a:solidFill>
-                <a:latin typeface="Segoe UI"/>
-                <a:cs typeface="Segoe UI"/>
+                <a:latin typeface="Arial"/>
+                <a:cs typeface="Arial"/>
               </a:rPr>
               <a:t>Tác động tương đối và tuyệt đối</a:t>
             </a:r>
@@ -17624,8 +17522,8 @@
                 <a:solidFill>
                   <a:srgbClr val="000000"/>
                 </a:solidFill>
-                <a:latin typeface="Segoe UI"/>
-                <a:cs typeface="Segoe UI"/>
+                <a:latin typeface="Arial"/>
+                <a:cs typeface="Arial"/>
               </a:rPr>
               <a:t>Kết cục hiếm: OR gần RR</a:t>
             </a:r>
@@ -17671,8 +17569,8 @@
                 <a:solidFill>
                   <a:srgbClr val="B5651D"/>
                 </a:solidFill>
-                <a:latin typeface="Segoe UI"/>
-                <a:cs typeface="Segoe UI"/>
+                <a:latin typeface="Arial"/>
+                <a:cs typeface="Arial"/>
               </a:rPr>
               <a:t>SẢN PHẨM   </a:t>
             </a:r>
@@ -17681,8 +17579,8 @@
                 <a:solidFill>
                   <a:srgbClr val="000000"/>
                 </a:solidFill>
-                <a:latin typeface="Segoe UI"/>
-                <a:cs typeface="Segoe UI"/>
+                <a:latin typeface="Arial"/>
+                <a:cs typeface="Arial"/>
               </a:rPr>
               <a:t>Mọi người thấy mọi số đo được tính từ một bảng</a:t>
             </a:r>
@@ -17719,7 +17617,7 @@
                     <a:lumMod val="50000"/>
                   </a:schemeClr>
                 </a:solidFill>
-                <a:latin typeface="Verdana"/>
+                <a:latin typeface="Arial"/>
               </a:rPr>
               <a:t>Neudata | #ClearDataClearImpact</a:t>
             </a:r>
@@ -17849,8 +17747,8 @@
                 <a:solidFill>
                   <a:srgbClr val="0D7377"/>
                 </a:solidFill>
-                <a:latin typeface="Segoe UI"/>
-                <a:cs typeface="Segoe UI"/>
+                <a:latin typeface="Arial"/>
+                <a:cs typeface="Arial"/>
               </a:rPr>
               <a:t>Từ khóa của ngày hôm nay</a:t>
             </a:r>
@@ -17916,8 +17814,8 @@
                 <a:solidFill>
                   <a:srgbClr val="595959"/>
                 </a:solidFill>
-                <a:latin typeface="Segoe UI"/>
-                <a:cs typeface="Segoe UI"/>
+                <a:latin typeface="Arial"/>
+                <a:cs typeface="Arial"/>
               </a:rPr>
               <a:t>Từ vựng hôm nay. Mỗi định nghĩa đi kèm một hình</a:t>
             </a:r>
@@ -17959,8 +17857,8 @@
                 <a:solidFill>
                   <a:srgbClr val="FFFFFF"/>
                 </a:solidFill>
-                <a:latin typeface="Segoe UI"/>
-                <a:cs typeface="Segoe UI"/>
+                <a:latin typeface="Arial"/>
+                <a:cs typeface="Arial"/>
               </a:rPr>
               <a:t>Có tin được?</a:t>
             </a:r>
@@ -18008,8 +17906,8 @@
                 <a:solidFill>
                   <a:srgbClr val="000000"/>
                 </a:solidFill>
-                <a:latin typeface="Segoe UI"/>
-                <a:cs typeface="Segoe UI"/>
+                <a:latin typeface="Arial"/>
+                <a:cs typeface="Arial"/>
               </a:rPr>
               <a:t>Sai lệch, yếu tố nhiễu</a:t>
             </a:r>
@@ -18029,8 +17927,8 @@
                 <a:solidFill>
                   <a:srgbClr val="000000"/>
                 </a:solidFill>
-                <a:latin typeface="Segoe UI"/>
-                <a:cs typeface="Segoe UI"/>
+                <a:latin typeface="Arial"/>
+                <a:cs typeface="Arial"/>
               </a:rPr>
               <a:t>Thay đổi tác động</a:t>
             </a:r>
@@ -18050,8 +17948,8 @@
                 <a:solidFill>
                   <a:srgbClr val="000000"/>
                 </a:solidFill>
-                <a:latin typeface="Segoe UI"/>
-                <a:cs typeface="Segoe UI"/>
+                <a:latin typeface="Arial"/>
+                <a:cs typeface="Arial"/>
               </a:rPr>
               <a:t>Nhân quả ngược</a:t>
             </a:r>
@@ -18093,8 +17991,8 @@
                 <a:solidFill>
                   <a:srgbClr val="FFFFFF"/>
                 </a:solidFill>
-                <a:latin typeface="Segoe UI"/>
-                <a:cs typeface="Segoe UI"/>
+                <a:latin typeface="Arial"/>
+                <a:cs typeface="Arial"/>
               </a:rPr>
               <a:t>Lớn đến đâu?</a:t>
             </a:r>
@@ -18142,8 +18040,8 @@
                 <a:solidFill>
                   <a:srgbClr val="000000"/>
                 </a:solidFill>
-                <a:latin typeface="Segoe UI"/>
-                <a:cs typeface="Segoe UI"/>
+                <a:latin typeface="Arial"/>
+                <a:cs typeface="Arial"/>
               </a:rPr>
               <a:t>Nguy cơ, tỷ số nguy cơ (RR)</a:t>
             </a:r>
@@ -18163,8 +18061,8 @@
                 <a:solidFill>
                   <a:srgbClr val="000000"/>
                 </a:solidFill>
-                <a:latin typeface="Segoe UI"/>
-                <a:cs typeface="Segoe UI"/>
+                <a:latin typeface="Arial"/>
+                <a:cs typeface="Arial"/>
               </a:rPr>
               <a:t>Hiệu số nguy cơ, NNT</a:t>
             </a:r>
@@ -18184,8 +18082,8 @@
                 <a:solidFill>
                   <a:srgbClr val="000000"/>
                 </a:solidFill>
-                <a:latin typeface="Segoe UI"/>
-                <a:cs typeface="Segoe UI"/>
+                <a:latin typeface="Arial"/>
+                <a:cs typeface="Arial"/>
               </a:rPr>
               <a:t>Tỷ số chênh (OR)</a:t>
             </a:r>
@@ -18227,8 +18125,8 @@
                 <a:solidFill>
                   <a:srgbClr val="FFFFFF"/>
                 </a:solidFill>
-                <a:latin typeface="Segoe UI"/>
-                <a:cs typeface="Segoe UI"/>
+                <a:latin typeface="Arial"/>
+                <a:cs typeface="Arial"/>
               </a:rPr>
               <a:t>Xét nghiệm</a:t>
             </a:r>
@@ -18276,8 +18174,8 @@
                 <a:solidFill>
                   <a:srgbClr val="000000"/>
                 </a:solidFill>
-                <a:latin typeface="Segoe UI"/>
-                <a:cs typeface="Segoe UI"/>
+                <a:latin typeface="Arial"/>
+                <a:cs typeface="Arial"/>
               </a:rPr>
               <a:t>Độ nhạy, độ đặc hiệu</a:t>
             </a:r>
@@ -18297,8 +18195,8 @@
                 <a:solidFill>
                   <a:srgbClr val="000000"/>
                 </a:solidFill>
-                <a:latin typeface="Segoe UI"/>
-                <a:cs typeface="Segoe UI"/>
+                <a:latin typeface="Arial"/>
+                <a:cs typeface="Arial"/>
               </a:rPr>
               <a:t>PPV, NPV, đường cong ROC</a:t>
             </a:r>
@@ -18340,8 +18238,8 @@
                 <a:solidFill>
                   <a:srgbClr val="FFFFFF"/>
                 </a:solidFill>
-                <a:latin typeface="Segoe UI"/>
-                <a:cs typeface="Segoe UI"/>
+                <a:latin typeface="Arial"/>
+                <a:cs typeface="Arial"/>
               </a:rPr>
               <a:t>Nhiều nghiên cứu</a:t>
             </a:r>
@@ -18389,8 +18287,8 @@
                 <a:solidFill>
                   <a:srgbClr val="000000"/>
                 </a:solidFill>
-                <a:latin typeface="Segoe UI"/>
-                <a:cs typeface="Segoe UI"/>
+                <a:latin typeface="Arial"/>
+                <a:cs typeface="Arial"/>
               </a:rPr>
               <a:t>Biểu đồ rừng, I bình phương</a:t>
             </a:r>
@@ -18410,8 +18308,8 @@
                 <a:solidFill>
                   <a:srgbClr val="000000"/>
                 </a:solidFill>
-                <a:latin typeface="Segoe UI"/>
-                <a:cs typeface="Segoe UI"/>
+                <a:latin typeface="Arial"/>
+                <a:cs typeface="Arial"/>
               </a:rPr>
               <a:t>Công cụ nguy cơ sai lệch</a:t>
             </a:r>
@@ -18455,8 +18353,8 @@
                 <a:solidFill>
                   <a:srgbClr val="FFFFFF"/>
                 </a:solidFill>
-                <a:latin typeface="Segoe UI"/>
-                <a:cs typeface="Segoe UI"/>
+                <a:latin typeface="Arial"/>
+                <a:cs typeface="Arial"/>
               </a:rPr>
               <a:t>THÔNG ĐIỆP CHÍNH   </a:t>
             </a:r>
@@ -18465,8 +18363,8 @@
                 <a:solidFill>
                   <a:srgbClr val="FFFFFF"/>
                 </a:solidFill>
-                <a:latin typeface="Segoe UI"/>
-                <a:cs typeface="Segoe UI"/>
+                <a:latin typeface="Arial"/>
+                <a:cs typeface="Arial"/>
               </a:rPr>
               <a:t>Tin trước, rồi mới đến độ lớn: một câu trả lời chính xác vẫn có thể bị sai lệch.</a:t>
             </a:r>
@@ -18503,7 +18401,7 @@
                     <a:lumMod val="50000"/>
                   </a:schemeClr>
                 </a:solidFill>
-                <a:latin typeface="Verdana"/>
+                <a:latin typeface="Arial"/>
               </a:rPr>
               <a:t>Neudata | #ClearDataClearImpact</a:t>
             </a:r>
@@ -18633,8 +18531,8 @@
                 <a:solidFill>
                   <a:srgbClr val="0D7377"/>
                 </a:solidFill>
-                <a:latin typeface="Segoe UI"/>
-                <a:cs typeface="Segoe UI"/>
+                <a:latin typeface="Arial"/>
+                <a:cs typeface="Arial"/>
               </a:rPr>
               <a:t>Giải lao</a:t>
             </a:r>
@@ -18704,8 +18602,8 @@
                 <a:solidFill>
                   <a:srgbClr val="FFFFFF"/>
                 </a:solidFill>
-                <a:latin typeface="Segoe UI"/>
-                <a:cs typeface="Segoe UI"/>
+                <a:latin typeface="Arial"/>
+                <a:cs typeface="Arial"/>
               </a:rPr>
               <a:t>GIẢI LAO   |   15 phút</a:t>
             </a:r>
@@ -18742,25 +18640,19 @@
               <a:spcBef>
                 <a:spcPts val="450"/>
               </a:spcBef>
-              <a:buNone/>
-            </a:pPr>
-            <a:r>
-              <a:rPr lang="en-US" sz="1650" b="1" dirty="0">
-                <a:solidFill>
-                  <a:srgbClr val="8A99A3"/>
-                </a:solidFill>
-                <a:latin typeface="Segoe UI"/>
-                <a:cs typeface="Segoe UI"/>
-              </a:rPr>
-              <a:t>1.  </a:t>
-            </a:r>
+              <a:buClr>
+                <a:srgbClr val="8A99A3"/>
+              </a:buClr>
+              <a:buFont typeface="Arial"/>
+              <a:buChar char="•"/>
+            </a:pPr>
             <a:r>
               <a:rPr lang="en-US" sz="1650" dirty="0">
                 <a:solidFill>
                   <a:srgbClr val="000000"/>
                 </a:solidFill>
-                <a:latin typeface="Segoe UI"/>
-                <a:cs typeface="Segoe UI"/>
+                <a:latin typeface="Arial"/>
+                <a:cs typeface="Arial"/>
               </a:rPr>
               <a:t>Vận động, uống cà phê, hít thở không khí</a:t>
             </a:r>
@@ -18773,25 +18665,19 @@
               <a:spcBef>
                 <a:spcPts val="450"/>
               </a:spcBef>
-              <a:buNone/>
-            </a:pPr>
-            <a:r>
-              <a:rPr lang="en-US" sz="1650" b="1" dirty="0">
-                <a:solidFill>
-                  <a:srgbClr val="8A99A3"/>
-                </a:solidFill>
-                <a:latin typeface="Segoe UI"/>
-                <a:cs typeface="Segoe UI"/>
-              </a:rPr>
-              <a:t>2.  </a:t>
-            </a:r>
+              <a:buClr>
+                <a:srgbClr val="8A99A3"/>
+              </a:buClr>
+              <a:buFont typeface="Arial"/>
+              <a:buChar char="•"/>
+            </a:pPr>
             <a:r>
               <a:rPr lang="en-US" sz="1650" dirty="0">
                 <a:solidFill>
                   <a:srgbClr val="000000"/>
                 </a:solidFill>
-                <a:latin typeface="Segoe UI"/>
-                <a:cs typeface="Segoe UI"/>
+                <a:latin typeface="Arial"/>
+                <a:cs typeface="Arial"/>
               </a:rPr>
               <a:t>Sau giải lao: hai bài tính bảng 2x2, hãy chuẩn bị bút</a:t>
             </a:r>
@@ -18804,25 +18690,19 @@
               <a:spcBef>
                 <a:spcPts val="450"/>
               </a:spcBef>
-              <a:buNone/>
-            </a:pPr>
-            <a:r>
-              <a:rPr lang="en-US" sz="1650" b="1" dirty="0">
-                <a:solidFill>
-                  <a:srgbClr val="8A99A3"/>
-                </a:solidFill>
-                <a:latin typeface="Segoe UI"/>
-                <a:cs typeface="Segoe UI"/>
-              </a:rPr>
-              <a:t>3.  </a:t>
-            </a:r>
+              <a:buClr>
+                <a:srgbClr val="8A99A3"/>
+              </a:buClr>
+              <a:buFont typeface="Arial"/>
+              <a:buChar char="•"/>
+            </a:pPr>
             <a:r>
               <a:rPr lang="en-US" sz="1650" dirty="0">
                 <a:solidFill>
                   <a:srgbClr val="000000"/>
                 </a:solidFill>
-                <a:latin typeface="Segoe UI"/>
-                <a:cs typeface="Segoe UI"/>
+                <a:latin typeface="Arial"/>
+                <a:cs typeface="Arial"/>
               </a:rPr>
               <a:t>Rồi phần 4.3: vượt ra ngoài một nghiên cứu</a:t>
             </a:r>
@@ -18859,7 +18739,7 @@
                     <a:lumMod val="50000"/>
                   </a:schemeClr>
                 </a:solidFill>
-                <a:latin typeface="Verdana"/>
+                <a:latin typeface="Arial"/>
               </a:rPr>
               <a:t>Neudata | #ClearDataClearImpact</a:t>
             </a:r>
@@ -18989,8 +18869,8 @@
                 <a:solidFill>
                   <a:srgbClr val="0D7377"/>
                 </a:solidFill>
-                <a:latin typeface="Segoe UI"/>
-                <a:cs typeface="Segoe UI"/>
+                <a:latin typeface="Arial"/>
+                <a:cs typeface="Arial"/>
               </a:rPr>
               <a:t>Đến lượt bạn: hai bài tính bảng 2x2</a:t>
             </a:r>
@@ -19060,8 +18940,8 @@
                 <a:solidFill>
                   <a:srgbClr val="FFFFFF"/>
                 </a:solidFill>
-                <a:latin typeface="Segoe UI"/>
-                <a:cs typeface="Segoe UI"/>
+                <a:latin typeface="Arial"/>
+                <a:cs typeface="Arial"/>
               </a:rPr>
               <a:t>BÀI TẬP CÁ NHÂN   |   20 phút</a:t>
             </a:r>
@@ -19098,25 +18978,19 @@
               <a:spcBef>
                 <a:spcPts val="450"/>
               </a:spcBef>
-              <a:buNone/>
-            </a:pPr>
-            <a:r>
-              <a:rPr lang="en-US" sz="1650" b="1" dirty="0">
-                <a:solidFill>
-                  <a:srgbClr val="0B376C"/>
-                </a:solidFill>
-                <a:latin typeface="Segoe UI"/>
-                <a:cs typeface="Segoe UI"/>
-              </a:rPr>
-              <a:t>1.  </a:t>
-            </a:r>
+              <a:buClr>
+                <a:srgbClr val="0B376C"/>
+              </a:buClr>
+              <a:buFont typeface="Arial"/>
+              <a:buChar char="•"/>
+            </a:pPr>
             <a:r>
               <a:rPr lang="en-US" sz="1650" dirty="0">
                 <a:solidFill>
                   <a:srgbClr val="000000"/>
                 </a:solidFill>
-                <a:latin typeface="Segoe UI"/>
-                <a:cs typeface="Segoe UI"/>
+                <a:latin typeface="Arial"/>
+                <a:cs typeface="Arial"/>
               </a:rPr>
               <a:t>Tài liệu Phần C: vẽ mỗi bảng 2x2 trước, phơi nhiễm ở hàng</a:t>
             </a:r>
@@ -19129,25 +19003,19 @@
               <a:spcBef>
                 <a:spcPts val="450"/>
               </a:spcBef>
-              <a:buNone/>
-            </a:pPr>
-            <a:r>
-              <a:rPr lang="en-US" sz="1650" b="1" dirty="0">
-                <a:solidFill>
-                  <a:srgbClr val="0B376C"/>
-                </a:solidFill>
-                <a:latin typeface="Segoe UI"/>
-                <a:cs typeface="Segoe UI"/>
-              </a:rPr>
-              <a:t>2.  </a:t>
-            </a:r>
+              <a:buClr>
+                <a:srgbClr val="0B376C"/>
+              </a:buClr>
+              <a:buFont typeface="Arial"/>
+              <a:buChar char="•"/>
+            </a:pPr>
             <a:r>
               <a:rPr lang="en-US" sz="1650" dirty="0">
                 <a:solidFill>
                   <a:srgbClr val="000000"/>
                 </a:solidFill>
-                <a:latin typeface="Segoe UI"/>
-                <a:cs typeface="Segoe UI"/>
+                <a:latin typeface="Arial"/>
+                <a:cs typeface="Arial"/>
               </a:rPr>
               <a:t>Bài 1 (thử nghiệm): nguy cơ, RR, RD, NNT, OR, và một câu diễn giải</a:t>
             </a:r>
@@ -19160,25 +19028,19 @@
               <a:spcBef>
                 <a:spcPts val="450"/>
               </a:spcBef>
-              <a:buNone/>
-            </a:pPr>
-            <a:r>
-              <a:rPr lang="en-US" sz="1650" b="1" dirty="0">
-                <a:solidFill>
-                  <a:srgbClr val="0B376C"/>
-                </a:solidFill>
-                <a:latin typeface="Segoe UI"/>
-                <a:cs typeface="Segoe UI"/>
-              </a:rPr>
-              <a:t>3.  </a:t>
-            </a:r>
+              <a:buClr>
+                <a:srgbClr val="0B376C"/>
+              </a:buClr>
+              <a:buFont typeface="Arial"/>
+              <a:buChar char="•"/>
+            </a:pPr>
             <a:r>
               <a:rPr lang="en-US" sz="1650" dirty="0">
                 <a:solidFill>
                   <a:srgbClr val="000000"/>
                 </a:solidFill>
-                <a:latin typeface="Segoe UI"/>
-                <a:cs typeface="Segoe UI"/>
+                <a:latin typeface="Arial"/>
+                <a:cs typeface="Arial"/>
               </a:rPr>
               <a:t>Bài 2 (bệnh-chứng): chỉ tính OR, và giải thích vì sao không tính RR</a:t>
             </a:r>
@@ -19191,25 +19053,19 @@
               <a:spcBef>
                 <a:spcPts val="450"/>
               </a:spcBef>
-              <a:buNone/>
-            </a:pPr>
-            <a:r>
-              <a:rPr lang="en-US" sz="1650" b="1" dirty="0">
-                <a:solidFill>
-                  <a:srgbClr val="0B376C"/>
-                </a:solidFill>
-                <a:latin typeface="Segoe UI"/>
-                <a:cs typeface="Segoe UI"/>
-              </a:rPr>
-              <a:t>4.  </a:t>
-            </a:r>
+              <a:buClr>
+                <a:srgbClr val="0B376C"/>
+              </a:buClr>
+              <a:buFont typeface="Arial"/>
+              <a:buChar char="•"/>
+            </a:pPr>
             <a:r>
               <a:rPr lang="en-US" sz="1650" dirty="0">
                 <a:solidFill>
                   <a:srgbClr val="000000"/>
                 </a:solidFill>
-                <a:latin typeface="Segoe UI"/>
-                <a:cs typeface="Segoe UI"/>
+                <a:latin typeface="Arial"/>
+                <a:cs typeface="Arial"/>
               </a:rPr>
               <a:t>Đối chiếu với người bên cạnh, rồi với công cụ tính</a:t>
             </a:r>
@@ -19253,8 +19109,8 @@
                 <a:solidFill>
                   <a:srgbClr val="0B376C"/>
                 </a:solidFill>
-                <a:latin typeface="Segoe UI"/>
-                <a:cs typeface="Segoe UI"/>
+                <a:latin typeface="Arial"/>
+                <a:cs typeface="Arial"/>
               </a:rPr>
               <a:t>Ghi nhớ</a:t>
             </a:r>
@@ -19275,8 +19131,8 @@
                 <a:solidFill>
                   <a:srgbClr val="000000"/>
                 </a:solidFill>
-                <a:latin typeface="Segoe UI"/>
-                <a:cs typeface="Segoe UI"/>
+                <a:latin typeface="Arial"/>
+                <a:cs typeface="Arial"/>
               </a:rPr>
               <a:t>Nguy cơ = a / (a + b)</a:t>
             </a:r>
@@ -19297,8 +19153,8 @@
                 <a:solidFill>
                   <a:srgbClr val="000000"/>
                 </a:solidFill>
-                <a:latin typeface="Segoe UI"/>
-                <a:cs typeface="Segoe UI"/>
+                <a:latin typeface="Arial"/>
+                <a:cs typeface="Arial"/>
               </a:rPr>
               <a:t>RR = nguy cơ / nguy cơ</a:t>
             </a:r>
@@ -19319,8 +19175,8 @@
                 <a:solidFill>
                   <a:srgbClr val="000000"/>
                 </a:solidFill>
-                <a:latin typeface="Segoe UI"/>
-                <a:cs typeface="Segoe UI"/>
+                <a:latin typeface="Arial"/>
+                <a:cs typeface="Arial"/>
               </a:rPr>
               <a:t>NNT = 1 / hiệu số nguy cơ</a:t>
             </a:r>
@@ -19341,8 +19197,8 @@
                 <a:solidFill>
                   <a:srgbClr val="000000"/>
                 </a:solidFill>
-                <a:latin typeface="Segoe UI"/>
-                <a:cs typeface="Segoe UI"/>
+                <a:latin typeface="Arial"/>
+                <a:cs typeface="Arial"/>
               </a:rPr>
               <a:t>OR = (a x d) / (b x c)</a:t>
             </a:r>
@@ -19388,8 +19244,8 @@
                 <a:solidFill>
                   <a:srgbClr val="0B376C"/>
                 </a:solidFill>
-                <a:latin typeface="Segoe UI"/>
-                <a:cs typeface="Segoe UI"/>
+                <a:latin typeface="Arial"/>
+                <a:cs typeface="Arial"/>
               </a:rPr>
               <a:t>SẢN PHẨM   </a:t>
             </a:r>
@@ -19398,8 +19254,8 @@
                 <a:solidFill>
                   <a:srgbClr val="000000"/>
                 </a:solidFill>
-                <a:latin typeface="Segoe UI"/>
-                <a:cs typeface="Segoe UI"/>
+                <a:latin typeface="Arial"/>
+                <a:cs typeface="Arial"/>
               </a:rPr>
               <a:t>Hai bảng 2x2 hoàn chỉnh với kết quả được diễn giải</a:t>
             </a:r>
@@ -19436,7 +19292,7 @@
                     <a:lumMod val="50000"/>
                   </a:schemeClr>
                 </a:solidFill>
-                <a:latin typeface="Verdana"/>
+                <a:latin typeface="Arial"/>
               </a:rPr>
               <a:t>Neudata | #ClearDataClearImpact</a:t>
             </a:r>
@@ -19566,8 +19422,8 @@
                 <a:solidFill>
                   <a:srgbClr val="0D7377"/>
                 </a:solidFill>
-                <a:latin typeface="Segoe UI"/>
-                <a:cs typeface="Segoe UI"/>
+                <a:latin typeface="Arial"/>
+                <a:cs typeface="Arial"/>
               </a:rPr>
               <a:t>4.3  Vượt ra ngoài một nghiên cứu</a:t>
             </a:r>
@@ -19636,8 +19492,8 @@
                 <a:solidFill>
                   <a:srgbClr val="0D7377"/>
                 </a:solidFill>
-                <a:latin typeface="Segoe UI"/>
-                <a:cs typeface="Segoe UI"/>
+                <a:latin typeface="Arial"/>
+                <a:cs typeface="Arial"/>
               </a:rPr>
               <a:t>Một nghiên cứu hiếm khi là câu trả lời.</a:t>
             </a:r>
@@ -19654,8 +19510,8 @@
                 <a:solidFill>
                   <a:srgbClr val="595959"/>
                 </a:solidFill>
-                <a:latin typeface="Segoe UI"/>
-                <a:cs typeface="Segoe UI"/>
+                <a:latin typeface="Arial"/>
+                <a:cs typeface="Arial"/>
               </a:rPr>
               <a:t>Xét nghiệm chẩn đoán, tổng quan hệ thống và phân tích gộp, và cách thẩm định chúng. (30 phút)</a:t>
             </a:r>
@@ -19692,7 +19548,7 @@
                     <a:lumMod val="50000"/>
                   </a:schemeClr>
                 </a:solidFill>
-                <a:latin typeface="Verdana"/>
+                <a:latin typeface="Arial"/>
               </a:rPr>
               <a:t>Neudata | #ClearDataClearImpact</a:t>
             </a:r>
@@ -19822,8 +19678,8 @@
                 <a:solidFill>
                   <a:srgbClr val="0D7377"/>
                 </a:solidFill>
-                <a:latin typeface="Segoe UI"/>
-                <a:cs typeface="Segoe UI"/>
+                <a:latin typeface="Arial"/>
+                <a:cs typeface="Arial"/>
               </a:rPr>
               <a:t>Độ chính xác chẩn đoán: nhìn lại độ nhạy và độ đặc hiệu</a:t>
             </a:r>
@@ -19919,8 +19775,8 @@
                 <a:solidFill>
                   <a:srgbClr val="FFFFFF"/>
                 </a:solidFill>
-                <a:latin typeface="Segoe UI"/>
-                <a:cs typeface="Segoe UI"/>
+                <a:latin typeface="Arial"/>
+                <a:cs typeface="Arial"/>
               </a:rPr>
               <a:t>THÔNG ĐIỆP CHÍNH   </a:t>
             </a:r>
@@ -19929,8 +19785,8 @@
                 <a:solidFill>
                   <a:srgbClr val="FFFFFF"/>
                 </a:solidFill>
-                <a:latin typeface="Segoe UI"/>
-                <a:cs typeface="Segoe UI"/>
+                <a:latin typeface="Arial"/>
+                <a:cs typeface="Arial"/>
               </a:rPr>
               <a:t>Độ nhạy phát hiện người bệnh; độ đặc hiệu loại trừ người khỏe.</a:t>
             </a:r>
@@ -19967,7 +19823,7 @@
                     <a:lumMod val="50000"/>
                   </a:schemeClr>
                 </a:solidFill>
-                <a:latin typeface="Verdana"/>
+                <a:latin typeface="Arial"/>
               </a:rPr>
               <a:t>Neudata | #ClearDataClearImpact</a:t>
             </a:r>
@@ -20097,8 +19953,8 @@
                 <a:solidFill>
                   <a:srgbClr val="0D7377"/>
                 </a:solidFill>
-                <a:latin typeface="Segoe UI"/>
-                <a:cs typeface="Segoe UI"/>
+                <a:latin typeface="Arial"/>
+                <a:cs typeface="Arial"/>
               </a:rPr>
               <a:t>Cùng xét nghiệm, khác bối cảnh: PPV phụ thuộc tỷ lệ hiện mắc</a:t>
             </a:r>
@@ -20194,8 +20050,8 @@
                 <a:solidFill>
                   <a:srgbClr val="FFFFFF"/>
                 </a:solidFill>
-                <a:latin typeface="Segoe UI"/>
-                <a:cs typeface="Segoe UI"/>
+                <a:latin typeface="Arial"/>
+                <a:cs typeface="Arial"/>
               </a:rPr>
               <a:t>THÔNG ĐIỆP CHÍNH   </a:t>
             </a:r>
@@ -20204,8 +20060,8 @@
                 <a:solidFill>
                   <a:srgbClr val="FFFFFF"/>
                 </a:solidFill>
-                <a:latin typeface="Segoe UI"/>
-                <a:cs typeface="Segoe UI"/>
+                <a:latin typeface="Arial"/>
+                <a:cs typeface="Arial"/>
               </a:rPr>
               <a:t>Kết quả dương tính có ít ý nghĩa hơn nhiều khi bệnh hiếm gặp.</a:t>
             </a:r>
@@ -20242,7 +20098,7 @@
                     <a:lumMod val="50000"/>
                   </a:schemeClr>
                 </a:solidFill>
-                <a:latin typeface="Verdana"/>
+                <a:latin typeface="Arial"/>
               </a:rPr>
               <a:t>Neudata | #ClearDataClearImpact</a:t>
             </a:r>
@@ -20372,8 +20228,8 @@
                 <a:solidFill>
                   <a:srgbClr val="0D7377"/>
                 </a:solidFill>
-                <a:latin typeface="Segoe UI"/>
-                <a:cs typeface="Segoe UI"/>
+                <a:latin typeface="Arial"/>
+                <a:cs typeface="Arial"/>
               </a:rPr>
               <a:t>Đường cong ROC và AUC</a:t>
             </a:r>
@@ -20469,8 +20325,8 @@
                 <a:solidFill>
                   <a:srgbClr val="FFFFFF"/>
                 </a:solidFill>
-                <a:latin typeface="Segoe UI"/>
-                <a:cs typeface="Segoe UI"/>
+                <a:latin typeface="Arial"/>
+                <a:cs typeface="Arial"/>
               </a:rPr>
               <a:t>THÔNG ĐIỆP CHÍNH   </a:t>
             </a:r>
@@ -20479,8 +20335,8 @@
                 <a:solidFill>
                   <a:srgbClr val="FFFFFF"/>
                 </a:solidFill>
-                <a:latin typeface="Segoe UI"/>
-                <a:cs typeface="Segoe UI"/>
+                <a:latin typeface="Arial"/>
+                <a:cs typeface="Arial"/>
               </a:rPr>
               <a:t>Mỗi ngưỡng đổi độ nhạy lấy độ đặc hiệu; AUC tóm tắt toàn bộ đường cong.</a:t>
             </a:r>
@@ -20517,7 +20373,7 @@
                     <a:lumMod val="50000"/>
                   </a:schemeClr>
                 </a:solidFill>
-                <a:latin typeface="Verdana"/>
+                <a:latin typeface="Arial"/>
               </a:rPr>
               <a:t>Neudata | #ClearDataClearImpact</a:t>
             </a:r>
@@ -20647,8 +20503,8 @@
                 <a:solidFill>
                   <a:srgbClr val="0D7377"/>
                 </a:solidFill>
-                <a:latin typeface="Segoe UI"/>
-                <a:cs typeface="Segoe UI"/>
+                <a:latin typeface="Arial"/>
+                <a:cs typeface="Arial"/>
               </a:rPr>
               <a:t>Sơ đồ PRISMA: từ 1.300 bản ghi đến 9 nghiên cứu</a:t>
             </a:r>
@@ -20744,8 +20600,8 @@
                 <a:solidFill>
                   <a:srgbClr val="FFFFFF"/>
                 </a:solidFill>
-                <a:latin typeface="Segoe UI"/>
-                <a:cs typeface="Segoe UI"/>
+                <a:latin typeface="Arial"/>
+                <a:cs typeface="Arial"/>
               </a:rPr>
               <a:t>THÔNG ĐIỆP CHÍNH   </a:t>
             </a:r>
@@ -20754,8 +20610,8 @@
                 <a:solidFill>
                   <a:srgbClr val="FFFFFF"/>
                 </a:solidFill>
-                <a:latin typeface="Segoe UI"/>
-                <a:cs typeface="Segoe UI"/>
+                <a:latin typeface="Arial"/>
+                <a:cs typeface="Arial"/>
               </a:rPr>
               <a:t>Sơ đồ PRISMA cho thấy cách tìm, sàng lọc và loại nghiên cứu, kèm lý do.</a:t>
             </a:r>
@@ -20792,7 +20648,7 @@
                     <a:lumMod val="50000"/>
                   </a:schemeClr>
                 </a:solidFill>
-                <a:latin typeface="Verdana"/>
+                <a:latin typeface="Arial"/>
               </a:rPr>
               <a:t>Neudata | #ClearDataClearImpact</a:t>
             </a:r>
@@ -20922,8 +20778,8 @@
                 <a:solidFill>
                   <a:srgbClr val="0D7377"/>
                 </a:solidFill>
-                <a:latin typeface="Segoe UI"/>
-                <a:cs typeface="Segoe UI"/>
+                <a:latin typeface="Arial"/>
+                <a:cs typeface="Arial"/>
               </a:rPr>
               <a:t>Đọc biểu đồ rừng trong bốn bước</a:t>
             </a:r>
@@ -21019,8 +20875,8 @@
                 <a:solidFill>
                   <a:srgbClr val="FFFFFF"/>
                 </a:solidFill>
-                <a:latin typeface="Segoe UI"/>
-                <a:cs typeface="Segoe UI"/>
+                <a:latin typeface="Arial"/>
+                <a:cs typeface="Arial"/>
               </a:rPr>
               <a:t>THÔNG ĐIỆP CHÍNH   </a:t>
             </a:r>
@@ -21029,8 +20885,8 @@
                 <a:solidFill>
                   <a:srgbClr val="FFFFFF"/>
                 </a:solidFill>
-                <a:latin typeface="Segoe UI"/>
-                <a:cs typeface="Segoe UI"/>
+                <a:latin typeface="Arial"/>
+                <a:cs typeface="Arial"/>
               </a:rPr>
               <a:t>Ô vuông = nghiên cứu, đường ngang = KTC, hình thoi = kết quả gộp, đường dọc = không tác động.</a:t>
             </a:r>
@@ -21067,7 +20923,7 @@
                     <a:lumMod val="50000"/>
                   </a:schemeClr>
                 </a:solidFill>
-                <a:latin typeface="Verdana"/>
+                <a:latin typeface="Arial"/>
               </a:rPr>
               <a:t>Neudata | #ClearDataClearImpact</a:t>
             </a:r>
@@ -21197,8 +21053,8 @@
                 <a:solidFill>
                   <a:srgbClr val="0D7377"/>
                 </a:solidFill>
-                <a:latin typeface="Segoe UI"/>
-                <a:cs typeface="Segoe UI"/>
+                <a:latin typeface="Arial"/>
+                <a:cs typeface="Arial"/>
               </a:rPr>
               <a:t>Tính không đồng nhất: các nghiên cứu có thống nhất?</a:t>
             </a:r>
@@ -21294,8 +21150,8 @@
                 <a:solidFill>
                   <a:srgbClr val="FFFFFF"/>
                 </a:solidFill>
-                <a:latin typeface="Segoe UI"/>
-                <a:cs typeface="Segoe UI"/>
+                <a:latin typeface="Arial"/>
+                <a:cs typeface="Arial"/>
               </a:rPr>
               <a:t>THÔNG ĐIỆP CHÍNH   </a:t>
             </a:r>
@@ -21304,8 +21160,8 @@
                 <a:solidFill>
                   <a:srgbClr val="FFFFFF"/>
                 </a:solidFill>
-                <a:latin typeface="Segoe UI"/>
-                <a:cs typeface="Segoe UI"/>
+                <a:latin typeface="Arial"/>
+                <a:cs typeface="Arial"/>
               </a:rPr>
               <a:t>I bình phương cao nghĩa là các nghiên cứu bất đồng: tìm lý do trước khi tin hình thoi.</a:t>
             </a:r>
@@ -21342,7 +21198,7 @@
                     <a:lumMod val="50000"/>
                   </a:schemeClr>
                 </a:solidFill>
-                <a:latin typeface="Verdana"/>
+                <a:latin typeface="Arial"/>
               </a:rPr>
               <a:t>Neudata | #ClearDataClearImpact</a:t>
             </a:r>
@@ -21472,8 +21328,8 @@
                 <a:solidFill>
                   <a:srgbClr val="0D7377"/>
                 </a:solidFill>
-                <a:latin typeface="Segoe UI"/>
-                <a:cs typeface="Segoe UI"/>
+                <a:latin typeface="Arial"/>
+                <a:cs typeface="Arial"/>
               </a:rPr>
               <a:t>Công cụ đánh giá nguy cơ sai lệch nào cho thiết kế nào?</a:t>
             </a:r>
@@ -21569,8 +21425,8 @@
                 <a:solidFill>
                   <a:srgbClr val="FFFFFF"/>
                 </a:solidFill>
-                <a:latin typeface="Segoe UI"/>
-                <a:cs typeface="Segoe UI"/>
+                <a:latin typeface="Arial"/>
+                <a:cs typeface="Arial"/>
               </a:rPr>
               <a:t>THÔNG ĐIỆP CHÍNH   </a:t>
             </a:r>
@@ -21579,8 +21435,8 @@
                 <a:solidFill>
                   <a:srgbClr val="FFFFFF"/>
                 </a:solidFill>
-                <a:latin typeface="Segoe UI"/>
-                <a:cs typeface="Segoe UI"/>
+                <a:latin typeface="Arial"/>
+                <a:cs typeface="Arial"/>
               </a:rPr>
               <a:t>Chọn công cụ thẩm định phù hợp với thiết kế, và cả hướng dẫn báo cáo.</a:t>
             </a:r>
@@ -21617,7 +21473,7 @@
                     <a:lumMod val="50000"/>
                   </a:schemeClr>
                 </a:solidFill>
-                <a:latin typeface="Verdana"/>
+                <a:latin typeface="Arial"/>
               </a:rPr>
               <a:t>Neudata | #ClearDataClearImpact</a:t>
             </a:r>
@@ -21747,8 +21603,8 @@
                 <a:solidFill>
                   <a:srgbClr val="0D7377"/>
                 </a:solidFill>
-                <a:latin typeface="Segoe UI"/>
-                <a:cs typeface="Segoe UI"/>
+                <a:latin typeface="Arial"/>
+                <a:cs typeface="Arial"/>
               </a:rPr>
               <a:t>4.1  Sai lệch, yếu tố nhiễu và nhân quả</a:t>
             </a:r>
@@ -21817,8 +21673,8 @@
                 <a:solidFill>
                   <a:srgbClr val="0D7377"/>
                 </a:solidFill>
-                <a:latin typeface="Segoe UI"/>
-                <a:cs typeface="Segoe UI"/>
+                <a:latin typeface="Arial"/>
+                <a:cs typeface="Arial"/>
               </a:rPr>
               <a:t>Sai lệch là sai số hệ thống. Tăng cỡ mẫu không sửa được.</a:t>
             </a:r>
@@ -21835,8 +21691,8 @@
                 <a:solidFill>
                   <a:srgbClr val="595959"/>
                 </a:solidFill>
-                <a:latin typeface="Segoe UI"/>
-                <a:cs typeface="Segoe UI"/>
+                <a:latin typeface="Arial"/>
+                <a:cs typeface="Arial"/>
               </a:rPr>
               <a:t>Chọn lựa, thông tin, yếu tố nhiễu, thay đổi tác động, và từ liên quan đến nhân quả. (40 phút)</a:t>
             </a:r>
@@ -21873,7 +21729,7 @@
                     <a:lumMod val="50000"/>
                   </a:schemeClr>
                 </a:solidFill>
-                <a:latin typeface="Verdana"/>
+                <a:latin typeface="Arial"/>
               </a:rPr>
               <a:t>Neudata | #ClearDataClearImpact</a:t>
             </a:r>
@@ -22003,8 +21859,8 @@
                 <a:solidFill>
                   <a:srgbClr val="0D7377"/>
                 </a:solidFill>
-                <a:latin typeface="Segoe UI"/>
-                <a:cs typeface="Segoe UI"/>
+                <a:latin typeface="Arial"/>
+                <a:cs typeface="Arial"/>
               </a:rPr>
               <a:t>Câu hỏi cuối: kết luận có được dữ liệu ủng hộ?</a:t>
             </a:r>
@@ -22070,8 +21926,8 @@
                 <a:solidFill>
                   <a:srgbClr val="595959"/>
                 </a:solidFill>
-                <a:latin typeface="Segoe UI"/>
-                <a:cs typeface="Segoe UI"/>
+                <a:latin typeface="Arial"/>
+                <a:cs typeface="Arial"/>
               </a:rPr>
               <a:t>Câu 7-9 trong bảng kiểm thẩm định 10 câu của khóa học (Buổi 8)</a:t>
             </a:r>
@@ -22113,8 +21969,8 @@
                 <a:solidFill>
                   <a:srgbClr val="FFFFFF"/>
                 </a:solidFill>
-                <a:latin typeface="Segoe UI"/>
-                <a:cs typeface="Segoe UI"/>
+                <a:latin typeface="Arial"/>
+                <a:cs typeface="Arial"/>
               </a:rPr>
               <a:t>Lời lẽ khớp thiết kế</a:t>
             </a:r>
@@ -22162,8 +22018,8 @@
                 <a:solidFill>
                   <a:srgbClr val="000000"/>
                 </a:solidFill>
-                <a:latin typeface="Segoe UI"/>
-                <a:cs typeface="Segoe UI"/>
+                <a:latin typeface="Arial"/>
+                <a:cs typeface="Arial"/>
               </a:rPr>
               <a:t>'Gây ra' cần ngẫu nhiên hóa</a:t>
             </a:r>
@@ -22183,8 +22039,8 @@
                 <a:solidFill>
                   <a:srgbClr val="000000"/>
                 </a:solidFill>
-                <a:latin typeface="Segoe UI"/>
-                <a:cs typeface="Segoe UI"/>
+                <a:latin typeface="Arial"/>
+                <a:cs typeface="Arial"/>
               </a:rPr>
               <a:t>Quan sát: 'có liên quan với'</a:t>
             </a:r>
@@ -22204,8 +22060,8 @@
                 <a:solidFill>
                   <a:srgbClr val="000000"/>
                 </a:solidFill>
-                <a:latin typeface="Segoe UI"/>
-                <a:cs typeface="Segoe UI"/>
+                <a:latin typeface="Arial"/>
+                <a:cs typeface="Arial"/>
               </a:rPr>
               <a:t>Thí điểm: khả thi, không phải hiệu quả</a:t>
             </a:r>
@@ -22247,8 +22103,8 @@
                 <a:solidFill>
                   <a:srgbClr val="FFFFFF"/>
                 </a:solidFill>
-                <a:latin typeface="Segoe UI"/>
-                <a:cs typeface="Segoe UI"/>
+                <a:latin typeface="Arial"/>
+                <a:cs typeface="Arial"/>
               </a:rPr>
               <a:t>Con số khớp lời lẽ</a:t>
             </a:r>
@@ -22296,8 +22152,8 @@
                 <a:solidFill>
                   <a:srgbClr val="000000"/>
                 </a:solidFill>
-                <a:latin typeface="Segoe UI"/>
-                <a:cs typeface="Segoe UI"/>
+                <a:latin typeface="Arial"/>
+                <a:cs typeface="Arial"/>
               </a:rPr>
               <a:t>Cỡ tác động kèm KTC 95%</a:t>
             </a:r>
@@ -22317,8 +22173,8 @@
                 <a:solidFill>
                   <a:srgbClr val="000000"/>
                 </a:solidFill>
-                <a:latin typeface="Segoe UI"/>
-                <a:cs typeface="Segoe UI"/>
+                <a:latin typeface="Arial"/>
+                <a:cs typeface="Arial"/>
               </a:rPr>
               <a:t>Tương đối VÀ tuyệt đối</a:t>
             </a:r>
@@ -22338,8 +22194,8 @@
                 <a:solidFill>
                   <a:srgbClr val="000000"/>
                 </a:solidFill>
-                <a:latin typeface="Segoe UI"/>
-                <a:cs typeface="Segoe UI"/>
+                <a:latin typeface="Arial"/>
+                <a:cs typeface="Arial"/>
               </a:rPr>
               <a:t>Không 'xu hướng' khi p = 0,42</a:t>
             </a:r>
@@ -22381,8 +22237,8 @@
                 <a:solidFill>
                   <a:srgbClr val="FFFFFF"/>
                 </a:solidFill>
-                <a:latin typeface="Segoe UI"/>
-                <a:cs typeface="Segoe UI"/>
+                <a:latin typeface="Arial"/>
+                <a:cs typeface="Arial"/>
               </a:rPr>
               <a:t>Trung thực, không tô vẽ</a:t>
             </a:r>
@@ -22430,8 +22286,8 @@
                 <a:solidFill>
                   <a:srgbClr val="000000"/>
                 </a:solidFill>
-                <a:latin typeface="Segoe UI"/>
-                <a:cs typeface="Segoe UI"/>
+                <a:latin typeface="Arial"/>
+                <a:cs typeface="Arial"/>
               </a:rPr>
               <a:t>Kết cục chính báo cáo trước</a:t>
             </a:r>
@@ -22451,8 +22307,8 @@
                 <a:solidFill>
                   <a:srgbClr val="000000"/>
                 </a:solidFill>
-                <a:latin typeface="Segoe UI"/>
-                <a:cs typeface="Segoe UI"/>
+                <a:latin typeface="Arial"/>
+                <a:cs typeface="Arial"/>
               </a:rPr>
               <a:t>Nêu rõ hạn chế chính</a:t>
             </a:r>
@@ -22472,8 +22328,8 @@
                 <a:solidFill>
                   <a:srgbClr val="000000"/>
                 </a:solidFill>
-                <a:latin typeface="Segoe UI"/>
-                <a:cs typeface="Segoe UI"/>
+                <a:latin typeface="Arial"/>
+                <a:cs typeface="Arial"/>
               </a:rPr>
               <a:t>Kết luận = kết quả chính</a:t>
             </a:r>
@@ -22517,8 +22373,8 @@
                 <a:solidFill>
                   <a:srgbClr val="FFFFFF"/>
                 </a:solidFill>
-                <a:latin typeface="Segoe UI"/>
-                <a:cs typeface="Segoe UI"/>
+                <a:latin typeface="Arial"/>
+                <a:cs typeface="Arial"/>
               </a:rPr>
               <a:t>THÔNG ĐIỆP CHÍNH   </a:t>
             </a:r>
@@ -22527,8 +22383,8 @@
                 <a:solidFill>
                   <a:srgbClr val="FFFFFF"/>
                 </a:solidFill>
-                <a:latin typeface="Segoe UI"/>
-                <a:cs typeface="Segoe UI"/>
+                <a:latin typeface="Arial"/>
+                <a:cs typeface="Arial"/>
               </a:rPr>
               <a:t>Đọc kết luận sau cùng, và đối chiếu với thiết kế và con số.</a:t>
             </a:r>
@@ -22565,7 +22421,7 @@
                     <a:lumMod val="50000"/>
                   </a:schemeClr>
                 </a:solidFill>
-                <a:latin typeface="Verdana"/>
+                <a:latin typeface="Arial"/>
               </a:rPr>
               <a:t>Neudata | #ClearDataClearImpact</a:t>
             </a:r>
@@ -22695,8 +22551,8 @@
                 <a:solidFill>
                   <a:srgbClr val="0D7377"/>
                 </a:solidFill>
-                <a:latin typeface="Segoe UI"/>
-                <a:cs typeface="Segoe UI"/>
+                <a:latin typeface="Arial"/>
+                <a:cs typeface="Arial"/>
               </a:rPr>
               <a:t>Làm theo cặp: đọc biểu đồ rừng, chọn công cụ</a:t>
             </a:r>
@@ -22766,8 +22622,8 @@
                 <a:solidFill>
                   <a:srgbClr val="FFFFFF"/>
                 </a:solidFill>
-                <a:latin typeface="Segoe UI"/>
-                <a:cs typeface="Segoe UI"/>
+                <a:latin typeface="Arial"/>
+                <a:cs typeface="Arial"/>
               </a:rPr>
               <a:t>THẢO LUẬN   |   6 phút</a:t>
             </a:r>
@@ -22804,25 +22660,19 @@
               <a:spcBef>
                 <a:spcPts val="450"/>
               </a:spcBef>
-              <a:buNone/>
-            </a:pPr>
-            <a:r>
-              <a:rPr lang="en-US" sz="1650" b="1" dirty="0">
-                <a:solidFill>
-                  <a:srgbClr val="1F5C7A"/>
-                </a:solidFill>
-                <a:latin typeface="Segoe UI"/>
-                <a:cs typeface="Segoe UI"/>
-              </a:rPr>
-              <a:t>1.  </a:t>
-            </a:r>
+              <a:buClr>
+                <a:srgbClr val="1F5C7A"/>
+              </a:buClr>
+              <a:buFont typeface="Arial"/>
+              <a:buChar char="•"/>
+            </a:pPr>
             <a:r>
               <a:rPr lang="en-US" sz="1650" dirty="0">
                 <a:solidFill>
                   <a:srgbClr val="000000"/>
                 </a:solidFill>
-                <a:latin typeface="Segoe UI"/>
-                <a:cs typeface="Segoe UI"/>
+                <a:latin typeface="Arial"/>
+                <a:cs typeface="Arial"/>
               </a:rPr>
               <a:t>Tài liệu Phần E: biểu đồ rừng của sáu thử nghiệm về dịch truyền</a:t>
             </a:r>
@@ -22835,25 +22685,19 @@
               <a:spcBef>
                 <a:spcPts val="450"/>
               </a:spcBef>
-              <a:buNone/>
-            </a:pPr>
-            <a:r>
-              <a:rPr lang="en-US" sz="1650" b="1" dirty="0">
-                <a:solidFill>
-                  <a:srgbClr val="1F5C7A"/>
-                </a:solidFill>
-                <a:latin typeface="Segoe UI"/>
-                <a:cs typeface="Segoe UI"/>
-              </a:rPr>
-              <a:t>2.  </a:t>
-            </a:r>
+              <a:buClr>
+                <a:srgbClr val="1F5C7A"/>
+              </a:buClr>
+              <a:buFont typeface="Arial"/>
+              <a:buChar char="•"/>
+            </a:pPr>
             <a:r>
               <a:rPr lang="en-US" sz="1650" dirty="0">
                 <a:solidFill>
                   <a:srgbClr val="000000"/>
                 </a:solidFill>
-                <a:latin typeface="Segoe UI"/>
-                <a:cs typeface="Segoe UI"/>
+                <a:latin typeface="Arial"/>
+                <a:cs typeface="Arial"/>
               </a:rPr>
               <a:t>Thử nghiệm nào có trọng số lớn nhất? Có thử nghiệm riêng lẻ nào cho tác động rõ không?</a:t>
             </a:r>
@@ -22866,25 +22710,19 @@
               <a:spcBef>
                 <a:spcPts val="450"/>
               </a:spcBef>
-              <a:buNone/>
-            </a:pPr>
-            <a:r>
-              <a:rPr lang="en-US" sz="1650" b="1" dirty="0">
-                <a:solidFill>
-                  <a:srgbClr val="1F5C7A"/>
-                </a:solidFill>
-                <a:latin typeface="Segoe UI"/>
-                <a:cs typeface="Segoe UI"/>
-              </a:rPr>
-              <a:t>3.  </a:t>
-            </a:r>
+              <a:buClr>
+                <a:srgbClr val="1F5C7A"/>
+              </a:buClr>
+              <a:buFont typeface="Arial"/>
+              <a:buChar char="•"/>
+            </a:pPr>
             <a:r>
               <a:rPr lang="en-US" sz="1650" dirty="0">
                 <a:solidFill>
                   <a:srgbClr val="000000"/>
                 </a:solidFill>
-                <a:latin typeface="Segoe UI"/>
-                <a:cs typeface="Segoe UI"/>
+                <a:latin typeface="Arial"/>
+                <a:cs typeface="Arial"/>
               </a:rPr>
               <a:t>Hình thoi có cắt RR = 1 không? Nói kết quả bằng một câu</a:t>
             </a:r>
@@ -22897,25 +22735,19 @@
               <a:spcBef>
                 <a:spcPts val="450"/>
               </a:spcBef>
-              <a:buNone/>
-            </a:pPr>
-            <a:r>
-              <a:rPr lang="en-US" sz="1650" b="1" dirty="0">
-                <a:solidFill>
-                  <a:srgbClr val="1F5C7A"/>
-                </a:solidFill>
-                <a:latin typeface="Segoe UI"/>
-                <a:cs typeface="Segoe UI"/>
-              </a:rPr>
-              <a:t>4.  </a:t>
-            </a:r>
+              <a:buClr>
+                <a:srgbClr val="1F5C7A"/>
+              </a:buClr>
+              <a:buFont typeface="Arial"/>
+              <a:buChar char="•"/>
+            </a:pPr>
             <a:r>
               <a:rPr lang="en-US" sz="1650" dirty="0">
                 <a:solidFill>
                   <a:srgbClr val="000000"/>
                 </a:solidFill>
-                <a:latin typeface="Segoe UI"/>
-                <a:cs typeface="Segoe UI"/>
+                <a:latin typeface="Arial"/>
+                <a:cs typeface="Arial"/>
               </a:rPr>
               <a:t>Chọn công cụ đánh giá sai lệch cho Boulet, cho Hyun và cho một tổng quan về dịch truyền</a:t>
             </a:r>
@@ -22959,8 +22791,8 @@
                 <a:solidFill>
                   <a:srgbClr val="1F5C7A"/>
                 </a:solidFill>
-                <a:latin typeface="Segoe UI"/>
-                <a:cs typeface="Segoe UI"/>
+                <a:latin typeface="Arial"/>
+                <a:cs typeface="Arial"/>
               </a:rPr>
               <a:t>Nhắc lại</a:t>
             </a:r>
@@ -22981,8 +22813,8 @@
                 <a:solidFill>
                   <a:srgbClr val="000000"/>
                 </a:solidFill>
-                <a:latin typeface="Segoe UI"/>
-                <a:cs typeface="Segoe UI"/>
+                <a:latin typeface="Arial"/>
+                <a:cs typeface="Arial"/>
               </a:rPr>
               <a:t>Ô vuông = một nghiên cứu</a:t>
             </a:r>
@@ -23003,8 +22835,8 @@
                 <a:solidFill>
                   <a:srgbClr val="000000"/>
                 </a:solidFill>
-                <a:latin typeface="Segoe UI"/>
-                <a:cs typeface="Segoe UI"/>
+                <a:latin typeface="Arial"/>
+                <a:cs typeface="Arial"/>
               </a:rPr>
               <a:t>Đường ngang = KTC 95%</a:t>
             </a:r>
@@ -23025,8 +22857,8 @@
                 <a:solidFill>
                   <a:srgbClr val="000000"/>
                 </a:solidFill>
-                <a:latin typeface="Segoe UI"/>
-                <a:cs typeface="Segoe UI"/>
+                <a:latin typeface="Arial"/>
+                <a:cs typeface="Arial"/>
               </a:rPr>
               <a:t>Hình thoi = kết quả gộp</a:t>
             </a:r>
@@ -23047,8 +22879,8 @@
                 <a:solidFill>
                   <a:srgbClr val="000000"/>
                 </a:solidFill>
-                <a:latin typeface="Segoe UI"/>
-                <a:cs typeface="Segoe UI"/>
+                <a:latin typeface="Arial"/>
+                <a:cs typeface="Arial"/>
               </a:rPr>
               <a:t>RoB 2, ROBINS-I, NOS, QUADAS-2, AMSTAR 2</a:t>
             </a:r>
@@ -23094,8 +22926,8 @@
                 <a:solidFill>
                   <a:srgbClr val="1F5C7A"/>
                 </a:solidFill>
-                <a:latin typeface="Segoe UI"/>
-                <a:cs typeface="Segoe UI"/>
+                <a:latin typeface="Arial"/>
+                <a:cs typeface="Arial"/>
               </a:rPr>
               <a:t>SẢN PHẨM   </a:t>
             </a:r>
@@ -23104,8 +22936,8 @@
                 <a:solidFill>
                   <a:srgbClr val="000000"/>
                 </a:solidFill>
-                <a:latin typeface="Segoe UI"/>
-                <a:cs typeface="Segoe UI"/>
+                <a:latin typeface="Arial"/>
+                <a:cs typeface="Arial"/>
               </a:rPr>
               <a:t>Một câu về kết quả gộp + ba công cụ được gọi tên</a:t>
             </a:r>
@@ -23142,7 +22974,7 @@
                     <a:lumMod val="50000"/>
                   </a:schemeClr>
                 </a:solidFill>
-                <a:latin typeface="Verdana"/>
+                <a:latin typeface="Arial"/>
               </a:rPr>
               <a:t>Neudata | #ClearDataClearImpact</a:t>
             </a:r>
@@ -23272,8 +23104,8 @@
                 <a:solidFill>
                   <a:srgbClr val="0D7377"/>
                 </a:solidFill>
-                <a:latin typeface="Segoe UI"/>
-                <a:cs typeface="Segoe UI"/>
+                <a:latin typeface="Arial"/>
+                <a:cs typeface="Arial"/>
               </a:rPr>
               <a:t>Kết cục: một kết cục chính, định nghĩa bằng cái gì, thế nào, khi nào</a:t>
             </a:r>
@@ -23369,8 +23201,8 @@
                 <a:solidFill>
                   <a:srgbClr val="FFFFFF"/>
                 </a:solidFill>
-                <a:latin typeface="Segoe UI"/>
-                <a:cs typeface="Segoe UI"/>
+                <a:latin typeface="Arial"/>
+                <a:cs typeface="Arial"/>
               </a:rPr>
               <a:t>THÔNG ĐIỆP CHÍNH   </a:t>
             </a:r>
@@ -23379,8 +23211,8 @@
                 <a:solidFill>
                   <a:srgbClr val="FFFFFF"/>
                 </a:solidFill>
-                <a:latin typeface="Segoe UI"/>
-                <a:cs typeface="Segoe UI"/>
+                <a:latin typeface="Arial"/>
+                <a:cs typeface="Arial"/>
               </a:rPr>
               <a:t>Kết cục chính không phải một từ; đó là một phép đo có phương pháp và thời điểm.</a:t>
             </a:r>
@@ -23417,7 +23249,7 @@
                     <a:lumMod val="50000"/>
                   </a:schemeClr>
                 </a:solidFill>
-                <a:latin typeface="Verdana"/>
+                <a:latin typeface="Arial"/>
               </a:rPr>
               <a:t>Neudata | #ClearDataClearImpact</a:t>
             </a:r>
@@ -23547,8 +23379,8 @@
                 <a:solidFill>
                   <a:srgbClr val="0D7377"/>
                 </a:solidFill>
-                <a:latin typeface="Segoe UI"/>
-                <a:cs typeface="Segoe UI"/>
+                <a:latin typeface="Arial"/>
+                <a:cs typeface="Arial"/>
               </a:rPr>
               <a:t>Xây dựng đề cương 4: phơi nhiễm, kết cục và sai lệch</a:t>
             </a:r>
@@ -23618,8 +23450,8 @@
                 <a:solidFill>
                   <a:srgbClr val="FFFFFF"/>
                 </a:solidFill>
-                <a:latin typeface="Segoe UI"/>
-                <a:cs typeface="Segoe UI"/>
+                <a:latin typeface="Arial"/>
+                <a:cs typeface="Arial"/>
               </a:rPr>
               <a:t>XÂY DỰNG ĐỀ CƯƠNG   |   30 phút</a:t>
             </a:r>
@@ -23656,25 +23488,19 @@
               <a:spcBef>
                 <a:spcPts val="450"/>
               </a:spcBef>
-              <a:buNone/>
-            </a:pPr>
-            <a:r>
-              <a:rPr lang="en-US" sz="1650" b="1" dirty="0">
-                <a:solidFill>
-                  <a:srgbClr val="055F56"/>
-                </a:solidFill>
-                <a:latin typeface="Segoe UI"/>
-                <a:cs typeface="Segoe UI"/>
-              </a:rPr>
-              <a:t>1.  </a:t>
-            </a:r>
+              <a:buClr>
+                <a:srgbClr val="055F56"/>
+              </a:buClr>
+              <a:buFont typeface="Arial"/>
+              <a:buChar char="•"/>
+            </a:pPr>
             <a:r>
               <a:rPr lang="en-US" sz="1650" dirty="0">
                 <a:solidFill>
                   <a:srgbClr val="000000"/>
                 </a:solidFill>
-                <a:latin typeface="Segoe UI"/>
-                <a:cs typeface="Segoe UI"/>
+                <a:latin typeface="Arial"/>
+                <a:cs typeface="Arial"/>
               </a:rPr>
               <a:t>Phơi nhiễm hoặc can thiệp: chính xác là gì, bao nhiêu, khi nào</a:t>
             </a:r>
@@ -23687,25 +23513,19 @@
               <a:spcBef>
                 <a:spcPts val="450"/>
               </a:spcBef>
-              <a:buNone/>
-            </a:pPr>
-            <a:r>
-              <a:rPr lang="en-US" sz="1650" b="1" dirty="0">
-                <a:solidFill>
-                  <a:srgbClr val="055F56"/>
-                </a:solidFill>
-                <a:latin typeface="Segoe UI"/>
-                <a:cs typeface="Segoe UI"/>
-              </a:rPr>
-              <a:t>2.  </a:t>
-            </a:r>
+              <a:buClr>
+                <a:srgbClr val="055F56"/>
+              </a:buClr>
+              <a:buFont typeface="Arial"/>
+              <a:buChar char="•"/>
+            </a:pPr>
             <a:r>
               <a:rPr lang="en-US" sz="1650" dirty="0">
                 <a:solidFill>
                   <a:srgbClr val="000000"/>
                 </a:solidFill>
-                <a:latin typeface="Segoe UI"/>
-                <a:cs typeface="Segoe UI"/>
+                <a:latin typeface="Arial"/>
+                <a:cs typeface="Arial"/>
               </a:rPr>
               <a:t>Nhóm so sánh: so sánh với ai hoặc với điều gì</a:t>
             </a:r>
@@ -23718,25 +23538,19 @@
               <a:spcBef>
                 <a:spcPts val="450"/>
               </a:spcBef>
-              <a:buNone/>
-            </a:pPr>
-            <a:r>
-              <a:rPr lang="en-US" sz="1650" b="1" dirty="0">
-                <a:solidFill>
-                  <a:srgbClr val="055F56"/>
-                </a:solidFill>
-                <a:latin typeface="Segoe UI"/>
-                <a:cs typeface="Segoe UI"/>
-              </a:rPr>
-              <a:t>3.  </a:t>
-            </a:r>
+              <a:buClr>
+                <a:srgbClr val="055F56"/>
+              </a:buClr>
+              <a:buFont typeface="Arial"/>
+              <a:buChar char="•"/>
+            </a:pPr>
             <a:r>
               <a:rPr lang="en-US" sz="1650" dirty="0">
                 <a:solidFill>
                   <a:srgbClr val="000000"/>
                 </a:solidFill>
-                <a:latin typeface="Segoe UI"/>
-                <a:cs typeface="Segoe UI"/>
+                <a:latin typeface="Arial"/>
+                <a:cs typeface="Arial"/>
               </a:rPr>
               <a:t>MỘT kết cục chính: cái gì, thế nào, khi nào</a:t>
             </a:r>
@@ -23749,25 +23563,19 @@
               <a:spcBef>
                 <a:spcPts val="450"/>
               </a:spcBef>
-              <a:buNone/>
-            </a:pPr>
-            <a:r>
-              <a:rPr lang="en-US" sz="1650" b="1" dirty="0">
-                <a:solidFill>
-                  <a:srgbClr val="055F56"/>
-                </a:solidFill>
-                <a:latin typeface="Segoe UI"/>
-                <a:cs typeface="Segoe UI"/>
-              </a:rPr>
-              <a:t>4.  </a:t>
-            </a:r>
+              <a:buClr>
+                <a:srgbClr val="055F56"/>
+              </a:buClr>
+              <a:buFont typeface="Arial"/>
+              <a:buChar char="•"/>
+            </a:pPr>
             <a:r>
               <a:rPr lang="en-US" sz="1650" dirty="0">
                 <a:solidFill>
                   <a:srgbClr val="000000"/>
                 </a:solidFill>
-                <a:latin typeface="Segoe UI"/>
-                <a:cs typeface="Segoe UI"/>
+                <a:latin typeface="Arial"/>
+                <a:cs typeface="Arial"/>
               </a:rPr>
               <a:t>2-3 kết cục phụ, mỗi kết cục có cái gì, thế nào, khi nào</a:t>
             </a:r>
@@ -23780,25 +23588,19 @@
               <a:spcBef>
                 <a:spcPts val="450"/>
               </a:spcBef>
-              <a:buNone/>
-            </a:pPr>
-            <a:r>
-              <a:rPr lang="en-US" sz="1650" b="1" dirty="0">
-                <a:solidFill>
-                  <a:srgbClr val="055F56"/>
-                </a:solidFill>
-                <a:latin typeface="Segoe UI"/>
-                <a:cs typeface="Segoe UI"/>
-              </a:rPr>
-              <a:t>5.  </a:t>
-            </a:r>
+              <a:buClr>
+                <a:srgbClr val="055F56"/>
+              </a:buClr>
+              <a:buFont typeface="Arial"/>
+              <a:buChar char="•"/>
+            </a:pPr>
             <a:r>
               <a:rPr lang="en-US" sz="1650" dirty="0">
                 <a:solidFill>
                   <a:srgbClr val="000000"/>
                 </a:solidFill>
-                <a:latin typeface="Segoe UI"/>
-                <a:cs typeface="Segoe UI"/>
+                <a:latin typeface="Arial"/>
+                <a:cs typeface="Arial"/>
               </a:rPr>
               <a:t>Hai sai lệch chính và bước thiết kế làm giảm từng sai lệch</a:t>
             </a:r>
@@ -23811,25 +23613,19 @@
               <a:spcBef>
                 <a:spcPts val="450"/>
               </a:spcBef>
-              <a:buNone/>
-            </a:pPr>
-            <a:r>
-              <a:rPr lang="en-US" sz="1650" b="1" dirty="0">
-                <a:solidFill>
-                  <a:srgbClr val="055F56"/>
-                </a:solidFill>
-                <a:latin typeface="Segoe UI"/>
-                <a:cs typeface="Segoe UI"/>
-              </a:rPr>
-              <a:t>6.  </a:t>
-            </a:r>
+              <a:buClr>
+                <a:srgbClr val="055F56"/>
+              </a:buClr>
+              <a:buFont typeface="Arial"/>
+              <a:buChar char="•"/>
+            </a:pPr>
             <a:r>
               <a:rPr lang="en-US" sz="1650" dirty="0">
                 <a:solidFill>
                   <a:srgbClr val="000000"/>
                 </a:solidFill>
-                <a:latin typeface="Segoe UI"/>
-                <a:cs typeface="Segoe UI"/>
+                <a:latin typeface="Arial"/>
+                <a:cs typeface="Arial"/>
               </a:rPr>
               <a:t>Viết một câu: sẽ kết luận 'gây ra' hay 'có liên quan'?</a:t>
             </a:r>
@@ -23873,8 +23669,8 @@
                 <a:solidFill>
                   <a:srgbClr val="055F56"/>
                 </a:solidFill>
-                <a:latin typeface="Segoe UI"/>
-                <a:cs typeface="Segoe UI"/>
+                <a:latin typeface="Arial"/>
+                <a:cs typeface="Arial"/>
               </a:rPr>
               <a:t>Người hướng dẫn kiểm tra</a:t>
             </a:r>
@@ -23895,8 +23691,8 @@
                 <a:solidFill>
                   <a:srgbClr val="000000"/>
                 </a:solidFill>
-                <a:latin typeface="Segoe UI"/>
-                <a:cs typeface="Segoe UI"/>
+                <a:latin typeface="Arial"/>
+                <a:cs typeface="Arial"/>
               </a:rPr>
               <a:t>Có nêu nhóm so sánh?</a:t>
             </a:r>
@@ -23917,8 +23713,8 @@
                 <a:solidFill>
                   <a:srgbClr val="000000"/>
                 </a:solidFill>
-                <a:latin typeface="Segoe UI"/>
-                <a:cs typeface="Segoe UI"/>
+                <a:latin typeface="Arial"/>
+                <a:cs typeface="Arial"/>
               </a:rPr>
               <a:t>Chỉ MỘT kết cục chính?</a:t>
             </a:r>
@@ -23939,8 +23735,8 @@
                 <a:solidFill>
                   <a:srgbClr val="000000"/>
                 </a:solidFill>
-                <a:latin typeface="Segoe UI"/>
-                <a:cs typeface="Segoe UI"/>
+                <a:latin typeface="Arial"/>
+                <a:cs typeface="Arial"/>
               </a:rPr>
               <a:t>Kết cục có thời điểm?</a:t>
             </a:r>
@@ -23961,8 +23757,8 @@
                 <a:solidFill>
                   <a:srgbClr val="000000"/>
                 </a:solidFill>
-                <a:latin typeface="Segoe UI"/>
-                <a:cs typeface="Segoe UI"/>
+                <a:latin typeface="Arial"/>
+                <a:cs typeface="Arial"/>
               </a:rPr>
               <a:t>Nhiễu do chỉ định?</a:t>
             </a:r>
@@ -23983,8 +23779,8 @@
                 <a:solidFill>
                   <a:srgbClr val="000000"/>
                 </a:solidFill>
-                <a:latin typeface="Segoe UI"/>
-                <a:cs typeface="Segoe UI"/>
+                <a:latin typeface="Arial"/>
+                <a:cs typeface="Arial"/>
               </a:rPr>
               <a:t>Mỗi sai lệch có biện pháp cụ thể?</a:t>
             </a:r>
@@ -24030,8 +23826,8 @@
                 <a:solidFill>
                   <a:srgbClr val="055F56"/>
                 </a:solidFill>
-                <a:latin typeface="Segoe UI"/>
-                <a:cs typeface="Segoe UI"/>
+                <a:latin typeface="Arial"/>
+                <a:cs typeface="Arial"/>
               </a:rPr>
               <a:t>SẢN PHẨM   </a:t>
             </a:r>
@@ -24040,8 +23836,8 @@
                 <a:solidFill>
                   <a:srgbClr val="000000"/>
                 </a:solidFill>
-                <a:latin typeface="Segoe UI"/>
-                <a:cs typeface="Segoe UI"/>
+                <a:latin typeface="Arial"/>
+                <a:cs typeface="Arial"/>
               </a:rPr>
               <a:t>Phần 2 đề cương hoàn chỉnh (2a từ Buổi 3 + 2b hôm nay)</a:t>
             </a:r>
@@ -24078,7 +23874,7 @@
                     <a:lumMod val="50000"/>
                   </a:schemeClr>
                 </a:solidFill>
-                <a:latin typeface="Verdana"/>
+                <a:latin typeface="Arial"/>
               </a:rPr>
               <a:t>Neudata | #ClearDataClearImpact</a:t>
             </a:r>
@@ -24208,8 +24004,8 @@
                 <a:solidFill>
                   <a:srgbClr val="0D7377"/>
                 </a:solidFill>
-                <a:latin typeface="Segoe UI"/>
-                <a:cs typeface="Segoe UI"/>
+                <a:latin typeface="Arial"/>
+                <a:cs typeface="Arial"/>
               </a:rPr>
               <a:t>Buổi 4 trong một slide</a:t>
             </a:r>
@@ -24279,8 +24075,8 @@
                 <a:solidFill>
                   <a:srgbClr val="FFFFFF"/>
                 </a:solidFill>
-                <a:latin typeface="Segoe UI"/>
-                <a:cs typeface="Segoe UI"/>
+                <a:latin typeface="Arial"/>
+                <a:cs typeface="Arial"/>
               </a:rPr>
               <a:t>4.1 Tin cậy</a:t>
             </a:r>
@@ -24328,8 +24124,8 @@
                 <a:solidFill>
                   <a:srgbClr val="000000"/>
                 </a:solidFill>
-                <a:latin typeface="Segoe UI"/>
-                <a:cs typeface="Segoe UI"/>
+                <a:latin typeface="Arial"/>
+                <a:cs typeface="Arial"/>
               </a:rPr>
               <a:t>Sai lệch: cỡ mẫu không sửa</a:t>
             </a:r>
@@ -24349,8 +24145,8 @@
                 <a:solidFill>
                   <a:srgbClr val="000000"/>
                 </a:solidFill>
-                <a:latin typeface="Segoe UI"/>
-                <a:cs typeface="Segoe UI"/>
+                <a:latin typeface="Arial"/>
+                <a:cs typeface="Arial"/>
               </a:rPr>
               <a:t>Yếu tố nhiễu: loại bỏ</a:t>
             </a:r>
@@ -24370,8 +24166,8 @@
                 <a:solidFill>
                   <a:srgbClr val="000000"/>
                 </a:solidFill>
-                <a:latin typeface="Segoe UI"/>
-                <a:cs typeface="Segoe UI"/>
+                <a:latin typeface="Arial"/>
+                <a:cs typeface="Arial"/>
               </a:rPr>
               <a:t>Thay đổi tác động: báo cáo</a:t>
             </a:r>
@@ -24413,8 +24209,8 @@
                 <a:solidFill>
                   <a:srgbClr val="FFFFFF"/>
                 </a:solidFill>
-                <a:latin typeface="Segoe UI"/>
-                <a:cs typeface="Segoe UI"/>
+                <a:latin typeface="Arial"/>
+                <a:cs typeface="Arial"/>
               </a:rPr>
               <a:t>4.2 Độ lớn</a:t>
             </a:r>
@@ -24462,8 +24258,8 @@
                 <a:solidFill>
                   <a:srgbClr val="000000"/>
                 </a:solidFill>
-                <a:latin typeface="Segoe UI"/>
-                <a:cs typeface="Segoe UI"/>
+                <a:latin typeface="Arial"/>
+                <a:cs typeface="Arial"/>
               </a:rPr>
               <a:t>Tương đối: RR, OR</a:t>
             </a:r>
@@ -24483,8 +24279,8 @@
                 <a:solidFill>
                   <a:srgbClr val="000000"/>
                 </a:solidFill>
-                <a:latin typeface="Segoe UI"/>
-                <a:cs typeface="Segoe UI"/>
+                <a:latin typeface="Arial"/>
+                <a:cs typeface="Arial"/>
               </a:rPr>
               <a:t>Tuyệt đối: RD, NNT</a:t>
             </a:r>
@@ -24504,8 +24300,8 @@
                 <a:solidFill>
                   <a:srgbClr val="000000"/>
                 </a:solidFill>
-                <a:latin typeface="Segoe UI"/>
-                <a:cs typeface="Segoe UI"/>
+                <a:latin typeface="Arial"/>
+                <a:cs typeface="Arial"/>
               </a:rPr>
               <a:t>OR = RR chỉ khi hiếm</a:t>
             </a:r>
@@ -24547,8 +24343,8 @@
                 <a:solidFill>
                   <a:srgbClr val="FFFFFF"/>
                 </a:solidFill>
-                <a:latin typeface="Segoe UI"/>
-                <a:cs typeface="Segoe UI"/>
+                <a:latin typeface="Arial"/>
+                <a:cs typeface="Arial"/>
               </a:rPr>
               <a:t>4.3 Nhiều nghiên cứu</a:t>
             </a:r>
@@ -24596,8 +24392,8 @@
                 <a:solidFill>
                   <a:srgbClr val="000000"/>
                 </a:solidFill>
-                <a:latin typeface="Segoe UI"/>
-                <a:cs typeface="Segoe UI"/>
+                <a:latin typeface="Arial"/>
+                <a:cs typeface="Arial"/>
               </a:rPr>
               <a:t>PPV phụ thuộc hiện mắc</a:t>
             </a:r>
@@ -24617,8 +24413,8 @@
                 <a:solidFill>
                   <a:srgbClr val="000000"/>
                 </a:solidFill>
-                <a:latin typeface="Segoe UI"/>
-                <a:cs typeface="Segoe UI"/>
+                <a:latin typeface="Arial"/>
+                <a:cs typeface="Arial"/>
               </a:rPr>
               <a:t>Biểu đồ rừng: đọc hình thoi</a:t>
             </a:r>
@@ -24638,8 +24434,8 @@
                 <a:solidFill>
                   <a:srgbClr val="000000"/>
                 </a:solidFill>
-                <a:latin typeface="Segoe UI"/>
-                <a:cs typeface="Segoe UI"/>
+                <a:latin typeface="Arial"/>
+                <a:cs typeface="Arial"/>
               </a:rPr>
               <a:t>Đúng công cụ cho thiết kế</a:t>
             </a:r>
@@ -24681,8 +24477,8 @@
                 <a:solidFill>
                   <a:srgbClr val="FFFFFF"/>
                 </a:solidFill>
-                <a:latin typeface="Segoe UI"/>
-                <a:cs typeface="Segoe UI"/>
+                <a:latin typeface="Arial"/>
+                <a:cs typeface="Arial"/>
               </a:rPr>
               <a:t>Đề cương của bạn</a:t>
             </a:r>
@@ -24730,8 +24526,8 @@
                 <a:solidFill>
                   <a:srgbClr val="000000"/>
                 </a:solidFill>
-                <a:latin typeface="Segoe UI"/>
-                <a:cs typeface="Segoe UI"/>
+                <a:latin typeface="Arial"/>
+                <a:cs typeface="Arial"/>
               </a:rPr>
               <a:t>Phần 2 hoàn chỉnh</a:t>
             </a:r>
@@ -24751,8 +24547,8 @@
                 <a:solidFill>
                   <a:srgbClr val="000000"/>
                 </a:solidFill>
-                <a:latin typeface="Segoe UI"/>
-                <a:cs typeface="Segoe UI"/>
+                <a:latin typeface="Arial"/>
+                <a:cs typeface="Arial"/>
               </a:rPr>
               <a:t>Gây ra hay có liên quan?</a:t>
             </a:r>
@@ -24796,8 +24592,8 @@
                 <a:solidFill>
                   <a:srgbClr val="FFFFFF"/>
                 </a:solidFill>
-                <a:latin typeface="Segoe UI"/>
-                <a:cs typeface="Segoe UI"/>
+                <a:latin typeface="Arial"/>
+                <a:cs typeface="Arial"/>
               </a:rPr>
               <a:t>THÔNG ĐIỆP CHÍNH   </a:t>
             </a:r>
@@ -24806,8 +24602,8 @@
                 <a:solidFill>
                   <a:srgbClr val="FFFFFF"/>
                 </a:solidFill>
-                <a:latin typeface="Segoe UI"/>
-                <a:cs typeface="Segoe UI"/>
+                <a:latin typeface="Arial"/>
+                <a:cs typeface="Arial"/>
               </a:rPr>
               <a:t>Tin trước, rồi đến độ lớn, và kiểm tra lời lẽ có khớp với thiết kế.</a:t>
             </a:r>
@@ -24844,7 +24640,7 @@
                     <a:lumMod val="50000"/>
                   </a:schemeClr>
                 </a:solidFill>
-                <a:latin typeface="Verdana"/>
+                <a:latin typeface="Arial"/>
               </a:rPr>
               <a:t>Neudata | #ClearDataClearImpact</a:t>
             </a:r>
@@ -24974,8 +24770,8 @@
                 <a:solidFill>
                   <a:srgbClr val="0D7377"/>
                 </a:solidFill>
-                <a:latin typeface="Segoe UI"/>
-                <a:cs typeface="Segoe UI"/>
+                <a:latin typeface="Arial"/>
+                <a:cs typeface="Arial"/>
               </a:rPr>
               <a:t>Tổng kết và bài về nhà</a:t>
             </a:r>
@@ -25045,8 +24841,8 @@
                 <a:solidFill>
                   <a:srgbClr val="FFFFFF"/>
                 </a:solidFill>
-                <a:latin typeface="Segoe UI"/>
-                <a:cs typeface="Segoe UI"/>
+                <a:latin typeface="Arial"/>
+                <a:cs typeface="Arial"/>
               </a:rPr>
               <a:t>THẢO LUẬN   |   5 phút</a:t>
             </a:r>
@@ -25083,25 +24879,19 @@
               <a:spcBef>
                 <a:spcPts val="450"/>
               </a:spcBef>
-              <a:buNone/>
-            </a:pPr>
-            <a:r>
-              <a:rPr lang="en-US" sz="1650" b="1" dirty="0">
-                <a:solidFill>
-                  <a:srgbClr val="1F5C7A"/>
-                </a:solidFill>
-                <a:latin typeface="Segoe UI"/>
-                <a:cs typeface="Segoe UI"/>
-              </a:rPr>
-              <a:t>1.  </a:t>
-            </a:r>
+              <a:buClr>
+                <a:srgbClr val="1F5C7A"/>
+              </a:buClr>
+              <a:buFont typeface="Arial"/>
+              <a:buChar char="•"/>
+            </a:pPr>
             <a:r>
               <a:rPr lang="en-US" sz="1650" dirty="0">
                 <a:solidFill>
                   <a:srgbClr val="000000"/>
                 </a:solidFill>
-                <a:latin typeface="Segoe UI"/>
-                <a:cs typeface="Segoe UI"/>
+                <a:latin typeface="Arial"/>
+                <a:cs typeface="Arial"/>
               </a:rPr>
               <a:t>Câu hỏi cuối buổi: BN ICU được truyền nhiều dịch hơn tử vong nhiều hơn. Nêu một lý do khác ngoài bản thân dịch truyền</a:t>
             </a:r>
@@ -25114,25 +24904,19 @@
               <a:spcBef>
                 <a:spcPts val="450"/>
               </a:spcBef>
-              <a:buNone/>
-            </a:pPr>
-            <a:r>
-              <a:rPr lang="en-US" sz="1650" b="1" dirty="0">
-                <a:solidFill>
-                  <a:srgbClr val="1F5C7A"/>
-                </a:solidFill>
-                <a:latin typeface="Segoe UI"/>
-                <a:cs typeface="Segoe UI"/>
-              </a:rPr>
-              <a:t>2.  </a:t>
-            </a:r>
+              <a:buClr>
+                <a:srgbClr val="1F5C7A"/>
+              </a:buClr>
+              <a:buFont typeface="Arial"/>
+              <a:buChar char="•"/>
+            </a:pPr>
             <a:r>
               <a:rPr lang="en-US" sz="1650" dirty="0">
                 <a:solidFill>
                   <a:srgbClr val="000000"/>
                 </a:solidFill>
-                <a:latin typeface="Segoe UI"/>
-                <a:cs typeface="Segoe UI"/>
+                <a:latin typeface="Arial"/>
+                <a:cs typeface="Arial"/>
               </a:rPr>
               <a:t>Bài về nhà: hoàn thành Phần 2 đề cương (phơi nhiễm, so sánh, kết cục, sai lệch)</a:t>
             </a:r>
@@ -25145,25 +24929,19 @@
               <a:spcBef>
                 <a:spcPts val="450"/>
               </a:spcBef>
-              <a:buNone/>
-            </a:pPr>
-            <a:r>
-              <a:rPr lang="en-US" sz="1650" b="1" dirty="0">
-                <a:solidFill>
-                  <a:srgbClr val="1F5C7A"/>
-                </a:solidFill>
-                <a:latin typeface="Segoe UI"/>
-                <a:cs typeface="Segoe UI"/>
-              </a:rPr>
-              <a:t>3.  </a:t>
-            </a:r>
+              <a:buClr>
+                <a:srgbClr val="1F5C7A"/>
+              </a:buClr>
+              <a:buFont typeface="Arial"/>
+              <a:buChar char="•"/>
+            </a:pPr>
             <a:r>
               <a:rPr lang="en-US" sz="1650" dirty="0">
                 <a:solidFill>
                   <a:srgbClr val="000000"/>
                 </a:solidFill>
-                <a:latin typeface="Segoe UI"/>
-                <a:cs typeface="Segoe UI"/>
+                <a:latin typeface="Arial"/>
+                <a:cs typeface="Arial"/>
               </a:rPr>
               <a:t>Tùy chọn: Phần B và D của tài liệu (thay đổi tác động, PPV ở hai bối cảnh)</a:t>
             </a:r>
@@ -25176,25 +24954,19 @@
               <a:spcBef>
                 <a:spcPts val="450"/>
               </a:spcBef>
-              <a:buNone/>
-            </a:pPr>
-            <a:r>
-              <a:rPr lang="en-US" sz="1650" b="1" dirty="0">
-                <a:solidFill>
-                  <a:srgbClr val="1F5C7A"/>
-                </a:solidFill>
-                <a:latin typeface="Segoe UI"/>
-                <a:cs typeface="Segoe UI"/>
-              </a:rPr>
-              <a:t>4.  </a:t>
-            </a:r>
+              <a:buClr>
+                <a:srgbClr val="1F5C7A"/>
+              </a:buClr>
+              <a:buFont typeface="Arial"/>
+              <a:buChar char="•"/>
+            </a:pPr>
             <a:r>
               <a:rPr lang="en-US" sz="1650" dirty="0">
                 <a:solidFill>
                   <a:srgbClr val="000000"/>
                 </a:solidFill>
-                <a:latin typeface="Segoe UI"/>
-                <a:cs typeface="Segoe UI"/>
+                <a:latin typeface="Arial"/>
+                <a:cs typeface="Arial"/>
               </a:rPr>
               <a:t>Hai thứ Bảy tới (Buổi 5-6): dữ liệu và bộ dữ liệu khóa học FLUID-ICU</a:t>
             </a:r>
@@ -25240,8 +25012,8 @@
                 <a:solidFill>
                   <a:srgbClr val="1F5C7A"/>
                 </a:solidFill>
-                <a:latin typeface="Segoe UI"/>
-                <a:cs typeface="Segoe UI"/>
+                <a:latin typeface="Arial"/>
+                <a:cs typeface="Arial"/>
               </a:rPr>
               <a:t>SẢN PHẨM   </a:t>
             </a:r>
@@ -25250,8 +25022,8 @@
                 <a:solidFill>
                   <a:srgbClr val="000000"/>
                 </a:solidFill>
-                <a:latin typeface="Segoe UI"/>
-                <a:cs typeface="Segoe UI"/>
+                <a:latin typeface="Arial"/>
+                <a:cs typeface="Arial"/>
               </a:rPr>
               <a:t>Câu trả lời cuối buổi trên giấy dán</a:t>
             </a:r>
@@ -25288,7 +25060,7 @@
                     <a:lumMod val="50000"/>
                   </a:schemeClr>
                 </a:solidFill>
-                <a:latin typeface="Verdana"/>
+                <a:latin typeface="Arial"/>
               </a:rPr>
               <a:t>Neudata | #ClearDataClearImpact</a:t>
             </a:r>
@@ -25418,8 +25190,8 @@
                 <a:solidFill>
                   <a:srgbClr val="0D7377"/>
                 </a:solidFill>
-                <a:latin typeface="Segoe UI"/>
-                <a:cs typeface="Segoe UI"/>
+                <a:latin typeface="Arial"/>
+                <a:cs typeface="Arial"/>
               </a:rPr>
               <a:t>Slide bổ sung: Buổi 4</a:t>
             </a:r>
@@ -25488,8 +25260,8 @@
                 <a:solidFill>
                   <a:srgbClr val="0D7377"/>
                 </a:solidFill>
-                <a:latin typeface="Segoe UI"/>
-                <a:cs typeface="Segoe UI"/>
+                <a:latin typeface="Arial"/>
+                <a:cs typeface="Arial"/>
               </a:rPr>
               <a:t>Slide bổ sung: Buổi 4</a:t>
             </a:r>
@@ -25506,8 +25278,8 @@
                 <a:solidFill>
                   <a:srgbClr val="595959"/>
                 </a:solidFill>
-                <a:latin typeface="Segoe UI"/>
-                <a:cs typeface="Segoe UI"/>
+                <a:latin typeface="Arial"/>
+                <a:cs typeface="Arial"/>
               </a:rPr>
               <a:t>Dùng nếu còn thời gian, hoặc để tự học</a:t>
             </a:r>
@@ -25544,7 +25316,7 @@
                     <a:lumMod val="50000"/>
                   </a:schemeClr>
                 </a:solidFill>
-                <a:latin typeface="Verdana"/>
+                <a:latin typeface="Arial"/>
               </a:rPr>
               <a:t>Neudata | #ClearDataClearImpact</a:t>
             </a:r>
@@ -25674,8 +25446,8 @@
                 <a:solidFill>
                   <a:srgbClr val="0D7377"/>
                 </a:solidFill>
-                <a:latin typeface="Segoe UI"/>
-                <a:cs typeface="Segoe UI"/>
+                <a:latin typeface="Arial"/>
+                <a:cs typeface="Arial"/>
               </a:rPr>
               <a:t>Tỷ số khả dĩ và báo cáo nghiên cứu chẩn đoán</a:t>
             </a:r>
@@ -25741,8 +25513,8 @@
                 <a:solidFill>
                   <a:srgbClr val="595959"/>
                 </a:solidFill>
-                <a:latin typeface="Segoe UI"/>
-                <a:cs typeface="Segoe UI"/>
+                <a:latin typeface="Arial"/>
+                <a:cs typeface="Arial"/>
               </a:rPr>
               <a:t>Cùng xét nghiệm: độ nhạy 90%, độ đặc hiệu 80%</a:t>
             </a:r>
@@ -25784,8 +25556,8 @@
                 <a:solidFill>
                   <a:srgbClr val="FFFFFF"/>
                 </a:solidFill>
-                <a:latin typeface="Segoe UI"/>
-                <a:cs typeface="Segoe UI"/>
+                <a:latin typeface="Arial"/>
+                <a:cs typeface="Arial"/>
               </a:rPr>
               <a:t>LR+ (xét nghiệm dương)</a:t>
             </a:r>
@@ -25833,8 +25605,8 @@
                 <a:solidFill>
                   <a:srgbClr val="000000"/>
                 </a:solidFill>
-                <a:latin typeface="Segoe UI"/>
-                <a:cs typeface="Segoe UI"/>
+                <a:latin typeface="Arial"/>
+                <a:cs typeface="Arial"/>
               </a:rPr>
               <a:t>độ nhạy / (1 - độ đặc hiệu)</a:t>
             </a:r>
@@ -25854,8 +25626,8 @@
                 <a:solidFill>
                   <a:srgbClr val="000000"/>
                 </a:solidFill>
-                <a:latin typeface="Segoe UI"/>
-                <a:cs typeface="Segoe UI"/>
+                <a:latin typeface="Arial"/>
+                <a:cs typeface="Arial"/>
               </a:rPr>
               <a:t>0,90 / 0,20 = 4,5</a:t>
             </a:r>
@@ -25875,8 +25647,8 @@
                 <a:solidFill>
                   <a:srgbClr val="000000"/>
                 </a:solidFill>
-                <a:latin typeface="Segoe UI"/>
-                <a:cs typeface="Segoe UI"/>
+                <a:latin typeface="Arial"/>
+                <a:cs typeface="Arial"/>
               </a:rPr>
               <a:t>kết quả dương gặp ở người bệnh nhiều gấp 4,5 lần</a:t>
             </a:r>
@@ -25918,8 +25690,8 @@
                 <a:solidFill>
                   <a:srgbClr val="FFFFFF"/>
                 </a:solidFill>
-                <a:latin typeface="Segoe UI"/>
-                <a:cs typeface="Segoe UI"/>
+                <a:latin typeface="Arial"/>
+                <a:cs typeface="Arial"/>
               </a:rPr>
               <a:t>LR- (xét nghiệm âm)</a:t>
             </a:r>
@@ -25967,8 +25739,8 @@
                 <a:solidFill>
                   <a:srgbClr val="000000"/>
                 </a:solidFill>
-                <a:latin typeface="Segoe UI"/>
-                <a:cs typeface="Segoe UI"/>
+                <a:latin typeface="Arial"/>
+                <a:cs typeface="Arial"/>
               </a:rPr>
               <a:t>(1 - độ nhạy) / độ đặc hiệu</a:t>
             </a:r>
@@ -25988,8 +25760,8 @@
                 <a:solidFill>
                   <a:srgbClr val="000000"/>
                 </a:solidFill>
-                <a:latin typeface="Segoe UI"/>
-                <a:cs typeface="Segoe UI"/>
+                <a:latin typeface="Arial"/>
+                <a:cs typeface="Arial"/>
               </a:rPr>
               <a:t>0,10 / 0,80 = 0,13</a:t>
             </a:r>
@@ -26009,8 +25781,8 @@
                 <a:solidFill>
                   <a:srgbClr val="000000"/>
                 </a:solidFill>
-                <a:latin typeface="Segoe UI"/>
-                <a:cs typeface="Segoe UI"/>
+                <a:latin typeface="Arial"/>
+                <a:cs typeface="Arial"/>
               </a:rPr>
               <a:t>LR trên 10 hoặc dưới 0,1 thay đổi quyết định nhiều nhất</a:t>
             </a:r>
@@ -26052,8 +25824,8 @@
                 <a:solidFill>
                   <a:srgbClr val="FFFFFF"/>
                 </a:solidFill>
-                <a:latin typeface="Segoe UI"/>
-                <a:cs typeface="Segoe UI"/>
+                <a:latin typeface="Arial"/>
+                <a:cs typeface="Arial"/>
               </a:rPr>
               <a:t>Báo cáo và thẩm định</a:t>
             </a:r>
@@ -26101,8 +25873,8 @@
                 <a:solidFill>
                   <a:srgbClr val="000000"/>
                 </a:solidFill>
-                <a:latin typeface="Segoe UI"/>
-                <a:cs typeface="Segoe UI"/>
+                <a:latin typeface="Arial"/>
+                <a:cs typeface="Arial"/>
               </a:rPr>
               <a:t>STARD: bảng kiểm 30 mục + sơ đồ</a:t>
             </a:r>
@@ -26122,8 +25894,8 @@
                 <a:solidFill>
                   <a:srgbClr val="000000"/>
                 </a:solidFill>
-                <a:latin typeface="Segoe UI"/>
-                <a:cs typeface="Segoe UI"/>
+                <a:latin typeface="Arial"/>
+                <a:cs typeface="Arial"/>
               </a:rPr>
               <a:t>QUADAS-2: nguy cơ sai lệch</a:t>
             </a:r>
@@ -26143,8 +25915,8 @@
                 <a:solidFill>
                   <a:srgbClr val="000000"/>
                 </a:solidFill>
-                <a:latin typeface="Segoe UI"/>
-                <a:cs typeface="Segoe UI"/>
+                <a:latin typeface="Arial"/>
+                <a:cs typeface="Arial"/>
               </a:rPr>
               <a:t>Thử trên đúng BN sẽ dùng xét nghiệm</a:t>
             </a:r>
@@ -26188,8 +25960,8 @@
                 <a:solidFill>
                   <a:srgbClr val="FFFFFF"/>
                 </a:solidFill>
-                <a:latin typeface="Segoe UI"/>
-                <a:cs typeface="Segoe UI"/>
+                <a:latin typeface="Arial"/>
+                <a:cs typeface="Arial"/>
               </a:rPr>
               <a:t>THÔNG ĐIỆP CHÍNH   </a:t>
             </a:r>
@@ -26198,8 +25970,8 @@
                 <a:solidFill>
                   <a:srgbClr val="FFFFFF"/>
                 </a:solidFill>
-                <a:latin typeface="Segoe UI"/>
-                <a:cs typeface="Segoe UI"/>
+                <a:latin typeface="Arial"/>
+                <a:cs typeface="Arial"/>
               </a:rPr>
               <a:t>Tỷ số khả dĩ không đổi theo tỷ lệ hiện mắc; giá trị tiên đoán thì có.</a:t>
             </a:r>
@@ -26236,7 +26008,7 @@
                     <a:lumMod val="50000"/>
                   </a:schemeClr>
                 </a:solidFill>
-                <a:latin typeface="Verdana"/>
+                <a:latin typeface="Arial"/>
               </a:rPr>
               <a:t>Neudata | #ClearDataClearImpact</a:t>
             </a:r>
@@ -26366,8 +26138,8 @@
                 <a:solidFill>
                   <a:srgbClr val="0D7377"/>
                 </a:solidFill>
-                <a:latin typeface="Segoe UI"/>
-                <a:cs typeface="Segoe UI"/>
+                <a:latin typeface="Arial"/>
+                <a:cs typeface="Arial"/>
               </a:rPr>
               <a:t>Biểu đồ đèn giao thông RoB 2</a:t>
             </a:r>
@@ -26463,8 +26235,8 @@
                 <a:solidFill>
                   <a:srgbClr val="FFFFFF"/>
                 </a:solidFill>
-                <a:latin typeface="Segoe UI"/>
-                <a:cs typeface="Segoe UI"/>
+                <a:latin typeface="Arial"/>
+                <a:cs typeface="Arial"/>
               </a:rPr>
               <a:t>THÔNG ĐIỆP CHÍNH   </a:t>
             </a:r>
@@ -26473,8 +26245,8 @@
                 <a:solidFill>
                   <a:srgbClr val="FFFFFF"/>
                 </a:solidFill>
-                <a:latin typeface="Segoe UI"/>
-                <a:cs typeface="Segoe UI"/>
+                <a:latin typeface="Arial"/>
+                <a:cs typeface="Arial"/>
               </a:rPr>
               <a:t>Đánh giá từng lĩnh vực; nguy cơ chung do lĩnh vực xấu nhất quyết định.</a:t>
             </a:r>
@@ -26511,7 +26283,7 @@
                     <a:lumMod val="50000"/>
                   </a:schemeClr>
                 </a:solidFill>
-                <a:latin typeface="Verdana"/>
+                <a:latin typeface="Arial"/>
               </a:rPr>
               <a:t>Neudata | #ClearDataClearImpact</a:t>
             </a:r>
@@ -26641,8 +26413,8 @@
                 <a:solidFill>
                   <a:srgbClr val="0D7377"/>
                 </a:solidFill>
-                <a:latin typeface="Segoe UI"/>
-                <a:cs typeface="Segoe UI"/>
+                <a:latin typeface="Arial"/>
+                <a:cs typeface="Arial"/>
               </a:rPr>
               <a:t>Ví dụ: hiện mắc hay mới mắc?</a:t>
             </a:r>
@@ -26714,10 +26486,10 @@
                 <a:solidFill>
                   <a:srgbClr val="FFFFFF"/>
                 </a:solidFill>
-                <a:latin typeface="Segoe UI"/>
-                <a:cs typeface="Segoe UI"/>
-              </a:rPr>
-              <a:t>1. Hôm nay</a:t>
+                <a:latin typeface="Arial"/>
+                <a:cs typeface="Arial"/>
+              </a:rPr>
+              <a:t>Hôm nay</a:t>
             </a:r>
           </a:p>
         </p:txBody>
@@ -26763,8 +26535,8 @@
                 <a:solidFill>
                   <a:srgbClr val="000000"/>
                 </a:solidFill>
-                <a:latin typeface="Segoe UI"/>
-                <a:cs typeface="Segoe UI"/>
+                <a:latin typeface="Arial"/>
+                <a:cs typeface="Arial"/>
               </a:rPr>
               <a:t>200 BN ở khoa; 20 BN có loét tì đè</a:t>
             </a:r>
@@ -26784,8 +26556,8 @@
                 <a:solidFill>
                   <a:srgbClr val="000000"/>
                 </a:solidFill>
-                <a:latin typeface="Segoe UI"/>
-                <a:cs typeface="Segoe UI"/>
+                <a:latin typeface="Arial"/>
+                <a:cs typeface="Arial"/>
               </a:rPr>
               <a:t>Hiện mắc 10%</a:t>
             </a:r>
@@ -26829,10 +26601,10 @@
                 <a:solidFill>
                   <a:srgbClr val="FFFFFF"/>
                 </a:solidFill>
-                <a:latin typeface="Segoe UI"/>
-                <a:cs typeface="Segoe UI"/>
-              </a:rPr>
-              <a:t>2. Có nguy cơ</a:t>
+                <a:latin typeface="Arial"/>
+                <a:cs typeface="Arial"/>
+              </a:rPr>
+              <a:t>Có nguy cơ</a:t>
             </a:r>
           </a:p>
         </p:txBody>
@@ -26878,8 +26650,8 @@
                 <a:solidFill>
                   <a:srgbClr val="000000"/>
                 </a:solidFill>
-                <a:latin typeface="Segoe UI"/>
-                <a:cs typeface="Segoe UI"/>
+                <a:latin typeface="Arial"/>
+                <a:cs typeface="Arial"/>
               </a:rPr>
               <a:t>180 BN chưa bị loét</a:t>
             </a:r>
@@ -26923,10 +26695,10 @@
                 <a:solidFill>
                   <a:srgbClr val="FFFFFF"/>
                 </a:solidFill>
-                <a:latin typeface="Segoe UI"/>
-                <a:cs typeface="Segoe UI"/>
-              </a:rPr>
-              <a:t>3. Một tuần</a:t>
+                <a:latin typeface="Arial"/>
+                <a:cs typeface="Arial"/>
+              </a:rPr>
+              <a:t>Một tuần</a:t>
             </a:r>
           </a:p>
         </p:txBody>
@@ -26972,8 +26744,8 @@
                 <a:solidFill>
                   <a:srgbClr val="000000"/>
                 </a:solidFill>
-                <a:latin typeface="Segoe UI"/>
-                <a:cs typeface="Segoe UI"/>
+                <a:latin typeface="Arial"/>
+                <a:cs typeface="Arial"/>
               </a:rPr>
               <a:t>9 BN bị loét mới</a:t>
             </a:r>
@@ -27017,10 +26789,10 @@
                 <a:solidFill>
                   <a:srgbClr val="FFFFFF"/>
                 </a:solidFill>
-                <a:latin typeface="Segoe UI"/>
-                <a:cs typeface="Segoe UI"/>
-              </a:rPr>
-              <a:t>4. Mới mắc</a:t>
+                <a:latin typeface="Arial"/>
+                <a:cs typeface="Arial"/>
+              </a:rPr>
+              <a:t>Mới mắc</a:t>
             </a:r>
           </a:p>
         </p:txBody>
@@ -27066,8 +26838,8 @@
                 <a:solidFill>
                   <a:srgbClr val="000000"/>
                 </a:solidFill>
-                <a:latin typeface="Segoe UI"/>
-                <a:cs typeface="Segoe UI"/>
+                <a:latin typeface="Arial"/>
+                <a:cs typeface="Arial"/>
               </a:rPr>
               <a:t>9 / 180 = 5% mỗi tuần</a:t>
             </a:r>
@@ -27087,8 +26859,8 @@
                 <a:solidFill>
                   <a:srgbClr val="000000"/>
                 </a:solidFill>
-                <a:latin typeface="Segoe UI"/>
-                <a:cs typeface="Segoe UI"/>
+                <a:latin typeface="Arial"/>
+                <a:cs typeface="Arial"/>
               </a:rPr>
               <a:t>(mẫu số = người có nguy cơ)</a:t>
             </a:r>
@@ -27132,8 +26904,8 @@
                 <a:solidFill>
                   <a:srgbClr val="FFFFFF"/>
                 </a:solidFill>
-                <a:latin typeface="Segoe UI"/>
-                <a:cs typeface="Segoe UI"/>
+                <a:latin typeface="Arial"/>
+                <a:cs typeface="Arial"/>
               </a:rPr>
               <a:t>THÔNG ĐIỆP CHÍNH   </a:t>
             </a:r>
@@ -27142,8 +26914,8 @@
                 <a:solidFill>
                   <a:srgbClr val="FFFFFF"/>
                 </a:solidFill>
-                <a:latin typeface="Segoe UI"/>
-                <a:cs typeface="Segoe UI"/>
+                <a:latin typeface="Arial"/>
+                <a:cs typeface="Arial"/>
               </a:rPr>
               <a:t>Tỷ lệ mới mắc luôn có khoảng thời gian và chỉ tính người có nguy cơ.</a:t>
             </a:r>
@@ -27180,7 +26952,7 @@
                     <a:lumMod val="50000"/>
                   </a:schemeClr>
                 </a:solidFill>
-                <a:latin typeface="Verdana"/>
+                <a:latin typeface="Arial"/>
               </a:rPr>
               <a:t>Neudata | #ClearDataClearImpact</a:t>
             </a:r>
@@ -27310,8 +27082,8 @@
                 <a:solidFill>
                   <a:srgbClr val="0D7377"/>
                 </a:solidFill>
-                <a:latin typeface="Segoe UI"/>
-                <a:cs typeface="Segoe UI"/>
+                <a:latin typeface="Arial"/>
+                <a:cs typeface="Arial"/>
               </a:rPr>
               <a:t>Sai số ngẫu nhiên và sai lệch</a:t>
             </a:r>
@@ -27407,8 +27179,8 @@
                 <a:solidFill>
                   <a:srgbClr val="FFFFFF"/>
                 </a:solidFill>
-                <a:latin typeface="Segoe UI"/>
-                <a:cs typeface="Segoe UI"/>
+                <a:latin typeface="Arial"/>
+                <a:cs typeface="Arial"/>
               </a:rPr>
               <a:t>THÔNG ĐIỆP CHÍNH   </a:t>
             </a:r>
@@ -27417,8 +27189,8 @@
                 <a:solidFill>
                   <a:srgbClr val="FFFFFF"/>
                 </a:solidFill>
-                <a:latin typeface="Segoe UI"/>
-                <a:cs typeface="Segoe UI"/>
+                <a:latin typeface="Arial"/>
+                <a:cs typeface="Arial"/>
               </a:rPr>
               <a:t>Cỡ mẫu lớn làm giảm sai số ngẫu nhiên nhưng không động đến sai lệch.</a:t>
             </a:r>
@@ -27455,7 +27227,7 @@
                     <a:lumMod val="50000"/>
                   </a:schemeClr>
                 </a:solidFill>
-                <a:latin typeface="Verdana"/>
+                <a:latin typeface="Arial"/>
               </a:rPr>
               <a:t>Neudata | #ClearDataClearImpact</a:t>
             </a:r>
@@ -27609,8 +27381,8 @@
                 <a:solidFill>
                   <a:srgbClr val="4472C4"/>
                 </a:solidFill>
-                <a:latin typeface="Segoe UI"/>
-                <a:cs typeface="Segoe UI"/>
+                <a:latin typeface="Arial"/>
+                <a:cs typeface="Arial"/>
               </a:rPr>
               <a:t>Copyright © Neudata, 2026</a:t>
             </a:r>
@@ -27755,7 +27527,7 @@
                     <a:lumMod val="50000"/>
                   </a:schemeClr>
                 </a:solidFill>
-                <a:latin typeface="Verdana"/>
+                <a:latin typeface="Arial"/>
               </a:rPr>
               <a:t>Neudata | #ClearDataClearImpact</a:t>
             </a:r>
@@ -27861,8 +27633,8 @@
                 <a:solidFill>
                   <a:srgbClr val="0D7377"/>
                 </a:solidFill>
-                <a:latin typeface="Segoe UI"/>
-                <a:cs typeface="Segoe UI"/>
+                <a:latin typeface="Arial"/>
+                <a:cs typeface="Arial"/>
               </a:rPr>
               <a:t>Sai lệch chọn lựa: ai được đưa vào nghiên cứu?</a:t>
             </a:r>
@@ -27958,8 +27730,8 @@
                 <a:solidFill>
                   <a:srgbClr val="FFFFFF"/>
                 </a:solidFill>
-                <a:latin typeface="Segoe UI"/>
-                <a:cs typeface="Segoe UI"/>
+                <a:latin typeface="Arial"/>
+                <a:cs typeface="Arial"/>
               </a:rPr>
               <a:t>THÔNG ĐIỆP CHÍNH   </a:t>
             </a:r>
@@ -27968,8 +27740,8 @@
                 <a:solidFill>
                   <a:srgbClr val="FFFFFF"/>
                 </a:solidFill>
-                <a:latin typeface="Segoe UI"/>
-                <a:cs typeface="Segoe UI"/>
+                <a:latin typeface="Arial"/>
+                <a:cs typeface="Arial"/>
               </a:rPr>
               <a:t>Nếu mẫu khác quần thể đích, kết quả có thể không áp dụng được.</a:t>
             </a:r>
@@ -28006,7 +27778,7 @@
                     <a:lumMod val="50000"/>
                   </a:schemeClr>
                 </a:solidFill>
-                <a:latin typeface="Verdana"/>
+                <a:latin typeface="Arial"/>
               </a:rPr>
               <a:t>Neudata | #ClearDataClearImpact</a:t>
             </a:r>
@@ -28136,8 +27908,8 @@
                 <a:solidFill>
                   <a:srgbClr val="0D7377"/>
                 </a:solidFill>
-                <a:latin typeface="Segoe UI"/>
-                <a:cs typeface="Segoe UI"/>
+                <a:latin typeface="Arial"/>
+                <a:cs typeface="Arial"/>
               </a:rPr>
               <a:t>Sai lệch thông tin: mọi thứ được đo thế nào</a:t>
             </a:r>
@@ -28233,8 +28005,8 @@
                 <a:solidFill>
                   <a:srgbClr val="FFFFFF"/>
                 </a:solidFill>
-                <a:latin typeface="Segoe UI"/>
-                <a:cs typeface="Segoe UI"/>
+                <a:latin typeface="Arial"/>
+                <a:cs typeface="Arial"/>
               </a:rPr>
               <a:t>THÔNG ĐIỆP CHÍNH   </a:t>
             </a:r>
@@ -28243,8 +28015,8 @@
                 <a:solidFill>
                   <a:srgbClr val="FFFFFF"/>
                 </a:solidFill>
-                <a:latin typeface="Segoe UI"/>
-                <a:cs typeface="Segoe UI"/>
+                <a:latin typeface="Arial"/>
+                <a:cs typeface="Arial"/>
               </a:rPr>
               <a:t>Đo phơi nhiễm và kết cục theo cùng một cách ở mọi nhóm.</a:t>
             </a:r>
@@ -28281,7 +28053,7 @@
                     <a:lumMod val="50000"/>
                   </a:schemeClr>
                 </a:solidFill>
-                <a:latin typeface="Verdana"/>
+                <a:latin typeface="Arial"/>
               </a:rPr>
               <a:t>Neudata | #ClearDataClearImpact</a:t>
             </a:r>
@@ -28411,8 +28183,8 @@
                 <a:solidFill>
                   <a:srgbClr val="0D7377"/>
                 </a:solidFill>
-                <a:latin typeface="Segoe UI"/>
-                <a:cs typeface="Segoe UI"/>
+                <a:latin typeface="Arial"/>
+                <a:cs typeface="Arial"/>
               </a:rPr>
               <a:t>Kiểm tra nhanh: sai lệch nào?</a:t>
             </a:r>
@@ -28482,8 +28254,8 @@
                 <a:solidFill>
                   <a:srgbClr val="FFFFFF"/>
                 </a:solidFill>
-                <a:latin typeface="Segoe UI"/>
-                <a:cs typeface="Segoe UI"/>
+                <a:latin typeface="Arial"/>
+                <a:cs typeface="Arial"/>
               </a:rPr>
               <a:t>CÂU HỎI NHANH   |   2 phút</a:t>
             </a:r>
@@ -28520,25 +28292,19 @@
               <a:spcBef>
                 <a:spcPts val="450"/>
               </a:spcBef>
-              <a:buNone/>
-            </a:pPr>
-            <a:r>
-              <a:rPr lang="en-US" sz="1650" b="1" dirty="0">
-                <a:solidFill>
-                  <a:srgbClr val="6C3483"/>
-                </a:solidFill>
-                <a:latin typeface="Segoe UI"/>
-                <a:cs typeface="Segoe UI"/>
-              </a:rPr>
-              <a:t>1.  </a:t>
-            </a:r>
+              <a:buClr>
+                <a:srgbClr val="6C3483"/>
+              </a:buClr>
+              <a:buFont typeface="Arial"/>
+              <a:buChar char="•"/>
+            </a:pPr>
             <a:r>
               <a:rPr lang="en-US" sz="1650" dirty="0">
                 <a:solidFill>
                   <a:srgbClr val="000000"/>
                 </a:solidFill>
-                <a:latin typeface="Segoe UI"/>
-                <a:cs typeface="Segoe UI"/>
+                <a:latin typeface="Arial"/>
+                <a:cs typeface="Arial"/>
               </a:rPr>
               <a:t>A. Chỉ phỏng vấn những BN sống đến lúc ra viện về chăm sóc tại ICU</a:t>
             </a:r>
@@ -28551,25 +28317,19 @@
               <a:spcBef>
                 <a:spcPts val="450"/>
               </a:spcBef>
-              <a:buNone/>
-            </a:pPr>
-            <a:r>
-              <a:rPr lang="en-US" sz="1650" b="1" dirty="0">
-                <a:solidFill>
-                  <a:srgbClr val="6C3483"/>
-                </a:solidFill>
-                <a:latin typeface="Segoe UI"/>
-                <a:cs typeface="Segoe UI"/>
-              </a:rPr>
-              <a:t>2.  </a:t>
-            </a:r>
+              <a:buClr>
+                <a:srgbClr val="6C3483"/>
+              </a:buClr>
+              <a:buFont typeface="Arial"/>
+              <a:buChar char="•"/>
+            </a:pPr>
             <a:r>
               <a:rPr lang="en-US" sz="1650" dirty="0">
                 <a:solidFill>
                   <a:srgbClr val="000000"/>
                 </a:solidFill>
-                <a:latin typeface="Segoe UI"/>
-                <a:cs typeface="Segoe UI"/>
+                <a:latin typeface="Arial"/>
+                <a:cs typeface="Arial"/>
               </a:rPr>
               <a:t>B. Điều dưỡng biết BN thuộc nhóm nào chấm điểm đau</a:t>
             </a:r>
@@ -28582,25 +28342,19 @@
               <a:spcBef>
                 <a:spcPts val="450"/>
               </a:spcBef>
-              <a:buNone/>
-            </a:pPr>
-            <a:r>
-              <a:rPr lang="en-US" sz="1650" b="1" dirty="0">
-                <a:solidFill>
-                  <a:srgbClr val="6C3483"/>
-                </a:solidFill>
-                <a:latin typeface="Segoe UI"/>
-                <a:cs typeface="Segoe UI"/>
-              </a:rPr>
-              <a:t>3.  </a:t>
-            </a:r>
+              <a:buClr>
+                <a:srgbClr val="6C3483"/>
+              </a:buClr>
+              <a:buFont typeface="Arial"/>
+              <a:buChar char="•"/>
+            </a:pPr>
             <a:r>
               <a:rPr lang="en-US" sz="1650" dirty="0">
                 <a:solidFill>
                   <a:srgbClr val="000000"/>
                 </a:solidFill>
-                <a:latin typeface="Segoe UI"/>
-                <a:cs typeface="Segoe UI"/>
+                <a:latin typeface="Arial"/>
+                <a:cs typeface="Arial"/>
               </a:rPr>
               <a:t>C. Một cái cân luôn chỉ cao 0,5 kg chỉ được dùng ở một khoa</a:t>
             </a:r>
@@ -28644,8 +28398,8 @@
                 <a:solidFill>
                   <a:srgbClr val="6C3483"/>
                 </a:solidFill>
-                <a:latin typeface="Segoe UI"/>
-                <a:cs typeface="Segoe UI"/>
+                <a:latin typeface="Arial"/>
+                <a:cs typeface="Arial"/>
               </a:rPr>
               <a:t>Chọn</a:t>
             </a:r>
@@ -28666,8 +28420,8 @@
                 <a:solidFill>
                   <a:srgbClr val="000000"/>
                 </a:solidFill>
-                <a:latin typeface="Segoe UI"/>
-                <a:cs typeface="Segoe UI"/>
+                <a:latin typeface="Arial"/>
+                <a:cs typeface="Arial"/>
               </a:rPr>
               <a:t>Sai lệch chọn lựa</a:t>
             </a:r>
@@ -28688,8 +28442,8 @@
                 <a:solidFill>
                   <a:srgbClr val="000000"/>
                 </a:solidFill>
-                <a:latin typeface="Segoe UI"/>
-                <a:cs typeface="Segoe UI"/>
+                <a:latin typeface="Arial"/>
+                <a:cs typeface="Arial"/>
               </a:rPr>
               <a:t>Sai lệch người quan sát</a:t>
             </a:r>
@@ -28710,8 +28464,8 @@
                 <a:solidFill>
                   <a:srgbClr val="000000"/>
                 </a:solidFill>
-                <a:latin typeface="Segoe UI"/>
-                <a:cs typeface="Segoe UI"/>
+                <a:latin typeface="Arial"/>
+                <a:cs typeface="Arial"/>
               </a:rPr>
               <a:t>Sai lệch đo lường</a:t>
             </a:r>
@@ -28757,8 +28511,8 @@
                 <a:solidFill>
                   <a:srgbClr val="6C3483"/>
                 </a:solidFill>
-                <a:latin typeface="Segoe UI"/>
-                <a:cs typeface="Segoe UI"/>
+                <a:latin typeface="Arial"/>
+                <a:cs typeface="Arial"/>
               </a:rPr>
               <a:t>SẢN PHẨM   </a:t>
             </a:r>
@@ -28767,8 +28521,8 @@
                 <a:solidFill>
                   <a:srgbClr val="000000"/>
                 </a:solidFill>
-                <a:latin typeface="Segoe UI"/>
-                <a:cs typeface="Segoe UI"/>
+                <a:latin typeface="Arial"/>
+                <a:cs typeface="Arial"/>
               </a:rPr>
               <a:t>Mỗi câu một sai lệch (đáp án trong ghi chú)</a:t>
             </a:r>
@@ -28805,7 +28559,7 @@
                     <a:lumMod val="50000"/>
                   </a:schemeClr>
                 </a:solidFill>
-                <a:latin typeface="Verdana"/>
+                <a:latin typeface="Arial"/>
               </a:rPr>
               <a:t>Neudata | #ClearDataClearImpact</a:t>
             </a:r>
@@ -28935,8 +28689,8 @@
                 <a:solidFill>
                   <a:srgbClr val="0D7377"/>
                 </a:solidFill>
-                <a:latin typeface="Segoe UI"/>
-                <a:cs typeface="Segoe UI"/>
+                <a:latin typeface="Arial"/>
+                <a:cs typeface="Arial"/>
               </a:rPr>
               <a:t>Nhiễu do chỉ định: ví dụ dịch truyền ở ICU</a:t>
             </a:r>
@@ -29032,8 +28786,8 @@
                 <a:solidFill>
                   <a:srgbClr val="FFFFFF"/>
                 </a:solidFill>
-                <a:latin typeface="Segoe UI"/>
-                <a:cs typeface="Segoe UI"/>
+                <a:latin typeface="Arial"/>
+                <a:cs typeface="Arial"/>
               </a:rPr>
               <a:t>THÔNG ĐIỆP CHÍNH   </a:t>
             </a:r>
@@ -29042,8 +28796,8 @@
                 <a:solidFill>
                   <a:srgbClr val="FFFFFF"/>
                 </a:solidFill>
-                <a:latin typeface="Segoe UI"/>
-                <a:cs typeface="Segoe UI"/>
+                <a:latin typeface="Arial"/>
+                <a:cs typeface="Arial"/>
               </a:rPr>
               <a:t>Yếu tố nhiễu liên quan với phơi nhiễm VÀ là nguyên nhân của kết cục.</a:t>
             </a:r>
@@ -29080,7 +28834,7 @@
                     <a:lumMod val="50000"/>
                   </a:schemeClr>
                 </a:solidFill>
-                <a:latin typeface="Verdana"/>
+                <a:latin typeface="Arial"/>
               </a:rPr>
               <a:t>Neudata | #ClearDataClearImpact</a:t>
             </a:r>
@@ -29197,7 +28951,7 @@
     </a:clrScheme>
     <a:fontScheme name="Office">
       <a:majorFont>
-        <a:latin typeface="Calibri"/>
+        <a:latin typeface="Arial"/>
         <a:ea typeface=""/>
         <a:cs typeface=""/>
         <a:font script="Jpan" typeface="ＭＳ Ｐゴシック"/>
@@ -29232,7 +28986,7 @@
         <a:font script="Geor" typeface="Sylfaen"/>
       </a:majorFont>
       <a:minorFont>
-        <a:latin typeface="Calibri"/>
+        <a:latin typeface="Arial"/>
         <a:ea typeface=""/>
         <a:cs typeface=""/>
         <a:font script="Jpan" typeface="ＭＳ Ｐゴシック"/>
@@ -29517,7 +29271,7 @@
     </a:clrScheme>
     <a:fontScheme name="Office">
       <a:majorFont>
-        <a:latin typeface="Calibri Light" panose="020F0302020204030204"/>
+        <a:latin typeface="Arial" panose="020F0302020204030204"/>
         <a:ea typeface=""/>
         <a:cs typeface=""/>
         <a:font script="Jpan" typeface="游ゴシック Light"/>
@@ -29552,7 +29306,7 @@
         <a:font script="Geor" typeface="Sylfaen"/>
       </a:majorFont>
       <a:minorFont>
-        <a:latin typeface="Calibri" panose="020F0502020204030204"/>
+        <a:latin typeface="Arial" panose="020F0502020204030204"/>
         <a:ea typeface=""/>
         <a:cs typeface=""/>
         <a:font script="Jpan" typeface="游ゴシック"/>
@@ -29778,7 +29532,7 @@
     </a:clrScheme>
     <a:fontScheme name="Office">
       <a:majorFont>
-        <a:latin typeface="Calibri Light" panose="020F0302020204030204"/>
+        <a:latin typeface="Arial" panose="020F0302020204030204"/>
         <a:ea typeface=""/>
         <a:cs typeface=""/>
         <a:font script="Jpan" typeface="游ゴシック Light"/>
@@ -29813,7 +29567,7 @@
         <a:font script="Geor" typeface="Sylfaen"/>
       </a:majorFont>
       <a:minorFont>
-        <a:latin typeface="Calibri" panose="020F0502020204030204"/>
+        <a:latin typeface="Arial" panose="020F0502020204030204"/>
         <a:ea typeface=""/>
         <a:cs typeface=""/>
         <a:font script="Jpan" typeface="游ゴシック"/>

--- a/vi/files/slides/Session_4_VN.pptx
+++ b/vi/files/slides/Session_4_VN.pptx
@@ -737,13 +737,13 @@
           <a:p>
             <a:r>
               <a:rPr lang="en-US" sz="1400" b="0" dirty="0"/>
-              <a:t>Mở đầu Buổi 4 (19:30). Thứ Bảy tuần trước ta chọn cách trả lời câu hỏi. Hôm nay hai câu hỏi cho mọi kết quả: có tin được không (sai lệch, yếu tố nhiễu, nhân quả) và lớn đến đâu (nguy cơ, nguy cơ tương đối, tỷ số chênh, hiệu số nguy cơ, số người cần điều trị)? Sau đó vượt ra ngoài một nghiên cứu: xét nghiệm chẩn đoán, phân tích gộp và công cụ thẩm định.</a:t>
+              <a:t>Mở đầu Buổi 4 (19:30). Thứ Bảy tuần trước cả lớp đã chọn cách trả lời câu hỏi. Hôm nay hai câu hỏi cho mọi kết quả: có tin được không (sai lệch, yếu tố nhiễu, nhân quả) và lớn đến đâu (nguy cơ, nguy cơ tương đối, tỷ số chênh, hiệu số nguy cơ, số người cần điều trị)? Sau đó vượt ra ngoài một nghiên cứu: xét nghiệm chẩn đoán, phân tích gộp và công cụ thẩm định.</a:t>
             </a:r>
           </a:p>
           <a:p>
             <a:r>
               <a:rPr lang="en-US" sz="1400" b="0" dirty="0"/>
-              <a:t>Mở đầu bằng câu hỏi cuối Buổi 3: chiếu ba câu trả lời nhận được qua khung chat hoặc biểu mẫu (ẩn danh). Câu hỏi về việc bác sĩ chọn hạn chế dịch cho một số người bệnh: đó là thuần tập, nên chỉ nói 'có liên quan'. Nó dẫn thẳng vào yếu tố nhiễu.</a:t>
+              <a:t>Mở đầu bằng câu hỏi cuối Buổi 3: chiếu ba câu trả lời nhận được qua khung chat. Câu hỏi về việc bác sĩ chọn hạn chế dịch cho một số người bệnh: đó là thuần tập, nên chỉ nói 'có liên quan'. Nó dẫn thẳng vào yếu tố nhiễu.</a:t>
             </a:r>
           </a:p>
           <a:p>
@@ -842,7 +842,7 @@
           <a:p>
             <a:r>
               <a:rPr lang="en-US" sz="1400" b="0" dirty="0"/>
-              <a:t>Cả hai xuất hiện khi ta chia dữ liệu theo tầng, nhưng mang ý nghĩa ngược nhau.</a:t>
+              <a:t>Cả hai xuất hiện khi chia dữ liệu theo tầng, nhưng mang ý nghĩa ngược nhau.</a:t>
             </a:r>
           </a:p>
           <a:p>
@@ -959,7 +959,7 @@
           <a:p>
             <a:r>
               <a:rPr lang="en-US" sz="1400" b="0" dirty="0"/>
-              <a:t>Slide này là hộp công cụ. Ba slide sau minh họa từng công cụ.</a:t>
+              <a:t>Slide này tóm tắt các công cụ. Ba slide sau minh họa từng công cụ.</a:t>
             </a:r>
           </a:p>
           <a:p>
@@ -1520,7 +1520,7 @@
           <a:p>
             <a:r>
               <a:rPr lang="en-US" sz="1400" b="0" dirty="0"/>
-              <a:t>Ví dụ ICU: ta giả định cân bằng dịch dương gây tổn thương thận và tử vong. Nhưng thận suy tạo ít nước tiểu, và ít dịch ra nghĩa là cân bằng dương hơn. Mũi tên có thể chạy ngược lại. Đó là lý do Hyun ghép cặp theo cả lượng dịch ra lẫn dịch vào.</a:t>
+              <a:t>Ví dụ ICU: thường giả định cân bằng dịch dương gây tổn thương thận và tử vong. Nhưng thận suy tạo ít nước tiểu, và ít dịch ra nghĩa là cân bằng dương hơn. Mũi tên có thể chạy ngược lại. Đó là lý do Hyun ghép cặp theo cả lượng dịch ra lẫn dịch vào.</a:t>
             </a:r>
           </a:p>
           <a:p>
@@ -2156,7 +2156,7 @@
           <a:p>
             <a:r>
               <a:rPr lang="en-US" sz="1400" b="0" dirty="0"/>
-              <a:t>Quan niệm sai: nguy cơ và odds. Nguy cơ tính trên mọi người trong nhóm (20 trên 100). Odds so sánh người có kết cục với người không có (20 so với 80). Ta sẽ cần cả hai ngay sau đây.</a:t>
+              <a:t>Quan niệm sai: nguy cơ và odds. Nguy cơ tính trên mọi người trong nhóm (20 trên 100). Odds so sánh người có kết cục với người không có (20 so với 80). Sẽ cần cả hai ngay sau đây.</a:t>
             </a:r>
           </a:p>
           <a:p>
@@ -2483,7 +2483,7 @@
           <a:p>
             <a:r>
               <a:rPr lang="en-US" sz="1400" b="0" dirty="0"/>
-              <a:t>Thu nhỏ 100 người bệnh xuống 10. Với chăm sóc thường quy 3/10 tử vong. Với chiến lược hạn chế dịch 2/10 tử vong. Người màu xanh lá là người bệnh, tính trung bình, đã tránh được tử vong nhờ điều trị. Vậy ta điều trị 10 người bệnh để một người có lợi: NNT = 10.</a:t>
+              <a:t>Thu nhỏ 100 người bệnh xuống 10. Với chăm sóc thường quy 3/10 tử vong. Với chiến lược hạn chế dịch 2/10 tử vong. Người màu xanh lá là người bệnh, tính trung bình, đã tránh được tử vong nhờ điều trị. Vậy cần điều trị 10 người bệnh để một người có lợi: NNT = 10.</a:t>
             </a:r>
           </a:p>
           <a:p>
@@ -2612,7 +2612,7 @@
           <a:p>
             <a:r>
               <a:rPr lang="en-US" sz="1400" b="0" dirty="0"/>
-              <a:t>Hỏi cả lớp (mời hai ba người trả lời, bật micro): trong ví dụ của ta (tử vong 20% và 30%), OR là 0.58 còn RR là 0.67. Vì sao khác nhau? Dự kiến: tử vong phổ biến trong quần thể này, nên OR phóng đại tác động.</a:t>
+              <a:t>Hỏi cả lớp (mời hai ba người trả lời, bật micro): trong ví dụ của mình (tử vong 20% và 30%), OR là 0.58 còn RR là 0.67. Vì sao khác nhau? Dự kiến: tử vong phổ biến trong quần thể này, nên OR phóng đại tác động.</a:t>
             </a:r>
           </a:p>
           <a:p>
@@ -2711,7 +2711,7 @@
           <a:p>
             <a:r>
               <a:rPr lang="en-US" sz="1400" b="0" dirty="0"/>
-              <a:t>Khoảnh khắc then chốt: đổi a thành 2 và c thành 3 (b = 98, d = 97). RR vẫn 0.67 nhưng OR giờ là 0.66, gần như bằng nhau. NNT nhảy lên 100. Cùng tác động tương đối, tác động tuyệt đối rất khác.</a:t>
+              <a:t>Điểm then chốt: đổi a thành 2 và c thành 3 (b = 98, d = 97). RR vẫn 0.67 nhưng OR giờ là 0.66, gần như bằng nhau. NNT nhảy lên 100. Cùng tác động tương đối, tác động tuyệt đối rất khác.</a:t>
             </a:r>
           </a:p>
           <a:p>
@@ -3119,7 +3119,7 @@
           <a:p>
             <a:r>
               <a:rPr lang="en-US" sz="1400" b="0" dirty="0"/>
-              <a:t>Ý chính: thứ tự quan trọng. Ta đánh giá kết quả có tin được không trước khi quan tâm nó lớn đến đâu.</a:t>
+              <a:t>Ý chính: thứ tự quan trọng. Cần đánh giá kết quả có tin được không trước khi quan tâm nó lớn đến đâu.</a:t>
             </a:r>
           </a:p>
           <a:p>
@@ -3242,7 +3242,7 @@
           <a:p>
             <a:r>
               <a:rPr lang="en-US" sz="1400" b="0" dirty="0"/>
-              <a:t>Hỏi cả lớp (bình chọn): với xét nghiệm sàng lọc mà ta không muốn bỏ sót nhiễm khuẩn huyết, ưu tiên độ nhạy hay độ đặc hiệu? Dự kiến: độ nhạy.</a:t>
+              <a:t>Hỏi cả lớp (bình chọn): với xét nghiệm sàng lọc không được bỏ sót nhiễm khuẩn huyết, ưu tiên độ nhạy hay độ đặc hiệu? Dự kiến: độ nhạy.</a:t>
             </a:r>
           </a:p>
           <a:p>
@@ -3569,13 +3569,13 @@
           <a:p>
             <a:r>
               <a:rPr lang="en-US" sz="1400" b="0" dirty="0"/>
-              <a:t>Nhận diện: 1 240 bản ghi từ cơ sở dữ liệu cộng 60 từ sổ đăng ký thử nghiệm = 1 300. Loại 300 bản trùng.</a:t>
+              <a:t>Nhận diện: 1240 bản ghi từ cơ sở dữ liệu cộng 60 từ sổ đăng ký thử nghiệm = 1300. Loại 300 bản trùng.</a:t>
             </a:r>
           </a:p>
           <a:p>
             <a:r>
               <a:rPr lang="en-US" sz="1400" b="0" dirty="0"/>
-              <a:t>Sàng lọc: 1 000 tiêu đề và tóm tắt được sàng lọc, loại 920. Đọc 80 toàn văn, loại 71 có lý do (38 không phải RCT, 21 sai đối tượng, 12 không có dữ liệu tử vong, cộng lại đúng 71).</a:t>
+              <a:t>Sàng lọc: 1000 tiêu đề và tóm tắt được sàng lọc, loại 920. Đọc 80 toàn văn, loại 71 có lý do (38 không phải RCT, 21 sai đối tượng, 12 không có dữ liệu tử vong, cộng lại đúng 71).</a:t>
             </a:r>
           </a:p>
           <a:p>
@@ -4358,7 +4358,7 @@
           <a:p>
             <a:r>
               <a:rPr lang="en-US" sz="1400" b="0" dirty="0"/>
-              <a:t>Ba nhóm sai lệch: ai được đưa vào nghiên cứu (chọn lựa), mọi thứ được đo thế nào (thông tin), và sự trộn lẫn tác động (yếu tố nhiễu). Sau đó là cách thiết kế chống sai lệch, và bốn ý để đánh giá một kết quả: thay đổi tác động, giá trị nội tại và ngoại suy, quan hệ nhân quả ngược và các quan điểm của Bradford Hill.</a:t>
+              <a:t>Ba nhóm sai lệch: ai được đưa vào nghiên cứu (chọn lựa), đo lường thế nào (thông tin), và sự trộn lẫn tác động (yếu tố nhiễu). Sau đó là cách thiết kế chống sai lệch, và bốn ý để đánh giá một kết quả: thay đổi tác động, giá trị nội tại và ngoại suy, quan hệ nhân quả ngược và các quan điểm của Bradford Hill.</a:t>
             </a:r>
           </a:p>
           <a:p>
@@ -4655,7 +4655,7 @@
           <a:p>
             <a:r>
               <a:rPr lang="en-US" sz="1400" b="0" dirty="0"/>
-              <a:t>Xem trước: ở Tuần 5-6 ta biến thiết kế thành dữ liệu (biến số, phiếu thu thập dữ liệu) và làm quen với bộ dữ liệu khóa học FLUID-ICU, một thuần tập mô phỏng trả lời phiên bản quan sát của câu hỏi về dịch truyền. Sau này mỗi học viên chọn một trong năm câu hỏi của bộ dữ liệu (Q1-Q5) để viết bản thảo của riêng mình.</a:t>
+              <a:t>Xem trước: ở Tuần 5-6 cả lớp biến thiết kế thành dữ liệu (biến số, phiếu thu thập dữ liệu) và làm quen với bộ dữ liệu khóa học FLUID-ICU, một thuần tập mô phỏng trả lời phiên bản quan sát của câu hỏi về dịch truyền. Sau này mỗi học viên chọn một trong năm câu hỏi của bộ dữ liệu (Q1-Q5) để viết bản thảo của riêng mình.</a:t>
             </a:r>
           </a:p>
           <a:p>
@@ -4922,7 +4922,7 @@
           <a:p>
             <a:r>
               <a:rPr lang="en-US" sz="1400" b="0" dirty="0"/>
-              <a:t>Extra (slide bổ sung): thêm ba ví dụ về nhiễu do chỉ định để ý tưởng thấm sâu hơn.</a:t>
+              <a:t>Extra (slide bổ sung): thêm ba ví dụ về nhiễu do chỉ định để củng cố ý này.</a:t>
             </a:r>
           </a:p>
           <a:p>
@@ -5027,7 +5027,7 @@
           <a:p>
             <a:r>
               <a:rPr lang="en-US" sz="1400" b="0" dirty="0"/>
-              <a:t>Extra (slide bổ sung): chỉ học khái niệm. Tỷ số khả dĩ (likelihood ratio, LR) gộp độ nhạy và độ đặc hiệu thành một con số cho biết một kết quả nên thay đổi mức nghi ngờ của ta bao nhiêu.</a:t>
+              <a:t>Extra (slide bổ sung): chỉ học khái niệm. Tỷ số khả dĩ (likelihood ratio, LR) gộp độ nhạy và độ đặc hiệu thành một con số cho biết một kết quả nên thay đổi mức nghi ngờ của bạn bao nhiêu.</a:t>
             </a:r>
           </a:p>
           <a:p>
@@ -5423,7 +5423,7 @@
           <a:p>
             <a:r>
               <a:rPr lang="en-US" sz="1400" b="0" dirty="0"/>
-              <a:t>Dùng hình bia phi tiêu. Trái: điều ta muốn, gần sự thật và tập trung. Giữa: sai số ngẫu nhiên, quanh sự thật nhưng phân tán. Cỡ mẫu lớn hơn sẽ kéo các phi tiêu lại gần nhau. Phải: sai lệch, tập trung nhưng sai chỗ. Cỡ mẫu lớn hơn chỉ làm ta tự tin hơn vào câu trả lời sai.</a:t>
+              <a:t>Dùng hình bia phi tiêu. Trái: điều mong muốn, gần sự thật và tập trung. Giữa: sai số ngẫu nhiên, quanh sự thật nhưng phân tán. Cỡ mẫu lớn hơn sẽ kéo các phi tiêu lại gần nhau. Phải: sai lệch, tập trung nhưng sai chỗ. Cỡ mẫu lớn hơn chỉ làm người đọc tự tin hơn vào câu trả lời sai.</a:t>
             </a:r>
           </a:p>
           <a:p>
@@ -5435,7 +5435,7 @@
           <a:p>
             <a:r>
               <a:rPr lang="en-US" sz="1400" b="0" dirty="0"/>
-              <a:t>Quan niệm sai: 'nghiên cứu 10 000 người bệnh không thể bị sai lệch'. Nghiên cứu sổ bộ lớn có thể rất chính xác mà vẫn sai lệch.</a:t>
+              <a:t>Quan niệm sai: 'nghiên cứu 10000 người bệnh không thể bị sai lệch'. Nghiên cứu sổ bộ lớn có thể rất chính xác mà vẫn sai lệch.</a:t>
             </a:r>
           </a:p>
           <a:p>
@@ -5528,13 +5528,13 @@
           <a:p>
             <a:r>
               <a:rPr lang="en-US" sz="1400" b="0" dirty="0"/>
-              <a:t>Sai lệch chọn lựa xảy ra khi những người vào (hoặc ở lại) nghiên cứu khác một cách hệ thống với những người ta muốn tìm hiểu.</a:t>
+              <a:t>Sai lệch chọn lựa xảy ra khi những người vào (hoặc ở lại) nghiên cứu khác một cách hệ thống với những người cần tìm hiểu.</a:t>
             </a:r>
           </a:p>
           <a:p>
             <a:r>
               <a:rPr lang="en-US" sz="1400" b="0" dirty="0"/>
-              <a:t>Ví dụ từ Bài báo 2 (Hyun): chỉ người bệnh nằm ICU ít nhất ba ngày và có dữ liệu dịch được đưa vào (2 516 trong 11 981 người bệnh của sổ bộ). Những người bệnh nặng nhất tử vong sớm, và những người nhẹ nhất ra sớm, bị loại. Kết quả áp dụng cho 'người bệnh còn ở ICU ngày 3', không phải mọi người bệnh nhiễm khuẩn huyết.</a:t>
+              <a:t>Ví dụ từ Bài báo 2 (Hyun): chỉ người bệnh nằm ICU ít nhất ba ngày và có dữ liệu dịch được đưa vào (2516 trong 11981 người bệnh của sổ bộ). Những người bệnh nặng nhất tử vong sớm, và những người nhẹ nhất ra sớm, bị loại. Kết quả áp dụng cho 'người bệnh còn ở ICU ngày 3', không phải mọi người bệnh nhiễm khuẩn huyết.</a:t>
             </a:r>
           </a:p>
           <a:p>
@@ -5552,7 +5552,7 @@
           <a:p>
             <a:r>
               <a:rPr lang="en-US" sz="1400" b="0" dirty="0"/>
-              <a:t>Hỏi cả lớp (mời hai ba người trả lời, bật micro): trong Bài báo 1 (Boulet), 1 201 người bệnh được sàng lọc và 50 được đưa vào. Điều đó nói gì? Dự kiến: người bệnh thử nghiệm được chọn lọc rất kỹ. Kiểm tra xem họ có giống người bệnh của mình không trước khi áp dụng.</a:t>
+              <a:t>Hỏi cả lớp (mời hai ba người trả lời, bật micro): trong Bài báo 1 (Boulet), 1201 người bệnh được sàng lọc và 50 được đưa vào. Điều đó nói gì? Dự kiến: người bệnh thử nghiệm được chọn lọc rất kỹ. Kiểm tra xem họ có giống người bệnh của mình không trước khi áp dụng.</a:t>
             </a:r>
           </a:p>
           <a:p>
@@ -5651,7 +5651,7 @@
           <a:p>
             <a:r>
               <a:rPr lang="en-US" sz="1400" b="0" dirty="0"/>
-              <a:t>Sai lệch người quan sát: người đánh giá biết nhóm có thể đánh giá kết cục 'mềm' khác đi, ví dụ 'đủ điều kiện ra viện' hay 'có mê sảng'. Trong Boulet, bác sĩ biết phân nhóm.</a:t>
+              <a:t>Sai lệch người quan sát (observer bias): người đánh giá biết nhóm có thể đánh giá kết cục 'mềm' khác đi, ví dụ 'đủ điều kiện ra viện' hay 'có mê sảng'. Trong Boulet, bác sĩ biết phân nhóm.</a:t>
             </a:r>
           </a:p>
           <a:p>
@@ -9727,7 +9727,7 @@
                 <a:latin typeface="Arial"/>
                 <a:cs typeface="Arial"/>
               </a:rPr>
-              <a:t>Xây sự bảo vệ vào thiết kế. Sửa phần còn lại trong phân tích</a:t>
+              <a:t>Phòng sai lệch ngay từ thiết kế. Xử lý phần còn lại khi phân tích</a:t>
             </a:r>
           </a:p>
         </p:txBody>
@@ -9797,12 +9797,12 @@
           </a:ln>
         </p:spPr>
         <p:txBody>
-          <a:bodyPr wrap="square" lIns="137160" tIns="91440" rIns="137160" bIns="91440" rtlCol="0" anchor="t">
+          <a:bodyPr wrap="square" lIns="137160" tIns="91440" rIns="137160" bIns="91440" rtlCol="0" anchor="ctr">
             <a:normAutofit/>
           </a:bodyPr>
           <a:lstStyle/>
           <a:p>
-            <a:pPr marL="0" indent="0" algn="l">
+            <a:pPr marL="0" indent="0" algn="ctr">
               <a:lnSpc>
                 <a:spcPct val="104000"/>
               </a:lnSpc>
@@ -9823,7 +9823,7 @@
             </a:r>
           </a:p>
           <a:p>
-            <a:pPr marL="0" indent="0" algn="l">
+            <a:pPr marL="0" indent="0" algn="ctr">
               <a:lnSpc>
                 <a:spcPct val="104000"/>
               </a:lnSpc>
@@ -9844,7 +9844,7 @@
             </a:r>
           </a:p>
           <a:p>
-            <a:pPr marL="0" indent="0" algn="l">
+            <a:pPr marL="0" indent="0" algn="ctr">
               <a:lnSpc>
                 <a:spcPct val="104000"/>
               </a:lnSpc>
@@ -9931,12 +9931,12 @@
           </a:ln>
         </p:spPr>
         <p:txBody>
-          <a:bodyPr wrap="square" lIns="137160" tIns="91440" rIns="137160" bIns="91440" rtlCol="0" anchor="t">
+          <a:bodyPr wrap="square" lIns="137160" tIns="91440" rIns="137160" bIns="91440" rtlCol="0" anchor="ctr">
             <a:normAutofit/>
           </a:bodyPr>
           <a:lstStyle/>
           <a:p>
-            <a:pPr marL="0" indent="0" algn="l">
+            <a:pPr marL="0" indent="0" algn="ctr">
               <a:lnSpc>
                 <a:spcPct val="104000"/>
               </a:lnSpc>
@@ -9957,7 +9957,7 @@
             </a:r>
           </a:p>
           <a:p>
-            <a:pPr marL="0" indent="0" algn="l">
+            <a:pPr marL="0" indent="0" algn="ctr">
               <a:lnSpc>
                 <a:spcPct val="104000"/>
               </a:lnSpc>
@@ -9978,7 +9978,7 @@
             </a:r>
           </a:p>
           <a:p>
-            <a:pPr marL="0" indent="0" algn="l">
+            <a:pPr marL="0" indent="0" algn="ctr">
               <a:lnSpc>
                 <a:spcPct val="104000"/>
               </a:lnSpc>
@@ -10065,12 +10065,12 @@
           </a:ln>
         </p:spPr>
         <p:txBody>
-          <a:bodyPr wrap="square" lIns="137160" tIns="91440" rIns="137160" bIns="91440" rtlCol="0" anchor="t">
+          <a:bodyPr wrap="square" lIns="137160" tIns="91440" rIns="137160" bIns="91440" rtlCol="0" anchor="ctr">
             <a:normAutofit/>
           </a:bodyPr>
           <a:lstStyle/>
           <a:p>
-            <a:pPr marL="0" indent="0" algn="l">
+            <a:pPr marL="0" indent="0" algn="ctr">
               <a:lnSpc>
                 <a:spcPct val="104000"/>
               </a:lnSpc>
@@ -10091,7 +10091,7 @@
             </a:r>
           </a:p>
           <a:p>
-            <a:pPr marL="0" indent="0" algn="l">
+            <a:pPr marL="0" indent="0" algn="ctr">
               <a:lnSpc>
                 <a:spcPct val="104000"/>
               </a:lnSpc>
@@ -10112,7 +10112,7 @@
             </a:r>
           </a:p>
           <a:p>
-            <a:pPr marL="0" indent="0" algn="l">
+            <a:pPr marL="0" indent="0" algn="ctr">
               <a:lnSpc>
                 <a:spcPct val="104000"/>
               </a:lnSpc>
@@ -10133,7 +10133,7 @@
             </a:r>
           </a:p>
           <a:p>
-            <a:pPr marL="0" indent="0" algn="l">
+            <a:pPr marL="0" indent="0" algn="ctr">
               <a:lnSpc>
                 <a:spcPct val="104000"/>
               </a:lnSpc>
@@ -10373,7 +10373,7 @@
                 <a:latin typeface="Arial"/>
                 <a:cs typeface="Arial"/>
               </a:rPr>
-              <a:t>Phân bổ ngẫu nhiên cân bằng điều ta biết và điều ta chưa biết</a:t>
+              <a:t>Phân bổ ngẫu nhiên cân bằng cả điều đã biết và điều chưa biết</a:t>
             </a:r>
           </a:p>
         </p:txBody>
@@ -10785,12 +10785,12 @@
           </a:ln>
         </p:spPr>
         <p:txBody>
-          <a:bodyPr wrap="square" lIns="137160" tIns="91440" rIns="137160" bIns="91440" rtlCol="0" anchor="t">
+          <a:bodyPr wrap="square" lIns="137160" tIns="91440" rIns="137160" bIns="91440" rtlCol="0" anchor="ctr">
             <a:normAutofit/>
           </a:bodyPr>
           <a:lstStyle/>
           <a:p>
-            <a:pPr marL="0" indent="0" algn="l">
+            <a:pPr marL="0" indent="0" algn="ctr">
               <a:lnSpc>
                 <a:spcPct val="104000"/>
               </a:lnSpc>
@@ -10811,7 +10811,7 @@
             </a:r>
           </a:p>
           <a:p>
-            <a:pPr marL="0" indent="0" algn="l">
+            <a:pPr marL="0" indent="0" algn="ctr">
               <a:lnSpc>
                 <a:spcPct val="104000"/>
               </a:lnSpc>
@@ -10832,7 +10832,7 @@
             </a:r>
           </a:p>
           <a:p>
-            <a:pPr marL="0" indent="0" algn="l">
+            <a:pPr marL="0" indent="0" algn="ctr">
               <a:lnSpc>
                 <a:spcPct val="104000"/>
               </a:lnSpc>
@@ -10853,7 +10853,7 @@
             </a:r>
           </a:p>
           <a:p>
-            <a:pPr marL="0" indent="0" algn="l">
+            <a:pPr marL="0" indent="0" algn="ctr">
               <a:lnSpc>
                 <a:spcPct val="104000"/>
               </a:lnSpc>
@@ -10940,12 +10940,12 @@
           </a:ln>
         </p:spPr>
         <p:txBody>
-          <a:bodyPr wrap="square" lIns="137160" tIns="91440" rIns="137160" bIns="91440" rtlCol="0" anchor="t">
+          <a:bodyPr wrap="square" lIns="137160" tIns="91440" rIns="137160" bIns="91440" rtlCol="0" anchor="ctr">
             <a:normAutofit/>
           </a:bodyPr>
           <a:lstStyle/>
           <a:p>
-            <a:pPr marL="0" indent="0" algn="l">
+            <a:pPr marL="0" indent="0" algn="ctr">
               <a:lnSpc>
                 <a:spcPct val="104000"/>
               </a:lnSpc>
@@ -10966,7 +10966,7 @@
             </a:r>
           </a:p>
           <a:p>
-            <a:pPr marL="0" indent="0" algn="l">
+            <a:pPr marL="0" indent="0" algn="ctr">
               <a:lnSpc>
                 <a:spcPct val="104000"/>
               </a:lnSpc>
@@ -10987,7 +10987,7 @@
             </a:r>
           </a:p>
           <a:p>
-            <a:pPr marL="0" indent="0" algn="l">
+            <a:pPr marL="0" indent="0" algn="ctr">
               <a:lnSpc>
                 <a:spcPct val="104000"/>
               </a:lnSpc>
@@ -11008,7 +11008,7 @@
             </a:r>
           </a:p>
           <a:p>
-            <a:pPr marL="0" indent="0" algn="l">
+            <a:pPr marL="0" indent="0" algn="ctr">
               <a:lnSpc>
                 <a:spcPct val="104000"/>
               </a:lnSpc>
@@ -11385,12 +11385,12 @@
           </a:ln>
         </p:spPr>
         <p:txBody>
-          <a:bodyPr wrap="square" lIns="137160" tIns="91440" rIns="137160" bIns="91440" rtlCol="0" anchor="t">
+          <a:bodyPr wrap="square" lIns="137160" tIns="91440" rIns="137160" bIns="91440" rtlCol="0" anchor="ctr">
             <a:normAutofit/>
           </a:bodyPr>
           <a:lstStyle/>
           <a:p>
-            <a:pPr marL="0" indent="0" algn="l">
+            <a:pPr marL="0" indent="0" algn="ctr">
               <a:lnSpc>
                 <a:spcPct val="104000"/>
               </a:lnSpc>
@@ -11411,7 +11411,7 @@
             </a:r>
           </a:p>
           <a:p>
-            <a:pPr marL="0" indent="0" algn="l">
+            <a:pPr marL="0" indent="0" algn="ctr">
               <a:lnSpc>
                 <a:spcPct val="104000"/>
               </a:lnSpc>
@@ -11498,12 +11498,12 @@
           </a:ln>
         </p:spPr>
         <p:txBody>
-          <a:bodyPr wrap="square" lIns="137160" tIns="91440" rIns="137160" bIns="91440" rtlCol="0" anchor="t">
+          <a:bodyPr wrap="square" lIns="137160" tIns="91440" rIns="137160" bIns="91440" rtlCol="0" anchor="ctr">
             <a:normAutofit/>
           </a:bodyPr>
           <a:lstStyle/>
           <a:p>
-            <a:pPr marL="0" indent="0" algn="l">
+            <a:pPr marL="0" indent="0" algn="ctr">
               <a:lnSpc>
                 <a:spcPct val="104000"/>
               </a:lnSpc>
@@ -11524,7 +11524,7 @@
             </a:r>
           </a:p>
           <a:p>
-            <a:pPr marL="0" indent="0" algn="l">
+            <a:pPr marL="0" indent="0" algn="ctr">
               <a:lnSpc>
                 <a:spcPct val="104000"/>
               </a:lnSpc>
@@ -11545,7 +11545,7 @@
             </a:r>
           </a:p>
           <a:p>
-            <a:pPr marL="0" indent="0" algn="l">
+            <a:pPr marL="0" indent="0" algn="ctr">
               <a:lnSpc>
                 <a:spcPct val="104000"/>
               </a:lnSpc>
@@ -11632,12 +11632,12 @@
           </a:ln>
         </p:spPr>
         <p:txBody>
-          <a:bodyPr wrap="square" lIns="137160" tIns="91440" rIns="137160" bIns="91440" rtlCol="0" anchor="t">
+          <a:bodyPr wrap="square" lIns="137160" tIns="91440" rIns="137160" bIns="91440" rtlCol="0" anchor="ctr">
             <a:normAutofit/>
           </a:bodyPr>
           <a:lstStyle/>
           <a:p>
-            <a:pPr marL="0" indent="0" algn="l">
+            <a:pPr marL="0" indent="0" algn="ctr">
               <a:lnSpc>
                 <a:spcPct val="104000"/>
               </a:lnSpc>
@@ -11658,7 +11658,7 @@
             </a:r>
           </a:p>
           <a:p>
-            <a:pPr marL="0" indent="0" algn="l">
+            <a:pPr marL="0" indent="0" algn="ctr">
               <a:lnSpc>
                 <a:spcPct val="104000"/>
               </a:lnSpc>
@@ -11679,7 +11679,7 @@
             </a:r>
           </a:p>
           <a:p>
-            <a:pPr marL="0" indent="0" algn="l">
+            <a:pPr marL="0" indent="0" algn="ctr">
               <a:lnSpc>
                 <a:spcPct val="104000"/>
               </a:lnSpc>
@@ -12017,12 +12017,12 @@
           </a:ln>
         </p:spPr>
         <p:txBody>
-          <a:bodyPr wrap="square" lIns="137160" tIns="91440" rIns="137160" bIns="91440" rtlCol="0" anchor="t">
+          <a:bodyPr wrap="square" lIns="137160" tIns="91440" rIns="137160" bIns="91440" rtlCol="0" anchor="ctr">
             <a:normAutofit/>
           </a:bodyPr>
           <a:lstStyle/>
           <a:p>
-            <a:pPr marL="0" indent="0" algn="l">
+            <a:pPr marL="0" indent="0" algn="ctr">
               <a:lnSpc>
                 <a:spcPct val="104000"/>
               </a:lnSpc>
@@ -12043,7 +12043,7 @@
             </a:r>
           </a:p>
           <a:p>
-            <a:pPr marL="0" indent="0" algn="l">
+            <a:pPr marL="0" indent="0" algn="ctr">
               <a:lnSpc>
                 <a:spcPct val="104000"/>
               </a:lnSpc>
@@ -12064,7 +12064,7 @@
             </a:r>
           </a:p>
           <a:p>
-            <a:pPr marL="0" indent="0" algn="l">
+            <a:pPr marL="0" indent="0" algn="ctr">
               <a:lnSpc>
                 <a:spcPct val="104000"/>
               </a:lnSpc>
@@ -12085,7 +12085,7 @@
             </a:r>
           </a:p>
           <a:p>
-            <a:pPr marL="0" indent="0" algn="l">
+            <a:pPr marL="0" indent="0" algn="ctr">
               <a:lnSpc>
                 <a:spcPct val="104000"/>
               </a:lnSpc>
@@ -12106,7 +12106,7 @@
             </a:r>
           </a:p>
           <a:p>
-            <a:pPr marL="0" indent="0" algn="l">
+            <a:pPr marL="0" indent="0" algn="ctr">
               <a:lnSpc>
                 <a:spcPct val="104000"/>
               </a:lnSpc>
@@ -12193,12 +12193,12 @@
           </a:ln>
         </p:spPr>
         <p:txBody>
-          <a:bodyPr wrap="square" lIns="137160" tIns="91440" rIns="137160" bIns="91440" rtlCol="0" anchor="t">
+          <a:bodyPr wrap="square" lIns="137160" tIns="91440" rIns="137160" bIns="91440" rtlCol="0" anchor="ctr">
             <a:normAutofit/>
           </a:bodyPr>
           <a:lstStyle/>
           <a:p>
-            <a:pPr marL="0" indent="0" algn="l">
+            <a:pPr marL="0" indent="0" algn="ctr">
               <a:lnSpc>
                 <a:spcPct val="104000"/>
               </a:lnSpc>
@@ -12219,7 +12219,7 @@
             </a:r>
           </a:p>
           <a:p>
-            <a:pPr marL="0" indent="0" algn="l">
+            <a:pPr marL="0" indent="0" algn="ctr">
               <a:lnSpc>
                 <a:spcPct val="104000"/>
               </a:lnSpc>
@@ -12240,7 +12240,7 @@
             </a:r>
           </a:p>
           <a:p>
-            <a:pPr marL="0" indent="0" algn="l">
+            <a:pPr marL="0" indent="0" algn="ctr">
               <a:lnSpc>
                 <a:spcPct val="104000"/>
               </a:lnSpc>
@@ -12261,7 +12261,7 @@
             </a:r>
           </a:p>
           <a:p>
-            <a:pPr marL="0" indent="0" algn="l">
+            <a:pPr marL="0" indent="0" algn="ctr">
               <a:lnSpc>
                 <a:spcPct val="104000"/>
               </a:lnSpc>
@@ -12282,7 +12282,7 @@
             </a:r>
           </a:p>
           <a:p>
-            <a:pPr marL="0" indent="0" algn="l">
+            <a:pPr marL="0" indent="0" algn="ctr">
               <a:lnSpc>
                 <a:spcPct val="104000"/>
               </a:lnSpc>
@@ -12593,7 +12593,7 @@
                 <a:latin typeface="Arial"/>
                 <a:cs typeface="Arial"/>
               </a:rPr>
-              <a:t>Điều ta giả định</a:t>
+              <a:t>Giả định thường gặp</a:t>
             </a:r>
           </a:p>
         </p:txBody>
@@ -12620,12 +12620,12 @@
           </a:ln>
         </p:spPr>
         <p:txBody>
-          <a:bodyPr wrap="square" lIns="137160" tIns="91440" rIns="137160" bIns="91440" rtlCol="0" anchor="t">
+          <a:bodyPr wrap="square" lIns="137160" tIns="91440" rIns="137160" bIns="91440" rtlCol="0" anchor="ctr">
             <a:normAutofit/>
           </a:bodyPr>
           <a:lstStyle/>
           <a:p>
-            <a:pPr marL="0" indent="0" algn="l">
+            <a:pPr marL="0" indent="0" algn="ctr">
               <a:lnSpc>
                 <a:spcPct val="104000"/>
               </a:lnSpc>
@@ -12646,7 +12646,7 @@
             </a:r>
           </a:p>
           <a:p>
-            <a:pPr marL="0" indent="0" algn="l">
+            <a:pPr marL="0" indent="0" algn="ctr">
               <a:lnSpc>
                 <a:spcPct val="104000"/>
               </a:lnSpc>
@@ -12733,12 +12733,12 @@
           </a:ln>
         </p:spPr>
         <p:txBody>
-          <a:bodyPr wrap="square" lIns="137160" tIns="91440" rIns="137160" bIns="91440" rtlCol="0" anchor="t">
+          <a:bodyPr wrap="square" lIns="137160" tIns="91440" rIns="137160" bIns="91440" rtlCol="0" anchor="ctr">
             <a:normAutofit/>
           </a:bodyPr>
           <a:lstStyle/>
           <a:p>
-            <a:pPr marL="0" indent="0" algn="l">
+            <a:pPr marL="0" indent="0" algn="ctr">
               <a:lnSpc>
                 <a:spcPct val="104000"/>
               </a:lnSpc>
@@ -12759,7 +12759,7 @@
             </a:r>
           </a:p>
           <a:p>
-            <a:pPr marL="0" indent="0" algn="l">
+            <a:pPr marL="0" indent="0" algn="ctr">
               <a:lnSpc>
                 <a:spcPct val="104000"/>
               </a:lnSpc>
@@ -12780,7 +12780,7 @@
             </a:r>
           </a:p>
           <a:p>
-            <a:pPr marL="0" indent="0" algn="l">
+            <a:pPr marL="0" indent="0" algn="ctr">
               <a:lnSpc>
                 <a:spcPct val="104000"/>
               </a:lnSpc>
@@ -12867,12 +12867,12 @@
           </a:ln>
         </p:spPr>
         <p:txBody>
-          <a:bodyPr wrap="square" lIns="137160" tIns="91440" rIns="137160" bIns="91440" rtlCol="0" anchor="t">
+          <a:bodyPr wrap="square" lIns="137160" tIns="91440" rIns="137160" bIns="91440" rtlCol="0" anchor="ctr">
             <a:normAutofit/>
           </a:bodyPr>
           <a:lstStyle/>
           <a:p>
-            <a:pPr marL="0" indent="0" algn="l">
+            <a:pPr marL="0" indent="0" algn="ctr">
               <a:lnSpc>
                 <a:spcPct val="104000"/>
               </a:lnSpc>
@@ -12893,7 +12893,7 @@
             </a:r>
           </a:p>
           <a:p>
-            <a:pPr marL="0" indent="0" algn="l">
+            <a:pPr marL="0" indent="0" algn="ctr">
               <a:lnSpc>
                 <a:spcPct val="104000"/>
               </a:lnSpc>
@@ -12914,7 +12914,7 @@
             </a:r>
           </a:p>
           <a:p>
-            <a:pPr marL="0" indent="0" algn="l">
+            <a:pPr marL="0" indent="0" algn="ctr">
               <a:lnSpc>
                 <a:spcPct val="104000"/>
               </a:lnSpc>
@@ -12935,7 +12935,7 @@
             </a:r>
           </a:p>
           <a:p>
-            <a:pPr marL="0" indent="0" algn="l">
+            <a:pPr marL="0" indent="0" algn="ctr">
               <a:lnSpc>
                 <a:spcPct val="104000"/>
               </a:lnSpc>
@@ -14399,12 +14399,12 @@
           </a:ln>
         </p:spPr>
         <p:txBody>
-          <a:bodyPr wrap="square" lIns="137160" tIns="91440" rIns="137160" bIns="91440" rtlCol="0" anchor="t">
+          <a:bodyPr wrap="square" lIns="137160" tIns="91440" rIns="137160" bIns="91440" rtlCol="0" anchor="ctr">
             <a:normAutofit/>
           </a:bodyPr>
           <a:lstStyle/>
           <a:p>
-            <a:pPr marL="0" indent="0" algn="l">
+            <a:pPr marL="0" indent="0" algn="ctr">
               <a:buNone/>
             </a:pPr>
             <a:r>
@@ -14419,15 +14419,14 @@
             </a:r>
           </a:p>
           <a:p>
-            <a:pPr marL="274320" indent="-274320" algn="l">
+            <a:pPr marL="0" indent="0" algn="ctr">
               <a:lnSpc>
                 <a:spcPct val="104000"/>
               </a:lnSpc>
               <a:spcBef>
                 <a:spcPts val="300"/>
               </a:spcBef>
-              <a:buFont typeface="Arial"/>
-              <a:buChar char="•"/>
+              <a:buNone/>
             </a:pPr>
             <a:r>
               <a:rPr lang="en-US" sz="1500" dirty="0">
@@ -14441,15 +14440,14 @@
             </a:r>
           </a:p>
           <a:p>
-            <a:pPr marL="274320" indent="-274320" algn="l">
+            <a:pPr marL="0" indent="0" algn="ctr">
               <a:lnSpc>
                 <a:spcPct val="104000"/>
               </a:lnSpc>
               <a:spcBef>
                 <a:spcPts val="300"/>
               </a:spcBef>
-              <a:buFont typeface="Arial"/>
-              <a:buChar char="•"/>
+              <a:buNone/>
             </a:pPr>
             <a:r>
               <a:rPr lang="en-US" sz="1500" dirty="0">
@@ -14463,15 +14461,14 @@
             </a:r>
           </a:p>
           <a:p>
-            <a:pPr marL="274320" indent="-274320" algn="l">
+            <a:pPr marL="0" indent="0" algn="ctr">
               <a:lnSpc>
                 <a:spcPct val="104000"/>
               </a:lnSpc>
               <a:spcBef>
                 <a:spcPts val="300"/>
               </a:spcBef>
-              <a:buFont typeface="Arial"/>
-              <a:buChar char="•"/>
+              <a:buNone/>
             </a:pPr>
             <a:r>
               <a:rPr lang="en-US" sz="1500" dirty="0">
@@ -14485,15 +14482,14 @@
             </a:r>
           </a:p>
           <a:p>
-            <a:pPr marL="274320" indent="-274320" algn="l">
+            <a:pPr marL="0" indent="0" algn="ctr">
               <a:lnSpc>
                 <a:spcPct val="104000"/>
               </a:lnSpc>
               <a:spcBef>
                 <a:spcPts val="300"/>
               </a:spcBef>
-              <a:buFont typeface="Arial"/>
-              <a:buChar char="•"/>
+              <a:buNone/>
             </a:pPr>
             <a:r>
               <a:rPr lang="en-US" sz="1500" dirty="0">
@@ -15208,12 +15204,12 @@
           </a:ln>
         </p:spPr>
         <p:txBody>
-          <a:bodyPr wrap="square" lIns="137160" tIns="91440" rIns="137160" bIns="91440" rtlCol="0" anchor="t">
+          <a:bodyPr wrap="square" lIns="137160" tIns="91440" rIns="137160" bIns="91440" rtlCol="0" anchor="ctr">
             <a:normAutofit/>
           </a:bodyPr>
           <a:lstStyle/>
           <a:p>
-            <a:pPr marL="0" indent="0" algn="l">
+            <a:pPr marL="0" indent="0" algn="ctr">
               <a:buNone/>
             </a:pPr>
             <a:r>
@@ -15228,15 +15224,14 @@
             </a:r>
           </a:p>
           <a:p>
-            <a:pPr marL="274320" indent="-274320" algn="l">
+            <a:pPr marL="0" indent="0" algn="ctr">
               <a:lnSpc>
                 <a:spcPct val="104000"/>
               </a:lnSpc>
               <a:spcBef>
                 <a:spcPts val="300"/>
               </a:spcBef>
-              <a:buFont typeface="Arial"/>
-              <a:buChar char="•"/>
+              <a:buNone/>
             </a:pPr>
             <a:r>
               <a:rPr lang="en-US" sz="1500" dirty="0">
@@ -15250,15 +15245,14 @@
             </a:r>
           </a:p>
           <a:p>
-            <a:pPr marL="274320" indent="-274320" algn="l">
+            <a:pPr marL="0" indent="0" algn="ctr">
               <a:lnSpc>
                 <a:spcPct val="104000"/>
               </a:lnSpc>
               <a:spcBef>
                 <a:spcPts val="300"/>
               </a:spcBef>
-              <a:buFont typeface="Arial"/>
-              <a:buChar char="•"/>
+              <a:buNone/>
             </a:pPr>
             <a:r>
               <a:rPr lang="en-US" sz="1500" dirty="0">
@@ -15272,15 +15266,14 @@
             </a:r>
           </a:p>
           <a:p>
-            <a:pPr marL="274320" indent="-274320" algn="l">
+            <a:pPr marL="0" indent="0" algn="ctr">
               <a:lnSpc>
                 <a:spcPct val="104000"/>
               </a:lnSpc>
               <a:spcBef>
                 <a:spcPts val="300"/>
               </a:spcBef>
-              <a:buFont typeface="Arial"/>
-              <a:buChar char="•"/>
+              <a:buNone/>
             </a:pPr>
             <a:r>
               <a:rPr lang="en-US" sz="1500" dirty="0">
@@ -16869,12 +16862,12 @@
           </a:ln>
         </p:spPr>
         <p:txBody>
-          <a:bodyPr wrap="square" lIns="137160" tIns="91440" rIns="137160" bIns="91440" rtlCol="0" anchor="t">
+          <a:bodyPr wrap="square" lIns="137160" tIns="91440" rIns="137160" bIns="91440" rtlCol="0" anchor="ctr">
             <a:normAutofit/>
           </a:bodyPr>
           <a:lstStyle/>
           <a:p>
-            <a:pPr marL="0" indent="0" algn="l">
+            <a:pPr marL="0" indent="0" algn="ctr">
               <a:lnSpc>
                 <a:spcPct val="104000"/>
               </a:lnSpc>
@@ -16895,7 +16888,7 @@
             </a:r>
           </a:p>
           <a:p>
-            <a:pPr marL="0" indent="0" algn="l">
+            <a:pPr marL="0" indent="0" algn="ctr">
               <a:lnSpc>
                 <a:spcPct val="104000"/>
               </a:lnSpc>
@@ -16916,7 +16909,7 @@
             </a:r>
           </a:p>
           <a:p>
-            <a:pPr marL="0" indent="0" algn="l">
+            <a:pPr marL="0" indent="0" algn="ctr">
               <a:lnSpc>
                 <a:spcPct val="104000"/>
               </a:lnSpc>
@@ -17003,12 +16996,12 @@
           </a:ln>
         </p:spPr>
         <p:txBody>
-          <a:bodyPr wrap="square" lIns="137160" tIns="91440" rIns="137160" bIns="91440" rtlCol="0" anchor="t">
+          <a:bodyPr wrap="square" lIns="137160" tIns="91440" rIns="137160" bIns="91440" rtlCol="0" anchor="ctr">
             <a:normAutofit/>
           </a:bodyPr>
           <a:lstStyle/>
           <a:p>
-            <a:pPr marL="0" indent="0" algn="l">
+            <a:pPr marL="0" indent="0" algn="ctr">
               <a:lnSpc>
                 <a:spcPct val="104000"/>
               </a:lnSpc>
@@ -17029,7 +17022,7 @@
             </a:r>
           </a:p>
           <a:p>
-            <a:pPr marL="0" indent="0" algn="l">
+            <a:pPr marL="0" indent="0" algn="ctr">
               <a:lnSpc>
                 <a:spcPct val="104000"/>
               </a:lnSpc>
@@ -17050,7 +17043,7 @@
             </a:r>
           </a:p>
           <a:p>
-            <a:pPr marL="0" indent="0" algn="l">
+            <a:pPr marL="0" indent="0" algn="ctr">
               <a:lnSpc>
                 <a:spcPct val="104000"/>
               </a:lnSpc>
@@ -17137,12 +17130,12 @@
           </a:ln>
         </p:spPr>
         <p:txBody>
-          <a:bodyPr wrap="square" lIns="137160" tIns="91440" rIns="137160" bIns="91440" rtlCol="0" anchor="t">
+          <a:bodyPr wrap="square" lIns="137160" tIns="91440" rIns="137160" bIns="91440" rtlCol="0" anchor="ctr">
             <a:normAutofit/>
           </a:bodyPr>
           <a:lstStyle/>
           <a:p>
-            <a:pPr marL="0" indent="0" algn="l">
+            <a:pPr marL="0" indent="0" algn="ctr">
               <a:lnSpc>
                 <a:spcPct val="104000"/>
               </a:lnSpc>
@@ -17163,7 +17156,7 @@
             </a:r>
           </a:p>
           <a:p>
-            <a:pPr marL="0" indent="0" algn="l">
+            <a:pPr marL="0" indent="0" algn="ctr">
               <a:lnSpc>
                 <a:spcPct val="104000"/>
               </a:lnSpc>
@@ -17184,7 +17177,7 @@
             </a:r>
           </a:p>
           <a:p>
-            <a:pPr marL="0" indent="0" algn="l">
+            <a:pPr marL="0" indent="0" algn="ctr">
               <a:lnSpc>
                 <a:spcPct val="104000"/>
               </a:lnSpc>
@@ -17271,12 +17264,12 @@
           </a:ln>
         </p:spPr>
         <p:txBody>
-          <a:bodyPr wrap="square" lIns="137160" tIns="91440" rIns="137160" bIns="91440" rtlCol="0" anchor="t">
+          <a:bodyPr wrap="square" lIns="137160" tIns="91440" rIns="137160" bIns="91440" rtlCol="0" anchor="ctr">
             <a:normAutofit/>
           </a:bodyPr>
           <a:lstStyle/>
           <a:p>
-            <a:pPr marL="0" indent="0" algn="l">
+            <a:pPr marL="0" indent="0" algn="ctr">
               <a:lnSpc>
                 <a:spcPct val="104000"/>
               </a:lnSpc>
@@ -17297,7 +17290,7 @@
             </a:r>
           </a:p>
           <a:p>
-            <a:pPr marL="0" indent="0" algn="l">
+            <a:pPr marL="0" indent="0" algn="ctr">
               <a:lnSpc>
                 <a:spcPct val="104000"/>
               </a:lnSpc>
@@ -17318,7 +17311,7 @@
             </a:r>
           </a:p>
           <a:p>
-            <a:pPr marL="0" indent="0" algn="l">
+            <a:pPr marL="0" indent="0" algn="ctr">
               <a:lnSpc>
                 <a:spcPct val="104000"/>
               </a:lnSpc>
@@ -18357,12 +18350,12 @@
           </a:ln>
         </p:spPr>
         <p:txBody>
-          <a:bodyPr wrap="square" lIns="137160" tIns="91440" rIns="137160" bIns="91440" rtlCol="0" anchor="t">
+          <a:bodyPr wrap="square" lIns="137160" tIns="91440" rIns="137160" bIns="91440" rtlCol="0" anchor="ctr">
             <a:normAutofit/>
           </a:bodyPr>
           <a:lstStyle/>
           <a:p>
-            <a:pPr marL="0" indent="0" algn="l">
+            <a:pPr marL="0" indent="0" algn="ctr">
               <a:buNone/>
             </a:pPr>
             <a:r>
@@ -18377,15 +18370,14 @@
             </a:r>
           </a:p>
           <a:p>
-            <a:pPr marL="274320" indent="-274320" algn="l">
+            <a:pPr marL="0" indent="0" algn="ctr">
               <a:lnSpc>
                 <a:spcPct val="104000"/>
               </a:lnSpc>
               <a:spcBef>
                 <a:spcPts val="300"/>
               </a:spcBef>
-              <a:buFont typeface="Arial"/>
-              <a:buChar char="•"/>
+              <a:buNone/>
             </a:pPr>
             <a:r>
               <a:rPr lang="en-US" sz="1500" dirty="0">
@@ -18399,15 +18391,14 @@
             </a:r>
           </a:p>
           <a:p>
-            <a:pPr marL="274320" indent="-274320" algn="l">
+            <a:pPr marL="0" indent="0" algn="ctr">
               <a:lnSpc>
                 <a:spcPct val="104000"/>
               </a:lnSpc>
               <a:spcBef>
                 <a:spcPts val="300"/>
               </a:spcBef>
-              <a:buFont typeface="Arial"/>
-              <a:buChar char="•"/>
+              <a:buNone/>
             </a:pPr>
             <a:r>
               <a:rPr lang="en-US" sz="1500" dirty="0">
@@ -18421,15 +18412,14 @@
             </a:r>
           </a:p>
           <a:p>
-            <a:pPr marL="274320" indent="-274320" algn="l">
+            <a:pPr marL="0" indent="0" algn="ctr">
               <a:lnSpc>
                 <a:spcPct val="104000"/>
               </a:lnSpc>
               <a:spcBef>
                 <a:spcPts val="300"/>
               </a:spcBef>
-              <a:buFont typeface="Arial"/>
-              <a:buChar char="•"/>
+              <a:buNone/>
             </a:pPr>
             <a:r>
               <a:rPr lang="en-US" sz="1500" dirty="0">
@@ -19383,12 +19373,12 @@
           </a:ln>
         </p:spPr>
         <p:txBody>
-          <a:bodyPr wrap="square" lIns="137160" tIns="91440" rIns="137160" bIns="91440" rtlCol="0" anchor="t">
+          <a:bodyPr wrap="square" lIns="137160" tIns="91440" rIns="137160" bIns="91440" rtlCol="0" anchor="ctr">
             <a:normAutofit/>
           </a:bodyPr>
           <a:lstStyle/>
           <a:p>
-            <a:pPr marL="0" indent="0" algn="l">
+            <a:pPr marL="0" indent="0" algn="ctr">
               <a:buNone/>
             </a:pPr>
             <a:r>
@@ -19403,15 +19393,14 @@
             </a:r>
           </a:p>
           <a:p>
-            <a:pPr marL="274320" indent="-274320" algn="l">
+            <a:pPr marL="0" indent="0" algn="ctr">
               <a:lnSpc>
                 <a:spcPct val="104000"/>
               </a:lnSpc>
               <a:spcBef>
                 <a:spcPts val="300"/>
               </a:spcBef>
-              <a:buFont typeface="Arial"/>
-              <a:buChar char="•"/>
+              <a:buNone/>
             </a:pPr>
             <a:r>
               <a:rPr lang="en-US" sz="1500" dirty="0">
@@ -19425,15 +19414,14 @@
             </a:r>
           </a:p>
           <a:p>
-            <a:pPr marL="274320" indent="-274320" algn="l">
+            <a:pPr marL="0" indent="0" algn="ctr">
               <a:lnSpc>
                 <a:spcPct val="104000"/>
               </a:lnSpc>
               <a:spcBef>
                 <a:spcPts val="300"/>
               </a:spcBef>
-              <a:buFont typeface="Arial"/>
-              <a:buChar char="•"/>
+              <a:buNone/>
             </a:pPr>
             <a:r>
               <a:rPr lang="en-US" sz="1500" dirty="0">
@@ -19447,15 +19435,14 @@
             </a:r>
           </a:p>
           <a:p>
-            <a:pPr marL="274320" indent="-274320" algn="l">
+            <a:pPr marL="0" indent="0" algn="ctr">
               <a:lnSpc>
                 <a:spcPct val="104000"/>
               </a:lnSpc>
               <a:spcBef>
                 <a:spcPts val="300"/>
               </a:spcBef>
-              <a:buFont typeface="Arial"/>
-              <a:buChar char="•"/>
+              <a:buNone/>
             </a:pPr>
             <a:r>
               <a:rPr lang="en-US" sz="1500" dirty="0">
@@ -19469,15 +19456,14 @@
             </a:r>
           </a:p>
           <a:p>
-            <a:pPr marL="274320" indent="-274320" algn="l">
+            <a:pPr marL="0" indent="0" algn="ctr">
               <a:lnSpc>
                 <a:spcPct val="104000"/>
               </a:lnSpc>
               <a:spcBef>
                 <a:spcPts val="300"/>
               </a:spcBef>
-              <a:buFont typeface="Arial"/>
-              <a:buChar char="•"/>
+              <a:buNone/>
             </a:pPr>
             <a:r>
               <a:rPr lang="en-US" sz="1500" dirty="0">
@@ -20105,12 +20091,12 @@
           </a:ln>
         </p:spPr>
         <p:txBody>
-          <a:bodyPr wrap="square" lIns="137160" tIns="91440" rIns="137160" bIns="91440" rtlCol="0" anchor="t">
+          <a:bodyPr wrap="square" lIns="137160" tIns="91440" rIns="137160" bIns="91440" rtlCol="0" anchor="ctr">
             <a:normAutofit/>
           </a:bodyPr>
           <a:lstStyle/>
           <a:p>
-            <a:pPr marL="0" indent="0" algn="l">
+            <a:pPr marL="0" indent="0" algn="ctr">
               <a:lnSpc>
                 <a:spcPct val="104000"/>
               </a:lnSpc>
@@ -20131,7 +20117,7 @@
             </a:r>
           </a:p>
           <a:p>
-            <a:pPr marL="0" indent="0" algn="l">
+            <a:pPr marL="0" indent="0" algn="ctr">
               <a:lnSpc>
                 <a:spcPct val="104000"/>
               </a:lnSpc>
@@ -20148,11 +20134,11 @@
                 <a:latin typeface="Arial"/>
                 <a:cs typeface="Arial"/>
               </a:rPr>
-              <a:t>Thay đổi tác động</a:t>
-            </a:r>
-          </a:p>
-          <a:p>
-            <a:pPr marL="0" indent="0" algn="l">
+              <a:t>Thay đổi tác động (effect modification)</a:t>
+            </a:r>
+          </a:p>
+          <a:p>
+            <a:pPr marL="0" indent="0" algn="ctr">
               <a:lnSpc>
                 <a:spcPct val="104000"/>
               </a:lnSpc>
@@ -20239,12 +20225,12 @@
           </a:ln>
         </p:spPr>
         <p:txBody>
-          <a:bodyPr wrap="square" lIns="137160" tIns="91440" rIns="137160" bIns="91440" rtlCol="0" anchor="t">
+          <a:bodyPr wrap="square" lIns="137160" tIns="91440" rIns="137160" bIns="91440" rtlCol="0" anchor="ctr">
             <a:normAutofit/>
           </a:bodyPr>
           <a:lstStyle/>
           <a:p>
-            <a:pPr marL="0" indent="0" algn="l">
+            <a:pPr marL="0" indent="0" algn="ctr">
               <a:lnSpc>
                 <a:spcPct val="104000"/>
               </a:lnSpc>
@@ -20265,7 +20251,7 @@
             </a:r>
           </a:p>
           <a:p>
-            <a:pPr marL="0" indent="0" algn="l">
+            <a:pPr marL="0" indent="0" algn="ctr">
               <a:lnSpc>
                 <a:spcPct val="104000"/>
               </a:lnSpc>
@@ -20286,7 +20272,7 @@
             </a:r>
           </a:p>
           <a:p>
-            <a:pPr marL="0" indent="0" algn="l">
+            <a:pPr marL="0" indent="0" algn="ctr">
               <a:lnSpc>
                 <a:spcPct val="104000"/>
               </a:lnSpc>
@@ -20373,12 +20359,12 @@
           </a:ln>
         </p:spPr>
         <p:txBody>
-          <a:bodyPr wrap="square" lIns="137160" tIns="91440" rIns="137160" bIns="91440" rtlCol="0" anchor="t">
+          <a:bodyPr wrap="square" lIns="137160" tIns="91440" rIns="137160" bIns="91440" rtlCol="0" anchor="ctr">
             <a:normAutofit/>
           </a:bodyPr>
           <a:lstStyle/>
           <a:p>
-            <a:pPr marL="0" indent="0" algn="l">
+            <a:pPr marL="0" indent="0" algn="ctr">
               <a:lnSpc>
                 <a:spcPct val="104000"/>
               </a:lnSpc>
@@ -20399,7 +20385,7 @@
             </a:r>
           </a:p>
           <a:p>
-            <a:pPr marL="0" indent="0" algn="l">
+            <a:pPr marL="0" indent="0" algn="ctr">
               <a:lnSpc>
                 <a:spcPct val="104000"/>
               </a:lnSpc>
@@ -20420,7 +20406,7 @@
             </a:r>
           </a:p>
           <a:p>
-            <a:pPr marL="0" indent="0" algn="l">
+            <a:pPr marL="0" indent="0" algn="ctr">
               <a:lnSpc>
                 <a:spcPct val="104000"/>
               </a:lnSpc>
@@ -20507,12 +20493,12 @@
           </a:ln>
         </p:spPr>
         <p:txBody>
-          <a:bodyPr wrap="square" lIns="137160" tIns="91440" rIns="137160" bIns="91440" rtlCol="0" anchor="t">
+          <a:bodyPr wrap="square" lIns="137160" tIns="91440" rIns="137160" bIns="91440" rtlCol="0" anchor="ctr">
             <a:normAutofit/>
           </a:bodyPr>
           <a:lstStyle/>
           <a:p>
-            <a:pPr marL="0" indent="0" algn="l">
+            <a:pPr marL="0" indent="0" algn="ctr">
               <a:lnSpc>
                 <a:spcPct val="104000"/>
               </a:lnSpc>
@@ -20529,11 +20515,11 @@
                 <a:latin typeface="Arial"/>
                 <a:cs typeface="Arial"/>
               </a:rPr>
-              <a:t>Biểu đồ rừng, tính không đồng nhất</a:t>
-            </a:r>
-          </a:p>
-          <a:p>
-            <a:pPr marL="0" indent="0" algn="l">
+              <a:t>Biểu đồ rừng (forest plot), không đồng nhất</a:t>
+            </a:r>
+          </a:p>
+          <a:p>
+            <a:pPr marL="0" indent="0" algn="ctr">
               <a:lnSpc>
                 <a:spcPct val="104000"/>
               </a:lnSpc>
@@ -21676,7 +21662,7 @@
                 <a:latin typeface="Arial"/>
                 <a:cs typeface="Arial"/>
               </a:rPr>
-              <a:t>Sơ đồ PRISMA: từ 1 300 bản ghi đến 9 nghiên cứu</a:t>
+              <a:t>Sơ đồ PRISMA: từ 1300 bản ghi đến 9 nghiên cứu</a:t>
             </a:r>
           </a:p>
         </p:txBody>
@@ -21767,7 +21753,7 @@
                 <a:latin typeface="Arial"/>
                 <a:cs typeface="Arial"/>
               </a:rPr>
-              <a:t>PRISMA: hướng dẫn báo cáo tổng quan hệ thống và phân tích gộp. RCT: thử nghiệm ngẫu nhiên có đối chứng.</a:t>
+              <a:t>PRISMA: hướng dẫn báo cáo tổng quan hệ thống và phân tích gộp. RCT: thử nghiệm ngẫu nhiên có đối chứng.</a:t>
             </a:r>
           </a:p>
         </p:txBody>
@@ -21990,7 +21976,7 @@
                 <a:latin typeface="Arial"/>
                 <a:cs typeface="Arial"/>
               </a:rPr>
-              <a:t>Đọc biểu đồ rừng trong bốn bước</a:t>
+              <a:t>Đọc biểu đồ rừng (forest plot) trong bốn bước</a:t>
             </a:r>
           </a:p>
         </p:txBody>
@@ -22297,14 +22283,14 @@
               <a:buNone/>
             </a:pPr>
             <a:r>
-              <a:rPr lang="en-US" sz="2800" b="1" dirty="0">
+              <a:rPr lang="en-US" sz="2100" b="1" dirty="0">
                 <a:solidFill>
                   <a:srgbClr val="0D7377"/>
                 </a:solidFill>
                 <a:latin typeface="Arial"/>
                 <a:cs typeface="Arial"/>
               </a:rPr>
-              <a:t>Tính không đồng nhất: các nghiên cứu có thống nhất?</a:t>
+              <a:t>Tính không đồng nhất (heterogeneity): các nghiên cứu có thống nhất?</a:t>
             </a:r>
           </a:p>
         </p:txBody>
@@ -23604,12 +23590,12 @@
           </a:ln>
         </p:spPr>
         <p:txBody>
-          <a:bodyPr wrap="square" lIns="137160" tIns="91440" rIns="137160" bIns="91440" rtlCol="0" anchor="t">
+          <a:bodyPr wrap="square" lIns="137160" tIns="91440" rIns="137160" bIns="91440" rtlCol="0" anchor="ctr">
             <a:normAutofit/>
           </a:bodyPr>
           <a:lstStyle/>
           <a:p>
-            <a:pPr marL="0" indent="0" algn="l">
+            <a:pPr marL="0" indent="0" algn="ctr">
               <a:lnSpc>
                 <a:spcPct val="104000"/>
               </a:lnSpc>
@@ -23630,7 +23616,7 @@
             </a:r>
           </a:p>
           <a:p>
-            <a:pPr marL="0" indent="0" algn="l">
+            <a:pPr marL="0" indent="0" algn="ctr">
               <a:lnSpc>
                 <a:spcPct val="104000"/>
               </a:lnSpc>
@@ -23651,7 +23637,7 @@
             </a:r>
           </a:p>
           <a:p>
-            <a:pPr marL="0" indent="0" algn="l">
+            <a:pPr marL="0" indent="0" algn="ctr">
               <a:lnSpc>
                 <a:spcPct val="104000"/>
               </a:lnSpc>
@@ -23668,7 +23654,7 @@
                 <a:latin typeface="Arial"/>
                 <a:cs typeface="Arial"/>
               </a:rPr>
-              <a:t>Thí điểm: khả thi, không phải hiệu quả</a:t>
+              <a:t>Thí điểm: khả thi, không phải hiệu quả</a:t>
             </a:r>
           </a:p>
         </p:txBody>
@@ -23738,12 +23724,12 @@
           </a:ln>
         </p:spPr>
         <p:txBody>
-          <a:bodyPr wrap="square" lIns="137160" tIns="91440" rIns="137160" bIns="91440" rtlCol="0" anchor="t">
+          <a:bodyPr wrap="square" lIns="137160" tIns="91440" rIns="137160" bIns="91440" rtlCol="0" anchor="ctr">
             <a:normAutofit/>
           </a:bodyPr>
           <a:lstStyle/>
           <a:p>
-            <a:pPr marL="0" indent="0" algn="l">
+            <a:pPr marL="0" indent="0" algn="ctr">
               <a:lnSpc>
                 <a:spcPct val="104000"/>
               </a:lnSpc>
@@ -23764,7 +23750,7 @@
             </a:r>
           </a:p>
           <a:p>
-            <a:pPr marL="0" indent="0" algn="l">
+            <a:pPr marL="0" indent="0" algn="ctr">
               <a:lnSpc>
                 <a:spcPct val="104000"/>
               </a:lnSpc>
@@ -23785,7 +23771,7 @@
             </a:r>
           </a:p>
           <a:p>
-            <a:pPr marL="0" indent="0" algn="l">
+            <a:pPr marL="0" indent="0" algn="ctr">
               <a:lnSpc>
                 <a:spcPct val="104000"/>
               </a:lnSpc>
@@ -23872,12 +23858,12 @@
           </a:ln>
         </p:spPr>
         <p:txBody>
-          <a:bodyPr wrap="square" lIns="137160" tIns="91440" rIns="137160" bIns="91440" rtlCol="0" anchor="t">
+          <a:bodyPr wrap="square" lIns="137160" tIns="91440" rIns="137160" bIns="91440" rtlCol="0" anchor="ctr">
             <a:normAutofit/>
           </a:bodyPr>
           <a:lstStyle/>
           <a:p>
-            <a:pPr marL="0" indent="0" algn="l">
+            <a:pPr marL="0" indent="0" algn="ctr">
               <a:lnSpc>
                 <a:spcPct val="104000"/>
               </a:lnSpc>
@@ -23898,7 +23884,7 @@
             </a:r>
           </a:p>
           <a:p>
-            <a:pPr marL="0" indent="0" algn="l">
+            <a:pPr marL="0" indent="0" algn="ctr">
               <a:lnSpc>
                 <a:spcPct val="104000"/>
               </a:lnSpc>
@@ -23919,7 +23905,7 @@
             </a:r>
           </a:p>
           <a:p>
-            <a:pPr marL="0" indent="0" algn="l">
+            <a:pPr marL="0" indent="0" algn="ctr">
               <a:lnSpc>
                 <a:spcPct val="104000"/>
               </a:lnSpc>
@@ -24408,12 +24394,12 @@
           </a:ln>
         </p:spPr>
         <p:txBody>
-          <a:bodyPr wrap="square" lIns="137160" tIns="91440" rIns="137160" bIns="91440" rtlCol="0" anchor="t">
+          <a:bodyPr wrap="square" lIns="137160" tIns="91440" rIns="137160" bIns="91440" rtlCol="0" anchor="ctr">
             <a:normAutofit/>
           </a:bodyPr>
           <a:lstStyle/>
           <a:p>
-            <a:pPr marL="0" indent="0" algn="l">
+            <a:pPr marL="0" indent="0" algn="ctr">
               <a:buNone/>
             </a:pPr>
             <a:r>
@@ -24428,15 +24414,14 @@
             </a:r>
           </a:p>
           <a:p>
-            <a:pPr marL="274320" indent="-274320" algn="l">
+            <a:pPr marL="0" indent="0" algn="ctr">
               <a:lnSpc>
                 <a:spcPct val="104000"/>
               </a:lnSpc>
               <a:spcBef>
                 <a:spcPts val="300"/>
               </a:spcBef>
-              <a:buFont typeface="Arial"/>
-              <a:buChar char="•"/>
+              <a:buNone/>
             </a:pPr>
             <a:r>
               <a:rPr lang="en-US" sz="1500" dirty="0">
@@ -24450,15 +24435,14 @@
             </a:r>
           </a:p>
           <a:p>
-            <a:pPr marL="274320" indent="-274320" algn="l">
+            <a:pPr marL="0" indent="0" algn="ctr">
               <a:lnSpc>
                 <a:spcPct val="104000"/>
               </a:lnSpc>
               <a:spcBef>
                 <a:spcPts val="300"/>
               </a:spcBef>
-              <a:buFont typeface="Arial"/>
-              <a:buChar char="•"/>
+              <a:buNone/>
             </a:pPr>
             <a:r>
               <a:rPr lang="en-US" sz="1500" dirty="0">
@@ -24472,15 +24456,14 @@
             </a:r>
           </a:p>
           <a:p>
-            <a:pPr marL="274320" indent="-274320" algn="l">
+            <a:pPr marL="0" indent="0" algn="ctr">
               <a:lnSpc>
                 <a:spcPct val="104000"/>
               </a:lnSpc>
               <a:spcBef>
                 <a:spcPts val="300"/>
               </a:spcBef>
-              <a:buFont typeface="Arial"/>
-              <a:buChar char="•"/>
+              <a:buNone/>
             </a:pPr>
             <a:r>
               <a:rPr lang="en-US" sz="1500" dirty="0">
@@ -24494,15 +24477,14 @@
             </a:r>
           </a:p>
           <a:p>
-            <a:pPr marL="274320" indent="-274320" algn="l">
+            <a:pPr marL="0" indent="0" algn="ctr">
               <a:lnSpc>
                 <a:spcPct val="104000"/>
               </a:lnSpc>
               <a:spcBef>
                 <a:spcPts val="300"/>
               </a:spcBef>
-              <a:buFont typeface="Arial"/>
-              <a:buChar char="•"/>
+              <a:buNone/>
             </a:pPr>
             <a:r>
               <a:rPr lang="en-US" sz="1500" dirty="0">
@@ -24874,12 +24856,12 @@
           </a:ln>
         </p:spPr>
         <p:txBody>
-          <a:bodyPr wrap="square" lIns="137160" tIns="91440" rIns="137160" bIns="91440" rtlCol="0" anchor="t">
+          <a:bodyPr wrap="square" lIns="137160" tIns="91440" rIns="137160" bIns="91440" rtlCol="0" anchor="ctr">
             <a:normAutofit/>
           </a:bodyPr>
           <a:lstStyle/>
           <a:p>
-            <a:pPr marL="0" indent="0" algn="l">
+            <a:pPr marL="0" indent="0" algn="ctr">
               <a:lnSpc>
                 <a:spcPct val="104000"/>
               </a:lnSpc>
@@ -24900,7 +24882,7 @@
             </a:r>
           </a:p>
           <a:p>
-            <a:pPr marL="0" indent="0" algn="l">
+            <a:pPr marL="0" indent="0" algn="ctr">
               <a:lnSpc>
                 <a:spcPct val="104000"/>
               </a:lnSpc>
@@ -24987,12 +24969,12 @@
           </a:ln>
         </p:spPr>
         <p:txBody>
-          <a:bodyPr wrap="square" lIns="137160" tIns="91440" rIns="137160" bIns="91440" rtlCol="0" anchor="t">
+          <a:bodyPr wrap="square" lIns="137160" tIns="91440" rIns="137160" bIns="91440" rtlCol="0" anchor="ctr">
             <a:normAutofit/>
           </a:bodyPr>
           <a:lstStyle/>
           <a:p>
-            <a:pPr marL="0" indent="0" algn="l">
+            <a:pPr marL="0" indent="0" algn="ctr">
               <a:lnSpc>
                 <a:spcPct val="104000"/>
               </a:lnSpc>
@@ -25013,7 +24995,7 @@
             </a:r>
           </a:p>
           <a:p>
-            <a:pPr marL="0" indent="0" algn="l">
+            <a:pPr marL="0" indent="0" algn="ctr">
               <a:lnSpc>
                 <a:spcPct val="104000"/>
               </a:lnSpc>
@@ -25100,12 +25082,12 @@
           </a:ln>
         </p:spPr>
         <p:txBody>
-          <a:bodyPr wrap="square" lIns="137160" tIns="91440" rIns="137160" bIns="91440" rtlCol="0" anchor="t">
+          <a:bodyPr wrap="square" lIns="137160" tIns="91440" rIns="137160" bIns="91440" rtlCol="0" anchor="ctr">
             <a:normAutofit/>
           </a:bodyPr>
           <a:lstStyle/>
           <a:p>
-            <a:pPr marL="0" indent="0" algn="l">
+            <a:pPr marL="0" indent="0" algn="ctr">
               <a:lnSpc>
                 <a:spcPct val="104000"/>
               </a:lnSpc>
@@ -25126,7 +25108,7 @@
             </a:r>
           </a:p>
           <a:p>
-            <a:pPr marL="0" indent="0" algn="l">
+            <a:pPr marL="0" indent="0" algn="ctr">
               <a:lnSpc>
                 <a:spcPct val="104000"/>
               </a:lnSpc>
@@ -25213,12 +25195,12 @@
           </a:ln>
         </p:spPr>
         <p:txBody>
-          <a:bodyPr wrap="square" lIns="137160" tIns="91440" rIns="137160" bIns="91440" rtlCol="0" anchor="t">
+          <a:bodyPr wrap="square" lIns="137160" tIns="91440" rIns="137160" bIns="91440" rtlCol="0" anchor="ctr">
             <a:normAutofit/>
           </a:bodyPr>
           <a:lstStyle/>
           <a:p>
-            <a:pPr marL="0" indent="0" algn="l">
+            <a:pPr marL="0" indent="0" algn="ctr">
               <a:lnSpc>
                 <a:spcPct val="104000"/>
               </a:lnSpc>
@@ -25239,7 +25221,7 @@
             </a:r>
           </a:p>
           <a:p>
-            <a:pPr marL="0" indent="0" algn="l">
+            <a:pPr marL="0" indent="0" algn="ctr">
               <a:lnSpc>
                 <a:spcPct val="104000"/>
               </a:lnSpc>
@@ -25260,7 +25242,7 @@
             </a:r>
           </a:p>
           <a:p>
-            <a:pPr marL="0" indent="0" algn="l">
+            <a:pPr marL="0" indent="0" algn="ctr">
               <a:lnSpc>
                 <a:spcPct val="104000"/>
               </a:lnSpc>
@@ -26030,12 +26012,12 @@
           </a:ln>
         </p:spPr>
         <p:txBody>
-          <a:bodyPr wrap="square" lIns="137160" tIns="91440" rIns="137160" bIns="91440" rtlCol="0" anchor="t">
+          <a:bodyPr wrap="square" lIns="137160" tIns="91440" rIns="137160" bIns="91440" rtlCol="0" anchor="ctr">
             <a:normAutofit/>
           </a:bodyPr>
           <a:lstStyle/>
           <a:p>
-            <a:pPr marL="0" indent="0" algn="l">
+            <a:pPr marL="0" indent="0" algn="ctr">
               <a:buNone/>
             </a:pPr>
             <a:r>
@@ -26050,15 +26032,14 @@
             </a:r>
           </a:p>
           <a:p>
-            <a:pPr marL="274320" indent="-274320" algn="l">
+            <a:pPr marL="0" indent="0" algn="ctr">
               <a:lnSpc>
                 <a:spcPct val="104000"/>
               </a:lnSpc>
               <a:spcBef>
                 <a:spcPts val="300"/>
               </a:spcBef>
-              <a:buFont typeface="Arial"/>
-              <a:buChar char="•"/>
+              <a:buNone/>
             </a:pPr>
             <a:r>
               <a:rPr lang="en-US" sz="1500" dirty="0">
@@ -26072,15 +26053,14 @@
             </a:r>
           </a:p>
           <a:p>
-            <a:pPr marL="274320" indent="-274320" algn="l">
+            <a:pPr marL="0" indent="0" algn="ctr">
               <a:lnSpc>
                 <a:spcPct val="104000"/>
               </a:lnSpc>
               <a:spcBef>
                 <a:spcPts val="300"/>
               </a:spcBef>
-              <a:buFont typeface="Arial"/>
-              <a:buChar char="•"/>
+              <a:buNone/>
             </a:pPr>
             <a:r>
               <a:rPr lang="en-US" sz="1500" dirty="0">
@@ -26094,15 +26074,14 @@
             </a:r>
           </a:p>
           <a:p>
-            <a:pPr marL="274320" indent="-274320" algn="l">
+            <a:pPr marL="0" indent="0" algn="ctr">
               <a:lnSpc>
                 <a:spcPct val="104000"/>
               </a:lnSpc>
               <a:spcBef>
                 <a:spcPts val="300"/>
               </a:spcBef>
-              <a:buFont typeface="Arial"/>
-              <a:buChar char="•"/>
+              <a:buNone/>
             </a:pPr>
             <a:r>
               <a:rPr lang="en-US" sz="1500" dirty="0">
@@ -26116,15 +26095,14 @@
             </a:r>
           </a:p>
           <a:p>
-            <a:pPr marL="274320" indent="-274320" algn="l">
+            <a:pPr marL="0" indent="0" algn="ctr">
               <a:lnSpc>
                 <a:spcPct val="104000"/>
               </a:lnSpc>
               <a:spcBef>
                 <a:spcPts val="300"/>
               </a:spcBef>
-              <a:buFont typeface="Arial"/>
-              <a:buChar char="•"/>
+              <a:buNone/>
             </a:pPr>
             <a:r>
               <a:rPr lang="en-US" sz="1500" dirty="0">
@@ -26138,15 +26116,14 @@
             </a:r>
           </a:p>
           <a:p>
-            <a:pPr marL="274320" indent="-274320" algn="l">
+            <a:pPr marL="0" indent="0" algn="ctr">
               <a:lnSpc>
                 <a:spcPct val="104000"/>
               </a:lnSpc>
               <a:spcBef>
                 <a:spcPts val="300"/>
               </a:spcBef>
-              <a:buFont typeface="Arial"/>
-              <a:buChar char="•"/>
+              <a:buNone/>
             </a:pPr>
             <a:r>
               <a:rPr lang="en-US" sz="1500" dirty="0">
@@ -26479,12 +26456,12 @@
           </a:ln>
         </p:spPr>
         <p:txBody>
-          <a:bodyPr wrap="square" lIns="137160" tIns="91440" rIns="137160" bIns="91440" rtlCol="0" anchor="t">
+          <a:bodyPr wrap="square" lIns="137160" tIns="91440" rIns="137160" bIns="91440" rtlCol="0" anchor="ctr">
             <a:normAutofit/>
           </a:bodyPr>
           <a:lstStyle/>
           <a:p>
-            <a:pPr marL="0" indent="0" algn="l">
+            <a:pPr marL="0" indent="0" algn="ctr">
               <a:lnSpc>
                 <a:spcPct val="104000"/>
               </a:lnSpc>
@@ -26505,7 +26482,7 @@
             </a:r>
           </a:p>
           <a:p>
-            <a:pPr marL="0" indent="0" algn="l">
+            <a:pPr marL="0" indent="0" algn="ctr">
               <a:lnSpc>
                 <a:spcPct val="104000"/>
               </a:lnSpc>
@@ -26526,7 +26503,7 @@
             </a:r>
           </a:p>
           <a:p>
-            <a:pPr marL="0" indent="0" algn="l">
+            <a:pPr marL="0" indent="0" algn="ctr">
               <a:lnSpc>
                 <a:spcPct val="104000"/>
               </a:lnSpc>
@@ -26613,12 +26590,12 @@
           </a:ln>
         </p:spPr>
         <p:txBody>
-          <a:bodyPr wrap="square" lIns="137160" tIns="91440" rIns="137160" bIns="91440" rtlCol="0" anchor="t">
+          <a:bodyPr wrap="square" lIns="137160" tIns="91440" rIns="137160" bIns="91440" rtlCol="0" anchor="ctr">
             <a:normAutofit/>
           </a:bodyPr>
           <a:lstStyle/>
           <a:p>
-            <a:pPr marL="0" indent="0" algn="l">
+            <a:pPr marL="0" indent="0" algn="ctr">
               <a:lnSpc>
                 <a:spcPct val="104000"/>
               </a:lnSpc>
@@ -26639,7 +26616,7 @@
             </a:r>
           </a:p>
           <a:p>
-            <a:pPr marL="0" indent="0" algn="l">
+            <a:pPr marL="0" indent="0" algn="ctr">
               <a:lnSpc>
                 <a:spcPct val="104000"/>
               </a:lnSpc>
@@ -26660,7 +26637,7 @@
             </a:r>
           </a:p>
           <a:p>
-            <a:pPr marL="0" indent="0" algn="l">
+            <a:pPr marL="0" indent="0" algn="ctr">
               <a:lnSpc>
                 <a:spcPct val="104000"/>
               </a:lnSpc>
@@ -26747,12 +26724,12 @@
           </a:ln>
         </p:spPr>
         <p:txBody>
-          <a:bodyPr wrap="square" lIns="137160" tIns="91440" rIns="137160" bIns="91440" rtlCol="0" anchor="t">
+          <a:bodyPr wrap="square" lIns="137160" tIns="91440" rIns="137160" bIns="91440" rtlCol="0" anchor="ctr">
             <a:normAutofit/>
           </a:bodyPr>
           <a:lstStyle/>
           <a:p>
-            <a:pPr marL="0" indent="0" algn="l">
+            <a:pPr marL="0" indent="0" algn="ctr">
               <a:lnSpc>
                 <a:spcPct val="104000"/>
               </a:lnSpc>
@@ -26773,7 +26750,7 @@
             </a:r>
           </a:p>
           <a:p>
-            <a:pPr marL="0" indent="0" algn="l">
+            <a:pPr marL="0" indent="0" algn="ctr">
               <a:lnSpc>
                 <a:spcPct val="104000"/>
               </a:lnSpc>
@@ -26794,7 +26771,7 @@
             </a:r>
           </a:p>
           <a:p>
-            <a:pPr marL="0" indent="0" algn="l">
+            <a:pPr marL="0" indent="0" algn="ctr">
               <a:lnSpc>
                 <a:spcPct val="104000"/>
               </a:lnSpc>
@@ -26881,12 +26858,12 @@
           </a:ln>
         </p:spPr>
         <p:txBody>
-          <a:bodyPr wrap="square" lIns="137160" tIns="91440" rIns="137160" bIns="91440" rtlCol="0" anchor="t">
+          <a:bodyPr wrap="square" lIns="137160" tIns="91440" rIns="137160" bIns="91440" rtlCol="0" anchor="ctr">
             <a:normAutofit/>
           </a:bodyPr>
           <a:lstStyle/>
           <a:p>
-            <a:pPr marL="0" indent="0" algn="l">
+            <a:pPr marL="0" indent="0" algn="ctr">
               <a:lnSpc>
                 <a:spcPct val="104000"/>
               </a:lnSpc>
@@ -26907,7 +26884,7 @@
             </a:r>
           </a:p>
           <a:p>
-            <a:pPr marL="0" indent="0" algn="l">
+            <a:pPr marL="0" indent="0" algn="ctr">
               <a:lnSpc>
                 <a:spcPct val="104000"/>
               </a:lnSpc>
@@ -27267,7 +27244,7 @@
                 <a:latin typeface="Arial"/>
                 <a:cs typeface="Arial"/>
               </a:rPr>
-              <a:t>Câu hỏi cuối buổi (chat hoặc biểu mẫu 1 câu): người bệnh ICU được truyền nhiều dịch hơn tử vong nhiều hơn. Nêu một lý do khác ngoài bản thân dịch truyền</a:t>
+              <a:t>Câu hỏi cuối buổi (trong chat): người bệnh ICU được truyền nhiều dịch hơn tử vong nhiều hơn. Nêu một lý do khác ngoài bản thân dịch truyền</a:t>
             </a:r>
           </a:p>
           <a:p>
@@ -27424,7 +27401,7 @@
                 <a:latin typeface="Arial"/>
                 <a:cs typeface="Arial"/>
               </a:rPr>
-              <a:t>Mỗi người một câu trả lời cuối buổi, trong khung chat hoặc biểu mẫu</a:t>
+              <a:t>Mỗi người một câu trả lời cuối buổi, trong khung chat</a:t>
             </a:r>
           </a:p>
         </p:txBody>
@@ -28047,12 +28024,12 @@
           </a:ln>
         </p:spPr>
         <p:txBody>
-          <a:bodyPr wrap="square" lIns="137160" tIns="91440" rIns="137160" bIns="91440" rtlCol="0" anchor="t">
+          <a:bodyPr wrap="square" lIns="137160" tIns="91440" rIns="137160" bIns="91440" rtlCol="0" anchor="ctr">
             <a:normAutofit/>
           </a:bodyPr>
           <a:lstStyle/>
           <a:p>
-            <a:pPr marL="0" indent="0" algn="l">
+            <a:pPr marL="0" indent="0" algn="ctr">
               <a:buNone/>
             </a:pPr>
             <a:r>
@@ -28067,15 +28044,14 @@
             </a:r>
           </a:p>
           <a:p>
-            <a:pPr marL="274320" indent="-274320" algn="l">
+            <a:pPr marL="0" indent="0" algn="ctr">
               <a:lnSpc>
                 <a:spcPct val="104000"/>
               </a:lnSpc>
               <a:spcBef>
                 <a:spcPts val="300"/>
               </a:spcBef>
-              <a:buFont typeface="Arial"/>
-              <a:buChar char="•"/>
+              <a:buNone/>
             </a:pPr>
             <a:r>
               <a:rPr lang="en-US" sz="1500" dirty="0">
@@ -28089,15 +28065,14 @@
             </a:r>
           </a:p>
           <a:p>
-            <a:pPr marL="274320" indent="-274320" algn="l">
+            <a:pPr marL="0" indent="0" algn="ctr">
               <a:lnSpc>
                 <a:spcPct val="104000"/>
               </a:lnSpc>
               <a:spcBef>
                 <a:spcPts val="300"/>
               </a:spcBef>
-              <a:buFont typeface="Arial"/>
-              <a:buChar char="•"/>
+              <a:buNone/>
             </a:pPr>
             <a:r>
               <a:rPr lang="en-US" sz="1500" dirty="0">
@@ -28111,15 +28086,14 @@
             </a:r>
           </a:p>
           <a:p>
-            <a:pPr marL="274320" indent="-274320" algn="l">
+            <a:pPr marL="0" indent="0" algn="ctr">
               <a:lnSpc>
                 <a:spcPct val="104000"/>
               </a:lnSpc>
               <a:spcBef>
                 <a:spcPts val="300"/>
               </a:spcBef>
-              <a:buFont typeface="Arial"/>
-              <a:buChar char="•"/>
+              <a:buNone/>
             </a:pPr>
             <a:r>
               <a:rPr lang="en-US" sz="1500" dirty="0">
@@ -28491,12 +28465,12 @@
           </a:ln>
         </p:spPr>
         <p:txBody>
-          <a:bodyPr wrap="square" lIns="137160" tIns="91440" rIns="137160" bIns="91440" rtlCol="0" anchor="t">
+          <a:bodyPr wrap="square" lIns="137160" tIns="91440" rIns="137160" bIns="91440" rtlCol="0" anchor="ctr">
             <a:normAutofit/>
           </a:bodyPr>
           <a:lstStyle/>
           <a:p>
-            <a:pPr marL="0" indent="0" algn="l">
+            <a:pPr marL="0" indent="0" algn="ctr">
               <a:lnSpc>
                 <a:spcPct val="104000"/>
               </a:lnSpc>
@@ -28517,7 +28491,7 @@
             </a:r>
           </a:p>
           <a:p>
-            <a:pPr marL="0" indent="0" algn="l">
+            <a:pPr marL="0" indent="0" algn="ctr">
               <a:lnSpc>
                 <a:spcPct val="104000"/>
               </a:lnSpc>
@@ -28538,7 +28512,7 @@
             </a:r>
           </a:p>
           <a:p>
-            <a:pPr marL="0" indent="0" algn="l">
+            <a:pPr marL="0" indent="0" algn="ctr">
               <a:lnSpc>
                 <a:spcPct val="104000"/>
               </a:lnSpc>
@@ -28625,12 +28599,12 @@
           </a:ln>
         </p:spPr>
         <p:txBody>
-          <a:bodyPr wrap="square" lIns="137160" tIns="91440" rIns="137160" bIns="91440" rtlCol="0" anchor="t">
+          <a:bodyPr wrap="square" lIns="137160" tIns="91440" rIns="137160" bIns="91440" rtlCol="0" anchor="ctr">
             <a:normAutofit/>
           </a:bodyPr>
           <a:lstStyle/>
           <a:p>
-            <a:pPr marL="0" indent="0" algn="l">
+            <a:pPr marL="0" indent="0" algn="ctr">
               <a:lnSpc>
                 <a:spcPct val="104000"/>
               </a:lnSpc>
@@ -28651,7 +28625,7 @@
             </a:r>
           </a:p>
           <a:p>
-            <a:pPr marL="0" indent="0" algn="l">
+            <a:pPr marL="0" indent="0" algn="ctr">
               <a:lnSpc>
                 <a:spcPct val="104000"/>
               </a:lnSpc>
@@ -28672,7 +28646,7 @@
             </a:r>
           </a:p>
           <a:p>
-            <a:pPr marL="0" indent="0" algn="l">
+            <a:pPr marL="0" indent="0" algn="ctr">
               <a:lnSpc>
                 <a:spcPct val="104000"/>
               </a:lnSpc>
@@ -28759,12 +28733,12 @@
           </a:ln>
         </p:spPr>
         <p:txBody>
-          <a:bodyPr wrap="square" lIns="137160" tIns="91440" rIns="137160" bIns="91440" rtlCol="0" anchor="t">
+          <a:bodyPr wrap="square" lIns="137160" tIns="91440" rIns="137160" bIns="91440" rtlCol="0" anchor="ctr">
             <a:normAutofit/>
           </a:bodyPr>
           <a:lstStyle/>
           <a:p>
-            <a:pPr marL="0" indent="0" algn="l">
+            <a:pPr marL="0" indent="0" algn="ctr">
               <a:lnSpc>
                 <a:spcPct val="104000"/>
               </a:lnSpc>
@@ -28785,7 +28759,7 @@
             </a:r>
           </a:p>
           <a:p>
-            <a:pPr marL="0" indent="0" algn="l">
+            <a:pPr marL="0" indent="0" algn="ctr">
               <a:lnSpc>
                 <a:spcPct val="104000"/>
               </a:lnSpc>
@@ -28806,7 +28780,7 @@
             </a:r>
           </a:p>
           <a:p>
-            <a:pPr marL="0" indent="0" algn="l">
+            <a:pPr marL="0" indent="0" algn="ctr">
               <a:lnSpc>
                 <a:spcPct val="104000"/>
               </a:lnSpc>
@@ -29183,12 +29157,12 @@
           </a:ln>
         </p:spPr>
         <p:txBody>
-          <a:bodyPr wrap="square" lIns="137160" tIns="91440" rIns="137160" bIns="91440" rtlCol="0" anchor="t">
+          <a:bodyPr wrap="square" lIns="137160" tIns="91440" rIns="137160" bIns="91440" rtlCol="0" anchor="ctr">
             <a:normAutofit/>
           </a:bodyPr>
           <a:lstStyle/>
           <a:p>
-            <a:pPr marL="0" indent="0" algn="l">
+            <a:pPr marL="0" indent="0" algn="ctr">
               <a:lnSpc>
                 <a:spcPct val="104000"/>
               </a:lnSpc>
@@ -29209,7 +29183,7 @@
             </a:r>
           </a:p>
           <a:p>
-            <a:pPr marL="0" indent="0" algn="l">
+            <a:pPr marL="0" indent="0" algn="ctr">
               <a:lnSpc>
                 <a:spcPct val="104000"/>
               </a:lnSpc>
@@ -29230,7 +29204,7 @@
             </a:r>
           </a:p>
           <a:p>
-            <a:pPr marL="0" indent="0" algn="l">
+            <a:pPr marL="0" indent="0" algn="ctr">
               <a:lnSpc>
                 <a:spcPct val="104000"/>
               </a:lnSpc>
@@ -29317,12 +29291,12 @@
           </a:ln>
         </p:spPr>
         <p:txBody>
-          <a:bodyPr wrap="square" lIns="137160" tIns="91440" rIns="137160" bIns="91440" rtlCol="0" anchor="t">
+          <a:bodyPr wrap="square" lIns="137160" tIns="91440" rIns="137160" bIns="91440" rtlCol="0" anchor="ctr">
             <a:normAutofit/>
           </a:bodyPr>
           <a:lstStyle/>
           <a:p>
-            <a:pPr marL="0" indent="0" algn="l">
+            <a:pPr marL="0" indent="0" algn="ctr">
               <a:lnSpc>
                 <a:spcPct val="104000"/>
               </a:lnSpc>
@@ -29343,7 +29317,7 @@
             </a:r>
           </a:p>
           <a:p>
-            <a:pPr marL="0" indent="0" algn="l">
+            <a:pPr marL="0" indent="0" algn="ctr">
               <a:lnSpc>
                 <a:spcPct val="104000"/>
               </a:lnSpc>
@@ -29364,7 +29338,7 @@
             </a:r>
           </a:p>
           <a:p>
-            <a:pPr marL="0" indent="0" algn="l">
+            <a:pPr marL="0" indent="0" algn="ctr">
               <a:lnSpc>
                 <a:spcPct val="104000"/>
               </a:lnSpc>
@@ -29451,12 +29425,12 @@
           </a:ln>
         </p:spPr>
         <p:txBody>
-          <a:bodyPr wrap="square" lIns="137160" tIns="91440" rIns="137160" bIns="91440" rtlCol="0" anchor="t">
+          <a:bodyPr wrap="square" lIns="137160" tIns="91440" rIns="137160" bIns="91440" rtlCol="0" anchor="ctr">
             <a:normAutofit/>
           </a:bodyPr>
           <a:lstStyle/>
           <a:p>
-            <a:pPr marL="0" indent="0" algn="l">
+            <a:pPr marL="0" indent="0" algn="ctr">
               <a:lnSpc>
                 <a:spcPct val="104000"/>
               </a:lnSpc>
@@ -29477,7 +29451,7 @@
             </a:r>
           </a:p>
           <a:p>
-            <a:pPr marL="0" indent="0" algn="l">
+            <a:pPr marL="0" indent="0" algn="ctr">
               <a:lnSpc>
                 <a:spcPct val="104000"/>
               </a:lnSpc>
@@ -29498,7 +29472,7 @@
             </a:r>
           </a:p>
           <a:p>
-            <a:pPr marL="0" indent="0" algn="l">
+            <a:pPr marL="0" indent="0" algn="ctr">
               <a:lnSpc>
                 <a:spcPct val="104000"/>
               </a:lnSpc>
@@ -30152,12 +30126,12 @@
           </a:ln>
         </p:spPr>
         <p:txBody>
-          <a:bodyPr wrap="square" lIns="110000" tIns="91440" rIns="110000" bIns="91440" rtlCol="0" anchor="t">
+          <a:bodyPr wrap="square" lIns="110000" tIns="91440" rIns="110000" bIns="91440" rtlCol="0" anchor="ctr">
             <a:normAutofit/>
           </a:bodyPr>
           <a:lstStyle/>
           <a:p>
-            <a:pPr marL="0" indent="0" algn="l">
+            <a:pPr marL="0" indent="0" algn="ctr">
               <a:lnSpc>
                 <a:spcPct val="104000"/>
               </a:lnSpc>
@@ -30178,7 +30152,7 @@
             </a:r>
           </a:p>
           <a:p>
-            <a:pPr marL="0" indent="0" algn="l">
+            <a:pPr marL="0" indent="0" algn="ctr">
               <a:lnSpc>
                 <a:spcPct val="104000"/>
               </a:lnSpc>
@@ -30267,12 +30241,12 @@
           </a:ln>
         </p:spPr>
         <p:txBody>
-          <a:bodyPr wrap="square" lIns="110000" tIns="91440" rIns="110000" bIns="91440" rtlCol="0" anchor="t">
+          <a:bodyPr wrap="square" lIns="110000" tIns="91440" rIns="110000" bIns="91440" rtlCol="0" anchor="ctr">
             <a:normAutofit/>
           </a:bodyPr>
           <a:lstStyle/>
           <a:p>
-            <a:pPr marL="0" indent="0" algn="l">
+            <a:pPr marL="0" indent="0" algn="ctr">
               <a:lnSpc>
                 <a:spcPct val="104000"/>
               </a:lnSpc>
@@ -30361,12 +30335,12 @@
           </a:ln>
         </p:spPr>
         <p:txBody>
-          <a:bodyPr wrap="square" lIns="110000" tIns="91440" rIns="110000" bIns="91440" rtlCol="0" anchor="t">
+          <a:bodyPr wrap="square" lIns="110000" tIns="91440" rIns="110000" bIns="91440" rtlCol="0" anchor="ctr">
             <a:normAutofit/>
           </a:bodyPr>
           <a:lstStyle/>
           <a:p>
-            <a:pPr marL="0" indent="0" algn="l">
+            <a:pPr marL="0" indent="0" algn="ctr">
               <a:lnSpc>
                 <a:spcPct val="104000"/>
               </a:lnSpc>
@@ -30455,12 +30429,12 @@
           </a:ln>
         </p:spPr>
         <p:txBody>
-          <a:bodyPr wrap="square" lIns="110000" tIns="91440" rIns="110000" bIns="91440" rtlCol="0" anchor="t">
+          <a:bodyPr wrap="square" lIns="110000" tIns="91440" rIns="110000" bIns="91440" rtlCol="0" anchor="ctr">
             <a:normAutofit/>
           </a:bodyPr>
           <a:lstStyle/>
           <a:p>
-            <a:pPr marL="0" indent="0" algn="l">
+            <a:pPr marL="0" indent="0" algn="ctr">
               <a:lnSpc>
                 <a:spcPct val="104000"/>
               </a:lnSpc>
@@ -30481,7 +30455,7 @@
             </a:r>
           </a:p>
           <a:p>
-            <a:pPr marL="0" indent="0" algn="l">
+            <a:pPr marL="0" indent="0" algn="ctr">
               <a:lnSpc>
                 <a:spcPct val="104000"/>
               </a:lnSpc>
@@ -31547,7 +31521,7 @@
                 <a:latin typeface="Arial"/>
                 <a:cs typeface="Arial"/>
               </a:rPr>
-              <a:t>Sai lệch thông tin: mọi thứ được đo thế nào</a:t>
+              <a:t>Sai lệch thông tin: đo lường thế nào</a:t>
             </a:r>
           </a:p>
         </p:txBody>
@@ -31645,12 +31619,12 @@
           </a:ln>
         </p:spPr>
         <p:txBody>
-          <a:bodyPr wrap="square" lIns="137160" tIns="91440" rIns="137160" bIns="91440" rtlCol="0" anchor="t">
+          <a:bodyPr wrap="square" lIns="137160" tIns="91440" rIns="137160" bIns="91440" rtlCol="0" anchor="ctr">
             <a:normAutofit/>
           </a:bodyPr>
           <a:lstStyle/>
           <a:p>
-            <a:pPr marL="0" indent="0" algn="l">
+            <a:pPr marL="0" indent="0" algn="ctr">
               <a:lnSpc>
                 <a:spcPct val="104000"/>
               </a:lnSpc>
@@ -31671,7 +31645,7 @@
             </a:r>
           </a:p>
           <a:p>
-            <a:pPr marL="0" indent="0" algn="l">
+            <a:pPr marL="0" indent="0" algn="ctr">
               <a:lnSpc>
                 <a:spcPct val="104000"/>
               </a:lnSpc>
@@ -31692,7 +31666,7 @@
             </a:r>
           </a:p>
           <a:p>
-            <a:pPr marL="0" indent="0" algn="l">
+            <a:pPr marL="0" indent="0" algn="ctr">
               <a:lnSpc>
                 <a:spcPct val="104000"/>
               </a:lnSpc>
@@ -31779,12 +31753,12 @@
           </a:ln>
         </p:spPr>
         <p:txBody>
-          <a:bodyPr wrap="square" lIns="137160" tIns="91440" rIns="137160" bIns="91440" rtlCol="0" anchor="t">
+          <a:bodyPr wrap="square" lIns="137160" tIns="91440" rIns="137160" bIns="91440" rtlCol="0" anchor="ctr">
             <a:normAutofit/>
           </a:bodyPr>
           <a:lstStyle/>
           <a:p>
-            <a:pPr marL="0" indent="0" algn="l">
+            <a:pPr marL="0" indent="0" algn="ctr">
               <a:lnSpc>
                 <a:spcPct val="104000"/>
               </a:lnSpc>
@@ -31805,7 +31779,7 @@
             </a:r>
           </a:p>
           <a:p>
-            <a:pPr marL="0" indent="0" algn="l">
+            <a:pPr marL="0" indent="0" algn="ctr">
               <a:lnSpc>
                 <a:spcPct val="104000"/>
               </a:lnSpc>
@@ -31826,7 +31800,7 @@
             </a:r>
           </a:p>
           <a:p>
-            <a:pPr marL="0" indent="0" algn="l">
+            <a:pPr marL="0" indent="0" algn="ctr">
               <a:lnSpc>
                 <a:spcPct val="104000"/>
               </a:lnSpc>
@@ -31913,12 +31887,12 @@
           </a:ln>
         </p:spPr>
         <p:txBody>
-          <a:bodyPr wrap="square" lIns="137160" tIns="91440" rIns="137160" bIns="91440" rtlCol="0" anchor="t">
+          <a:bodyPr wrap="square" lIns="137160" tIns="91440" rIns="137160" bIns="91440" rtlCol="0" anchor="ctr">
             <a:normAutofit/>
           </a:bodyPr>
           <a:lstStyle/>
           <a:p>
-            <a:pPr marL="0" indent="0" algn="l">
+            <a:pPr marL="0" indent="0" algn="ctr">
               <a:lnSpc>
                 <a:spcPct val="104000"/>
               </a:lnSpc>
@@ -31939,7 +31913,7 @@
             </a:r>
           </a:p>
           <a:p>
-            <a:pPr marL="0" indent="0" algn="l">
+            <a:pPr marL="0" indent="0" algn="ctr">
               <a:lnSpc>
                 <a:spcPct val="104000"/>
               </a:lnSpc>
@@ -31960,7 +31934,7 @@
             </a:r>
           </a:p>
           <a:p>
-            <a:pPr marL="0" indent="0" algn="l">
+            <a:pPr marL="0" indent="0" algn="ctr">
               <a:lnSpc>
                 <a:spcPct val="104000"/>
               </a:lnSpc>

--- a/vi/files/slides/Session_4_VN.pptx
+++ b/vi/files/slides/Session_4_VN.pptx
@@ -2699,7 +2699,7 @@
           <a:p>
             <a:r>
               <a:rPr lang="en-US" sz="1400" b="0" dirty="0"/>
-              <a:t>Kịch bản: Course/Demos/s4_demo.md. Tệp: Course/Resources/tools/2x2_calculator.xlsx (đã điền sẵn ví dụ). Học viên chỉ theo dõi. Sau buổi học có thể tải tệp từ thư mục khóa học.</a:t>
+              <a:t>Kịch bản: Course/Demos/s4_demo.md. Tệp: Course/Resources/tools/2x2_calculator.xlsx (đã điền sẵn ví dụ). Học viên chỉ theo dõi. Tệp được gửi qua email sau buổi học.</a:t>
             </a:r>
           </a:p>
           <a:p>

--- a/vi/files/slides/Session_4_VN.pptx
+++ b/vi/files/slides/Session_4_VN.pptx
@@ -737,31 +737,25 @@
           <a:p>
             <a:r>
               <a:rPr lang="en-US" sz="1400" b="0" dirty="0"/>
-              <a:t>Mở đầu Buổi 4 (19:30). Thứ Bảy tuần trước cả lớp đã chọn cách trả lời câu hỏi. Hôm nay hai câu hỏi cho mọi kết quả: có tin được không (sai lệch, yếu tố nhiễu, nhân quả) và lớn đến đâu (nguy cơ, nguy cơ tương đối, tỷ số chênh, hiệu số nguy cơ, số người cần điều trị)? Sau đó vượt ra ngoài một nghiên cứu: xét nghiệm chẩn đoán, phân tích gộp và công cụ thẩm định.</a:t>
+              <a:t>Bắt đầu 19:30. Chiếu ba câu trả lời cho câu hỏi cuối Buổi 3: thuần tập, nên 'có liên quan'. Từ đó dẫn vào yếu tố nhiễu.</a:t>
             </a:r>
           </a:p>
           <a:p>
             <a:r>
               <a:rPr lang="en-US" sz="1400" b="0" dirty="0"/>
-              <a:t>Mở đầu bằng câu hỏi cuối Buổi 3: chiếu ba câu trả lời nhận được qua khung chat. Câu hỏi về việc bác sĩ chọn hạn chế dịch cho một số người bệnh: đó là thuần tập, nên chỉ nói 'có liên quan'. Nó dẫn thẳng vào yếu tố nhiễu.</a:t>
+              <a:t>Phép tính duy nhất hôm nay là phép chia trong bảng 2x2.</a:t>
             </a:r>
           </a:p>
           <a:p>
             <a:r>
               <a:rPr lang="en-US" sz="1400" b="0" dirty="0"/>
-              <a:t>Cách học trực tuyến (nhắc ngắn): câu trả lời nhanh qua bình chọn, câu hỏi khác thì mời hai ba người trả lời bật micro, bấm 'giơ tay' để phát biểu, mọi bài tập do cả lớp cùng làm.</a:t>
+              <a:t>Giờ: 19:30 ôn tập, 19:40 phần 4.1, 20:20 phần 4.2 và trình diễn, 20:45 giải lao, 21:00 hai bài tính, 21:15 phần 4.3, 21:45 xây dựng đề cương 4, 22:25 tổng kết.</a:t>
             </a:r>
           </a:p>
           <a:p>
             <a:r>
               <a:rPr lang="en-US" sz="1400" b="0" dirty="0"/>
-              <a:t>Nhịp độ: phép tính duy nhất là phép chia trong bảng 2x2, và bảng tính kiểm tra mọi đáp án.</a:t>
-            </a:r>
-          </a:p>
-          <a:p>
-            <a:r>
-              <a:rPr lang="en-US" sz="1400" b="0" dirty="0"/>
-              <a:t>Thời gian: 1 phút. Lịch: 19:30 ôn tập (10), 19:40 phần 4.1 (40), 20:20 phần 4.2 kèm trình diễn (25), 20:45 giải lao (15), 21:00 cả lớp cùng làm hai bài tính (15), 21:15 phần 4.3 (30), 21:45 xây dựng đề cương 4 (40), 22:25 tổng kết (5), 22:30 kết thúc.</a:t>
+              <a:t>Thời gian: 1 phút.</a:t>
             </a:r>
           </a:p>
         </p:txBody>
@@ -842,37 +836,13 @@
           <a:p>
             <a:r>
               <a:rPr lang="en-US" sz="1400" b="0" dirty="0"/>
-              <a:t>Cả hai xuất hiện khi chia dữ liệu theo tầng, nhưng mang ý nghĩa ngược nhau.</a:t>
+              <a:t>Các tầng giống nhau nhưng khác số thô: yếu tố nhiễu, cần hiệu chỉnh. Các tầng khác nhau: thay đổi tác động, báo cáo từng tầng.</a:t>
             </a:r>
           </a:p>
           <a:p>
             <a:r>
               <a:rPr lang="en-US" sz="1400" b="0" dirty="0"/>
-              <a:t>Bên trái, yếu tố nhiễu (ví dụ dịch truyền): các tầng giống nhau (RR 1.0 và 1.0) nhưng khác kết quả thô (2.33). Yếu tố thứ ba (độ nặng) tạo ra một mối liên quan giả. Cách xử lý: hiệu chỉnh, và báo cáo ước lượng đã hiệu chỉnh.</a:t>
-            </a:r>
-          </a:p>
-          <a:p>
-            <a:r>
-              <a:rPr lang="en-US" sz="1400" b="0" dirty="0"/>
-              <a:t>Bên phải, thay đổi tác động (effect modification), còn gọi là tương tác (interaction) (giả định): chiến lược hạn chế dịch có thể có lợi ở người bệnh ARDS (RR 0.60) nhưng không khác biệt khi không có ARDS (RR 1.00). Các tầng khác nhau. Đây là sinh học thật, không phải sai lệch: báo cáo từng phân nhóm. Đừng gộp trung bình.</a:t>
-            </a:r>
-          </a:p>
-          <a:p>
-            <a:r>
-              <a:rPr lang="en-US" sz="1400" b="0" dirty="0"/>
-              <a:t>Quy tắc: các tầng giống nhau nhưng khác kết quả thô = nhiễu. Các tầng khác nhau = thay đổi tác động.</a:t>
-            </a:r>
-          </a:p>
-          <a:p>
-            <a:r>
-              <a:rPr lang="en-US" sz="1400" b="0" dirty="0"/>
-              <a:t>Quan niệm sai: 'mọi khác biệt giữa phân nhóm đều là thật'. Phân nhóm phải được định trước và ít. Với nhiều phân nhóm, một số sẽ khác nhau do may rủi. Buổi 6 sẽ xem tương tác trong mô hình.</a:t>
-            </a:r>
-          </a:p>
-          <a:p>
-            <a:r>
-              <a:rPr lang="en-US" sz="1400" b="0" dirty="0"/>
-              <a:t>Hỏi cả lớp (bình chọn): hạn chế dịch, RR 0.95 ở người bệnh thận bình thường và 0.60 ở người bệnh tổn thương thận. Nhiễu hay thay đổi tác động? Dự kiến: thay đổi tác động (các tầng khác nhau).</a:t>
+              <a:t>Bình chọn: 'RR 0.95 khi thận bình thường, 0.60 khi tổn thương thận?' Mong đợi: thay đổi tác động.</a:t>
             </a:r>
           </a:p>
           <a:p>
@@ -959,31 +929,13 @@
           <a:p>
             <a:r>
               <a:rPr lang="en-US" sz="1400" b="0" dirty="0"/>
-              <a:t>Slide này tóm tắt các công cụ. Ba slide sau minh họa từng công cụ.</a:t>
+              <a:t>Chỉ phân bổ ngẫu nhiên cân bằng được điều chưa đo.</a:t>
             </a:r>
           </a:p>
           <a:p>
             <a:r>
               <a:rPr lang="en-US" sz="1400" b="0" dirty="0"/>
-              <a:t>Giai đoạn thiết kế (phòng ngừa): phân bổ ngẫu nhiên, che giấu phân bổ, làm mù, giới hạn, ghép cặp. Giai đoạn phân tích (sửa chữa): phân tầng, hiệu chỉnh bằng hồi quy, điểm xu hướng (propensity score).</a:t>
-            </a:r>
-          </a:p>
-          <a:p>
-            <a:r>
-              <a:rPr lang="en-US" sz="1400" b="0" dirty="0"/>
-              <a:t>Ý chính: dòng chữ đỏ in đậm là thông điệp then chốt. Mọi công cụ quan sát chỉ tác động lên những gì đã đo. Phân bổ ngẫu nhiên là công cụ duy nhất cân bằng cả những gì chưa đo.</a:t>
-            </a:r>
-          </a:p>
-          <a:p>
-            <a:r>
-              <a:rPr lang="en-US" sz="1400" b="0" dirty="0"/>
-              <a:t>Quan niệm sai: 'ghép cặp theo điểm xu hướng tốt như phân bổ ngẫu nhiên'. Đó là ghép cặp trên các yếu tố đã đo: khéo léo, nhưng vẫn giới hạn ở những yếu tố đó.</a:t>
-            </a:r>
-          </a:p>
-          <a:p>
-            <a:r>
-              <a:rPr lang="en-US" sz="1400" b="0" dirty="0"/>
-              <a:t>Hỏi cả lớp (bình chọn): Bài báo 2 (Hyun) đã dùng công cụ nào? Dự kiến: giới hạn (người lớn nhiễm khuẩn huyết, nằm ICU từ 3 ngày trở lên) và ghép cặp 1:1 theo điểm xu hướng.</a:t>
+              <a:t>Bình chọn: 'Hyun dùng công cụ nào?' Mong đợi: giới hạn đối tượng và ghép cặp theo điểm xu hướng.</a:t>
             </a:r>
           </a:p>
           <a:p>
@@ -1070,31 +1022,13 @@
           <a:p>
             <a:r>
               <a:rPr lang="en-US" sz="1400" b="0" dirty="0"/>
-              <a:t>Hình màu đỏ là người bệnh nặng (yếu tố nhiễu đã biết). Ngôi sao vàng là một yếu tố ẩn chưa ai đo: một đặc điểm di truyền, sự suy yếu (frailty), linh cảm của bác sĩ.</a:t>
+              <a:t>Cân bằng là tính trung bình. Boulet có creatinine ban đầu cao hơn ở một nhóm: với 24 người mỗi nhóm, điều này không lạ.</a:t>
             </a:r>
           </a:p>
           <a:p>
             <a:r>
               <a:rPr lang="en-US" sz="1400" b="0" dirty="0"/>
-              <a:t>Phân bổ ngẫu nhiên đưa người bệnh vào nhóm A hoặc B bằng may rủi, nên trung bình cả hai nhóm có cùng tỷ lệ người bệnh nặng và ngôi sao. Ở đây mỗi nhóm có 5 người bệnh nặng và 3 ngôi sao.</a:t>
-            </a:r>
-          </a:p>
-          <a:p>
-            <a:r>
-              <a:rPr lang="en-US" sz="1400" b="0" dirty="0"/>
-              <a:t>Ý chính: sự cân bằng là tính trung bình. Với thử nghiệm rất nhỏ vẫn có mất cân bằng do may rủi. Boulet thấy creatinine ban đầu cao hơn ở nhóm can thiệp. Với 24 người bệnh mỗi nhóm điều này không lạ.</a:t>
-            </a:r>
-          </a:p>
-          <a:p>
-            <a:r>
-              <a:rPr lang="en-US" sz="1400" b="0" dirty="0"/>
-              <a:t>Quan niệm sai: 'ngẫu nhiên nghĩa là hai nhóm giống hệt nhau'. Chúng tương tự nhau tính trung bình. Bảng 1 của bài báo giúp kiểm tra.</a:t>
-            </a:r>
-          </a:p>
-          <a:p>
-            <a:r>
-              <a:rPr lang="en-US" sz="1400" b="0" dirty="0"/>
-              <a:t>Hỏi cả lớp (mời hai ba người trả lời, bật micro): vì sao điều này hiệu quả hơn với 500 người bệnh so với 50? Dự kiến: với số lượng lớn, mất cân bằng do may rủi được san bằng.</a:t>
+              <a:t>Hỏi: 'Vì sao 500 người tốt hơn 50?' Mong đợi: mất cân bằng do ngẫu nhiên tự bù trừ.</a:t>
             </a:r>
           </a:p>
           <a:p>
@@ -1181,31 +1115,13 @@
           <a:p>
             <a:r>
               <a:rPr lang="en-US" sz="1400" b="0" dirty="0"/>
-              <a:t>Che giấu phân bổ (allocation concealment) diễn ra trước khi phân nhóm: người tuyển người bệnh không biết và không đoán được lần phân bổ kế tiếp (máy tính trung tâm, không phải phong bì trên bàn). Nếu không, bác sĩ có thể hướng người bệnh nặng tránh khỏi điều trị mới: sai lệch chọn lựa ngay trong thử nghiệm.</a:t>
+              <a:t>Trong Boulet, người bệnh và người phân tích thống kê được làm mù, bác sĩ thì không. Khi không làm mù được bác sĩ, làm mù người đánh giá và dùng kết cục khách quan.</a:t>
             </a:r>
           </a:p>
           <a:p>
             <a:r>
               <a:rPr lang="en-US" sz="1400" b="0" dirty="0"/>
-              <a:t>Làm mù (blinding) diễn ra sau: ai biết nhóm? Trong Boulet, người bệnh và nhà thống kê được làm mù, bác sĩ và nghiên cứu viên thì không, vì vậy gọi là 'mù đơn'.</a:t>
-            </a:r>
-          </a:p>
-          <a:p>
-            <a:r>
-              <a:rPr lang="en-US" sz="1400" b="0" dirty="0"/>
-              <a:t>Ý chính: trong thử nghiệm về dịch truyền và nhiều thử nghiệm ICU, làm mù bác sĩ thường không thể. Khi đó hãy làm mù người đánh giá kết cục và chọn kết cục khách quan.</a:t>
-            </a:r>
-          </a:p>
-          <a:p>
-            <a:r>
-              <a:rPr lang="en-US" sz="1400" b="0" dirty="0"/>
-              <a:t>Quan niệm sai: 'mù đơn, mù đôi, mù ba' có nghĩa cố định. Không. Bài báo nên nêu chính xác ai được làm mù.</a:t>
-            </a:r>
-          </a:p>
-          <a:p>
-            <a:r>
-              <a:rPr lang="en-US" sz="1400" b="0" dirty="0"/>
-              <a:t>Hỏi cả lớp (bình chọn): có thể che giấu phân bổ khi không thể làm mù không? Dự kiến: có. Che giấu phân bổ luôn làm được và luôn bắt buộc.</a:t>
+              <a:t>Bình chọn: 'Không làm mù được thì có che giấu phân bổ được không?' Mong đợi: có, luôn luôn.</a:t>
             </a:r>
           </a:p>
           <a:p>
@@ -1292,31 +1208,13 @@
           <a:p>
             <a:r>
               <a:rPr lang="en-US" sz="1400" b="0" dirty="0"/>
-              <a:t>Hyun ghép mỗi người bệnh cân bằng dương với một người bệnh cân bằng âm có điểm xu hướng tương tự, xây dựng từ các yếu tố đã đo: tuổi, giới, điểm SOFA, sốc nhiễm khuẩn, bệnh kèm, vị trí nhiễm khuẩn, lượng dịch ra và các yếu tố khác. Kết quả là 483, 373 và 392 cặp cho phân tích ngày 1, ngày 2 và ngày 3.</a:t>
+              <a:t>Hyun không đo loại dịch và dinh dưỡng. Phần còn lại là nhiễu tồn dư, nên thuần tập vẫn chỉ nói 'có liên quan'.</a:t>
             </a:r>
           </a:p>
           <a:p>
             <a:r>
               <a:rPr lang="en-US" sz="1400" b="0" dirty="0"/>
-              <a:t>Chính tác giả đã nêu những gì không đo: loại dịch và hỗ trợ dinh dưỡng. Nhận định tại giường của bác sĩ về độ nặng của người bệnh không bao giờ được ghi nhận đầy đủ. Phần còn lại gọi là nhiễu tồn dư (residual confounding).</a:t>
-            </a:r>
-          </a:p>
-          <a:p>
-            <a:r>
-              <a:rPr lang="en-US" sz="1400" b="0" dirty="0"/>
-              <a:t>Ý chính: đó là lý do một nghiên cứu thuần tập, dù ghép cặp tốt đến đâu, vẫn nói 'có liên quan', và câu hỏi 'hạn chế dịch có cứu sống không?' vẫn cần một RCT lớn.</a:t>
-            </a:r>
-          </a:p>
-          <a:p>
-            <a:r>
-              <a:rPr lang="en-US" sz="1400" b="0" dirty="0"/>
-              <a:t>Quan niệm sai: 'nhóm đã ghép cặp tốt như nhóm ngẫu nhiên'. Hãy xem Bảng 1, rồi hỏi điều gì không có trong Bảng 1.</a:t>
-            </a:r>
-          </a:p>
-          <a:p>
-            <a:r>
-              <a:rPr lang="en-US" sz="1400" b="0" dirty="0"/>
-              <a:t>Hỏi cả lớp (mời hai ba người trả lời, bật micro): nêu một yếu tố chưa đo có thể khiến bác sĩ truyền nhiều dịch hơn và dự báo tử vong. Dự kiến: ấn tượng lâm sàng về sốc, da nổi vân tím, tim suy, thảo luận về mục tiêu điều trị.</a:t>
+              <a:t>Hỏi: 'Một yếu tố không đo được làm truyền thêm dịch và dự báo tử vong?' Mong đợi: ấn tượng lâm sàng về sốc, suy tim, thảo luận mục tiêu điều trị.</a:t>
             </a:r>
           </a:p>
           <a:p>
@@ -1403,31 +1301,13 @@
           <a:p>
             <a:r>
               <a:rPr lang="en-US" sz="1400" b="0" dirty="0"/>
-              <a:t>Giá trị nội tại (internal validity): câu trả lời có đúng với những người trong nghiên cứu không? Đây là điều mà phân bổ ngẫu nhiên, che giấu phân bổ, làm mù, theo dõi đầy đủ và đo lường tốt bảo vệ.</a:t>
+              <a:t>Kết quả sai lệch không áp dụng được ở đâu. Thử nghiệm đúng nhưng chọn lọc có thể không áp dụng cho khoa của bạn.</a:t>
             </a:r>
           </a:p>
           <a:p>
             <a:r>
               <a:rPr lang="en-US" sz="1400" b="0" dirty="0"/>
-              <a:t>Giá trị ngoại suy (external validity, tính khái quát hóa): câu trả lời có áp dụng cho người bệnh của tôi trong bối cảnh của tôi không? So sánh quần thể thử nghiệm với quần thể của mình. Bài báo 1 (Boulet) đưa vào người lớn 18-85 tuổi không lọc máu hay suy dinh dưỡng nặng, tại 3 ICU của một quốc gia, và chỉ khoảng 4% số người bệnh được sàng lọc.</a:t>
-            </a:r>
-          </a:p>
-          <a:p>
-            <a:r>
-              <a:rPr lang="en-US" sz="1400" b="0" dirty="0"/>
-              <a:t>Ý chính: giá trị nội tại đi trước. Một kết quả sai lệch không áp dụng được ở đâu cả. Nhưng một thử nghiệm hoàn toàn đúng trên người bệnh được chọn lọc kỹ có thể không giúp được khoa của bạn.</a:t>
-            </a:r>
-          </a:p>
-          <a:p>
-            <a:r>
-              <a:rPr lang="en-US" sz="1400" b="0" dirty="0"/>
-              <a:t>Quan niệm sai: 'RCT áp dụng cho tất cả mọi người'. Nó áp dụng rõ nhất cho những người bệnh giống người đã tham gia.</a:t>
-            </a:r>
-          </a:p>
-          <a:p>
-            <a:r>
-              <a:rPr lang="en-US" sz="1400" b="0" dirty="0"/>
-              <a:t>Hỏi cả lớp (mời hai ba người trả lời, bật micro): nêu một nhóm người bệnh ở ICU của mình không thể vào thử nghiệm Boulet. Dự kiến: người bệnh trên 85 tuổi, người bệnh lọc máu mạn, người bệnh vào sau hơn 24 giờ dùng vận mạch.</a:t>
+              <a:t>Hỏi: 'Nhóm người bệnh nào ở ICU của bạn không được vào thử nghiệm Boulet?' Mong đợi: trên 85 tuổi, lọc máu mạn, dùng vận mạch quá 24 giờ.</a:t>
             </a:r>
           </a:p>
           <a:p>
@@ -1514,37 +1394,13 @@
           <a:p>
             <a:r>
               <a:rPr lang="en-US" sz="1400" b="0" dirty="0"/>
-              <a:t>Quan hệ nhân quả ngược (reverse causation): 'kết cục' thực ra gây ra 'phơi nhiễm'.</a:t>
+              <a:t>Thận suy làm giảm nước tiểu, nên cân bằng dịch dương lên. Vì vậy Hyun ghép cặp cả theo lượng dịch ra.</a:t>
             </a:r>
           </a:p>
           <a:p>
             <a:r>
               <a:rPr lang="en-US" sz="1400" b="0" dirty="0"/>
-              <a:t>Ví dụ ICU: thường giả định cân bằng dịch dương gây tổn thương thận và tử vong. Nhưng thận suy tạo ít nước tiểu, và ít dịch ra nghĩa là cân bằng dương hơn. Mũi tên có thể chạy ngược lại. Đó là lý do Hyun ghép cặp theo cả lượng dịch ra lẫn dịch vào.</a:t>
-            </a:r>
-          </a:p>
-          <a:p>
-            <a:r>
-              <a:rPr lang="en-US" sz="1400" b="0" dirty="0"/>
-              <a:t>Ví dụ khác: người mắc bệnh sớm chưa chẩn đoán ngừng vận động (nên ít vận động trông có hại). Người bệnh đang xấu đi được làm nhiều xét nghiệm và dùng nhiều thuốc hơn.</a:t>
-            </a:r>
-          </a:p>
-          <a:p>
-            <a:r>
-              <a:rPr lang="en-US" sz="1400" b="0" dirty="0"/>
-              <a:t>Cách kiểm tra: bảo đảm phơi nhiễm được đo trước khi kết cục bắt đầu, dùng độ trễ thời gian, ưu tiên thiết kế thuần tập hoặc thử nghiệm hơn cắt ngang.</a:t>
-            </a:r>
-          </a:p>
-          <a:p>
-            <a:r>
-              <a:rPr lang="en-US" sz="1400" b="0" dirty="0"/>
-              <a:t>Quan niệm sai: 'nhân quả ngược chỉ quan trọng trong nghiên cứu cắt ngang'. Nó có thể ảnh hưởng cả thuần tập khi phơi nhiễm được đo lúc kết cục đang hình thành.</a:t>
-            </a:r>
-          </a:p>
-          <a:p>
-            <a:r>
-              <a:rPr lang="en-US" sz="1400" b="0" dirty="0"/>
-              <a:t>Hỏi cả lớp (mời hai ba người trả lời, bật micro): người bệnh sốc được tăng liều vận mạch và tử vong nhiều hơn. Mũi tên có thể chạy chiều nào? Dự kiến: cả hai. Thuốc có thể gây hại, nhưng sốc nặng dần chính là lý do tăng liều.</a:t>
+              <a:t>Hỏi: 'Người bệnh sốc dùng nhiều vận mạch hơn và tử vong nhiều hơn. Mũi tên có thể đi chiều nào?' Mong đợi: cả hai chiều.</a:t>
             </a:r>
           </a:p>
           <a:p>
@@ -1631,31 +1487,19 @@
           <a:p>
             <a:r>
               <a:rPr lang="en-US" sz="1400" b="0" dirty="0"/>
-              <a:t>Năm 1965, Austin Bradford Hill nêu chín quan điểm để đánh giá một mối liên quan có khả năng là nhân quả không. Chúng không phải bảng kiểm để cho điểm. Chúng là manh mối.</a:t>
+              <a:t>Các quan điểm là manh mối, không phải bảng chấm điểm. Dừng ở trình tự thời gian (bắt buộc) và thực nghiệm (do RCT cung cấp).</a:t>
             </a:r>
           </a:p>
           <a:p>
             <a:r>
               <a:rPr lang="en-US" sz="1400" b="0" dirty="0"/>
-              <a:t>Đi nhanh qua bảng. Dừng ở trình tự thời gian (điều duy nhất bắt buộc) và thực nghiệm (mạnh nhất, do RCT cung cấp).</a:t>
+              <a:t>Với Hyun: có thể, chưa chứng minh.</a:t>
             </a:r>
           </a:p>
           <a:p>
             <a:r>
               <a:rPr lang="en-US" sz="1400" b="0" dirty="0"/>
-              <a:t>Áp dụng cho Hyun (cột bên phải): độ mạnh vừa (tỷ số nguy cơ tức thời, HR, khoảng 1.6-2.1). Nhất quán với các thuần tập khác. Trình tự thời gian: cân bằng dịch đo trước tử vong, nhưng có thể có nhân quả ngược. Chưa cho thấy liều-đáp ứng. Thực nghiệm: các thử nghiệm như Boulet chưa cho thấy tác động lên tử vong. Kết luận: có thể, chưa được chứng minh.</a:t>
-            </a:r>
-          </a:p>
-          <a:p>
-            <a:r>
-              <a:rPr lang="en-US" sz="1400" b="0" dirty="0"/>
-              <a:t>Quan niệm sai: 'đạt phần lớn tiêu chí là chứng minh được nhân quả'. Chúng làm tăng hoặc giảm sự tin cậy. Không bao giờ chứng minh.</a:t>
-            </a:r>
-          </a:p>
-          <a:p>
-            <a:r>
-              <a:rPr lang="en-US" sz="1400" b="0" dirty="0"/>
-              <a:t>Hỏi cả lớp (bình chọn): quan điểm nào RCT cung cấp mà không thuần tập nào có? Dự kiến: thực nghiệm.</a:t>
+              <a:t>Bình chọn: 'Quan điểm nào RCT cho được mà thuần tập không cho được?' Mong đợi: thực nghiệm.</a:t>
             </a:r>
           </a:p>
           <a:p>
@@ -1742,19 +1586,19 @@
           <a:p>
             <a:r>
               <a:rPr lang="en-US" sz="1400" b="0" dirty="0"/>
-              <a:t>Chạy thành bốn câu bình chọn (mỗi tình huống một câu). Sau mỗi kết quả, mời một hai người nêu một cách khắc phục, bật micro. Bốn tình huống này cũng có trong phiếu bài tập Buổi 4 (PDF), Phần A.</a:t>
+              <a:t>Bốn câu bình chọn. Sau mỗi câu, mời một hai người đề xuất cách khắc phục.</a:t>
             </a:r>
           </a:p>
           <a:p>
             <a:r>
               <a:rPr lang="en-US" sz="1400" b="0" dirty="0"/>
-              <a:t>Đáp án. 1: sai lệch nhớ lại. Khắc phục: dùng dữ liệu phơi nhiễm ghi trước khi biết kết cục (hồ sơ, đơn thuốc). Hỏi hai nhóm cùng một bộ câu hỏi có cấu trúc. 2: sai lệch người quan sát. Khắc phục: làm mù người đánh giá, tiêu chuẩn ra khỏi ICU khách quan. 3: sai lệch chọn lựa (thiếu những người nặng nhất đã tử vong sớm). Khắc phục: đưa vào mọi người bệnh đủ tiêu chuẩn từ lúc nhập viện và báo cáo số bị loại cùng lý do. 4: nhiễu do chỉ định. Khắc phục: phân nhóm ngẫu nhiên, hoặc đo lactate và các chỉ dấu độ nặng khác rồi hiệu chỉnh hoặc ghép cặp.</a:t>
+              <a:t>Đáp án: 1 sai lệch nhớ lại (dùng hồ sơ ghi trước khi có kết cục). 2 sai lệch người quan sát (người đánh giá được làm mù). 3 sai lệch chọn lựa (chọn mọi người từ khi nhập viện, báo cáo số bị loại). 4 nhiễu do chỉ định (phân bổ ngẫu nhiên, hoặc đo mức độ nặng và hiệu chỉnh).</a:t>
             </a:r>
           </a:p>
           <a:p>
             <a:r>
               <a:rPr lang="en-US" sz="1400" b="0" dirty="0"/>
-              <a:t>Thời gian: 5 phút. Đi nhanh: đây là kiểm tra, không phải bài giảng. Slide này khép lại 40 phút của phần 4.1.</a:t>
+              <a:t>Thời gian: 5 phút. Kết thúc phần 4.1.</a:t>
             </a:r>
           </a:p>
         </p:txBody>
@@ -1835,13 +1679,7 @@
           <a:p>
             <a:r>
               <a:rPr lang="en-US" sz="1400" b="0" dirty="0"/>
-              <a:t>Đánh dấu phần 4.2 (25 phút: khoảng 17 phút slide, rồi 8 phút trình diễn trực tiếp, phần tính toán ở sau giải lao). RR: nguy cơ tương đối. OR: tỷ số chênh. RD: hiệu số nguy cơ. NNT: số người cần điều trị. Mỗi số đo được định nghĩa ở slide dạy nó.</a:t>
-            </a:r>
-          </a:p>
-          <a:p>
-            <a:r>
-              <a:rPr lang="en-US" sz="1400" b="0" dirty="0"/>
-              <a:t>Trấn an cả lớp: phép tính duy nhất hôm nay là phép chia với bảng 2x2, và bảng tính sẽ kiểm tra mọi đáp án.</a:t>
+              <a:t>Phần 4.2: khoảng 17 phút slide, rồi 8 phút trình diễn.</a:t>
             </a:r>
           </a:p>
           <a:p>
@@ -1928,25 +1766,25 @@
           <a:p>
             <a:r>
               <a:rPr lang="en-US" sz="1400" b="0" dirty="0"/>
-              <a:t>Chạy thành ba câu bình chọn. KTC = khoảng tin cậy (Buổi 3, slide thử nghiệm không kém hơn).</a:t>
+              <a:t>Ba câu bình chọn.</a:t>
             </a:r>
           </a:p>
           <a:p>
             <a:r>
               <a:rPr lang="en-US" sz="1400" b="0" dirty="0"/>
-              <a:t>Đáp án. C1: bệnh–chứng (chọn theo kết cục là tử vong, nhìn ngược lại phơi nhiễm là dịch truyền). C2: thử nghiệm ngẫu nhiên theo cụm. C3: không kém hơn. Toàn bộ KTC nằm dưới ngưỡng +4 (nó cắt 0, nên không vượt trội).</a:t>
+              <a:t>Đáp án: Câu 1 bệnh-chứng (chọn theo kết cục). Câu 2 thử nghiệm ngẫu nhiên theo cụm. Câu 3 không kém hơn: cả KTC nằm dưới ngưỡng +4.</a:t>
             </a:r>
           </a:p>
           <a:p>
             <a:r>
               <a:rPr lang="en-US" sz="1400" b="0" dirty="0"/>
-              <a:t>Quan niệm sai cần sửa ở C1: 'dùng hồ sơ nên là thuần tập'. Hỏi: người được chọn theo điều đã xảy ra với họ (tử vong) hay theo điều họ được nhận?</a:t>
+              <a:t>Nếu có người nói 'dùng hồ sơ nên là thuần tập', hỏi: chọn theo điều đã xảy ra với họ hay theo điều họ được nhận?</a:t>
             </a:r>
           </a:p>
           <a:p>
             <a:r>
               <a:rPr lang="en-US" sz="1400" b="0" dirty="0"/>
-              <a:t>Thời gian: 9 phút (khoảng 6 phút cho ba câu, 3 phút đọc lại Phần 2a, bài về nhà của Buổi 3). Cộng với slide mở đầu là 10 phút ôn tập. Phần xây dựng đề cương hôm nay hoàn thành Phần 2.</a:t>
+              <a:t>Thời gian: 9 phút.</a:t>
             </a:r>
           </a:p>
         </p:txBody>
@@ -2027,31 +1865,13 @@
           <a:p>
             <a:r>
               <a:rPr lang="en-US" sz="1400" b="0" dirty="0"/>
-              <a:t>Nước chảy vào từ vòi = ca mới = tỷ lệ mới mắc (incidence). Nước trong bồn lúc này = ca hiện có = tỷ lệ hiện mắc (prevalence). Nước thoát qua lỗ xả = người bệnh khỏi bệnh hoặc tử vong.</a:t>
+              <a:t>Mới mắc cần một khoảng thời gian, và mẫu số chỉ gồm người có nguy cơ.</a:t>
             </a:r>
           </a:p>
           <a:p>
             <a:r>
               <a:rPr lang="en-US" sz="1400" b="0" dirty="0"/>
-              <a:t>Ví dụ bên phải (một ví dụ khác, ở khoa nội trú): 20 trong 200 người bệnh của khoa có loét tì đè hôm nay, hiện mắc 10%. Trong 180 người chưa bị, 9 người bị loét mới trong tuần tới, mới mắc 5%/tuần. Lưu ý mẫu số của tỷ lệ mới mắc: chỉ những người có nguy cơ (chưa mắc lúc bắt đầu).</a:t>
-            </a:r>
-          </a:p>
-          <a:p>
-            <a:r>
-              <a:rPr lang="en-US" sz="1400" b="0" dirty="0"/>
-              <a:t>Ý chính: bệnh kéo dài có thể có hiện mắc cao dù mới mắc thấp (đái tháo đường). Bệnh ngắn có thể có mới mắc cao nhưng hiện mắc thấp (cảm lạnh, các đợt mê sảng ngắn).</a:t>
-            </a:r>
-          </a:p>
-          <a:p>
-            <a:r>
-              <a:rPr lang="en-US" sz="1400" b="0" dirty="0"/>
-              <a:t>Quan niệm sai: dùng lẫn lộn hiện mắc và mới mắc. Tỷ lệ mới mắc luôn gắn với một khoảng thời gian.</a:t>
-            </a:r>
-          </a:p>
-          <a:p>
-            <a:r>
-              <a:rPr lang="en-US" sz="1400" b="0" dirty="0"/>
-              <a:t>Hỏi cả lớp (mời hai ba người trả lời, bật micro): ở ICU, 'hôm nay bao nhiêu người bệnh có cân bằng dịch dương' là hiện mắc hay mới mắc? Còn 'bao nhiêu người bị tổn thương thận trong tuần đầu'? Dự kiến: hiện mắc, mới mắc.</a:t>
+              <a:t>Hỏi: 'Cân bằng dịch dương hôm nay: hiện mắc hay mới mắc? Tổn thương thận trong tuần đầu?' Mong đợi: hiện mắc, mới mắc.</a:t>
             </a:r>
           </a:p>
           <a:p>
@@ -2138,31 +1958,13 @@
           <a:p>
             <a:r>
               <a:rPr lang="en-US" sz="1400" b="0" dirty="0"/>
-              <a:t>Một thử nghiệm giả định, lớn hơn, cho câu hỏi xuyên suốt, không phải số liệu của Boulet. 100 người bệnh mỗi nhóm. Hạn chế dịch: 20 tử vong đến ngày 28. Thường quy: 30 tử vong.</a:t>
+              <a:t>Thử nghiệm giả định, không phải Boulet. Luôn hỏi 'trên tổng số bao nhiêu?'.</a:t>
             </a:r>
           </a:p>
           <a:p>
             <a:r>
               <a:rPr lang="en-US" sz="1400" b="0" dirty="0"/>
-              <a:t>Nguy cơ (risk) là số đo đơn giản nhất: 20/100 = 20% và 30/100 = 30%. Hình như thế này (biểu đồ biểu tượng) cũng là cách tốt nhất để giải thích nguy cơ cho người bệnh và gia đình.</a:t>
-            </a:r>
-          </a:p>
-          <a:p>
-            <a:r>
-              <a:rPr lang="en-US" sz="1400" b="0" dirty="0"/>
-              <a:t>Ý chính: luôn hỏi 'trên tổng số bao nhiêu?' Một tiêu đề '10 ca tử vong nhiều hơn' vô nghĩa nếu không có mẫu số.</a:t>
-            </a:r>
-          </a:p>
-          <a:p>
-            <a:r>
-              <a:rPr lang="en-US" sz="1400" b="0" dirty="0"/>
-              <a:t>Quan niệm sai: nguy cơ và odds. Nguy cơ tính trên mọi người trong nhóm (20 trên 100). Odds so sánh người có kết cục với người không có (20 so với 80). Sẽ cần cả hai ngay sau đây.</a:t>
-            </a:r>
-          </a:p>
-          <a:p>
-            <a:r>
-              <a:rPr lang="en-US" sz="1400" b="0" dirty="0"/>
-              <a:t>Hỏi cả lớp (mời hai ba người trả lời, bật micro): odds tử vong ở nhóm hạn chế dịch là bao nhiêu? Dự kiến: 20 so với 80, tức 0.25.</a:t>
+              <a:t>Hỏi: 'Odds tử vong ở nhóm hạn chế dịch?' Mong đợi: 20 trên 80, tức 0.25.</a:t>
             </a:r>
           </a:p>
           <a:p>
@@ -2249,31 +2051,13 @@
           <a:p>
             <a:r>
               <a:rPr lang="en-US" sz="1400" b="0" dirty="0"/>
-              <a:t>Yêu cầu một cách trình bày và giữ mãi: phơi nhiễm (hoặc điều trị) ở hàng, nhóm phơi nhiễm ở trên. Kết cục ở cột, 'có kết cục' ở bên trái. Khi đó a, b, c, d luôn mang cùng ý nghĩa.</a:t>
+              <a:t>Giữ một cách trình bày: phơi nhiễm theo hàng (có phơi nhiễm ở trên), có kết cục ở cột trái. Phần lớn lỗi do vẽ bảng ngược.</a:t>
             </a:r>
           </a:p>
           <a:p>
             <a:r>
               <a:rPr lang="en-US" sz="1400" b="0" dirty="0"/>
-              <a:t>Ví dụ: a = 20, b = 80, c = 30, d = 70. Tổng hàng 100 và 100.</a:t>
-            </a:r>
-          </a:p>
-          <a:p>
-            <a:r>
-              <a:rPr lang="en-US" sz="1400" b="0" dirty="0"/>
-              <a:t>Ý chính: gần như mọi số đo mối liên quan cho kết cục có/không đều đến từ bốn con số này. Bảng tính trong phần trình diễn dùng đúng cách trình bày này.</a:t>
-            </a:r>
-          </a:p>
-          <a:p>
-            <a:r>
-              <a:rPr lang="en-US" sz="1400" b="0" dirty="0"/>
-              <a:t>Quan niệm sai: đảo hàng và cột. Nhiều lỗi trong bài làm của học viên đến từ bảng vẽ ngược. Kiểm tra cách trình bày trước khi tính.</a:t>
-            </a:r>
-          </a:p>
-          <a:p>
-            <a:r>
-              <a:rPr lang="en-US" sz="1400" b="0" dirty="0"/>
-              <a:t>Hỏi cả lớp (mời hai ba người trả lời, bật micro): trong Bài báo 1 (Boulet), với tử vong ngày 28, a, b, c và d là bao nhiêu? Dự kiến: a = 6, b = 18, c = 6, d = 18 (mỗi nhóm 6/24 tử vong).</a:t>
+              <a:t>Hỏi: 'Boulet, tử vong ngày 28: a, b, c, d?' Mong đợi: 6, 18, 6, 18.</a:t>
             </a:r>
           </a:p>
           <a:p>
@@ -2360,43 +2144,13 @@
           <a:p>
             <a:r>
               <a:rPr lang="en-US" sz="1400" b="0" dirty="0"/>
-              <a:t>Đi từng thẻ, luôn quay về bảng 2x2.</a:t>
+              <a:t>Đi từng thẻ, mỗi lần quay về bảng. 'Giảm một phần ba' và 'ít hơn 10 ca trên 100' là cùng một kết quả.</a:t>
             </a:r>
           </a:p>
           <a:p>
             <a:r>
               <a:rPr lang="en-US" sz="1400" b="0" dirty="0"/>
-              <a:t>RR = 0.20 / 0.30 = 0.67: nguy cơ tử vong thấp hơn một phần ba khi hạn chế dịch. RR = 1 là không khác biệt. Dưới 1 là bảo vệ. Trên 1 là có hại.</a:t>
-            </a:r>
-          </a:p>
-          <a:p>
-            <a:r>
-              <a:rPr lang="en-US" sz="1400" b="0" dirty="0"/>
-              <a:t>RD = 0.20 - 0.30 = -0.10: ít hơn 10 ca tử vong trên 100 người bệnh được điều trị. Còn gọi là giảm nguy cơ tuyệt đối (ARR = 10%).</a:t>
-            </a:r>
-          </a:p>
-          <a:p>
-            <a:r>
-              <a:rPr lang="en-US" sz="1400" b="0" dirty="0"/>
-              <a:t>NNT (số người cần điều trị) = 1 / 0.10 = 10: điều trị 10 người bệnh để ngăn một ca tử vong. Nếu phơi nhiễm có hại, phép tính tương tự cho số người cần để gây hại (NNH).</a:t>
-            </a:r>
-          </a:p>
-          <a:p>
-            <a:r>
-              <a:rPr lang="en-US" sz="1400" b="0" dirty="0"/>
-              <a:t>OR = (20 x 70) / (80 x 30) = 1400 / 2400 = 0.58. Xa 1 hơn RR. Các slide sau giải thích vì sao.</a:t>
-            </a:r>
-          </a:p>
-          <a:p>
-            <a:r>
-              <a:rPr lang="en-US" sz="1400" b="0" dirty="0"/>
-              <a:t>Quan niệm sai: tác động tương đối nghe lớn hơn. 'Thấp hơn một phần ba' và 'ít hơn 10 ca/100' là cùng một kết quả. Người bệnh và nhà quản lý cần con số tuyệt đối.</a:t>
-            </a:r>
-          </a:p>
-          <a:p>
-            <a:r>
-              <a:rPr lang="en-US" sz="1400" b="0" dirty="0"/>
-              <a:t>Hỏi cả lớp (mời hai ba người trả lời, bật micro): nếu nguy cơ nền là 3% thay vì 30%, với cùng RR 0.67, NNT là bao nhiêu? Dự kiến: nguy cơ 2% so với 3%, hiệu số 1%, NNT = 100.</a:t>
+              <a:t>Hỏi: 'Nguy cơ nền 3%, cùng RR 0.67: NNT bao nhiêu?' Mong đợi: 2% so với 3%, NNT = 100.</a:t>
             </a:r>
           </a:p>
           <a:p>
@@ -2483,25 +2237,13 @@
           <a:p>
             <a:r>
               <a:rPr lang="en-US" sz="1400" b="0" dirty="0"/>
-              <a:t>Thu nhỏ 100 người bệnh xuống 10. Với chăm sóc thường quy 3/10 tử vong. Với chiến lược hạn chế dịch 2/10 tử vong. Người màu xanh lá là người bệnh, tính trung bình, đã tránh được tử vong nhờ điều trị. Vậy cần điều trị 10 người bệnh để một người có lợi: NNT = 10.</a:t>
+              <a:t>9 người còn lại vẫn sống hoặc vẫn tử vong. NNT là trung bình, không phải dự đoán cho một người bệnh.</a:t>
             </a:r>
           </a:p>
           <a:p>
             <a:r>
               <a:rPr lang="en-US" sz="1400" b="0" dirty="0"/>
-              <a:t>Ý chính: 9 người còn lại hoặc đằng nào cũng sống, hoặc đằng nào cũng tử vong. Họ chịu gánh nặng điều trị mà không được lợi. Vì vậy NNT là công cụ trao đổi hữu ích với người bệnh, gia đình và nhà quản lý.</a:t>
-            </a:r>
-          </a:p>
-          <a:p>
-            <a:r>
-              <a:rPr lang="en-US" sz="1400" b="0" dirty="0"/>
-              <a:t>Quan niệm sai: 'NNT bằng 10 nghĩa là 1/10 người bệnh đáp ứng'. Đó là trung bình của cả nhóm, không phải dự đoán cho một người bệnh.</a:t>
-            </a:r>
-          </a:p>
-          <a:p>
-            <a:r>
-              <a:rPr lang="en-US" sz="1400" b="0" dirty="0"/>
-              <a:t>Hỏi cả lớp (bình chọn): NNT 5 hay NNT 50 tốt hơn? Dự kiến: 5. Cần điều trị ít người hơn để một người có lợi (nhưng luôn cân nhắc với tác hại và chi phí).</a:t>
+              <a:t>Bình chọn: 'NNT 5 hay 50 tốt hơn?' Mong đợi: 5.</a:t>
             </a:r>
           </a:p>
           <a:p>
@@ -2588,31 +2330,13 @@
           <a:p>
             <a:r>
               <a:rPr lang="en-US" sz="1400" b="0" dirty="0"/>
-              <a:t>Ở đây phơi nhiễm thực sự làm nguy cơ tăng gấp đôi (RR = 2, đường xanh). Đường đỏ là OR với cùng dữ liệu khi kết cục ngày càng phổ biến.</a:t>
+              <a:t>OR chỉ gần RR khi kết cục hiếm. Tử vong ở ICU là kết cục thường gặp.</a:t>
             </a:r>
           </a:p>
           <a:p>
             <a:r>
               <a:rPr lang="en-US" sz="1400" b="0" dirty="0"/>
-              <a:t>Khi kết cục hiếm (bên trái, vùng tô), OR khoảng 2.1, gần như bằng RR. Ở nguy cơ nền 20%, OR = 2.7. Ở 40%, OR = 6. OR luôn nằm xa 1 hơn RR.</a:t>
-            </a:r>
-          </a:p>
-          <a:p>
-            <a:r>
-              <a:rPr lang="en-US" sz="1400" b="0" dirty="0"/>
-              <a:t>Ý chính: nghiên cứu bệnh–chứng và hồi quy logistic cho ra OR. Khi bài báo báo cáo OR cho kết cục phổ biến, như tử vong ICU 20-40%, đừng đọc thành 'nguy cơ gấp X lần'.</a:t>
-            </a:r>
-          </a:p>
-          <a:p>
-            <a:r>
-              <a:rPr lang="en-US" sz="1400" b="0" dirty="0"/>
-              <a:t>Quan niệm sai: 'OR bằng 2 nghĩa là nguy cơ gấp đôi'. Chỉ đúng với kết cục hiếm.</a:t>
-            </a:r>
-          </a:p>
-          <a:p>
-            <a:r>
-              <a:rPr lang="en-US" sz="1400" b="0" dirty="0"/>
-              <a:t>Hỏi cả lớp (mời hai ba người trả lời, bật micro): trong ví dụ của mình (tử vong 20% và 30%), OR là 0.58 còn RR là 0.67. Vì sao khác nhau? Dự kiến: tử vong phổ biến trong quần thể này, nên OR phóng đại tác động.</a:t>
+              <a:t>Hỏi: 'OR của mình là 0.58, RR 0.67. Vì sao khác?' Mong đợi: tử vong thường gặp, nên OR phóng đại.</a:t>
             </a:r>
           </a:p>
           <a:p>
@@ -2699,37 +2423,31 @@
           <a:p>
             <a:r>
               <a:rPr lang="en-US" sz="1400" b="0" dirty="0"/>
-              <a:t>Kịch bản: Course/Demos/s4_demo.md. Tệp: Course/Resources/tools/2x2_calculator.xlsx (đã điền sẵn ví dụ). Học viên chỉ theo dõi. Tệp được gửi qua email sau buổi học.</a:t>
+              <a:t>Kịch bản: s4_demo_VN.md. Tệp: 2x2_calculator.xlsx, đã điền sẵn. Học viên chỉ xem. Gửi tệp qua email sau buổi học.</a:t>
             </a:r>
           </a:p>
           <a:p>
             <a:r>
               <a:rPr lang="en-US" sz="1400" b="0" dirty="0"/>
-              <a:t>Ý chính: bảng tính lo phần số học. Con người lo phần diễn giải. Đọc to các ô diễn giải bằng lời.</a:t>
+              <a:t>Điểm chính: a = 2, c = 3. RR vẫn 0.67, OR thành 0.66, NNT tăng lên 100.</a:t>
             </a:r>
           </a:p>
           <a:p>
             <a:r>
               <a:rPr lang="en-US" sz="1400" b="0" dirty="0"/>
-              <a:t>Điểm then chốt: đổi a thành 2 và c thành 3 (b = 98, d = 97). RR vẫn 0.67 nhưng OR giờ là 0.66, gần như bằng nhau. NNT nhảy lên 100. Cùng tác động tương đối, tác động tuyệt đối rất khác.</a:t>
+              <a:t>Công cụ vẫn tính 'nguy cơ' cho dữ liệu bệnh-chứng, nhưng chỉ OR là có giá trị.</a:t>
             </a:r>
           </a:p>
           <a:p>
             <a:r>
               <a:rPr lang="en-US" sz="1400" b="0" dirty="0"/>
-              <a:t>Phương án dự phòng nếu không chia sẻ được màn hình: gõ bảng 2x2 vào khung chat hoặc một tài liệu chia sẻ và cùng cả lớp tính RR và NNT bằng tay. Các con số được chọn để dễ tính.</a:t>
+              <a:t>Nếu không chia sẻ được màn hình, tính RR và NNT bằng tay.</a:t>
             </a:r>
           </a:p>
           <a:p>
             <a:r>
               <a:rPr lang="en-US" sz="1400" b="0" dirty="0"/>
-              <a:t>Quan niệm sai cần nêu: công cụ vẫn tính ra 'nguy cơ' cho dữ liệu bệnh–chứng. Ở đó nó vô nghĩa: chỉ OR là hợp lệ.</a:t>
-            </a:r>
-          </a:p>
-          <a:p>
-            <a:r>
-              <a:rPr lang="en-US" sz="1400" b="0" dirty="0"/>
-              <a:t>Thời gian: 8 phút. Trang Diagnostic được trình chiếu nhanh ở phần 4.3. Sau đó giải lao. Slide này khép lại 25 phút của phần 4.2.</a:t>
+              <a:t>Thời gian: 8 phút. Sau đó giải lao.</a:t>
             </a:r>
           </a:p>
         </p:txBody>
@@ -2810,19 +2528,7 @@
           <a:p>
             <a:r>
               <a:rPr lang="en-US" sz="1400" b="0" dirty="0"/>
-              <a:t>Slide chỉ có hình, có chủ ý. Trước giờ giải lao, nói: sau giải lao cả lớp cùng làm hai bài tính bảng 2x2, hãy chuẩn bị bút, giấy và máy tính cầm tay. Rồi đến phần 4.3, vượt ra ngoài một nghiên cứu.</a:t>
-            </a:r>
-          </a:p>
-          <a:p>
-            <a:r>
-              <a:rPr lang="en-US" sz="1400" b="0" dirty="0"/>
-              <a:t>Giải lao 15 phút (20:45-21:00). Chiếu đồng hồ đếm ngược trên màn hình chia sẻ và để phiên họp mở.</a:t>
-            </a:r>
-          </a:p>
-          <a:p>
-            <a:r>
-              <a:rPr lang="en-US" sz="1400" b="0" dirty="0"/>
-              <a:t>Bắt đầu lại đúng giờ.</a:t>
+              <a:t>Giải lao 20:45-21:00. Nhắc chuẩn bị bút, giấy và máy tính. Chiếu đồng hồ đếm ngược.</a:t>
             </a:r>
           </a:p>
         </p:txBody>
@@ -2903,31 +2609,25 @@
           <a:p>
             <a:r>
               <a:rPr lang="en-US" sz="1400" b="0" dirty="0"/>
-              <a:t>Bài tập cả lớp. Phiếu: Course/Practicals/s4_exercises.md, Phần C (PDF). Đáp án: Course/Solutions/s4_solutions.md, Phần C.</a:t>
+              <a:t>7 phút mỗi bài. Bình chọn từng bước và gõ bảng vào công cụ tính.</a:t>
             </a:r>
           </a:p>
           <a:p>
             <a:r>
               <a:rPr lang="en-US" sz="1400" b="0" dirty="0"/>
-              <a:t>Bài 1 (thử nghiệm giả định hạn chế dịch so với thường quy, 200 người bệnh mỗi nhóm): 20 so với 30 ca tử vong đến ngày 28. Bình chọn từng bước: nguy cơ 10% và 15%. RR = 0.67. RD = -5 điểm phần trăm. NNT = 20. OR = (20 x 170) / (180 x 30) = 0.63. Ý chính: cùng RR (0.67) như ví dụ mẫu, nhưng nguy cơ nền thấp hơn (15% thay vì 30%), nên NNT tăng gấp đôi từ 10 lên 20.</a:t>
+              <a:t>Bài 1: nguy cơ 10% và 15%, RR 0.67, RD -5 điểm, NNT 20, OR 0.63. Cùng RR, nguy cơ nền thấp hơn, nên NNT gấp đôi.</a:t>
             </a:r>
           </a:p>
           <a:p>
             <a:r>
               <a:rPr lang="en-US" sz="1400" b="0" dirty="0"/>
-              <a:t>Bài 2 (nghiên cứu bệnh–chứng giả định): 40 người bệnh nhiễm khuẩn huyết phải lọc máu mới (ca bệnh) và 80 người không phải lọc máu (ca chứng), cùng các ICU. Cân bằng dịch dương ở ngày 3 có ở 24/40 ca bệnh và 16/80 ca chứng. OR = (24 x 64) / (16 x 16) = 6.0. Không tính được RR vì nhà nghiên cứu tự chọn số ca bệnh và ca chứng. Rồi hỏi (mời hai ba người trả lời, bật micro): ở đây mũi tên có thể chạy ngược không? Có: thận suy tạo ít nước tiểu, nên cân bằng dịch trở nên dương (nhân quả ngược, slide 16).</a:t>
+              <a:t>Bài 2: OR = (24 x 64) / (16 x 16) = 6.0. Không tính RR: nhà nghiên cứu tự chọn số ca bệnh và ca chứng. Hỏi về nhân quả ngược (thận suy).</a:t>
             </a:r>
           </a:p>
           <a:p>
             <a:r>
               <a:rPr lang="en-US" sz="1400" b="0" dirty="0"/>
-              <a:t>Nhịp: 7 phút mỗi bài (bình chọn từng đáp án, gõ bảng vào công cụ tính trên màn hình chia sẻ), 1 phút kết thúc. Phần lớn lỗi là do cách trình bày, không phải số học: kiểm tra mọi người đặt phơi nhiễm ở hàng.</a:t>
-            </a:r>
-          </a:p>
-          <a:p>
-            <a:r>
-              <a:rPr lang="en-US" sz="1400" b="0" dirty="0"/>
-              <a:t>Nếu lớp làm nhanh: phiếu có thêm một bài tính về chủ đề khác (Phần C, luyện tập thêm) để tự học.</a:t>
+              <a:t>Lỗi thường gặp là cách trình bày bảng. Đáp án: s4_solutions_VN, Phần C.</a:t>
             </a:r>
           </a:p>
         </p:txBody>
@@ -3008,25 +2708,13 @@
           <a:p>
             <a:r>
               <a:rPr lang="en-US" sz="1400" b="0" dirty="0"/>
-              <a:t>Đánh dấu phần 4.3 (30 phút, gồm 8 phút cả lớp cùng đọc biểu đồ rừng).</a:t>
+              <a:t>Phần 4.3: 30 phút, kể cả 8 phút bài biểu đồ rừng. Khoảng 2.5 phút mỗi slide.</a:t>
             </a:r>
           </a:p>
           <a:p>
             <a:r>
               <a:rPr lang="en-US" sz="1400" b="0" dirty="0"/>
-              <a:t>Ba khối: độ chính xác chẩn đoán (độ nhạy, độ đặc hiệu, giá trị tiên đoán, đường cong ROC), tổng quan hệ thống và phân tích gộp (sơ đồ PRISMA, biểu đồ rừng, tính không đồng nhất), và công cụ đánh giá nguy cơ sai lệch (công cụ nào cho thiết kế nào).</a:t>
-            </a:r>
-          </a:p>
-          <a:p>
-            <a:r>
-              <a:rPr lang="en-US" sz="1400" b="0" dirty="0"/>
-              <a:t>Ý chính: mọi thứ ở đây là để đánh giá bằng chứng, những kỹ năng học viên sẽ dùng ở Buổi 8 trong phần 'Làm người phản biện'.</a:t>
-            </a:r>
-          </a:p>
-          <a:p>
-            <a:r>
-              <a:rPr lang="en-US" sz="1400" b="0" dirty="0"/>
-              <a:t>Thời gian: 30 giây. Giữ nhịp nhanh: khoảng 2.5 phút mỗi slide.</a:t>
+              <a:t>Thời gian: 30 giây.</a:t>
             </a:r>
           </a:p>
         </p:txBody>
@@ -3107,25 +2795,13 @@
           <a:p>
             <a:r>
               <a:rPr lang="en-US" sz="1400" b="0" dirty="0"/>
-              <a:t>Phần 4.1 bắt đầu từ đây (tổng cộng 40 phút, từ slide này đến câu bình chọn 'Phát hiện sai lệch').</a:t>
+              <a:t>Phần 4.1 bắt đầu ở đây (40 phút). Xét kết quả có tin được không trước, rồi mới hỏi lớn đến đâu.</a:t>
             </a:r>
           </a:p>
           <a:p>
             <a:r>
               <a:rPr lang="en-US" sz="1400" b="0" dirty="0"/>
-              <a:t>Đọc bốn tiêu đề. Nói với cả lớp bảng thuật ngữ có ở đầu phiếu bài tập Buổi 4 (file PDF gửi trước buổi học).</a:t>
-            </a:r>
-          </a:p>
-          <a:p>
-            <a:r>
-              <a:rPr lang="en-US" sz="1400" b="0" dirty="0"/>
-              <a:t>Ý chính: thứ tự quan trọng. Cần đánh giá kết quả có tin được không trước khi quan tâm nó lớn đến đâu.</a:t>
-            </a:r>
-          </a:p>
-          <a:p>
-            <a:r>
-              <a:rPr lang="en-US" sz="1400" b="0" dirty="0"/>
-              <a:t>Hỏi cả lớp (mời hai ba người trả lời, bật micro): tháng này bạn đã gặp từ nào trong các bài báo? Dự kiến: OR, RR, KTC 95%, biểu đồ rừng.</a:t>
+              <a:t>Hỏi: 'Tháng này bạn đã gặp từ nào trong bài báo?' Mong đợi: OR, RR, KTC 95%, biểu đồ rừng.</a:t>
             </a:r>
           </a:p>
           <a:p>
@@ -3212,37 +2888,13 @@
           <a:p>
             <a:r>
               <a:rPr lang="en-US" sz="1400" b="0" dirty="0"/>
-              <a:t>Quay lại bảng 2x2, lần này cho một xét nghiệm. 100 người bệnh, 20 người thực sự có bệnh.</a:t>
+              <a:t>Xét nghiệm nhạy giúp loại trừ. Xét nghiệm đặc hiệu giúp khẳng định. PPV ở đây chỉ 53%.</a:t>
             </a:r>
           </a:p>
           <a:p>
             <a:r>
               <a:rPr lang="en-US" sz="1400" b="0" dirty="0"/>
-              <a:t>Độ nhạy (sensitivity): trong 20 người có bệnh, xét nghiệm phát hiện 18 = 90%. Xét nghiệm có độ nhạy cao hiếm khi bỏ sót bệnh, nên kết quả âm tính giúp loại trừ bệnh.</a:t>
-            </a:r>
-          </a:p>
-          <a:p>
-            <a:r>
-              <a:rPr lang="en-US" sz="1400" b="0" dirty="0"/>
-              <a:t>Độ đặc hiệu (specificity): trong 80 người không có bệnh, 64 người xét nghiệm âm tính = 80%. Xét nghiệm có độ đặc hiệu cao hiếm khi báo động nhầm, nên kết quả dương tính giúp khẳng định bệnh.</a:t>
-            </a:r>
-          </a:p>
-          <a:p>
-            <a:r>
-              <a:rPr lang="en-US" sz="1400" b="0" dirty="0"/>
-              <a:t>Xem trước slide sau: trong 34 xét nghiệm dương tính, chỉ 18 người thực sự có bệnh, giá trị tiên đoán dương 53%. Nó phụ thuộc vào mức độ phổ biến của bệnh.</a:t>
-            </a:r>
-          </a:p>
-          <a:p>
-            <a:r>
-              <a:rPr lang="en-US" sz="1400" b="0" dirty="0"/>
-              <a:t>Quan niệm sai: 'xét nghiệm có độ nhạy 90% nghĩa là người dương tính có 90% khả năng mắc bệnh'. Không. Đó là giá trị tiên đoán dương, ở đây chỉ 53%.</a:t>
-            </a:r>
-          </a:p>
-          <a:p>
-            <a:r>
-              <a:rPr lang="en-US" sz="1400" b="0" dirty="0"/>
-              <a:t>Hỏi cả lớp (bình chọn): với xét nghiệm sàng lọc không được bỏ sót nhiễm khuẩn huyết, ưu tiên độ nhạy hay độ đặc hiệu? Dự kiến: độ nhạy.</a:t>
+              <a:t>Bình chọn: 'Sàng lọc không được bỏ sót nhiễm khuẩn huyết: ưu tiên độ nhạy hay độ đặc hiệu?' Mong đợi: độ nhạy.</a:t>
             </a:r>
           </a:p>
           <a:p>
@@ -3329,43 +2981,19 @@
           <a:p>
             <a:r>
               <a:rPr lang="en-US" sz="1400" b="0" dirty="0"/>
-              <a:t>Cùng một xét nghiệm (độ nhạy 90%, độ đặc hiệu 80%) dùng cho 500 người ở hai bối cảnh.</a:t>
+              <a:t>PPV và NPV phụ thuộc tỷ lệ hiện mắc. Không mượn PPV từ bối cảnh khác.</a:t>
             </a:r>
           </a:p>
           <a:p>
             <a:r>
               <a:rPr lang="en-US" sz="1400" b="0" dirty="0"/>
-              <a:t>ICU, nơi 20% mắc bệnh: 90 dương thật, 80 dương giả, nên kết quả dương tính đúng 90 / 170 = 53% số lần (giá trị tiên đoán dương, PPV).</a:t>
+              <a:t>Hỏi: 'Vì sao chương trình sàng lọc dùng xét nghiệm thứ hai đặc hiệu hơn?' Mong đợi: để loại dương tính giả.</a:t>
             </a:r>
           </a:p>
           <a:p>
             <a:r>
               <a:rPr lang="en-US" sz="1400" b="0" dirty="0"/>
-              <a:t>Sàng lọc, nơi 2% mắc bệnh: 9 dương thật nhưng 98 dương giả: PPV 9 / 107 = 8%. Hơn 9/10 kết quả dương là báo động nhầm. Trong khi đó giá trị tiên đoán âm (NPV) tăng lên 99.7%.</a:t>
-            </a:r>
-          </a:p>
-          <a:p>
-            <a:r>
-              <a:rPr lang="en-US" sz="1400" b="0" dirty="0"/>
-              <a:t>Ý chính: độ nhạy và độ đặc hiệu thuộc về xét nghiệm. PPV và NPV thuộc về xét nghiệm trong một quần thể. Đừng bao giờ mượn PPV từ một nghiên cứu ở bối cảnh khác.</a:t>
-            </a:r>
-          </a:p>
-          <a:p>
-            <a:r>
-              <a:rPr lang="en-US" sz="1400" b="0" dirty="0"/>
-              <a:t>Quan niệm sai: 'xét nghiệm tốt thì tốt ở mọi nơi'. Sàng lọc quần thể khỏe mạnh bằng xét nghiệm có độ đặc hiệu vừa phải tạo ra nhiều dương giả và nhiều thăm dò không cần thiết.</a:t>
-            </a:r>
-          </a:p>
-          <a:p>
-            <a:r>
-              <a:rPr lang="en-US" sz="1400" b="0" dirty="0"/>
-              <a:t>Hỏi cả lớp (mời hai ba người trả lời, bật micro): vì sao chương trình sàng lọc dùng thêm một xét nghiệm thứ hai đặc hiệu hơn trước khi can thiệp? Dự kiến: để loại bỏ dương giả do tỷ lệ hiện mắc thấp.</a:t>
-            </a:r>
-          </a:p>
-          <a:p>
-            <a:r>
-              <a:rPr lang="en-US" sz="1400" b="0" dirty="0"/>
-              <a:t>Tùy chọn (1 phút): trên màn hình chia sẻ, mở ô 'PPV ở tỷ lệ hiện mắc khác' trên trang Diagnostic của công cụ tính 2x2, rồi nhập 2% và 20% (Course/Demos/s4_demo.md, Phần 2).</a:t>
+              <a:t>Tùy chọn: chiếu ô 'PPV ở tỷ lệ hiện mắc khác' (s4_demo_VN.md, Phần 2).</a:t>
             </a:r>
           </a:p>
           <a:p>
@@ -3452,31 +3080,13 @@
           <a:p>
             <a:r>
               <a:rPr lang="en-US" sz="1400" b="0" dirty="0"/>
-              <a:t>Nhiều xét nghiệm cho ra một con số (lactate, procalcitonin, một thang điểm nguy cơ). Mỗi ngưỡng cắt cho một cặp độ nhạy và độ đặc hiệu. Đường cong ROC vẽ tất cả: độ nhạy theo trục đứng, tỷ lệ dương giả (1 - độ đặc hiệu) theo trục ngang.</a:t>
+              <a:t>Ngưỡng tốt nhất tùy vào cái giá của bỏ sót so với báo động giả. AUC không chọn ngưỡng.</a:t>
             </a:r>
           </a:p>
           <a:p>
             <a:r>
               <a:rPr lang="en-US" sz="1400" b="0" dirty="0"/>
-              <a:t>Ngưỡng thấp phát hiện gần như mọi ca nhưng gây nhiều báo động nhầm (góc trên phải). Ngưỡng cao ít báo động nhầm nhưng bỏ sót ca bệnh (góc dưới trái). Ngưỡng tốt nhất tùy vào cái giá của việc bỏ sót so với báo động nhầm.</a:t>
-            </a:r>
-          </a:p>
-          <a:p>
-            <a:r>
-              <a:rPr lang="en-US" sz="1400" b="0" dirty="0"/>
-              <a:t>Diện tích dưới đường cong (AUC, còn gọi là chỉ số c) tóm tắt khả năng phân biệt: 0.5 = tung đồng xu (đường nét đứt), 1.0 = hoàn hảo. Xét nghiệm mô phỏng này có AUC 0.80.</a:t>
-            </a:r>
-          </a:p>
-          <a:p>
-            <a:r>
-              <a:rPr lang="en-US" sz="1400" b="0" dirty="0"/>
-              <a:t>Quan niệm sai: 'AUC cho biết nên dùng ngưỡng nào'. Không. Nó mô tả toàn bộ đường cong. AUC sẽ xuất hiện lại ở Buổi 6 với mô hình dự báo.</a:t>
-            </a:r>
-          </a:p>
-          <a:p>
-            <a:r>
-              <a:rPr lang="en-US" sz="1400" b="0" dirty="0"/>
-              <a:t>Hỏi cả lớp (bình chọn): để loại trừ nhiễm khuẩn huyết ở phân loại cấp cứu, chọn ngưỡng lactate thấp hay cao? Dự kiến: thấp, để có độ nhạy cao, chấp nhận nhiều báo động nhầm hơn.</a:t>
+              <a:t>Bình chọn: 'Loại trừ nhiễm khuẩn huyết khi phân loại: ngưỡng lactate thấp hay cao?' Mong đợi: thấp.</a:t>
             </a:r>
           </a:p>
           <a:p>
@@ -3563,43 +3173,13 @@
           <a:p>
             <a:r>
               <a:rPr lang="en-US" sz="1400" b="0" dirty="0"/>
-              <a:t>Số liệu minh họa. Mọi tổng quan hệ thống nên có sơ đồ này (PRISMA 2020).</a:t>
+              <a:t>Số liệu minh họa. Hai người sàng lọc độc lập. Đề cương được đăng ký trên PROSPERO.</a:t>
             </a:r>
           </a:p>
           <a:p>
             <a:r>
               <a:rPr lang="en-US" sz="1400" b="0" dirty="0"/>
-              <a:t>Nhận diện: 1240 bản ghi từ cơ sở dữ liệu cộng 60 từ sổ đăng ký thử nghiệm = 1300. Loại 300 bản trùng.</a:t>
-            </a:r>
-          </a:p>
-          <a:p>
-            <a:r>
-              <a:rPr lang="en-US" sz="1400" b="0" dirty="0"/>
-              <a:t>Sàng lọc: 1000 tiêu đề và tóm tắt được sàng lọc, loại 920. Đọc 80 toàn văn, loại 71 có lý do (38 không phải RCT, 21 sai đối tượng, 12 không có dữ liệu tử vong, cộng lại đúng 71).</a:t>
-            </a:r>
-          </a:p>
-          <a:p>
-            <a:r>
-              <a:rPr lang="en-US" sz="1400" b="0" dirty="0"/>
-              <a:t>Đưa vào: 9 nghiên cứu, cả 9 vào phân tích gộp.</a:t>
-            </a:r>
-          </a:p>
-          <a:p>
-            <a:r>
-              <a:rPr lang="en-US" sz="1400" b="0" dirty="0"/>
-              <a:t>Ý chính: hai người sàng lọc độc lập, và đề cương được đăng ký trước (PROSPERO, sổ đăng ký quốc tế cho đề cương tổng quan hệ thống). Sơ đồ giúp người đọc đánh giá liệu có nghiên cứu liên quan bị bỏ sót không.</a:t>
-            </a:r>
-          </a:p>
-          <a:p>
-            <a:r>
-              <a:rPr lang="en-US" sz="1400" b="0" dirty="0"/>
-              <a:t>Quan niệm sai: 'càng nhiều nghiên cứu được đưa vào thì tổng quan càng tốt'. Tiêu chuẩn chọn chặt chẽ, rõ ràng quan trọng hơn số lượng.</a:t>
-            </a:r>
-          </a:p>
-          <a:p>
-            <a:r>
-              <a:rPr lang="en-US" sz="1400" b="0" dirty="0"/>
-              <a:t>Hỏi cả lớp (mời hai ba người trả lời, bật micro): vì sao tìm trong sổ đăng ký thử nghiệm chứ không chỉ PubMed? Dự kiến: để tìm thử nghiệm chưa công bố hoặc kết quả âm tính, do sai lệch công bố (tài liệu xám ở Buổi 2).</a:t>
+              <a:t>Hỏi: 'Vì sao tìm cả sổ đăng ký thử nghiệm?' Mong đợi: thử nghiệm chưa công bố hoặc âm tính (sai lệch xuất bản).</a:t>
             </a:r>
           </a:p>
           <a:p>
@@ -3686,25 +3266,19 @@
           <a:p>
             <a:r>
               <a:rPr lang="en-US" sz="1400" b="0" dirty="0"/>
-              <a:t>Các thử nghiệm giả định, gộp theo mô hình tác động cố định (nghịch đảo phương sai). Đọc trong bốn bước. (1) Tìm đường dọc không tác động: RR = 1. Bên trái có lợi cho hạn chế dịch. Bên phải có lợi cho thường quy. (2) Mỗi ô vuông là RR của một nghiên cứu. Kích thước thể hiện trọng số (thử nghiệm 4 lớn nhất, 38%). (3) Mỗi đường ngang là KTC 95% của nghiên cứu đó. Nếu cắt 1, riêng nghiên cứu đó chưa kết luận được. Ở đây mọi thử nghiệm đều cắt 1. (4) Hình thoi là ước lượng gộp: RR 0.79 (KTC 95% 0.64-0.98). Độ rộng là KTC. Nó không cắt 1.</a:t>
+              <a:t>Bốn bước: đường không tác động, hình vuông (trọng số), đường ngang (KTC), hình thoi: RR 0.79 (0.64-0.98).</a:t>
             </a:r>
           </a:p>
           <a:p>
             <a:r>
               <a:rPr lang="en-US" sz="1400" b="0" dirty="0"/>
-              <a:t>Ý chính: gộp nhiều thử nghiệm chưa kết luận có thể cho câu trả lời chính xác. Đó là thế mạnh của phân tích gộp. Bằng lời: nguy cơ tử vong tương đối thấp hơn khoảng 21%, dù giới hạn trên (0.98) gần mức không tác động.</a:t>
+              <a:t>Từng thử nghiệm đều cắt qua 1, nhưng kết quả gộp thì không. KTC cắt qua 1 là chưa chắc chắn, không phải không có tác động.</a:t>
             </a:r>
           </a:p>
           <a:p>
             <a:r>
               <a:rPr lang="en-US" sz="1400" b="0" dirty="0"/>
-              <a:t>Quan niệm sai: 'thử nghiệm có KTC cắt 1 cho thấy không có tác động'. Nó cho thấy sự không chắc chắn, không phải sự vắng mặt của tác động.</a:t>
-            </a:r>
-          </a:p>
-          <a:p>
-            <a:r>
-              <a:rPr lang="en-US" sz="1400" b="0" dirty="0"/>
-              <a:t>Chưa đặt câu hỏi: bài tập cả lớp ở cuối phần 4.3 dùng đúng biểu đồ này.</a:t>
+              <a:t>Chưa hỏi lớp: bài tập cuối phần 4.3 dùng biểu đồ này.</a:t>
             </a:r>
           </a:p>
           <a:p>
@@ -3791,37 +3365,13 @@
           <a:p>
             <a:r>
               <a:rPr lang="en-US" sz="1400" b="0" dirty="0"/>
-              <a:t>Trái: sáu thử nghiệm ở slide trước cùng một hướng. KTC chồng lên nhau. I bình phương (i²) = 0%. Gộp là hợp lý.</a:t>
+              <a:t>Khi không đồng nhất cao, hỏi vì sao: người bệnh, liều, thời điểm, định nghĩa hay nguy cơ sai lệch. Mô hình hiệu ứng ngẫu nhiên chỉ làm KTC rộng ra.</a:t>
             </a:r>
           </a:p>
           <a:p>
             <a:r>
               <a:rPr lang="en-US" sz="1400" b="0" dirty="0"/>
-              <a:t>Phải: sáu thử nghiệm giả định khác bất đồng. Một số rõ ràng có lợi cho hạn chế dịch, số khác theo hướng ngược lại. I² = 80%: khoảng 80% biến thiên giữa các nghiên cứu phản ánh khác biệt thật chứ không phải may rủi. Hình thoi theo mô hình tác động ngẫu nhiên rộng và cắt 1 (RR 0.74, KTC 95% 0.47-1.15).</a:t>
-            </a:r>
-          </a:p>
-          <a:p>
-            <a:r>
-              <a:rPr lang="en-US" sz="1400" b="0" dirty="0"/>
-              <a:t>Hướng dẫn gần đúng (Cochrane): i² khoảng 0-40% có thể không quan trọng, 30-60% trung bình, 50-90% đáng kể, 75-100% rất lớn. Các khoảng chồng nhau có chủ ý: hãy đánh giá cùng biểu đồ.</a:t>
-            </a:r>
-          </a:p>
-          <a:p>
-            <a:r>
-              <a:rPr lang="en-US" sz="1400" b="0" dirty="0"/>
-              <a:t>Ý chính: khi không đồng nhất cao, câu hỏi hữu ích nhất là vì sao: khác người bệnh, liều, thời điểm, định nghĩa kết cục hay nguy cơ sai lệch? Một con số gộp duy nhất có thể che giấu điều đó.</a:t>
-            </a:r>
-          </a:p>
-          <a:p>
-            <a:r>
-              <a:rPr lang="en-US" sz="1400" b="0" dirty="0"/>
-              <a:t>Quan niệm sai: 'mô hình tác động ngẫu nhiên sửa được tính không đồng nhất'. Nó chỉ làm KTC rộng hơn. Không giải thích gì.</a:t>
-            </a:r>
-          </a:p>
-          <a:p>
-            <a:r>
-              <a:rPr lang="en-US" sz="1400" b="0" dirty="0"/>
-              <a:t>Hỏi cả lớp (mời hai ba người trả lời, bật micro): nêu một lý do các thử nghiệm hạn chế dịch có thể bất đồng. Dự kiến: quần thể khác nhau (nhiễm khuẩn huyết hay phẫu thuật), quy trình hạn chế khác nhau, thời điểm khác nhau.</a:t>
+              <a:t>Hỏi: 'Một lý do các thử nghiệm dịch truyền không thống nhất?' Mong đợi: quần thể, quy trình hoặc thời điểm khác nhau.</a:t>
             </a:r>
           </a:p>
           <a:p>
@@ -3908,37 +3458,19 @@
           <a:p>
             <a:r>
               <a:rPr lang="en-US" sz="1400" b="0" dirty="0"/>
-              <a:t>Công cụ đánh giá nguy cơ sai lệch là cách có cấu trúc để hỏi 'thiết kế hay cách thực hiện có thể làm méo kết quả này không?'. Mỗi thiết kế có công cụ riêng. Bản một trang của bảng này nằm trong thư mục khóa học: Course/Resources/Risk_of_Bias_Tool_Chooser.pdf.</a:t>
+              <a:t>Hướng dẫn báo cáo kiểm tra điều đã báo cáo. Công cụ nguy cơ sai lệch đánh giá độ tin cậy. Đánh giá theo từng lĩnh vực, không cộng sao.</a:t>
             </a:r>
           </a:p>
           <a:p>
             <a:r>
               <a:rPr lang="en-US" sz="1400" b="0" dirty="0"/>
-              <a:t>Thử nghiệm ngẫu nhiên: RoB 2 (Cochrane), dùng cho Bài báo 1 (Boulet). Nghiên cứu không ngẫu nhiên về can thiệp (trước-sau, thuần tập so sánh điều trị): ROBINS-I. Nghiên cứu thuần tập và bệnh–chứng về phơi nhiễm: thang Newcastle-Ottawa vẫn được dùng rộng rãi. ROBINS-E là lựa chọn mới hơn, chặt chẽ hơn (dùng cho Bài báo 2, Hyun). Nghiên cứu độ chính xác chẩn đoán: QUADAS-2. Bản thân tổng quan hệ thống: AMSTAR 2.</a:t>
+              <a:t>Bản một trang: Risk_of_Bias_Tool_Chooser.pdf.</a:t>
             </a:r>
           </a:p>
           <a:p>
             <a:r>
               <a:rPr lang="en-US" sz="1400" b="0" dirty="0"/>
-              <a:t>Cột thứ ba nối sang phần sau: mỗi thiết kế cũng có hướng dẫn báo cáo (CONSORT cho thử nghiệm, TREND hoặc STROBE, STROBE cho nghiên cứu quan sát, STARD cho độ chính xác chẩn đoán, PRISMA cho tổng quan), học ở Buổi 8.</a:t>
-            </a:r>
-          </a:p>
-          <a:p>
-            <a:r>
-              <a:rPr lang="en-US" sz="1400" b="0" dirty="0"/>
-              <a:t>Ý chính: hướng dẫn báo cáo kiểm tra điều gì đã được báo cáo. Công cụ nguy cơ sai lệch đánh giá kết quả đáng tin đến đâu. Một nghiên cứu báo cáo tốt vẫn có thể có nguy cơ sai lệch cao.</a:t>
-            </a:r>
-          </a:p>
-          <a:p>
-            <a:r>
-              <a:rPr lang="en-US" sz="1400" b="0" dirty="0"/>
-              <a:t>Quan niệm sai: 'cộng số sao là ra chất lượng'. Điểm tổng che mất lĩnh vực nào thất bại. Đánh giá theo từng lĩnh vực hữu ích hơn.</a:t>
-            </a:r>
-          </a:p>
-          <a:p>
-            <a:r>
-              <a:rPr lang="en-US" sz="1400" b="0" dirty="0"/>
-              <a:t>Hỏi cả lớp (bình chọn): thẩm định một nghiên cứu cải tiến chất lượng trước-sau về gói xử trí nhiễm khuẩn huyết, dùng công cụ nào? Dự kiến: ROBINS-I.</a:t>
+              <a:t>Bình chọn: 'Nghiên cứu trước-sau về gói nhiễm khuẩn huyết: công cụ nào?' Mong đợi: ROBINS-I.</a:t>
             </a:r>
           </a:p>
           <a:p>
@@ -4025,31 +3557,13 @@
           <a:p>
             <a:r>
               <a:rPr lang="en-US" sz="1400" b="0" dirty="0"/>
-              <a:t>Slide này khép lại khối thẩm định và nối với bảng kiểm 10 câu dùng ở Buổi 8 ('Làm người phản biện'): Course/Resources/Critical_Appraisal_Checklist.pdf.</a:t>
+              <a:t>Liên kết với bảng kiểm 10 câu ở Buổi 8 (Critical_Appraisal_Checklist.pdf).</a:t>
             </a:r>
           </a:p>
           <a:p>
             <a:r>
               <a:rPr lang="en-US" sz="1400" b="0" dirty="0"/>
-              <a:t>Lời lẽ và thiết kế: kết luận của Boulet ('không làm giảm cân bằng dịch chung ở ngày 5') khớp với thiết kế RCT thí điểm. Tóm tắt của Hyun nói 'có liên quan', nhưng tiêu đề dùng chữ 'Impact' (tác động), mạnh hơn mức một nghiên cứu thuần tập cho phép.</a:t>
-            </a:r>
-          </a:p>
-          <a:p>
-            <a:r>
-              <a:rPr lang="en-US" sz="1400" b="0" dirty="0"/>
-              <a:t>Con số và lời lẽ: kết quả chính có được trình bày bằng cỡ tác động kèm KTC 95% không? Kết quả không có ý nghĩa (p = 0.42) có được mô tả trung thực, không dùng 'có xu hướng' không?</a:t>
-            </a:r>
-          </a:p>
-          <a:p>
-            <a:r>
-              <a:rPr lang="en-US" sz="1400" b="0" dirty="0"/>
-              <a:t>Tô vẽ (spin): kết cục chính có được báo cáo trước và kết luận dựa trên nó, thay vì một kết cục phụ hay phân nhóm thuận lợi không?</a:t>
-            </a:r>
-          </a:p>
-          <a:p>
-            <a:r>
-              <a:rPr lang="en-US" sz="1400" b="0" dirty="0"/>
-              <a:t>Hỏi cả lớp (mời hai ba người trả lời, bật micro): tìm một chữ trong tiêu đề hoặc tóm tắt nói quá. Dự kiến: 'tác động', 'hiệu quả', 'làm giảm' hoặc 'phòng ngừa' trong nghiên cứu quan sát.</a:t>
+              <a:t>Hỏi: 'Tìm một từ trong tiêu đề hay tóm tắt nói quá.' Mong đợi: 'impact', 'effect', 'reduces' trong nghiên cứu quan sát.</a:t>
             </a:r>
           </a:p>
           <a:p>
@@ -4136,31 +3650,31 @@
           <a:p>
             <a:r>
               <a:rPr lang="en-US" sz="1400" b="0" dirty="0"/>
-              <a:t>Bài tập cả lớp. Phiếu: Course/Practicals/s4_exercises.md, Phần E (PDF). Đáp án: Course/Solutions/s4_solutions.md, Phần E. Quay lại slide biểu đồ rừng trên màn hình chia sẻ trong lúc cả lớp trả lời.</a:t>
+              <a:t>Chiếu lại slide biểu đồ rừng khi lớp trả lời.</a:t>
             </a:r>
           </a:p>
           <a:p>
             <a:r>
               <a:rPr lang="en-US" sz="1400" b="0" dirty="0"/>
-              <a:t>Đáp án: thử nghiệm 4 có trọng số lớn nhất (38%). Không thử nghiệm riêng lẻ nào loại trừ được RR = 1: mọi KTC đều cắt 1. Hình thoi (RR 0.79, KTC 95% 0.64-0.98) không cắt 1: gộp lại, hạn chế dịch liên quan với nguy cơ tử vong tương đối thấp hơn khoảng 21% trong các thử nghiệm (giả định) này, với giới hạn trên gần mức không tác động. Mời hai ba người trả lời, rồi gõ câu hay nhất lên màn hình chia sẻ. Công cụ: RoB 2 cho Boulet. Newcastle-Ottawa (hoặc ROBINS-E) cho Hyun. AMSTAR 2 cho tổng quan.</a:t>
+              <a:t>Đáp án: Thử nghiệm 4 có trọng số lớn nhất (38%). Mọi thử nghiệm đều cắt qua 1. Hình thoi thì không: nguy cơ tương đối thấp hơn khoảng 21%, giới hạn trên gần không tác động. Công cụ: RoB 2 cho Boulet, Newcastle-Ottawa hoặc ROBINS-E cho Hyun, AMSTAR 2 cho tổng quan.</a:t>
             </a:r>
           </a:p>
           <a:p>
             <a:r>
               <a:rPr lang="en-US" sz="1400" b="0" dirty="0"/>
-              <a:t>Nếu thiếu thời gian, chỉ làm câu về hình thoi và câu chọn công cụ.</a:t>
+              <a:t>Luôn nêu KTC cùng hình thoi. Nếu thiếu thời gian, chỉ làm câu về hình thoi và công cụ.</a:t>
             </a:r>
           </a:p>
           <a:p>
             <a:r>
               <a:rPr lang="en-US" sz="1400" b="0" dirty="0"/>
-              <a:t>Lỗi thường gặp: chỉ đọc tâm hình thoi mà bỏ qua độ rộng. Luôn nêu KTC.</a:t>
+              <a:t>Đáp án: s4_solutions_VN, Phần E.</a:t>
             </a:r>
           </a:p>
           <a:p>
             <a:r>
               <a:rPr lang="en-US" sz="1400" b="0" dirty="0"/>
-              <a:t>Thời gian: 8 phút. Slide này khép lại 30 phút của phần 4.3. Rồi chuyển sang xây dựng đề cương.</a:t>
+              <a:t>Thời gian: 8 phút. Kết thúc phần 4.3.</a:t>
             </a:r>
           </a:p>
         </p:txBody>
@@ -4241,31 +3755,19 @@
           <a:p>
             <a:r>
               <a:rPr lang="en-US" sz="1400" b="0" dirty="0"/>
-              <a:t>Phần xây dựng đề cương 4 bắt đầu từ đây (tổng cộng 40 phút, đúng như trên băng tiêu đề và trong chương trình: slide này 2 phút, rồi 38 phút xây dựng đề cương).</a:t>
+              <a:t>Xây dựng đề cương 4 bắt đầu ở đây (slide này 2 phút, rồi 38 phút).</a:t>
             </a:r>
           </a:p>
           <a:p>
             <a:r>
               <a:rPr lang="en-US" sz="1400" b="0" dirty="0"/>
-              <a:t>Kết cục chính là một kết quả mà nghiên cứu được thiết kế và tính cỡ mẫu cho nó. Định nghĩa theo ba ý: cái gì (tử vong do mọi nguyên nhân, không phải 'cải thiện tử vong'), đo thế nào (hồ sơ bệnh viện, gọi điện nếu đã ra viện), khi nào (ngày 28 sau khi vào ICU). Kết cục phụ cũng có đủ ba ý (ví dụ tổn thương thận cấp đến ngày 7 theo tiêu chuẩn KDIGO, Kidney Disease: Improving Global Outcomes).</a:t>
+              <a:t>Nhiều kết cục chính dễ dẫn đến chọn kết quả có lợi.</a:t>
             </a:r>
           </a:p>
           <a:p>
             <a:r>
               <a:rPr lang="en-US" sz="1400" b="0" dirty="0"/>
-              <a:t>Kết cục chính của Bài báo 1 (Boulet): cân bằng dịch tích lũy (ml/kg) ở ngày 5: rõ cái gì, thế nào và khi nào. Của Bài báo 2 (Hyun): tử vong ngày 28.</a:t>
-            </a:r>
-          </a:p>
-          <a:p>
-            <a:r>
-              <a:rPr lang="en-US" sz="1400" b="0" dirty="0"/>
-              <a:t>Quan niệm sai: 'nhiều kết cục chính = nhiều cơ hội có kết quả'. Đó chính là vấn đề: nhiều kết cục chính tạo điều kiện chọn lọc kết quả (tô vẽ, Buổi 2).</a:t>
-            </a:r>
-          </a:p>
-          <a:p>
-            <a:r>
-              <a:rPr lang="en-US" sz="1400" b="0" dirty="0"/>
-              <a:t>Hỏi cả lớp (mời hai ba người trả lời, bật micro): viết lại 'cải thiện kết cục người bệnh' thành một kết cục chính cho câu hỏi dịch truyền. Dự kiến: vd. 'phải lọc máu mới đến ngày 28 sau khi vào ICU, theo hồ sơ ICU'.</a:t>
+              <a:t>Hỏi: 'Viết lại cải thiện kết cục người bệnh thành một kết cục chính.' Mong đợi: ví dụ lọc máu mới trước ngày 28 sau khi vào ICU, theo hồ sơ ICU.</a:t>
             </a:r>
           </a:p>
           <a:p>
@@ -4352,18 +3854,6 @@
           <a:p>
             <a:r>
               <a:rPr lang="en-US" sz="1400" b="0" dirty="0"/>
-              <a:t>Đánh dấu phần 4.1. 40 phút tính từ slide từ khóa đến câu bình chọn 'Phát hiện sai lệch'.</a:t>
-            </a:r>
-          </a:p>
-          <a:p>
-            <a:r>
-              <a:rPr lang="en-US" sz="1400" b="0" dirty="0"/>
-              <a:t>Ba nhóm sai lệch: ai được đưa vào nghiên cứu (chọn lựa), đo lường thế nào (thông tin), và sự trộn lẫn tác động (yếu tố nhiễu). Sau đó là cách thiết kế chống sai lệch, và bốn ý để đánh giá một kết quả: thay đổi tác động, giá trị nội tại và ngoại suy, quan hệ nhân quả ngược và các quan điểm của Bradford Hill.</a:t>
-            </a:r>
-          </a:p>
-          <a:p>
-            <a:r>
-              <a:rPr lang="en-US" sz="1400" b="0" dirty="0"/>
               <a:t>Thời gian: 30 giây.</a:t>
             </a:r>
           </a:p>
@@ -4445,31 +3935,25 @@
           <a:p>
             <a:r>
               <a:rPr lang="en-US" sz="1400" b="0" dirty="0"/>
-              <a:t>Phiếu làm việc: phiếu bài tập Buổi 4 (PDF), Phần F, và mẫu đề cương (Course/Templates/Research_Proposal_Template.docx, Phần 2). Mỗi người viết đề cương của chính mình. Không chia nhóm.</a:t>
+              <a:t>15 phút: điền Phần 2b cho ví dụ xuyên suốt trên màn hình. 16 phút: mỗi người tự viết. 7 phút: ba bạn tình nguyện đọc một sai lệch và cách khắc phục.</a:t>
             </a:r>
           </a:p>
           <a:p>
             <a:r>
               <a:rPr lang="en-US" sz="1400" b="0" dirty="0"/>
-              <a:t>Nhịp (38 phút): 15 phút giảng viên điền Phần 2b cho ví dụ xuyên suốt trên màn hình chia sẻ, vừa viết vừa nói ra suy nghĩ, 16 phút học viên tự viết nháp Phần 2b của mình (có thể tắt camera, hỏi trong khung chat), 7 phút ba bạn tình nguyện đọc to một sai lệch và biện pháp và giảng viên nhận xét.</a:t>
+              <a:t>Mẫu: phơi nhiễm cân bằng dịch dương ở 72 giờ, so sánh với bằng 0 hoặc âm, kết cục chính tử vong đến ngày 28. Sai lệch: mức độ nặng (hiệu chỉnh hoặc ghép cặp), chọn lựa (người bệnh liên tiếp), thông tin (kiểm tra lại 10% hồ sơ). Bản đầy đủ trong s4_solutions_VN, Phần F.</a:t>
             </a:r>
           </a:p>
           <a:p>
             <a:r>
               <a:rPr lang="en-US" sz="1400" b="0" dirty="0"/>
-              <a:t>Đáp án mẫu cho ví dụ xuyên suốt (phiên bản quan sát), để viết trực tiếp: phơi nhiễm: cân bằng dịch tích lũy dương (ml/kg) ở 72 giờ sau khi vào ICU. So sánh: cân bằng bằng 0 hoặc âm. Kết cục chính: tử vong do mọi nguyên nhân đến ngày 28 (hồ sơ bệnh viện). Kết cục phụ: tổn thương thận cấp (KDIGO) đến ngày 7, số ngày không thở máy đến ngày 28, thời gian nằm ICU. Sai lệch: nhiễu do độ nặng (ghi điểm SOFA, lactate, liều vận mạch và hiệu chỉnh hoặc ghép cặp), chọn lựa (người bệnh liên tiếp, báo cáo các trường hợp bị loại), thông tin (định nghĩa dịch định trước, kiểm tra lại 10% hồ sơ). Kết luận: 'có liên quan với'. Mẫu đầy đủ ở Course/Solutions/s4_solutions.md, Phần F.</a:t>
+              <a:t>Chú ý: thiếu nhóm so sánh, ba kết cục chính, 'chúng tôi sẽ cẩn thận' không phải là cách khắc phục.</a:t>
             </a:r>
           </a:p>
           <a:p>
             <a:r>
               <a:rPr lang="en-US" sz="1400" b="0" dirty="0"/>
-              <a:t>Vấn đề thường gặp: không có nhóm so sánh. Ba kết cục chính. Nêu sai lệch mà không có biện pháp cụ thể ('chúng tôi sẽ cẩn thận' không phải là biện pháp).</a:t>
-            </a:r>
-          </a:p>
-          <a:p>
-            <a:r>
-              <a:rPr lang="en-US" sz="1400" b="0" dirty="0"/>
-              <a:t>Thời gian: nhắc khi còn 10 phút và 2 phút của phần làm riêng.</a:t>
+              <a:t>Nhắc khi còn 10 phút và 2 phút.</a:t>
             </a:r>
           </a:p>
         </p:txBody>
@@ -4550,19 +4034,13 @@
           <a:p>
             <a:r>
               <a:rPr lang="en-US" sz="1400" b="0" dirty="0"/>
-              <a:t>Tóm tắt buổi học (22:25). Mời bốn bạn tình nguyện (giơ tay) giải thích mỗi người một thẻ. RR, OR, RD, NNT và PPV đều đã được định nghĩa trong buổi hôm nay.</a:t>
+              <a:t>Mời bốn bạn tình nguyện giải thích mỗi người một thẻ. Mỗi đề cương giờ đã có Phần 1 và Phần 2.</a:t>
             </a:r>
           </a:p>
           <a:p>
             <a:r>
               <a:rPr lang="en-US" sz="1400" b="0" dirty="0"/>
-              <a:t>Slide này cũng khép lại Tuần 3-4: đề cương của mỗi học viên giờ đã có câu hỏi (Phần 1) và thiết kế (Phần 2).</a:t>
-            </a:r>
-          </a:p>
-          <a:p>
-            <a:r>
-              <a:rPr lang="en-US" sz="1400" b="0" dirty="0"/>
-              <a:t>Thời gian: 2 phút. Cùng với slide tổng kết (3 phút) là 5 phút kết thúc buổi.</a:t>
+              <a:t>Thời gian: 2 phút.</a:t>
             </a:r>
           </a:p>
         </p:txBody>
@@ -4643,25 +4121,25 @@
           <a:p>
             <a:r>
               <a:rPr lang="en-US" sz="1400" b="0" dirty="0"/>
-              <a:t>Đáp án câu hỏi cuối buổi: nhiễu do chỉ định (người bệnh nặng hơn được truyền nhiều dịch hơn và tử vong nhiều hơn), hoặc nhân quả ngược (thận suy tạo ít nước tiểu nên cân bằng dịch trở nên dương).</a:t>
+              <a:t>Đáp án câu hỏi cuối buổi: nhiễu do chỉ định, hoặc nhân quả ngược (thận suy).</a:t>
             </a:r>
           </a:p>
           <a:p>
             <a:r>
               <a:rPr lang="en-US" sz="1400" b="0" dirty="0"/>
-              <a:t>Mục đích: kiểm tra hai ý chính của phần 4.1 đã được hiểu chưa. Đọc mọi câu trả lời trước Buổi 5 và mở đầu Buổi 5 bằng ba câu (ẩn danh).</a:t>
+              <a:t>Mở đầu Buổi 5 bằng ba câu trả lời (ẩn tên).</a:t>
             </a:r>
           </a:p>
           <a:p>
             <a:r>
               <a:rPr lang="en-US" sz="1400" b="0" dirty="0"/>
-              <a:t>Xem trước: ở Tuần 5-6 cả lớp biến thiết kế thành dữ liệu (biến số, phiếu thu thập dữ liệu) và làm quen với bộ dữ liệu khóa học FLUID-ICU, một thuần tập mô phỏng trả lời phiên bản quan sát của câu hỏi về dịch truyền. Sau này mỗi học viên chọn một trong năm câu hỏi của bộ dữ liệu (Q1-Q5) để viết bản thảo của riêng mình.</a:t>
+              <a:t>Giới thiệu trước: Tuần 5-6 chuyển thiết kế thành dữ liệu và giới thiệu FLUID-ICU. Ở Buổi 6, mỗi người chọn một câu hỏi (Q1-Q5) để viết phần Kết quả.</a:t>
             </a:r>
           </a:p>
           <a:p>
             <a:r>
               <a:rPr lang="en-US" sz="1400" b="0" dirty="0"/>
-              <a:t>Thời gian: 3 phút sau slide tóm tắt 2 phút (tổng cộng 5 phút, đúng như trên băng tiêu đề và trong chương trình). Kết thúc lúc 22:30.</a:t>
+              <a:t>Thời gian: 3 phút. Kết thúc lúc 22:30.</a:t>
             </a:r>
           </a:p>
         </p:txBody>
@@ -4742,13 +4220,7 @@
           <a:p>
             <a:r>
               <a:rPr lang="en-US" sz="1400" b="0" dirty="0"/>
-              <a:t>Extra (slide bổ sung): các slide sau đây là tùy chọn. Dùng nếu lớp đi nhanh, để trả lời câu hỏi, hoặc để tự học (bộ slide được gửi dạng PDF sau buổi học).</a:t>
-            </a:r>
-          </a:p>
-          <a:p>
-            <a:r>
-              <a:rPr lang="en-US" sz="1400" b="0" dirty="0"/>
-              <a:t>Thời gian: bỏ qua trong buổi học trừ khi còn thời gian.</a:t>
+              <a:t>Tùy chọn. Dùng nếu còn thời gian, hoặc để tự học.</a:t>
             </a:r>
           </a:p>
         </p:txBody>
@@ -4829,13 +4301,7 @@
           <a:p>
             <a:r>
               <a:rPr lang="en-US" sz="1400" b="0" dirty="0"/>
-              <a:t>Extra (slide bổ sung): thêm ba tình huống từ bối cảnh khác, để bình chọn nhanh hoặc tự học.</a:t>
-            </a:r>
-          </a:p>
-          <a:p>
-            <a:r>
-              <a:rPr lang="en-US" sz="1400" b="0" dirty="0"/>
-              <a:t>Đáp án. A: sai lệch chọn lựa. Những người bệnh nặng nhất (đã tử vong) bị thiếu, nên mẫu không còn là quần thể. B: sai lệch người quan sát (sai lệch thông tin): một điểm số chủ quan do người biết nhóm đánh giá. C: sai lệch đo lường (sai lệch thông tin). Vì chỉ ảnh hưởng một khoa, nó làm méo phép so sánh giữa các khoa.</a:t>
+              <a:t>Đáp án: A sai lệch chọn lựa. B sai lệch người quan sát. C sai lệch đo lường, làm sai phép so sánh vì chỉ xảy ra ở một khoa.</a:t>
             </a:r>
           </a:p>
           <a:p>
@@ -4922,25 +4388,7 @@
           <a:p>
             <a:r>
               <a:rPr lang="en-US" sz="1400" b="0" dirty="0"/>
-              <a:t>Extra (slide bổ sung): thêm ba ví dụ về nhiễu do chỉ định để củng cố ý này.</a:t>
-            </a:r>
-          </a:p>
-          <a:p>
-            <a:r>
-              <a:rPr lang="en-US" sz="1400" b="0" dirty="0"/>
-              <a:t>Với mỗi thẻ, đọc mối liên quan bề ngoài, rồi hỏi yếu tố thứ ba trước khi công bố.</a:t>
-            </a:r>
-          </a:p>
-          <a:p>
-            <a:r>
-              <a:rPr lang="en-US" sz="1400" b="0" dirty="0"/>
-              <a:t>Thẻ 3 cố ý pha trộn: vận mạch có thể gây rối loạn nhịp, và mức độ sốc chi phối cả hai. Mối liên quan thực tế thường là hỗn hợp của tác động thật và yếu tố nhiễu. Vì vậy cần hiệu chỉnh, hoặc phân bổ ngẫu nhiên, để tách chúng ra.</a:t>
-            </a:r>
-          </a:p>
-          <a:p>
-            <a:r>
-              <a:rPr lang="en-US" sz="1400" b="0" dirty="0"/>
-              <a:t>Quan niệm sai: 'yếu tố nhiễu là bất kỳ khác biệt nào giữa các nhóm'. Nó phải liên quan với phơi nhiễm và gây ra kết cục.</a:t>
+              <a:t>Hỏi yếu tố thứ ba trước khi hiện đáp án. Thẻ 3 vừa có tác động thật vừa có nhiễu.</a:t>
             </a:r>
           </a:p>
           <a:p>
@@ -5027,37 +4475,13 @@
           <a:p>
             <a:r>
               <a:rPr lang="en-US" sz="1400" b="0" dirty="0"/>
-              <a:t>Extra (slide bổ sung): chỉ học khái niệm. Tỷ số khả dĩ (likelihood ratio, LR) gộp độ nhạy và độ đặc hiệu thành một con số cho biết một kết quả nên thay đổi mức nghi ngờ của bạn bao nhiêu.</a:t>
+              <a:t>Chỉ giới thiệu khái niệm. LR+ 4.5, LR- 0.13. LR không phụ thuộc tỷ lệ hiện mắc. Báo cáo: STARD. Đánh giá: QUADAS-2.</a:t>
             </a:r>
           </a:p>
           <a:p>
             <a:r>
               <a:rPr lang="en-US" sz="1400" b="0" dirty="0"/>
-              <a:t>LR+ = 0.90 / 0.20 = 4.5: kết quả dương gặp ở người có bệnh nhiều gấp 4.5 lần người không bệnh. LR- = 0.10 / 0.80 = 0.13: kết quả âm ở người bệnh hiếm hơn khoảng 8 lần. Quy tắc gần đúng: LR+ trên 10 hoặc LR- dưới 0.1 thay đổi quyết định nhiều. Giá trị gần 1 thay đổi ít.</a:t>
-            </a:r>
-          </a:p>
-          <a:p>
-            <a:r>
-              <a:rPr lang="en-US" sz="1400" b="0" dirty="0"/>
-              <a:t>Khác với PPV, tỷ số khả dĩ không phụ thuộc tỷ lệ hiện mắc, nên chuyển giữa các bối cảnh tốt hơn.</a:t>
-            </a:r>
-          </a:p>
-          <a:p>
-            <a:r>
-              <a:rPr lang="en-US" sz="1400" b="0" dirty="0"/>
-              <a:t>Báo cáo: STARD (chuẩn báo cáo nghiên cứu độ chính xác chẩn đoán: 30 mục và sơ đồ luồng người tham gia). Thẩm định: QUADAS-2 (đánh giá chất lượng nghiên cứu độ chính xác chẩn đoán). Cảnh giác sai lệch phổ bệnh (spectrum bias): xét nghiệm được đánh giá trên người bệnh rất nặng so với người tình nguyện khỏe sẽ trông tốt hơn so với khi dùng trên người bệnh thực tế.</a:t>
-            </a:r>
-          </a:p>
-          <a:p>
-            <a:r>
-              <a:rPr lang="en-US" sz="1400" b="0" dirty="0"/>
-              <a:t>Quan niệm sai: 'nghiên cứu độ chính xác chẩn đoán chỉ là một bảng 2x2'. Các câu hỏi thiết kế (ai được xét nghiệm, tiêu chuẩn tham chiếu có áp dụng cho mọi người không, có đọc mù không) quan trọng không kém con số.</a:t>
-            </a:r>
-          </a:p>
-          <a:p>
-            <a:r>
-              <a:rPr lang="en-US" sz="1400" b="0" dirty="0"/>
-              <a:t>Thời gian: 1.5 phút. Các học phần nâng cao có thực hành phân tích độ chính xác chẩn đoán.</a:t>
+              <a:t>Thời gian: 1.5 phút nếu dùng.</a:t>
             </a:r>
           </a:p>
         </p:txBody>
@@ -5138,37 +4562,19 @@
           <a:p>
             <a:r>
               <a:rPr lang="en-US" sz="1400" b="0" dirty="0"/>
-              <a:t>Extra (slide bổ sung): đánh giá minh họa. RoB 2 đặt các câu hỏi gợi ý trong năm lĩnh vực: D1 quá trình phân bổ ngẫu nhiên (trình tự và che giấu), D2 sai lệch so với can thiệp dự kiến (làm mù, tuân thủ), D3 thiếu dữ liệu kết cục, D4 đo lường kết cục, D5 lựa chọn kết quả báo cáo.</a:t>
+              <a:t>Minh họa. Lĩnh vực kém nhất quyết định đánh giá chung. Boulet: D1 có lẽ thấp, D2 có vài lo ngại, D4 thấp với cân bằng dịch.</a:t>
             </a:r>
           </a:p>
           <a:p>
             <a:r>
               <a:rPr lang="en-US" sz="1400" b="0" dirty="0"/>
-              <a:t>Mỗi lĩnh vực được đánh giá nguy cơ thấp (xanh +), có vài lo ngại (vàng -) hoặc nguy cơ cao (đỏ x). Đánh giá chung do lĩnh vực xấu nhất quyết định: thử nghiệm C có nguy cơ cao vì D2.</a:t>
+              <a:t>Không làm mù chưa chắc là nguy cơ cao.</a:t>
             </a:r>
           </a:p>
           <a:p>
             <a:r>
               <a:rPr lang="en-US" sz="1400" b="0" dirty="0"/>
-              <a:t>Các tổng quan trình bày biểu đồ này để người đọc thấy thử nghiệm nào chi phối kết quả gộp và việc loại thử nghiệm nguy cơ cao có làm thay đổi kết quả không (phân tích độ nhạy).</a:t>
-            </a:r>
-          </a:p>
-          <a:p>
-            <a:r>
-              <a:rPr lang="en-US" sz="1400" b="0" dirty="0"/>
-              <a:t>Áp dụng cho Bài báo 1, Boulet (thảo luận, không chấm chính thức): D1 có lẽ thấp (máy tính trung tâm). D2 có vài lo ngại vì bác sĩ biết nhóm. D4 thấp với kết cục khách quan như cân bằng dịch.</a:t>
-            </a:r>
-          </a:p>
-          <a:p>
-            <a:r>
-              <a:rPr lang="en-US" sz="1400" b="0" dirty="0"/>
-              <a:t>Quan niệm sai: 'không làm mù = nguy cơ cao'. Không nhất thiết nếu kết cục khách quan và sai lệch nhỏ. Tùy câu hỏi của từng lĩnh vực.</a:t>
-            </a:r>
-          </a:p>
-          <a:p>
-            <a:r>
-              <a:rPr lang="en-US" sz="1400" b="0" dirty="0"/>
-              <a:t>Thời gian: 1.5 phút. Buổi 8 dùng bảng kiểm 10 câu đơn giản của khóa học. Các học phần nâng cao thực hành đầy đủ các công cụ.</a:t>
+              <a:t>Thời gian: 1.5 phút nếu dùng.</a:t>
             </a:r>
           </a:p>
         </p:txBody>
@@ -5249,13 +4655,7 @@
           <a:p>
             <a:r>
               <a:rPr lang="en-US" sz="1400" b="0" dirty="0"/>
-              <a:t>Extra (slide bổ sung): các con số của hình bồn tắm, trình bày lại theo từng bước cho học viên thấy hình quá nhanh.</a:t>
-            </a:r>
-          </a:p>
-          <a:p>
-            <a:r>
-              <a:rPr lang="en-US" sz="1400" b="0" dirty="0"/>
-              <a:t>Khác biệt then chốt là mẫu số: hiện mắc dùng mọi người hôm nay (200). Mới mắc chỉ dùng người có thể trở thành ca mới (180) và cần một khoảng thời gian.</a:t>
+              <a:t>Khác biệt nằm ở mẫu số: mọi người hôm nay (200) so với người có nguy cơ (180) trong một khoảng thời gian.</a:t>
             </a:r>
           </a:p>
           <a:p>
@@ -5342,7 +4742,7 @@
           <a:p>
             <a:r>
               <a:rPr lang="en-US" sz="1400" b="0" dirty="0"/>
-              <a:t>Slide bản quyền. Để trên màn hình khi học viên rời phòng họp.</a:t>
+              <a:t>Để trên màn hình khi học viên rời phòng họp.</a:t>
             </a:r>
           </a:p>
         </p:txBody>
@@ -5423,25 +4823,13 @@
           <a:p>
             <a:r>
               <a:rPr lang="en-US" sz="1400" b="0" dirty="0"/>
-              <a:t>Dùng hình bia phi tiêu. Trái: điều mong muốn, gần sự thật và tập trung. Giữa: sai số ngẫu nhiên, quanh sự thật nhưng phân tán. Cỡ mẫu lớn hơn sẽ kéo các phi tiêu lại gần nhau. Phải: sai lệch, tập trung nhưng sai chỗ. Cỡ mẫu lớn hơn chỉ làm người đọc tự tin hơn vào câu trả lời sai.</a:t>
+              <a:t>Cỡ mẫu lớn giảm sai số ngẫu nhiên, không giảm sai lệch. KTC hẹp không nói gì về sai lệch.</a:t>
             </a:r>
           </a:p>
           <a:p>
             <a:r>
               <a:rPr lang="en-US" sz="1400" b="0" dirty="0"/>
-              <a:t>Ý chính: khoảng tin cậy (Buổi 6) chỉ mô tả sai số ngẫu nhiên. Khoảng tin cậy hẹp không nói gì về sai lệch.</a:t>
-            </a:r>
-          </a:p>
-          <a:p>
-            <a:r>
-              <a:rPr lang="en-US" sz="1400" b="0" dirty="0"/>
-              <a:t>Quan niệm sai: 'nghiên cứu 10000 người bệnh không thể bị sai lệch'. Nghiên cứu sổ bộ lớn có thể rất chính xác mà vẫn sai lệch.</a:t>
-            </a:r>
-          </a:p>
-          <a:p>
-            <a:r>
-              <a:rPr lang="en-US" sz="1400" b="0" dirty="0"/>
-              <a:t>Hỏi cả lớp (bình chọn): bài nào trong hai bài báo dễ bị sai số ngẫu nhiên hơn, bài nào dễ bị sai lệch hơn? Dự kiến: Bài báo 1, Boulet 2024 (48 người bệnh) dễ bị sai số ngẫu nhiên. Bài báo 2, Hyun 2023 (quan sát) dễ bị sai lệch, nhất là yếu tố nhiễu. Cả hai bài nằm trong thư mục khóa học, Course/Papers.</a:t>
+              <a:t>Bình chọn: 'Bài nào dễ bị sai số ngẫu nhiên, bài nào dễ bị sai lệch?' Mong đợi: Boulet (48 người) sai số ngẫu nhiên, Hyun (quan sát) sai lệch.</a:t>
             </a:r>
           </a:p>
           <a:p>
@@ -5528,31 +4916,13 @@
           <a:p>
             <a:r>
               <a:rPr lang="en-US" sz="1400" b="0" dirty="0"/>
-              <a:t>Sai lệch chọn lựa xảy ra khi những người vào (hoặc ở lại) nghiên cứu khác một cách hệ thống với những người cần tìm hiểu.</a:t>
+              <a:t>Hyun chỉ chọn người bệnh còn ở ICU đến ngày 3 (2516/11981). Kết quả áp dụng cho nhóm này, không cho mọi người bệnh nhiễm khuẩn huyết.</a:t>
             </a:r>
           </a:p>
           <a:p>
             <a:r>
               <a:rPr lang="en-US" sz="1400" b="0" dirty="0"/>
-              <a:t>Ví dụ từ Bài báo 2 (Hyun): chỉ người bệnh nằm ICU ít nhất ba ngày và có dữ liệu dịch được đưa vào (2516 trong 11981 người bệnh của sổ bộ). Những người bệnh nặng nhất tử vong sớm, và những người nhẹ nhất ra sớm, bị loại. Kết quả áp dụng cho 'người bệnh còn ở ICU ngày 3', không phải mọi người bệnh nhiễm khuẩn huyết.</a:t>
-            </a:r>
-          </a:p>
-          <a:p>
-            <a:r>
-              <a:rPr lang="en-US" sz="1400" b="0" dirty="0"/>
-              <a:t>Nguồn thường gặp khác: người tình nguyện, người bệnh từ chối tham gia, mất theo dõi, trung tâm tuyến cuối duy nhất.</a:t>
-            </a:r>
-          </a:p>
-          <a:p>
-            <a:r>
-              <a:rPr lang="en-US" sz="1400" b="0" dirty="0"/>
-              <a:t>Quan niệm sai: 'sai lệch chọn lựa chỉ quan trọng trong khảo sát'. Nó ảnh hưởng mọi thiết kế, kể cả RCT (tiêu chuẩn loại trừ chặt làm hẹp đối tượng áp dụng kết quả).</a:t>
-            </a:r>
-          </a:p>
-          <a:p>
-            <a:r>
-              <a:rPr lang="en-US" sz="1400" b="0" dirty="0"/>
-              <a:t>Hỏi cả lớp (mời hai ba người trả lời, bật micro): trong Bài báo 1 (Boulet), 1201 người bệnh được sàng lọc và 50 được đưa vào. Điều đó nói gì? Dự kiến: người bệnh thử nghiệm được chọn lọc rất kỹ. Kiểm tra xem họ có giống người bệnh của mình không trước khi áp dụng.</a:t>
+              <a:t>Hỏi: 'Boulet sàng lọc 1201, chọn 50. Điều đó cho biết gì?' Mong đợi: người bệnh được chọn lọc nhiều. Kiểm tra họ có giống người bệnh của mình không.</a:t>
             </a:r>
           </a:p>
           <a:p>
@@ -5639,37 +5009,13 @@
           <a:p>
             <a:r>
               <a:rPr lang="en-US" sz="1400" b="0" dirty="0"/>
-              <a:t>Sai lệch thông tin (đo lường): dữ liệu sai một cách hệ thống.</a:t>
+              <a:t>Với câu hỏi của mình: ghi thiếu nước tiểu làm cân bằng dịch dương hơn thực tế. Nếu khác nhau giữa hai nhóm, phép so sánh bị sai lệch.</a:t>
             </a:r>
           </a:p>
           <a:p>
             <a:r>
               <a:rPr lang="en-US" sz="1400" b="0" dirty="0"/>
-              <a:t>Sai lệch nhớ lại: trong nghiên cứu bệnh–chứng, ca bệnh (hoặc gia đình) cố nhớ kỹ hơn ca chứng, nên phơi nhiễm có vẻ phổ biến hơn ở ca bệnh.</a:t>
-            </a:r>
-          </a:p>
-          <a:p>
-            <a:r>
-              <a:rPr lang="en-US" sz="1400" b="0" dirty="0"/>
-              <a:t>Sai lệch người quan sát (observer bias): người đánh giá biết nhóm có thể đánh giá kết cục 'mềm' khác đi, ví dụ 'đủ điều kiện ra viện' hay 'có mê sảng'. Trong Boulet, bác sĩ biết phân nhóm.</a:t>
-            </a:r>
-          </a:p>
-          <a:p>
-            <a:r>
-              <a:rPr lang="en-US" sz="1400" b="0" dirty="0"/>
-              <a:t>Sai lệch đo lường: cân luôn chỉ cao 0.5 kg, hoặc lượng nước tiểu bị ghi thiếu ở ca đêm. Với câu hỏi dịch truyền điều này rất quan trọng: thiếu ghi nước tiểu làm cân bằng dịch trông dương hơn thực tế. Nếu khác nhau giữa các nhóm, nó làm méo phép so sánh.</a:t>
-            </a:r>
-          </a:p>
-          <a:p>
-            <a:r>
-              <a:rPr lang="en-US" sz="1400" b="0" dirty="0"/>
-              <a:t>Quan niệm sai: 'kết cục cứng như tử vong thì miễn nhiễm'. Tử vong được ghi nhận đáng tin cậy, nhưng thời điểm và nguyên nhân tử vong vẫn có thể bị phân loại sai.</a:t>
-            </a:r>
-          </a:p>
-          <a:p>
-            <a:r>
-              <a:rPr lang="en-US" sz="1400" b="0" dirty="0"/>
-              <a:t>Hỏi cả lớp (mời hai ba người trả lời, bật micro): làm sao giảm sai lệch người quan sát trong một thử nghiệm dịch truyền ở ICU không làm mù? Dự kiến: kết cục khách quan, người đánh giá kết cục được làm mù, định nghĩa chuẩn và tập huấn.</a:t>
+              <a:t>Hỏi: 'Giảm sai lệch người quan sát trong thử nghiệm dịch không làm mù thế nào?' Mong đợi: kết cục khách quan, người đánh giá được làm mù, định nghĩa chuẩn.</a:t>
             </a:r>
           </a:p>
           <a:p>
@@ -5756,37 +5102,13 @@
           <a:p>
             <a:r>
               <a:rPr lang="en-US" sz="1400" b="0" dirty="0"/>
-              <a:t>Đây là slide quan trọng nhất của 4.1. Dùng con trỏ chuột chỉ vào từng mũi tên.</a:t>
+              <a:t>Slide quan trọng nhất của phần 4.1. Chỉ từng mũi tên. Yếu tố nhiễu liên quan với phơi nhiễm, gây ra kết cục và không nằm trên đường nhân quả.</a:t>
             </a:r>
           </a:p>
           <a:p>
             <a:r>
               <a:rPr lang="en-US" sz="1400" b="0" dirty="0"/>
-              <a:t>Mức độ nặng của bệnh khiến bác sĩ truyền nhiều dịch hơn (mũi tên trái). Mức độ nặng cũng gây tử vong (mũi tên phải). Vì vậy người bệnh được truyền nhiều dịch hơn tử vong nhiều hơn, kể cả khi dịch không có tác động gì.</a:t>
-            </a:r>
-          </a:p>
-          <a:p>
-            <a:r>
-              <a:rPr lang="en-US" sz="1400" b="0" dirty="0"/>
-              <a:t>Trường hợp đặc biệt này gọi là nhiễu do chỉ định (confounding by indication): lý do đưa ra điều trị lại chính là thứ liên quan với kết cục.</a:t>
-            </a:r>
-          </a:p>
-          <a:p>
-            <a:r>
-              <a:rPr lang="en-US" sz="1400" b="0" dirty="0"/>
-              <a:t>Ba điều kiện của một yếu tố nhiễu: liên quan với phơi nhiễm, là nguyên nhân của kết cục, và không nằm trên con đường nhân quả giữa hai yếu tố đó.</a:t>
-            </a:r>
-          </a:p>
-          <a:p>
-            <a:r>
-              <a:rPr lang="en-US" sz="1400" b="0" dirty="0"/>
-              <a:t>Quan niệm sai: 'yếu tố nhiễu là bất kỳ biến nào khác nhau giữa các nhóm'. Nó còn phải ảnh hưởng đến kết cục.</a:t>
-            </a:r>
-          </a:p>
-          <a:p>
-            <a:r>
-              <a:rPr lang="en-US" sz="1400" b="0" dirty="0"/>
-              <a:t>Hỏi cả lớp (mời hai ba người trả lời, bật micro): dấu hiệu nào tại giường khiến bạn truyền thêm dịch và dự báo tử vong? Dự kiến: huyết áp thấp, lactate cao, liều vận mạch cao, da nổi vân tím. Mỗi dấu hiệu là một yếu tố nhiễu tiềm năng.</a:t>
+              <a:t>Hỏi: 'Dấu hiệu nào tại giường làm bạn truyền thêm dịch và dự báo tử vong?' Mong đợi: huyết áp thấp, lactate cao, liều vận mạch cao, da nổi vân.</a:t>
             </a:r>
           </a:p>
           <a:p>
@@ -5873,43 +5195,25 @@
           <a:p>
             <a:r>
               <a:rPr lang="en-US" sz="1400" b="0" dirty="0"/>
-              <a:t>Số liệu giả định, chọn để minh họa. Gộp tất cả người bệnh: 42% người bệnh truyền nhiều dịch tử vong so với 18% người bệnh truyền ít, nguy cơ tương đối (RR) thô 2.33. Trông như dịch gây tử vong.</a:t>
+              <a:t>Số liệu giả định. RR thô 2.33. Trong từng mức độ nặng RR 1.0. 80/100 người nhiều dịch là ca nặng, nhưng chỉ 20/100 người ít dịch.</a:t>
             </a:r>
           </a:p>
           <a:p>
             <a:r>
               <a:rPr lang="en-US" sz="1400" b="0" dirty="0"/>
-              <a:t>Giờ chia theo mức độ nặng. Bệnh nhẹ: 10% so với 10%. Bệnh nặng: 50% so với 50%. Trong mỗi mức, RR là 1.0.</a:t>
+              <a:t>Đọc to: 2 + 40 = 42 ca tử vong, 8 + 10 = 18.</a:t>
             </a:r>
           </a:p>
           <a:p>
             <a:r>
               <a:rPr lang="en-US" sz="1400" b="0" dirty="0"/>
-              <a:t>Lý do: 80 trong 100 người bệnh truyền nhiều dịch là bệnh nặng, nhưng chỉ 20 trong 100 người bệnh truyền ít dịch. Mức độ nặng, chứ không phải dịch, giải thích khác biệt thô.</a:t>
+              <a:t>Hỏi: 'Cần đo gì lúc ban đầu để làm được việc này?' Mong đợi: SOFA, lactate, liều vận mạch, tuổi, bệnh kèm.</a:t>
             </a:r>
           </a:p>
           <a:p>
             <a:r>
               <a:rPr lang="en-US" sz="1400" b="0" dirty="0"/>
-              <a:t>Ý chính: đó là điều 'hiệu chỉnh theo mức độ nặng' làm: so sánh tương đồng với tương đồng. Buổi 6 sẽ xem các bài báo và mô hình trình bày điều này thế nào. Slide sau: điều gì xảy ra khi các tầng không giống nhau.</a:t>
-            </a:r>
-          </a:p>
-          <a:p>
-            <a:r>
-              <a:rPr lang="en-US" sz="1400" b="0" dirty="0"/>
-              <a:t>Quan niệm sai: 'sau hiệu chỉnh, mối liên quan còn lại là nhân quả'. Chỉ đúng nếu mọi yếu tố nhiễu quan trọng đều được đo tốt, điều không bao giờ được bảo đảm trong dữ liệu quan sát.</a:t>
-            </a:r>
-          </a:p>
-          <a:p>
-            <a:r>
-              <a:rPr lang="en-US" sz="1400" b="0" dirty="0"/>
-              <a:t>Hỏi cả lớp (mời hai ba người trả lời, bật micro): cần đo gì lúc ban đầu trong một nghiên cứu quan sát về dịch truyền để làm được điều này? Dự kiến: các chỉ dấu mức độ nặng chính: điểm SOFA, lactate, liều vận mạch, tuổi, bệnh kèm.</a:t>
-            </a:r>
-          </a:p>
-          <a:p>
-            <a:r>
-              <a:rPr lang="en-US" sz="1400" b="0" dirty="0"/>
-              <a:t>Thời gian: 3.5 phút. Kiểm tra số học thành tiếng: 2 + 40 = 42 ca tử vong/100, 8 + 10 = 18/100.</a:t>
+              <a:t>Thời gian: 3.5 phút.</a:t>
             </a:r>
           </a:p>
         </p:txBody>
@@ -18221,7 +17525,7 @@
                 <a:latin typeface="Arial"/>
                 <a:cs typeface="Arial"/>
               </a:rPr>
-              <a:t>Giảng viên chia sẻ màn hình: Course/Resources/tools/2x2_calculator.xlsx, trang Association</a:t>
+              <a:t>Giảng viên chia sẻ màn hình: 2x2_calculator.xlsx, trang Association</a:t>
             </a:r>
           </a:p>
           <a:p>
@@ -23520,7 +22824,7 @@
                 <a:latin typeface="Arial"/>
                 <a:cs typeface="Arial"/>
               </a:rPr>
-              <a:t>Câu 7-9 trong bảng kiểm thẩm định 10 câu dùng ở Buổi 8 (Course/Resources)</a:t>
+              <a:t>Câu 7-9 trong bảng kiểm thẩm định 10 câu dùng ở Buổi 8</a:t>
             </a:r>
           </a:p>
         </p:txBody>
@@ -27245,31 +26549,6 @@
                 <a:cs typeface="Arial"/>
               </a:rPr>
               <a:t>Câu hỏi cuối buổi (trong chat): người bệnh ICU được truyền nhiều dịch hơn tử vong nhiều hơn. Nêu một lý do khác ngoài bản thân dịch truyền</a:t>
-            </a:r>
-          </a:p>
-          <a:p>
-            <a:pPr marL="380000" indent="-380000" algn="l">
-              <a:lnSpc>
-                <a:spcPct val="104000"/>
-              </a:lnSpc>
-              <a:spcBef>
-                <a:spcPts val="450"/>
-              </a:spcBef>
-              <a:buClr>
-                <a:srgbClr val="1F5C7A"/>
-              </a:buClr>
-              <a:buFont typeface="Arial"/>
-              <a:buChar char="•"/>
-            </a:pPr>
-            <a:r>
-              <a:rPr lang="en-US" sz="1650" dirty="0">
-                <a:solidFill>
-                  <a:srgbClr val="000000"/>
-                </a:solidFill>
-                <a:latin typeface="Arial"/>
-                <a:cs typeface="Arial"/>
-              </a:rPr>
-              <a:t>Vì sao: để kiểm tra ý chính hôm nay. Giảng viên đọc mọi câu trả lời và mở đầu Buổi 5 bằng chúng</a:t>
             </a:r>
           </a:p>
           <a:p>
